--- a/content/W04/D5/slides/C2_W04_D05_fallback_STUDENT.pptx
+++ b/content/W04/D5/slides/C2_W04_D05_fallback_STUDENT.pptx
@@ -1033,12 +1033,12 @@
           <a:lstStyle/>
           <a:p>
             <a:r>
-              <a:t>LIVE, 2 minutes. The one rule carries into the Saturday paper's part 5. The faculty block, when</a:t>
-            </a:r>
-          </a:p>
-          <a:p>
-            <a:r>
-              <a:t>it runs on another day, picks up autocorrelation and smoothing from here.</a:t>
+              <a:t>LIVE, 2 minutes. The one rule carries into the Saturday paper's part 5. The IITGN block</a:t>
+            </a:r>
+          </a:p>
+          <a:p>
+            <a:r>
+              <a:t>(tentative), when it runs on another day, picks up autocorrelation and smoothing from here.</a:t>
             </a:r>
           </a:p>
           <a:p>
@@ -4677,7 +4677,7 @@
                 </a:solidFill>
                 <a:latin typeface="Calibri"/>
               </a:rPr>
-              <a:t>What runs if the faculty block slips, and in what order?</a:t>
+              <a:t>What runs if the IITGN block (tentative) slips, and in what order?</a:t>
             </a:r>
           </a:p>
         </p:txBody>
@@ -5726,7 +5726,7 @@
       </p:sp>
       <p:pic>
         <p:nvPicPr>
-          <p:cNvPr id="9" name="mermaid diagram" descr="C2_W04_D05_holdout_slide_STUDENT_still.png"/>
+          <p:cNvPr id="9" name="mermaid diagram" descr="C2_W04_D05_holdout_slide_still_STUDENT.png"/>
           <p:cNvPicPr>
             <a:picLocks noChangeAspect="1"/>
           </p:cNvPicPr>

--- a/content/W04/D5/slides/C2_W04_D05_fallback_STUDENT.pptx
+++ b/content/W04/D5/slides/C2_W04_D05_fallback_STUDENT.pptx
@@ -19,7 +19,6 @@
     <p:sldId id="267" r:id="rId19"/>
     <p:sldId id="268" r:id="rId20"/>
     <p:sldId id="269" r:id="rId21"/>
-    <p:sldId id="270" r:id="rId22"/>
   </p:sldIdLst>
   <p:sldSz cx="12191695" cy="6858000" type="screen4x3"/>
   <p:notesSz cx="6858000" cy="9144000"/>
@@ -516,17 +515,22 @@
           <a:lstStyle/>
           <a:p>
             <a:r>
-              <a:t>On screen only if the faculty session (tentative) slips. Four parts, 35, 30, 30 and 25 minutes.</a:t>
-            </a:r>
-          </a:p>
-          <a:p>
-            <a:r>
-              <a:t>Nothing here teaches autocorrelation, smoothing or ARIMA: the faculty session (tentative) owns them.</a:t>
-            </a:r>
-          </a:p>
-          <a:p>
-            <a:r>
-              <a:t>Transition: the four parts.</a:t>
+              <a:t>LIVE, 2 minutes, on screen only if the faculty session (tentative) slips. Nothing here teaches</a:t>
+            </a:r>
+          </a:p>
+          <a:p>
+            <a:r>
+              <a:t>autocorrelation, smoothing or ARIMA: the faculty session (tentative) owns them. Read the four parts.</a:t>
+            </a:r>
+          </a:p>
+          <a:p>
+            <a:r>
+              <a:t>Each ends on one line a group writes down. Transition:</a:t>
+            </a:r>
+          </a:p>
+          <a:p>
+            <a:r>
+              <a:t>part 1.</a:t>
             </a:r>
           </a:p>
         </p:txBody>
@@ -596,12 +600,12 @@
           <a:lstStyle/>
           <a:p>
             <a:r>
-              <a:t>LIVE, 3 minutes. 71,180 over 2,040 is about thirty-five: b was the closest option. Transition:</a:t>
-            </a:r>
-          </a:p>
-          <a:p>
-            <a:r>
-              <a:t>part 3, two real failures.</a:t>
+              <a:t>LIVE, 10 minutes. Groups name the Lucknow equivalent: a vendor forecast allowed to run past its</a:t>
+            </a:r>
+          </a:p>
+          <a:p>
+            <a:r>
+              <a:t>own error band with nobody watching the band. Transition: Target Canada.</a:t>
             </a:r>
           </a:p>
         </p:txBody>
@@ -671,12 +675,17 @@
           <a:lstStyle/>
           <a:p>
             <a:r>
-              <a:t>LIVE, 10 minutes. Groups name the Lucknow equivalent: a vendor forecast allowed to run past its</a:t>
-            </a:r>
-          </a:p>
-          <a:p>
-            <a:r>
-              <a:t>own error band with nobody watching the band. Transition: Target Canada.</a:t>
+              <a:t>LIVE, 10 minutes. The forecasting account is Canadian Business's, through the archived copy the</a:t>
+            </a:r>
+          </a:p>
+          <a:p>
+            <a:r>
+              <a:t>research ledger cites. The Lucknow version: a vendor model with no Lucknow festival in its record.</a:t>
+            </a:r>
+          </a:p>
+          <a:p>
+            <a:r>
+              <a:t>Transition: the two side by side.</a:t>
             </a:r>
           </a:p>
         </p:txBody>
@@ -746,17 +755,12 @@
           <a:lstStyle/>
           <a:p>
             <a:r>
-              <a:t>LIVE, 10 minutes. The forecasting account is Canadian Business's, through the archived copy the</a:t>
-            </a:r>
-          </a:p>
-          <a:p>
-            <a:r>
-              <a:t>research ledger cites. The Lucknow version: a vendor model with no Lucknow festival in its record.</a:t>
-            </a:r>
-          </a:p>
-          <a:p>
-            <a:r>
-              <a:t>Transition: the two side by side.</a:t>
+              <a:t>LIVE, 10 minutes. Each group writes the check in one line. Transition: part 4, the second</a:t>
+            </a:r>
+          </a:p>
+          <a:p>
+            <a:r>
+              <a:t>transcript.</a:t>
             </a:r>
           </a:p>
         </p:txBody>
@@ -826,12 +830,12 @@
           <a:lstStyle/>
           <a:p>
             <a:r>
-              <a:t>LIVE, 10 minutes. Each group writes the check in one line. Transition: part 4, the second</a:t>
-            </a:r>
-          </a:p>
-          <a:p>
-            <a:r>
-              <a:t>transcript.</a:t>
+              <a:t>LIVE, 15 minutes. Pairs play the planner and one stakeholder, then swap. The full [D] transcript is</a:t>
+            </a:r>
+          </a:p>
+          <a:p>
+            <a:r>
+              <a:t>in `extras/C2_W04_D05_interview_transcripts_STUDENT.md`. Transition: the close.</a:t>
             </a:r>
           </a:p>
         </p:txBody>
@@ -901,81 +905,6 @@
           <a:lstStyle/>
           <a:p>
             <a:r>
-              <a:t>LIVE, 15 minutes. Pairs play the planner and one stakeholder, then swap. The full [D] transcript is</a:t>
-            </a:r>
-          </a:p>
-          <a:p>
-            <a:r>
-              <a:t>in `extras/C2_W04_D05_interview_transcripts_STUDENT.md`. Transition: the close.</a:t>
-            </a:r>
-          </a:p>
-        </p:txBody>
-      </p:sp>
-      <p:sp>
-        <p:nvSpPr>
-          <p:cNvPr id="4" name="Slide Number Placeholder 3"/>
-          <p:cNvSpPr>
-            <a:spLocks noGrp="1"/>
-          </p:cNvSpPr>
-          <p:nvPr>
-            <p:ph type="sldNum" idx="5" sz="quarter"/>
-          </p:nvPr>
-        </p:nvSpPr>
-        <p:spPr/>
-      </p:sp>
-    </p:spTree>
-  </p:cSld>
-  <p:clrMapOvr>
-    <a:masterClrMapping/>
-  </p:clrMapOvr>
-</p:notes>
-</file>
-
-<file path=ppt/notesSlides/notesSlide15.xml><?xml version="1.0" encoding="utf-8"?>
-<p:notes xmlns:a="http://schemas.openxmlformats.org/drawingml/2006/main" xmlns:p="http://schemas.openxmlformats.org/presentationml/2006/main" xmlns:r="http://schemas.openxmlformats.org/officeDocument/2006/relationships">
-  <p:cSld>
-    <p:spTree>
-      <p:nvGrpSpPr>
-        <p:cNvPr id="1" name=""/>
-        <p:cNvGrpSpPr/>
-        <p:nvPr/>
-      </p:nvGrpSpPr>
-      <p:grpSpPr>
-        <a:xfrm>
-          <a:off x="0" y="0"/>
-          <a:ext cx="0" cy="0"/>
-          <a:chOff x="0" y="0"/>
-          <a:chExt cx="0" cy="0"/>
-        </a:xfrm>
-      </p:grpSpPr>
-      <p:sp>
-        <p:nvSpPr>
-          <p:cNvPr id="2" name="Slide Image Placeholder 1"/>
-          <p:cNvSpPr>
-            <a:spLocks noGrp="1"/>
-          </p:cNvSpPr>
-          <p:nvPr>
-            <p:ph type="sldImg" idx="2"/>
-          </p:nvPr>
-        </p:nvSpPr>
-        <p:spPr/>
-      </p:sp>
-      <p:sp>
-        <p:nvSpPr>
-          <p:cNvPr id="3" name="Notes Placeholder 2"/>
-          <p:cNvSpPr>
-            <a:spLocks noGrp="1"/>
-          </p:cNvSpPr>
-          <p:nvPr>
-            <p:ph type="body" idx="3" sz="quarter"/>
-          </p:nvPr>
-        </p:nvSpPr>
-        <p:spPr/>
-        <p:txBody>
-          <a:bodyPr/>
-          <a:lstStyle/>
-          <a:p>
-            <a:r>
               <a:t>LIVE, 2 minutes. The faculty session (tentative) picks up autocorrelation and smoothing from here</a:t>
             </a:r>
           </a:p>
@@ -1051,12 +980,17 @@
           <a:lstStyle/>
           <a:p>
             <a:r>
-              <a:t>LIVE, 2 minutes. Read the four parts. Each ends on one line a group writes down. Transition:</a:t>
-            </a:r>
-          </a:p>
-          <a:p>
-            <a:r>
-              <a:t>part 1.</a:t>
+              <a:t>LIVE, 10 minutes. Groups run notebook 02 with the split moved to 24 August 2026, or read this table.</a:t>
+            </a:r>
+          </a:p>
+          <a:p>
+            <a:r>
+              <a:t>The vendor's four weeks are its old forecast, made from 22 June, so they are its farthest weeks</a:t>
+            </a:r>
+          </a:p>
+          <a:p>
+            <a:r>
+              <a:t>ahead. Transition: why naive moved most.</a:t>
             </a:r>
           </a:p>
         </p:txBody>
@@ -1126,17 +1060,12 @@
           <a:lstStyle/>
           <a:p>
             <a:r>
-              <a:t>LIVE, 10 minutes. Groups run notebook 02 with the split moved to 24 August 2026, or read this table.</a:t>
-            </a:r>
-          </a:p>
-          <a:p>
-            <a:r>
-              <a:t>The vendor's four weeks are its old forecast, made from 22 June, so they are its farthest weeks</a:t>
-            </a:r>
-          </a:p>
-          <a:p>
-            <a:r>
-              <a:t>ahead. Transition: why naive moved most.</a:t>
+              <a:t>LIVE, 4 minutes. Vote, argue for one minute, vote again. a and c are partly true; b is the cause.</a:t>
+            </a:r>
+          </a:p>
+          <a:p>
+            <a:r>
+              <a:t>Transition: the answer.</a:t>
             </a:r>
           </a:p>
         </p:txBody>
@@ -1206,12 +1135,12 @@
           <a:lstStyle/>
           <a:p>
             <a:r>
-              <a:t>LIVE, 4 minutes. Vote, argue for one minute, vote again. a and c are partly true; b is the cause.</a:t>
-            </a:r>
-          </a:p>
-          <a:p>
-            <a:r>
-              <a:t>Transition: the answer.</a:t>
+              <a:t>LIVE, 5 minutes. Show the four misses on the board. The house bot and festival-aligned barely move</a:t>
+            </a:r>
+          </a:p>
+          <a:p>
+            <a:r>
+              <a:t>because they copy last year's weeks and ignore the origin. Transition: the rule this proves.</a:t>
             </a:r>
           </a:p>
         </p:txBody>
@@ -1281,12 +1210,12 @@
           <a:lstStyle/>
           <a:p>
             <a:r>
-              <a:t>LIVE, 5 minutes. Show the four misses on the board. The house bot and festival-aligned barely move</a:t>
-            </a:r>
-          </a:p>
-          <a:p>
-            <a:r>
-              <a:t>because they copy last year's weeks and ignore the origin. Transition: the rule this proves.</a:t>
+              <a:t>LIVE, 6 minutes. Each group writes one line: what a four-week test would have let the vendor's</a:t>
+            </a:r>
+          </a:p>
+          <a:p>
+            <a:r>
+              <a:t>sponsor claim. Transition: part 2, rolling the origin.</a:t>
             </a:r>
           </a:p>
         </p:txBody>
@@ -1356,12 +1285,12 @@
           <a:lstStyle/>
           <a:p>
             <a:r>
-              <a:t>LIVE, 6 minutes. Each group writes one line: what a four-week test would have let the vendor's</a:t>
-            </a:r>
-          </a:p>
-          <a:p>
-            <a:r>
-              <a:t>sponsor claim. Transition: part 2, rolling the origin.</a:t>
+              <a:t>LIVE, 4 minutes. This is the rolling-origin picture of FPP3's section 5.10 (checked 12 October</a:t>
+            </a:r>
+          </a:p>
+          <a:p>
+            <a:r>
+              <a:t>2026), on the twelve printed rows. Groups work it by hand. Transition: the five forecasts.</a:t>
             </a:r>
           </a:p>
         </p:txBody>
@@ -1431,12 +1360,12 @@
           <a:lstStyle/>
           <a:p>
             <a:r>
-              <a:t>LIVE, 4 minutes. This is the rolling-origin picture of FPP3's section 5.10 (checked 12 October</a:t>
-            </a:r>
-          </a:p>
-          <a:p>
-            <a:r>
-              <a:t>2026), on the twelve printed rows. Groups work it by hand. Transition: the five forecasts.</a:t>
+              <a:t>LIVE, 10 minutes. Each group takes one row and calls out its two misses. Festival-aligned copies</a:t>
+            </a:r>
+          </a:p>
+          <a:p>
+            <a:r>
+              <a:t>2024's week at the same distance from Diwali, plus 4 percent. Transition: the vote.</a:t>
             </a:r>
           </a:p>
         </p:txBody>
@@ -1506,12 +1435,7 @@
           <a:lstStyle/>
           <a:p>
             <a:r>
-              <a:t>LIVE, 10 minutes. Each group takes one row and calls out its two misses. Festival-aligned copies</a:t>
-            </a:r>
-          </a:p>
-          <a:p>
-            <a:r>
-              <a:t>2024's week at the same distance from Diwali, plus 4 percent. Transition: the vote.</a:t>
+              <a:t>LIVE, 3 minutes. Groups add their row's misses to the board first. Transition: the answer.</a:t>
             </a:r>
           </a:p>
         </p:txBody>
@@ -1581,7 +1505,12 @@
           <a:lstStyle/>
           <a:p>
             <a:r>
-              <a:t>LIVE, 3 minutes. Groups add their row's misses to the board first. Transition: the answer.</a:t>
+              <a:t>LIVE, 3 minutes. 71,180 over 2,040 is about thirty-five: b was the closest option. Transition:</a:t>
+            </a:r>
+          </a:p>
+          <a:p>
+            <a:r>
+              <a:t>part 3, two real failures.</a:t>
             </a:r>
           </a:p>
         </p:txBody>
@@ -4589,7 +4518,7 @@
       <p:grpSpPr/>
       <p:pic>
         <p:nvPicPr>
-          <p:cNvPr id="2" name="Picture 1" descr="bg_dark.jpg"/>
+          <p:cNvPr id="2" name="Picture 1" descr="bg_light.jpg"/>
           <p:cNvPicPr>
             <a:picLocks noChangeAspect="1"/>
           </p:cNvPicPr>
@@ -4627,8 +4556,8 @@
         </p:blipFill>
         <p:spPr>
           <a:xfrm>
-            <a:off x="621792" y="566928"/>
-            <a:ext cx="1051560" cy="1051560"/>
+            <a:off x="530352" y="201168"/>
+            <a:ext cx="420624" cy="420624"/>
           </a:xfrm>
           <a:prstGeom prst="rect">
             <a:avLst/>
@@ -4643,8 +4572,8 @@
         </p:nvSpPr>
         <p:spPr>
           <a:xfrm>
-            <a:off x="1901952" y="804672"/>
-            <a:ext cx="6858000" cy="300735"/>
+            <a:off x="1042416" y="228600"/>
+            <a:ext cx="5120640" cy="185166"/>
           </a:xfrm>
           <a:prstGeom prst="rect">
             <a:avLst/>
@@ -4659,9 +4588,9 @@
           <a:p>
             <a:pPr algn="l"/>
             <a:r>
-              <a:rPr sz="1600" b="1" i="0">
-                <a:solidFill>
-                  <a:srgbClr val="FFFFFF"/>
+              <a:rPr sz="900" b="1" i="0">
+                <a:solidFill>
+                  <a:srgbClr val="1A0F5C"/>
                 </a:solidFill>
                 <a:latin typeface="Calibri"/>
               </a:rPr>
@@ -4678,8 +4607,8 @@
         </p:nvSpPr>
         <p:spPr>
           <a:xfrm>
-            <a:off x="1901952" y="1133856"/>
-            <a:ext cx="7772400" cy="152146"/>
+            <a:off x="1042416" y="420623"/>
+            <a:ext cx="5852160" cy="127381"/>
           </a:xfrm>
           <a:prstGeom prst="rect">
             <a:avLst/>
@@ -4694,9 +4623,9 @@
           <a:p>
             <a:pPr algn="l"/>
             <a:r>
-              <a:rPr sz="700" b="1" i="0" spc="300">
-                <a:solidFill>
-                  <a:srgbClr val="D9A7FF"/>
+              <a:rPr sz="550" b="1" i="0" spc="300">
+                <a:solidFill>
+                  <a:srgbClr val="6B6690"/>
                 </a:solidFill>
                 <a:latin typeface="Calibri"/>
               </a:rPr>
@@ -4707,99 +4636,70 @@
       </p:sp>
       <p:sp>
         <p:nvSpPr>
-          <p:cNvPr id="6" name="Rectangle 5"/>
-          <p:cNvSpPr/>
-          <p:nvPr/>
-        </p:nvSpPr>
-        <p:spPr>
-          <a:xfrm>
-            <a:off x="621792" y="1938528"/>
-            <a:ext cx="10948111" cy="10972"/>
-          </a:xfrm>
-          <a:prstGeom prst="rect">
-            <a:avLst/>
-          </a:prstGeom>
-          <a:solidFill>
-            <a:srgbClr val="A9A3D2"/>
-          </a:solidFill>
-          <a:ln>
-            <a:noFill/>
-          </a:ln>
-          <a:effectLst/>
-        </p:spPr>
-        <p:style>
-          <a:lnRef idx="1">
-            <a:schemeClr val="accent1"/>
-          </a:lnRef>
-          <a:fillRef idx="3">
-            <a:schemeClr val="accent1"/>
-          </a:fillRef>
-          <a:effectRef idx="2">
-            <a:schemeClr val="accent1"/>
-          </a:effectRef>
-          <a:fontRef idx="minor">
-            <a:schemeClr val="lt1"/>
-          </a:fontRef>
-        </p:style>
-        <p:txBody>
-          <a:bodyPr rtlCol="0" anchor="ctr" wrap="square"/>
-          <a:lstStyle/>
-          <a:p>
-            <a:pPr algn="ctr"/>
-          </a:p>
-        </p:txBody>
-      </p:sp>
-      <p:sp>
-        <p:nvSpPr>
-          <p:cNvPr id="7" name="Rounded Rectangle 6"/>
-          <p:cNvSpPr/>
-          <p:nvPr/>
-        </p:nvSpPr>
-        <p:spPr>
-          <a:xfrm>
-            <a:off x="621792" y="2240280"/>
-            <a:ext cx="6124155" cy="329184"/>
-          </a:xfrm>
-          <a:prstGeom prst="roundRect">
-            <a:avLst>
-              <a:gd name="adj" fmla="val 50000"/>
-            </a:avLst>
-          </a:prstGeom>
-          <a:noFill/>
-          <a:ln w="9525">
-            <a:solidFill>
-              <a:srgbClr val="CFC9EE"/>
-            </a:solidFill>
-          </a:ln>
-          <a:effectLst/>
-        </p:spPr>
-        <p:style>
-          <a:lnRef idx="1">
-            <a:schemeClr val="accent1"/>
-          </a:lnRef>
-          <a:fillRef idx="3">
-            <a:schemeClr val="accent1"/>
-          </a:fillRef>
-          <a:effectRef idx="2">
-            <a:schemeClr val="accent1"/>
-          </a:effectRef>
-          <a:fontRef idx="minor">
-            <a:schemeClr val="lt1"/>
-          </a:fontRef>
-        </p:style>
-        <p:txBody>
-          <a:bodyPr rtlCol="0" anchor="ctr" wrap="none" lIns="25400" rIns="25400" tIns="0" bIns="0"/>
-          <a:lstStyle/>
-          <a:p>
-            <a:pPr algn="ctr"/>
-            <a:r>
-              <a:rPr sz="900" b="1" spc="250">
-                <a:solidFill>
-                  <a:srgbClr val="FFFFFF"/>
+          <p:cNvPr id="6" name="TextBox 5"/>
+          <p:cNvSpPr txBox="1"/>
+          <p:nvPr/>
+        </p:nvSpPr>
+        <p:spPr>
+          <a:xfrm>
+            <a:off x="5992063" y="310896"/>
+            <a:ext cx="5669280" cy="127381"/>
+          </a:xfrm>
+          <a:prstGeom prst="rect">
+            <a:avLst/>
+          </a:prstGeom>
+          <a:noFill/>
+        </p:spPr>
+        <p:txBody>
+          <a:bodyPr wrap="square" anchor="t" lIns="0" rIns="0" tIns="0" bIns="0">
+            <a:spAutoFit/>
+          </a:bodyPr>
+          <a:lstStyle/>
+          <a:p>
+            <a:pPr algn="r"/>
+            <a:r>
+              <a:rPr sz="550" b="1" i="0" spc="300">
+                <a:solidFill>
+                  <a:srgbClr val="6B6690"/>
                 </a:solidFill>
                 <a:latin typeface="Calibri"/>
               </a:rPr>
-              <a:t>WEEK 4  ·  FRIDAY  ·  IF THE TENTATIVE FACULTY SESSION SLIPS</a:t>
+              <a:t>WEEK 4  ·  FRIDAY  ·  FLIPKART, LUCKNOW  ·  FALLBACK</a:t>
+            </a:r>
+          </a:p>
+        </p:txBody>
+      </p:sp>
+      <p:sp>
+        <p:nvSpPr>
+          <p:cNvPr id="7" name="TextBox 6"/>
+          <p:cNvSpPr txBox="1"/>
+          <p:nvPr/>
+        </p:nvSpPr>
+        <p:spPr>
+          <a:xfrm>
+            <a:off x="530352" y="676656"/>
+            <a:ext cx="11130991" cy="512064"/>
+          </a:xfrm>
+          <a:prstGeom prst="rect">
+            <a:avLst/>
+          </a:prstGeom>
+          <a:noFill/>
+        </p:spPr>
+        <p:txBody>
+          <a:bodyPr wrap="square" anchor="b" lIns="0" rIns="0" tIns="0" bIns="0">
+            <a:spAutoFit/>
+          </a:bodyPr>
+          <a:lstStyle/>
+          <a:p>
+            <a:pPr algn="l"/>
+            <a:r>
+              <a:rPr sz="2600" b="0" i="0">
+                <a:solidFill>
+                  <a:srgbClr val="1A0F5C"/>
+                </a:solidFill>
+                <a:latin typeface="Georgia"/>
+              </a:rPr>
+              <a:t>Four parts, each testing the morning's choice</a:t>
             </a:r>
           </a:p>
         </p:txBody>
@@ -4812,8 +4712,8 @@
         </p:nvSpPr>
         <p:spPr>
           <a:xfrm>
-            <a:off x="621792" y="2807208"/>
-            <a:ext cx="10582351" cy="1291336"/>
+            <a:off x="530352" y="1243584"/>
+            <a:ext cx="11130991" cy="234696"/>
           </a:xfrm>
           <a:prstGeom prst="rect">
             <a:avLst/>
@@ -4828,27 +4728,51 @@
           <a:p>
             <a:pPr algn="l"/>
             <a:r>
-              <a:rPr sz="3800" b="0" i="0">
-                <a:solidFill>
-                  <a:srgbClr val="FFFFFF"/>
-                </a:solidFill>
-                <a:latin typeface="Georgia"/>
-              </a:rPr>
-              <a:t>Flipkart Lucknow: the rolling-origin hour</a:t>
-            </a:r>
-          </a:p>
-        </p:txBody>
-      </p:sp>
-      <p:sp>
-        <p:nvSpPr>
-          <p:cNvPr id="9" name="TextBox 8"/>
-          <p:cNvSpPr txBox="1"/>
-          <p:nvPr/>
-        </p:nvSpPr>
-        <p:spPr>
-          <a:xfrm>
-            <a:off x="621792" y="4263136"/>
-            <a:ext cx="10033711" cy="663956"/>
+              <a:rPr sz="1200" b="0" i="0">
+                <a:solidFill>
+                  <a:srgbClr val="6B6690"/>
+                </a:solidFill>
+                <a:latin typeface="Calibri"/>
+              </a:rPr>
+              <a:t>What runs in the next 120 minutes, and in what order?</a:t>
+            </a:r>
+          </a:p>
+        </p:txBody>
+      </p:sp>
+      <p:pic>
+        <p:nvPicPr>
+          <p:cNvPr id="9" name="mermaid diagram" descr="f7bebd1c83210485.png"/>
+          <p:cNvPicPr>
+            <a:picLocks noChangeAspect="1"/>
+          </p:cNvPicPr>
+          <p:nvPr/>
+        </p:nvPicPr>
+        <p:blipFill>
+          <a:blip r:embed="rId5"/>
+          <a:stretch>
+            <a:fillRect/>
+          </a:stretch>
+        </p:blipFill>
+        <p:spPr>
+          <a:xfrm>
+            <a:off x="780897" y="1956816"/>
+            <a:ext cx="10629900" cy="1600200"/>
+          </a:xfrm>
+          <a:prstGeom prst="rect">
+            <a:avLst/>
+          </a:prstGeom>
+        </p:spPr>
+      </p:pic>
+      <p:sp>
+        <p:nvSpPr>
+          <p:cNvPr id="10" name="TextBox 9"/>
+          <p:cNvSpPr txBox="1"/>
+          <p:nvPr/>
+        </p:nvSpPr>
+        <p:spPr>
+          <a:xfrm>
+            <a:off x="530352" y="3703320"/>
+            <a:ext cx="11130991" cy="772160"/>
           </a:xfrm>
           <a:prstGeom prst="rect">
             <a:avLst/>
@@ -4861,50 +4785,19 @@
           </a:bodyPr>
           <a:lstStyle/>
           <a:p>
-            <a:pPr algn="l"/>
-            <a:r>
-              <a:rPr sz="1900" b="0" i="1">
-                <a:solidFill>
-                  <a:srgbClr val="D9A7FF"/>
-                </a:solidFill>
-                <a:latin typeface="Georgia"/>
-              </a:rPr>
-              <a:t>“Before the plan is signed, would a shorter test, or a test that rolls week by week, have told the planner something different?”</a:t>
-            </a:r>
-          </a:p>
-        </p:txBody>
-      </p:sp>
-      <p:sp>
-        <p:nvSpPr>
-          <p:cNvPr id="10" name="TextBox 9"/>
-          <p:cNvSpPr txBox="1"/>
-          <p:nvPr/>
-        </p:nvSpPr>
-        <p:spPr>
-          <a:xfrm>
-            <a:off x="621792" y="4981956"/>
-            <a:ext cx="10033711" cy="399796"/>
-          </a:xfrm>
-          <a:prstGeom prst="rect">
-            <a:avLst/>
-          </a:prstGeom>
-          <a:noFill/>
-        </p:spPr>
-        <p:txBody>
-          <a:bodyPr wrap="square" anchor="t" lIns="0" rIns="0" tIns="0" bIns="0">
-            <a:spAutoFit/>
-          </a:bodyPr>
-          <a:lstStyle/>
-          <a:p>
-            <a:pPr algn="l"/>
-            <a:r>
-              <a:rPr sz="1100" b="0" i="0">
-                <a:solidFill>
-                  <a:srgbClr val="CFC9EE"/>
+            <a:pPr>
+              <a:spcAft>
+                <a:spcPts val="800"/>
+              </a:spcAft>
+            </a:pPr>
+            <a:r>
+              <a:rPr sz="1600" b="0" i="0">
+                <a:solidFill>
+                  <a:srgbClr val="1A1440"/>
                 </a:solidFill>
                 <a:latin typeface="Calibri"/>
               </a:rPr>
-              <a:t>The FC planner, testing the morning's choice. Runs only if the IITGN faculty session W4-4 (tentative) does not run. Illustrative case: the company is real, the situation and the data are synthetic, built for this class.</a:t>
+              <a:t>This hour runs only if the IITGN faculty session W4-4 (tentative) does not run. Illustrative case: the company is real, the situation and the data are synthetic, built for this class.</a:t>
             </a:r>
           </a:p>
         </p:txBody>
@@ -4935,11 +4828,11 @@
             <a:r>
               <a:rPr sz="750" b="0" i="0">
                 <a:solidFill>
-                  <a:srgbClr val="CFC9EE"/>
+                  <a:srgbClr val="6B6690"/>
                 </a:solidFill>
                 <a:latin typeface="Calibri"/>
               </a:rPr>
-              <a:t>Week 4, Day 5. Flipkart Lucknow: the rolling-origin hour</a:t>
+              <a:t>Week 4 Day 5: how much is coming, and how wrong could we be</a:t>
             </a:r>
           </a:p>
         </p:txBody>
@@ -4970,11 +4863,11 @@
             <a:r>
               <a:rPr sz="750" b="0" i="0">
                 <a:solidFill>
-                  <a:srgbClr val="CFC9EE"/>
+                  <a:srgbClr val="6B6690"/>
                 </a:solidFill>
                 <a:latin typeface="Calibri"/>
               </a:rPr>
-              <a:t>1 / 15</a:t>
+              <a:t>S1  ·  1 / 14</a:t>
             </a:r>
           </a:p>
         </p:txBody>
@@ -5145,411 +5038,7 @@
                 </a:solidFill>
                 <a:latin typeface="Calibri"/>
               </a:rPr>
-              <a:t>WEEK 4  ·  DAY 5  ·  KALPA GLOBAL CAPABILITY CENTRE</a:t>
-            </a:r>
-          </a:p>
-        </p:txBody>
-      </p:sp>
-      <p:sp>
-        <p:nvSpPr>
-          <p:cNvPr id="7" name="TextBox 6"/>
-          <p:cNvSpPr txBox="1"/>
-          <p:nvPr/>
-        </p:nvSpPr>
-        <p:spPr>
-          <a:xfrm>
-            <a:off x="530352" y="676656"/>
-            <a:ext cx="11130991" cy="512064"/>
-          </a:xfrm>
-          <a:prstGeom prst="rect">
-            <a:avLst/>
-          </a:prstGeom>
-          <a:noFill/>
-        </p:spPr>
-        <p:txBody>
-          <a:bodyPr wrap="square" anchor="b" lIns="0" rIns="0" tIns="0" bIns="0">
-            <a:spAutoFit/>
-          </a:bodyPr>
-          <a:lstStyle/>
-          <a:p>
-            <a:pPr algn="l"/>
-            <a:r>
-              <a:rPr sz="2600" b="0" i="0">
-                <a:solidFill>
-                  <a:srgbClr val="1A0F5C"/>
-                </a:solidFill>
-                <a:latin typeface="Georgia"/>
-              </a:rPr>
-              <a:t>Answer: naive, by about thirty-five times</a:t>
-            </a:r>
-          </a:p>
-        </p:txBody>
-      </p:sp>
-      <p:sp>
-        <p:nvSpPr>
-          <p:cNvPr id="8" name="TextBox 7"/>
-          <p:cNvSpPr txBox="1"/>
-          <p:nvPr/>
-        </p:nvSpPr>
-        <p:spPr>
-          <a:xfrm>
-            <a:off x="530352" y="1243584"/>
-            <a:ext cx="11130991" cy="234696"/>
-          </a:xfrm>
-          <a:prstGeom prst="rect">
-            <a:avLst/>
-          </a:prstGeom>
-          <a:noFill/>
-        </p:spPr>
-        <p:txBody>
-          <a:bodyPr wrap="square" anchor="t" lIns="0" rIns="0" tIns="0" bIns="0">
-            <a:spAutoFit/>
-          </a:bodyPr>
-          <a:lstStyle/>
-          <a:p>
-            <a:pPr algn="l"/>
-            <a:r>
-              <a:rPr sz="1200" b="0" i="0">
-                <a:solidFill>
-                  <a:srgbClr val="6B6690"/>
-                </a:solidFill>
-                <a:latin typeface="Calibri"/>
-              </a:rPr>
-              <a:t>What does the rolling origin say about naive near a festival?</a:t>
-            </a:r>
-          </a:p>
-        </p:txBody>
-      </p:sp>
-      <p:pic>
-        <p:nvPicPr>
-          <p:cNvPr id="9" name="mermaid diagram" descr="C2_W04_D05_rolling_origin_STUDENT.png"/>
-          <p:cNvPicPr>
-            <a:picLocks noChangeAspect="1"/>
-          </p:cNvPicPr>
-          <p:nvPr/>
-        </p:nvPicPr>
-        <p:blipFill>
-          <a:blip r:embed="rId4"/>
-          <a:stretch>
-            <a:fillRect/>
-          </a:stretch>
-        </p:blipFill>
-        <p:spPr>
-          <a:xfrm>
-            <a:off x="2400728" y="1664208"/>
-            <a:ext cx="7390239" cy="3215640"/>
-          </a:xfrm>
-          <a:prstGeom prst="rect">
-            <a:avLst/>
-          </a:prstGeom>
-        </p:spPr>
-      </p:pic>
-      <p:sp>
-        <p:nvSpPr>
-          <p:cNvPr id="10" name="picture caption"/>
-          <p:cNvSpPr txBox="1"/>
-          <p:nvPr/>
-        </p:nvSpPr>
-        <p:spPr>
-          <a:xfrm>
-            <a:off x="530352" y="4916424"/>
-            <a:ext cx="11130991" cy="316992"/>
-          </a:xfrm>
-          <a:prstGeom prst="rect">
-            <a:avLst/>
-          </a:prstGeom>
-          <a:noFill/>
-        </p:spPr>
-        <p:txBody>
-          <a:bodyPr wrap="square" anchor="t" lIns="0" rIns="0" tIns="0" bIns="0">
-            <a:spAutoFit/>
-          </a:bodyPr>
-          <a:lstStyle/>
-          <a:p>
-            <a:pPr algn="ctr"/>
-            <a:r>
-              <a:rPr sz="1200" b="0" i="0">
-                <a:solidFill>
-                  <a:srgbClr val="6B6690"/>
-                </a:solidFill>
-                <a:latin typeface="Calibri"/>
-              </a:rPr>
-              <a:t>Naive and festival-aligned, one week ahead from five origins</a:t>
-            </a:r>
-          </a:p>
-        </p:txBody>
-      </p:sp>
-      <p:sp>
-        <p:nvSpPr>
-          <p:cNvPr id="11" name="TextBox 10"/>
-          <p:cNvSpPr txBox="1"/>
-          <p:nvPr/>
-        </p:nvSpPr>
-        <p:spPr>
-          <a:xfrm>
-            <a:off x="530352" y="5242560"/>
-            <a:ext cx="11130991" cy="957072"/>
-          </a:xfrm>
-          <a:prstGeom prst="rect">
-            <a:avLst/>
-          </a:prstGeom>
-          <a:noFill/>
-        </p:spPr>
-        <p:txBody>
-          <a:bodyPr wrap="square" anchor="t" lIns="0" rIns="0" tIns="0" bIns="0">
-            <a:spAutoFit/>
-          </a:bodyPr>
-          <a:lstStyle/>
-          <a:p>
-            <a:r>
-              <a:rPr sz="1600" b="0" i="0">
-                <a:solidFill>
-                  <a:srgbClr val="1A1440"/>
-                </a:solidFill>
-                <a:latin typeface="Calibri"/>
-              </a:rPr>
-              <a:t>Naive's five misses average 71,180 a week and festival-aligned's 2,040. Near a festival the week before is a poor guide, because the weeks change sharply; last year's week at the same distance from Diwali is a good one.</a:t>
-            </a:r>
-          </a:p>
-        </p:txBody>
-      </p:sp>
-      <p:sp>
-        <p:nvSpPr>
-          <p:cNvPr id="12" name="TextBox 11"/>
-          <p:cNvSpPr txBox="1"/>
-          <p:nvPr/>
-        </p:nvSpPr>
-        <p:spPr>
-          <a:xfrm>
-            <a:off x="530352" y="6437376"/>
-            <a:ext cx="9667951" cy="160401"/>
-          </a:xfrm>
-          <a:prstGeom prst="rect">
-            <a:avLst/>
-          </a:prstGeom>
-          <a:noFill/>
-        </p:spPr>
-        <p:txBody>
-          <a:bodyPr wrap="square" anchor="t" lIns="0" rIns="0" tIns="0" bIns="0">
-            <a:spAutoFit/>
-          </a:bodyPr>
-          <a:lstStyle/>
-          <a:p>
-            <a:pPr algn="l"/>
-            <a:r>
-              <a:rPr sz="750" b="0" i="0">
-                <a:solidFill>
-                  <a:srgbClr val="6B6690"/>
-                </a:solidFill>
-                <a:latin typeface="Calibri"/>
-              </a:rPr>
-              <a:t>Week 4 Day 5: how much is coming, and how wrong could we be</a:t>
-            </a:r>
-          </a:p>
-        </p:txBody>
-      </p:sp>
-      <p:sp>
-        <p:nvSpPr>
-          <p:cNvPr id="13" name="TextBox 12"/>
-          <p:cNvSpPr txBox="1"/>
-          <p:nvPr/>
-        </p:nvSpPr>
-        <p:spPr>
-          <a:xfrm>
-            <a:off x="10198303" y="6437376"/>
-            <a:ext cx="1463040" cy="160401"/>
-          </a:xfrm>
-          <a:prstGeom prst="rect">
-            <a:avLst/>
-          </a:prstGeom>
-          <a:noFill/>
-        </p:spPr>
-        <p:txBody>
-          <a:bodyPr wrap="square" anchor="t" lIns="0" rIns="0" tIns="0" bIns="0">
-            <a:spAutoFit/>
-          </a:bodyPr>
-          <a:lstStyle/>
-          <a:p>
-            <a:pPr algn="r"/>
-            <a:r>
-              <a:rPr sz="750" b="0" i="0">
-                <a:solidFill>
-                  <a:srgbClr val="6B6690"/>
-                </a:solidFill>
-                <a:latin typeface="Calibri"/>
-              </a:rPr>
-              <a:t>S9  ·  10 / 15</a:t>
-            </a:r>
-          </a:p>
-        </p:txBody>
-      </p:sp>
-    </p:spTree>
-  </p:cSld>
-  <p:clrMapOvr>
-    <a:masterClrMapping/>
-  </p:clrMapOvr>
-</p:sld>
-</file>
-
-<file path=ppt/slides/slide11.xml><?xml version="1.0" encoding="utf-8"?>
-<p:sld xmlns:a="http://schemas.openxmlformats.org/drawingml/2006/main" xmlns:p="http://schemas.openxmlformats.org/presentationml/2006/main" xmlns:r="http://schemas.openxmlformats.org/officeDocument/2006/relationships">
-  <p:cSld>
-    <p:spTree>
-      <p:nvGrpSpPr>
-        <p:cNvPr id="1" name=""/>
-        <p:cNvGrpSpPr/>
-        <p:nvPr/>
-      </p:nvGrpSpPr>
-      <p:grpSpPr/>
-      <p:pic>
-        <p:nvPicPr>
-          <p:cNvPr id="2" name="Picture 1" descr="bg_light.jpg"/>
-          <p:cNvPicPr>
-            <a:picLocks noChangeAspect="1"/>
-          </p:cNvPicPr>
-          <p:nvPr/>
-        </p:nvPicPr>
-        <p:blipFill>
-          <a:blip r:embed="rId2"/>
-          <a:stretch>
-            <a:fillRect/>
-          </a:stretch>
-        </p:blipFill>
-        <p:spPr>
-          <a:xfrm>
-            <a:off x="0" y="0"/>
-            <a:ext cx="12191695" cy="6858000"/>
-          </a:xfrm>
-          <a:prstGeom prst="rect">
-            <a:avLst/>
-          </a:prstGeom>
-        </p:spPr>
-      </p:pic>
-      <p:pic>
-        <p:nvPicPr>
-          <p:cNvPr id="3" name="Picture 2" descr="iitgn_logo.png"/>
-          <p:cNvPicPr>
-            <a:picLocks noChangeAspect="1"/>
-          </p:cNvPicPr>
-          <p:nvPr/>
-        </p:nvPicPr>
-        <p:blipFill>
-          <a:blip r:embed="rId3"/>
-          <a:stretch>
-            <a:fillRect/>
-          </a:stretch>
-        </p:blipFill>
-        <p:spPr>
-          <a:xfrm>
-            <a:off x="530352" y="201168"/>
-            <a:ext cx="420624" cy="420624"/>
-          </a:xfrm>
-          <a:prstGeom prst="rect">
-            <a:avLst/>
-          </a:prstGeom>
-        </p:spPr>
-      </p:pic>
-      <p:sp>
-        <p:nvSpPr>
-          <p:cNvPr id="4" name="TextBox 3"/>
-          <p:cNvSpPr txBox="1"/>
-          <p:nvPr/>
-        </p:nvSpPr>
-        <p:spPr>
-          <a:xfrm>
-            <a:off x="1042416" y="228600"/>
-            <a:ext cx="5120640" cy="185166"/>
-          </a:xfrm>
-          <a:prstGeom prst="rect">
-            <a:avLst/>
-          </a:prstGeom>
-          <a:noFill/>
-        </p:spPr>
-        <p:txBody>
-          <a:bodyPr wrap="square" anchor="t" lIns="0" rIns="0" tIns="0" bIns="0">
-            <a:spAutoFit/>
-          </a:bodyPr>
-          <a:lstStyle/>
-          <a:p>
-            <a:pPr algn="l"/>
-            <a:r>
-              <a:rPr sz="900" b="1" i="0">
-                <a:solidFill>
-                  <a:srgbClr val="1A0F5C"/>
-                </a:solidFill>
-                <a:latin typeface="Calibri"/>
-              </a:rPr>
-              <a:t>Indian Institute of Technology Gandhinagar</a:t>
-            </a:r>
-          </a:p>
-        </p:txBody>
-      </p:sp>
-      <p:sp>
-        <p:nvSpPr>
-          <p:cNvPr id="5" name="TextBox 4"/>
-          <p:cNvSpPr txBox="1"/>
-          <p:nvPr/>
-        </p:nvSpPr>
-        <p:spPr>
-          <a:xfrm>
-            <a:off x="1042416" y="420623"/>
-            <a:ext cx="5852160" cy="127381"/>
-          </a:xfrm>
-          <a:prstGeom prst="rect">
-            <a:avLst/>
-          </a:prstGeom>
-          <a:noFill/>
-        </p:spPr>
-        <p:txBody>
-          <a:bodyPr wrap="square" anchor="t" lIns="0" rIns="0" tIns="0" bIns="0">
-            <a:spAutoFit/>
-          </a:bodyPr>
-          <a:lstStyle/>
-          <a:p>
-            <a:pPr algn="l"/>
-            <a:r>
-              <a:rPr sz="550" b="1" i="0" spc="300">
-                <a:solidFill>
-                  <a:srgbClr val="6B6690"/>
-                </a:solidFill>
-                <a:latin typeface="Calibri"/>
-              </a:rPr>
-              <a:t>ADMINISTERED THROUGH THE COMPETENCY ADVANCEMENT ACADEMY</a:t>
-            </a:r>
-          </a:p>
-        </p:txBody>
-      </p:sp>
-      <p:sp>
-        <p:nvSpPr>
-          <p:cNvPr id="6" name="TextBox 5"/>
-          <p:cNvSpPr txBox="1"/>
-          <p:nvPr/>
-        </p:nvSpPr>
-        <p:spPr>
-          <a:xfrm>
-            <a:off x="5992063" y="310896"/>
-            <a:ext cx="5669280" cy="127381"/>
-          </a:xfrm>
-          <a:prstGeom prst="rect">
-            <a:avLst/>
-          </a:prstGeom>
-          <a:noFill/>
-        </p:spPr>
-        <p:txBody>
-          <a:bodyPr wrap="square" anchor="t" lIns="0" rIns="0" tIns="0" bIns="0">
-            <a:spAutoFit/>
-          </a:bodyPr>
-          <a:lstStyle/>
-          <a:p>
-            <a:pPr algn="r"/>
-            <a:r>
-              <a:rPr sz="550" b="1" i="0" spc="300">
-                <a:solidFill>
-                  <a:srgbClr val="6B6690"/>
-                </a:solidFill>
-                <a:latin typeface="Calibri"/>
-              </a:rPr>
-              <a:t>WEEK 4  ·  DAY 5  ·  KALPA GLOBAL CAPABILITY CENTRE</a:t>
+              <a:t>WEEK 4  ·  FRIDAY  ·  FLIPKART, LUCKNOW  ·  FALLBACK</a:t>
             </a:r>
           </a:p>
         </p:txBody>
@@ -5935,7 +5424,7 @@
                 </a:solidFill>
                 <a:latin typeface="Calibri"/>
               </a:rPr>
-              <a:t>S10  ·  11 / 15</a:t>
+              <a:t>S10  ·  10 / 14</a:t>
             </a:r>
           </a:p>
         </p:txBody>
@@ -5948,7 +5437,7 @@
 </p:sld>
 </file>
 
-<file path=ppt/slides/slide12.xml><?xml version="1.0" encoding="utf-8"?>
+<file path=ppt/slides/slide11.xml><?xml version="1.0" encoding="utf-8"?>
 <p:sld xmlns:a="http://schemas.openxmlformats.org/drawingml/2006/main" xmlns:p="http://schemas.openxmlformats.org/presentationml/2006/main" xmlns:r="http://schemas.openxmlformats.org/officeDocument/2006/relationships">
   <p:cSld>
     <p:spTree>
@@ -6106,7 +5595,7 @@
                 </a:solidFill>
                 <a:latin typeface="Calibri"/>
               </a:rPr>
-              <a:t>WEEK 4  ·  DAY 5  ·  KALPA GLOBAL CAPABILITY CENTRE</a:t>
+              <a:t>WEEK 4  ·  FRIDAY  ·  FLIPKART, LUCKNOW  ·  FALLBACK</a:t>
             </a:r>
           </a:p>
         </p:txBody>
@@ -6446,7 +5935,7 @@
                 </a:solidFill>
                 <a:latin typeface="Calibri"/>
               </a:rPr>
-              <a:t>S11  ·  12 / 15</a:t>
+              <a:t>S11  ·  11 / 14</a:t>
             </a:r>
           </a:p>
         </p:txBody>
@@ -6459,7 +5948,7 @@
 </p:sld>
 </file>
 
-<file path=ppt/slides/slide13.xml><?xml version="1.0" encoding="utf-8"?>
+<file path=ppt/slides/slide12.xml><?xml version="1.0" encoding="utf-8"?>
 <p:sld xmlns:a="http://schemas.openxmlformats.org/drawingml/2006/main" xmlns:p="http://schemas.openxmlformats.org/presentationml/2006/main" xmlns:r="http://schemas.openxmlformats.org/officeDocument/2006/relationships">
   <p:cSld>
     <p:spTree>
@@ -6617,7 +6106,7 @@
                 </a:solidFill>
                 <a:latin typeface="Calibri"/>
               </a:rPr>
-              <a:t>WEEK 4  ·  DAY 5  ·  KALPA GLOBAL CAPABILITY CENTRE</a:t>
+              <a:t>WEEK 4  ·  FRIDAY  ·  FLIPKART, LUCKNOW  ·  FALLBACK</a:t>
             </a:r>
           </a:p>
         </p:txBody>
@@ -6988,7 +6477,7 @@
                 </a:solidFill>
                 <a:latin typeface="Calibri"/>
               </a:rPr>
-              <a:t>S12  ·  13 / 15</a:t>
+              <a:t>S12  ·  12 / 14</a:t>
             </a:r>
           </a:p>
         </p:txBody>
@@ -7001,7 +6490,7 @@
 </p:sld>
 </file>
 
-<file path=ppt/slides/slide14.xml><?xml version="1.0" encoding="utf-8"?>
+<file path=ppt/slides/slide13.xml><?xml version="1.0" encoding="utf-8"?>
 <p:sld xmlns:a="http://schemas.openxmlformats.org/drawingml/2006/main" xmlns:p="http://schemas.openxmlformats.org/presentationml/2006/main" xmlns:r="http://schemas.openxmlformats.org/officeDocument/2006/relationships">
   <p:cSld>
     <p:spTree>
@@ -7159,7 +6648,7 @@
                 </a:solidFill>
                 <a:latin typeface="Calibri"/>
               </a:rPr>
-              <a:t>WEEK 4  ·  DAY 5  ·  KALPA GLOBAL CAPABILITY CENTRE</a:t>
+              <a:t>WEEK 4  ·  FRIDAY  ·  FLIPKART, LUCKNOW  ·  FALLBACK</a:t>
             </a:r>
           </a:p>
         </p:txBody>
@@ -7509,7 +6998,7 @@
                 </a:solidFill>
                 <a:latin typeface="Calibri"/>
               </a:rPr>
-              <a:t>S13  ·  14 / 15</a:t>
+              <a:t>S13  ·  13 / 14</a:t>
             </a:r>
           </a:p>
         </p:txBody>
@@ -7522,7 +7011,7 @@
 </p:sld>
 </file>
 
-<file path=ppt/slides/slide15.xml><?xml version="1.0" encoding="utf-8"?>
+<file path=ppt/slides/slide14.xml><?xml version="1.0" encoding="utf-8"?>
 <p:sld xmlns:a="http://schemas.openxmlformats.org/drawingml/2006/main" xmlns:p="http://schemas.openxmlformats.org/presentationml/2006/main" xmlns:r="http://schemas.openxmlformats.org/officeDocument/2006/relationships">
   <p:cSld>
     <p:spTree>
@@ -7680,7 +7169,7 @@
                 </a:solidFill>
                 <a:latin typeface="Calibri"/>
               </a:rPr>
-              <a:t>WEEK 4  ·  DAY 5  ·  KALPA GLOBAL CAPABILITY CENTRE</a:t>
+              <a:t>WEEK 4  ·  FRIDAY  ·  FLIPKART, LUCKNOW  ·  FALLBACK</a:t>
             </a:r>
           </a:p>
         </p:txBody>
@@ -8507,7 +7996,7 @@
                 </a:solidFill>
                 <a:latin typeface="Calibri"/>
               </a:rPr>
-              <a:t>S14  ·  15 / 15</a:t>
+              <a:t>S14  ·  14 / 14</a:t>
             </a:r>
           </a:p>
         </p:txBody>
@@ -8678,7 +8167,7 @@
                 </a:solidFill>
                 <a:latin typeface="Calibri"/>
               </a:rPr>
-              <a:t>WEEK 4  ·  DAY 5  ·  KALPA GLOBAL CAPABILITY CENTRE</a:t>
+              <a:t>WEEK 4  ·  FRIDAY  ·  FLIPKART, LUCKNOW  ·  FALLBACK</a:t>
             </a:r>
           </a:p>
         </p:txBody>
@@ -8713,7 +8202,7 @@
                 </a:solidFill>
                 <a:latin typeface="Georgia"/>
               </a:rPr>
-              <a:t>Four parts, each testing the morning's choice</a:t>
+              <a:t>Hide four weeks, forecast from 24 August</a:t>
             </a:r>
           </a:p>
         </p:txBody>
@@ -8748,29 +8237,29 @@
                 </a:solidFill>
                 <a:latin typeface="Calibri"/>
               </a:rPr>
-              <a:t>What runs in the next 120 minutes, and in what order?</a:t>
+              <a:t>What do the rules score when only the last four weeks are hidden?</a:t>
             </a:r>
           </a:p>
         </p:txBody>
       </p:sp>
       <p:pic>
         <p:nvPicPr>
-          <p:cNvPr id="9" name="mermaid diagram" descr="f7bebd1c83210485.png"/>
+          <p:cNvPr id="9" name="mermaid diagram" descr="C2_W04_D05_four_vs_thirteen_STUDENT.png"/>
           <p:cNvPicPr>
             <a:picLocks noChangeAspect="1"/>
           </p:cNvPicPr>
           <p:nvPr/>
         </p:nvPicPr>
         <p:blipFill>
-          <a:blip r:embed="rId5"/>
+          <a:blip r:embed="rId4"/>
           <a:stretch>
             <a:fillRect/>
           </a:stretch>
         </p:blipFill>
         <p:spPr>
           <a:xfrm>
-            <a:off x="780897" y="1956816"/>
-            <a:ext cx="10629900" cy="1600200"/>
+            <a:off x="2032232" y="1664208"/>
+            <a:ext cx="8127229" cy="3491992"/>
           </a:xfrm>
           <a:prstGeom prst="rect">
             <a:avLst/>
@@ -8779,7 +8268,76 @@
       </p:pic>
       <p:sp>
         <p:nvSpPr>
-          <p:cNvPr id="10" name="TextBox 9"/>
+          <p:cNvPr id="10" name="picture caption"/>
+          <p:cNvSpPr txBox="1"/>
+          <p:nvPr/>
+        </p:nvSpPr>
+        <p:spPr>
+          <a:xfrm>
+            <a:off x="530352" y="5192776"/>
+            <a:ext cx="11130991" cy="316992"/>
+          </a:xfrm>
+          <a:prstGeom prst="rect">
+            <a:avLst/>
+          </a:prstGeom>
+          <a:noFill/>
+        </p:spPr>
+        <p:txBody>
+          <a:bodyPr wrap="square" anchor="t" lIns="0" rIns="0" tIns="0" bIns="0">
+            <a:spAutoFit/>
+          </a:bodyPr>
+          <a:lstStyle/>
+          <a:p>
+            <a:pPr algn="ctr"/>
+            <a:r>
+              <a:rPr sz="1200" b="0" i="0">
+                <a:solidFill>
+                  <a:srgbClr val="6B6690"/>
+                </a:solidFill>
+                <a:latin typeface="Calibri"/>
+              </a:rPr>
+              <a:t>MAE by rule on thirteen hidden weeks and on the last four</a:t>
+            </a:r>
+          </a:p>
+        </p:txBody>
+      </p:sp>
+      <p:sp>
+        <p:nvSpPr>
+          <p:cNvPr id="11" name="TextBox 10"/>
+          <p:cNvSpPr txBox="1"/>
+          <p:nvPr/>
+        </p:nvSpPr>
+        <p:spPr>
+          <a:xfrm>
+            <a:off x="530352" y="5518912"/>
+            <a:ext cx="11130991" cy="680720"/>
+          </a:xfrm>
+          <a:prstGeom prst="rect">
+            <a:avLst/>
+          </a:prstGeom>
+          <a:noFill/>
+        </p:spPr>
+        <p:txBody>
+          <a:bodyPr wrap="square" anchor="t" lIns="0" rIns="0" tIns="0" bIns="0">
+            <a:spAutoFit/>
+          </a:bodyPr>
+          <a:lstStyle/>
+          <a:p>
+            <a:r>
+              <a:rPr sz="1600" b="0" i="0">
+                <a:solidFill>
+                  <a:srgbClr val="1A1440"/>
+                </a:solidFill>
+                <a:latin typeface="Calibri"/>
+              </a:rPr>
+              <a:t>The order barely moves; the numbers move a great deal. The four-week test rests on four misses and on one origin week.</a:t>
+            </a:r>
+          </a:p>
+        </p:txBody>
+      </p:sp>
+      <p:sp>
+        <p:nvSpPr>
+          <p:cNvPr id="12" name="TextBox 11"/>
           <p:cNvSpPr txBox="1"/>
           <p:nvPr/>
         </p:nvSpPr>
@@ -8814,7 +8372,7 @@
       </p:sp>
       <p:sp>
         <p:nvSpPr>
-          <p:cNvPr id="11" name="TextBox 10"/>
+          <p:cNvPr id="13" name="TextBox 12"/>
           <p:cNvSpPr txBox="1"/>
           <p:nvPr/>
         </p:nvSpPr>
@@ -8842,7 +8400,7 @@
                 </a:solidFill>
                 <a:latin typeface="Calibri"/>
               </a:rPr>
-              <a:t>S1  ·  2 / 15</a:t>
+              <a:t>S2  ·  2 / 14</a:t>
             </a:r>
           </a:p>
         </p:txBody>
@@ -9013,7 +8571,7 @@
                 </a:solidFill>
                 <a:latin typeface="Calibri"/>
               </a:rPr>
-              <a:t>WEEK 4  ·  DAY 5  ·  KALPA GLOBAL CAPABILITY CENTRE</a:t>
+              <a:t>WEEK 4  ·  FRIDAY  ·  FLIPKART, LUCKNOW  ·  FALLBACK</a:t>
             </a:r>
           </a:p>
         </p:txBody>
@@ -9048,7 +8606,7 @@
                 </a:solidFill>
                 <a:latin typeface="Georgia"/>
               </a:rPr>
-              <a:t>Hide four weeks, forecast from 24 August</a:t>
+              <a:t>Why did naive jump from 14,923 to 37,050?</a:t>
             </a:r>
           </a:p>
         </p:txBody>
@@ -9083,14 +8641,112 @@
                 </a:solidFill>
                 <a:latin typeface="Calibri"/>
               </a:rPr>
-              <a:t>What do the rules score when only the last four weeks are hidden?</a:t>
-            </a:r>
+              <a:t>What, in the four-week test, made naive's average miss more than double?</a:t>
+            </a:r>
+          </a:p>
+        </p:txBody>
+      </p:sp>
+      <p:sp>
+        <p:nvSpPr>
+          <p:cNvPr id="9" name="Rounded Rectangle 8"/>
+          <p:cNvSpPr/>
+          <p:nvPr/>
+        </p:nvSpPr>
+        <p:spPr>
+          <a:xfrm>
+            <a:off x="530352" y="1956816"/>
+            <a:ext cx="2645587" cy="2195576"/>
+          </a:xfrm>
+          <a:prstGeom prst="roundRect">
+            <a:avLst>
+              <a:gd name="adj" fmla="val 5000"/>
+            </a:avLst>
+          </a:prstGeom>
+          <a:solidFill>
+            <a:srgbClr val="FFFFFF"/>
+          </a:solidFill>
+          <a:ln w="9525">
+            <a:solidFill>
+              <a:srgbClr val="E4E1F1"/>
+            </a:solidFill>
+          </a:ln>
+          <a:effectLst>
+            <a:outerShdw blurRad="76200" dist="19050" dir="5400000" algn="bl" rotWithShape="0">
+              <a:srgbClr val="1A0F5C">
+                <a:alpha val="12000"/>
+              </a:srgbClr>
+            </a:outerShdw>
+          </a:effectLst>
+        </p:spPr>
+        <p:style>
+          <a:lnRef idx="1">
+            <a:schemeClr val="accent1"/>
+          </a:lnRef>
+          <a:fillRef idx="3">
+            <a:schemeClr val="accent1"/>
+          </a:fillRef>
+          <a:effectRef idx="2">
+            <a:schemeClr val="accent1"/>
+          </a:effectRef>
+          <a:fontRef idx="minor">
+            <a:schemeClr val="lt1"/>
+          </a:fontRef>
+        </p:style>
+        <p:txBody>
+          <a:bodyPr rtlCol="0" anchor="ctr" wrap="square"/>
+          <a:lstStyle/>
+          <a:p>
+            <a:pPr algn="ctr"/>
+          </a:p>
+        </p:txBody>
+      </p:sp>
+      <p:sp>
+        <p:nvSpPr>
+          <p:cNvPr id="10" name="Oval 9"/>
+          <p:cNvSpPr/>
+          <p:nvPr/>
+        </p:nvSpPr>
+        <p:spPr>
+          <a:xfrm>
+            <a:off x="731519" y="2157984"/>
+            <a:ext cx="457200" cy="457200"/>
+          </a:xfrm>
+          <a:prstGeom prst="ellipse">
+            <a:avLst/>
+          </a:prstGeom>
+          <a:solidFill>
+            <a:srgbClr val="EEEAFB"/>
+          </a:solidFill>
+          <a:ln>
+            <a:noFill/>
+          </a:ln>
+          <a:effectLst/>
+        </p:spPr>
+        <p:style>
+          <a:lnRef idx="1">
+            <a:schemeClr val="accent1"/>
+          </a:lnRef>
+          <a:fillRef idx="3">
+            <a:schemeClr val="accent1"/>
+          </a:fillRef>
+          <a:effectRef idx="2">
+            <a:schemeClr val="accent1"/>
+          </a:effectRef>
+          <a:fontRef idx="minor">
+            <a:schemeClr val="lt1"/>
+          </a:fontRef>
+        </p:style>
+        <p:txBody>
+          <a:bodyPr rtlCol="0" anchor="ctr" wrap="square"/>
+          <a:lstStyle/>
+          <a:p>
+            <a:pPr algn="ctr"/>
           </a:p>
         </p:txBody>
       </p:sp>
       <p:pic>
         <p:nvPicPr>
-          <p:cNvPr id="9" name="mermaid diagram" descr="C2_W04_D05_four_vs_thirteen_STUDENT.png"/>
+          <p:cNvPr id="11" name="Picture 10" descr="list_637b34e7c72a.png"/>
           <p:cNvPicPr>
             <a:picLocks noChangeAspect="1"/>
           </p:cNvPicPr>
@@ -9104,8 +8760,8 @@
         </p:blipFill>
         <p:spPr>
           <a:xfrm>
-            <a:off x="2032232" y="1664208"/>
-            <a:ext cx="8127229" cy="3491992"/>
+            <a:off x="841247" y="2267712"/>
+            <a:ext cx="237744" cy="237744"/>
           </a:xfrm>
           <a:prstGeom prst="rect">
             <a:avLst/>
@@ -9114,14 +8770,14 @@
       </p:pic>
       <p:sp>
         <p:nvSpPr>
-          <p:cNvPr id="10" name="picture caption"/>
-          <p:cNvSpPr txBox="1"/>
-          <p:nvPr/>
-        </p:nvSpPr>
-        <p:spPr>
-          <a:xfrm>
-            <a:off x="530352" y="5192776"/>
-            <a:ext cx="11130991" cy="316992"/>
+          <p:cNvPr id="12" name="TextBox 11"/>
+          <p:cNvSpPr txBox="1"/>
+          <p:nvPr/>
+        </p:nvSpPr>
+        <p:spPr>
+          <a:xfrm>
+            <a:off x="731519" y="2724912"/>
+            <a:ext cx="2243251" cy="160401"/>
           </a:xfrm>
           <a:prstGeom prst="rect">
             <a:avLst/>
@@ -9134,29 +8790,448 @@
           </a:bodyPr>
           <a:lstStyle/>
           <a:p>
+            <a:pPr algn="l"/>
+            <a:r>
+              <a:rPr sz="750" b="1" i="0" spc="250">
+                <a:solidFill>
+                  <a:srgbClr val="5B3FD6"/>
+                </a:solidFill>
+                <a:latin typeface="Calibri"/>
+              </a:rPr>
+              <a:t>A</a:t>
+            </a:r>
+          </a:p>
+        </p:txBody>
+      </p:sp>
+      <p:sp>
+        <p:nvSpPr>
+          <p:cNvPr id="13" name="TextBox 12"/>
+          <p:cNvSpPr txBox="1"/>
+          <p:nvPr/>
+        </p:nvSpPr>
+        <p:spPr>
+          <a:xfrm>
+            <a:off x="731519" y="2962656"/>
+            <a:ext cx="2243251" cy="498856"/>
+          </a:xfrm>
+          <a:prstGeom prst="rect">
+            <a:avLst/>
+          </a:prstGeom>
+          <a:noFill/>
+        </p:spPr>
+        <p:txBody>
+          <a:bodyPr wrap="square" anchor="t" lIns="0" rIns="0" tIns="0" bIns="0">
+            <a:spAutoFit/>
+          </a:bodyPr>
+          <a:lstStyle/>
+          <a:p>
+            <a:pPr algn="l"/>
+            <a:r>
+              <a:rPr sz="1400" b="1" i="0">
+                <a:solidFill>
+                  <a:srgbClr val="1A0F5C"/>
+                </a:solidFill>
+                <a:latin typeface="Calibri"/>
+              </a:rPr>
+              <a:t>The last four weeks are harder</a:t>
+            </a:r>
+          </a:p>
+        </p:txBody>
+      </p:sp>
+      <p:sp>
+        <p:nvSpPr>
+          <p:cNvPr id="14" name="TextBox 13"/>
+          <p:cNvSpPr txBox="1"/>
+          <p:nvPr/>
+        </p:nvSpPr>
+        <p:spPr>
+          <a:xfrm>
+            <a:off x="731519" y="3534664"/>
+            <a:ext cx="2243251" cy="218186"/>
+          </a:xfrm>
+          <a:prstGeom prst="rect">
+            <a:avLst/>
+          </a:prstGeom>
+          <a:noFill/>
+        </p:spPr>
+        <p:txBody>
+          <a:bodyPr wrap="square" anchor="t" lIns="0" rIns="0" tIns="0" bIns="0">
+            <a:spAutoFit/>
+          </a:bodyPr>
+          <a:lstStyle/>
+          <a:p>
+            <a:pPr algn="l"/>
+            <a:r>
+              <a:rPr sz="1100" b="0" i="0">
+                <a:solidFill>
+                  <a:srgbClr val="6B6690"/>
+                </a:solidFill>
+                <a:latin typeface="Calibri"/>
+              </a:rPr>
+              <a:t>September ships more than July.</a:t>
+            </a:r>
+          </a:p>
+        </p:txBody>
+      </p:sp>
+      <p:sp>
+        <p:nvSpPr>
+          <p:cNvPr id="15" name="Rounded Rectangle 14"/>
+          <p:cNvSpPr/>
+          <p:nvPr/>
+        </p:nvSpPr>
+        <p:spPr>
+          <a:xfrm>
+            <a:off x="3358819" y="1956816"/>
+            <a:ext cx="2645587" cy="2195576"/>
+          </a:xfrm>
+          <a:prstGeom prst="roundRect">
+            <a:avLst>
+              <a:gd name="adj" fmla="val 5000"/>
+            </a:avLst>
+          </a:prstGeom>
+          <a:solidFill>
+            <a:srgbClr val="FFFFFF"/>
+          </a:solidFill>
+          <a:ln w="9525">
+            <a:solidFill>
+              <a:srgbClr val="E4E1F1"/>
+            </a:solidFill>
+          </a:ln>
+          <a:effectLst>
+            <a:outerShdw blurRad="76200" dist="19050" dir="5400000" algn="bl" rotWithShape="0">
+              <a:srgbClr val="1A0F5C">
+                <a:alpha val="12000"/>
+              </a:srgbClr>
+            </a:outerShdw>
+          </a:effectLst>
+        </p:spPr>
+        <p:style>
+          <a:lnRef idx="1">
+            <a:schemeClr val="accent1"/>
+          </a:lnRef>
+          <a:fillRef idx="3">
+            <a:schemeClr val="accent1"/>
+          </a:fillRef>
+          <a:effectRef idx="2">
+            <a:schemeClr val="accent1"/>
+          </a:effectRef>
+          <a:fontRef idx="minor">
+            <a:schemeClr val="lt1"/>
+          </a:fontRef>
+        </p:style>
+        <p:txBody>
+          <a:bodyPr rtlCol="0" anchor="ctr" wrap="square"/>
+          <a:lstStyle/>
+          <a:p>
             <a:pPr algn="ctr"/>
-            <a:r>
-              <a:rPr sz="1200" b="0" i="0">
+          </a:p>
+        </p:txBody>
+      </p:sp>
+      <p:sp>
+        <p:nvSpPr>
+          <p:cNvPr id="16" name="Oval 15"/>
+          <p:cNvSpPr/>
+          <p:nvPr/>
+        </p:nvSpPr>
+        <p:spPr>
+          <a:xfrm>
+            <a:off x="3559987" y="2157984"/>
+            <a:ext cx="457200" cy="457200"/>
+          </a:xfrm>
+          <a:prstGeom prst="ellipse">
+            <a:avLst/>
+          </a:prstGeom>
+          <a:solidFill>
+            <a:srgbClr val="EEEAFB"/>
+          </a:solidFill>
+          <a:ln>
+            <a:noFill/>
+          </a:ln>
+          <a:effectLst/>
+        </p:spPr>
+        <p:style>
+          <a:lnRef idx="1">
+            <a:schemeClr val="accent1"/>
+          </a:lnRef>
+          <a:fillRef idx="3">
+            <a:schemeClr val="accent1"/>
+          </a:fillRef>
+          <a:effectRef idx="2">
+            <a:schemeClr val="accent1"/>
+          </a:effectRef>
+          <a:fontRef idx="minor">
+            <a:schemeClr val="lt1"/>
+          </a:fontRef>
+        </p:style>
+        <p:txBody>
+          <a:bodyPr rtlCol="0" anchor="ctr" wrap="square"/>
+          <a:lstStyle/>
+          <a:p>
+            <a:pPr algn="ctr"/>
+          </a:p>
+        </p:txBody>
+      </p:sp>
+      <p:pic>
+        <p:nvPicPr>
+          <p:cNvPr id="17" name="Picture 16" descr="list_637b34e7c72a.png"/>
+          <p:cNvPicPr>
+            <a:picLocks noChangeAspect="1"/>
+          </p:cNvPicPr>
+          <p:nvPr/>
+        </p:nvPicPr>
+        <p:blipFill>
+          <a:blip r:embed="rId4"/>
+          <a:stretch>
+            <a:fillRect/>
+          </a:stretch>
+        </p:blipFill>
+        <p:spPr>
+          <a:xfrm>
+            <a:off x="3669715" y="2267712"/>
+            <a:ext cx="237744" cy="237744"/>
+          </a:xfrm>
+          <a:prstGeom prst="rect">
+            <a:avLst/>
+          </a:prstGeom>
+        </p:spPr>
+      </p:pic>
+      <p:sp>
+        <p:nvSpPr>
+          <p:cNvPr id="18" name="TextBox 17"/>
+          <p:cNvSpPr txBox="1"/>
+          <p:nvPr/>
+        </p:nvSpPr>
+        <p:spPr>
+          <a:xfrm>
+            <a:off x="3559987" y="2724912"/>
+            <a:ext cx="2243251" cy="160401"/>
+          </a:xfrm>
+          <a:prstGeom prst="rect">
+            <a:avLst/>
+          </a:prstGeom>
+          <a:noFill/>
+        </p:spPr>
+        <p:txBody>
+          <a:bodyPr wrap="square" anchor="t" lIns="0" rIns="0" tIns="0" bIns="0">
+            <a:spAutoFit/>
+          </a:bodyPr>
+          <a:lstStyle/>
+          <a:p>
+            <a:pPr algn="l"/>
+            <a:r>
+              <a:rPr sz="750" b="1" i="0" spc="250">
+                <a:solidFill>
+                  <a:srgbClr val="5B3FD6"/>
+                </a:solidFill>
+                <a:latin typeface="Calibri"/>
+              </a:rPr>
+              <a:t>B</a:t>
+            </a:r>
+          </a:p>
+        </p:txBody>
+      </p:sp>
+      <p:sp>
+        <p:nvSpPr>
+          <p:cNvPr id="19" name="TextBox 18"/>
+          <p:cNvSpPr txBox="1"/>
+          <p:nvPr/>
+        </p:nvSpPr>
+        <p:spPr>
+          <a:xfrm>
+            <a:off x="3559987" y="2962656"/>
+            <a:ext cx="2243251" cy="498856"/>
+          </a:xfrm>
+          <a:prstGeom prst="rect">
+            <a:avLst/>
+          </a:prstGeom>
+          <a:noFill/>
+        </p:spPr>
+        <p:txBody>
+          <a:bodyPr wrap="square" anchor="t" lIns="0" rIns="0" tIns="0" bIns="0">
+            <a:spAutoFit/>
+          </a:bodyPr>
+          <a:lstStyle/>
+          <a:p>
+            <a:pPr algn="l"/>
+            <a:r>
+              <a:rPr sz="1400" b="1" i="0">
+                <a:solidFill>
+                  <a:srgbClr val="1A0F5C"/>
+                </a:solidFill>
+                <a:latin typeface="Calibri"/>
+              </a:rPr>
+              <a:t>The origin week was a dip</a:t>
+            </a:r>
+          </a:p>
+        </p:txBody>
+      </p:sp>
+      <p:sp>
+        <p:nvSpPr>
+          <p:cNvPr id="20" name="TextBox 19"/>
+          <p:cNvSpPr txBox="1"/>
+          <p:nvPr/>
+        </p:nvSpPr>
+        <p:spPr>
+          <a:xfrm>
+            <a:off x="3559987" y="3534664"/>
+            <a:ext cx="2243251" cy="399796"/>
+          </a:xfrm>
+          <a:prstGeom prst="rect">
+            <a:avLst/>
+          </a:prstGeom>
+          <a:noFill/>
+        </p:spPr>
+        <p:txBody>
+          <a:bodyPr wrap="square" anchor="t" lIns="0" rIns="0" tIns="0" bIns="0">
+            <a:spAutoFit/>
+          </a:bodyPr>
+          <a:lstStyle/>
+          <a:p>
+            <a:pPr algn="l"/>
+            <a:r>
+              <a:rPr sz="1100" b="0" i="0">
                 <a:solidFill>
                   <a:srgbClr val="6B6690"/>
                 </a:solidFill>
                 <a:latin typeface="Calibri"/>
               </a:rPr>
-              <a:t>MAE by rule on thirteen hidden weeks and on the last four</a:t>
-            </a:r>
-          </a:p>
-        </p:txBody>
-      </p:sp>
-      <p:sp>
-        <p:nvSpPr>
-          <p:cNvPr id="11" name="TextBox 10"/>
-          <p:cNvSpPr txBox="1"/>
-          <p:nvPr/>
-        </p:nvSpPr>
-        <p:spPr>
-          <a:xfrm>
-            <a:off x="530352" y="5518912"/>
-            <a:ext cx="11130991" cy="680720"/>
+              <a:t>The week of 24 August shipped 196,600.</a:t>
+            </a:r>
+          </a:p>
+        </p:txBody>
+      </p:sp>
+      <p:sp>
+        <p:nvSpPr>
+          <p:cNvPr id="21" name="Rounded Rectangle 20"/>
+          <p:cNvSpPr/>
+          <p:nvPr/>
+        </p:nvSpPr>
+        <p:spPr>
+          <a:xfrm>
+            <a:off x="6187287" y="1956816"/>
+            <a:ext cx="2645587" cy="2195576"/>
+          </a:xfrm>
+          <a:prstGeom prst="roundRect">
+            <a:avLst>
+              <a:gd name="adj" fmla="val 5000"/>
+            </a:avLst>
+          </a:prstGeom>
+          <a:solidFill>
+            <a:srgbClr val="FFFFFF"/>
+          </a:solidFill>
+          <a:ln w="9525">
+            <a:solidFill>
+              <a:srgbClr val="E4E1F1"/>
+            </a:solidFill>
+          </a:ln>
+          <a:effectLst>
+            <a:outerShdw blurRad="76200" dist="19050" dir="5400000" algn="bl" rotWithShape="0">
+              <a:srgbClr val="1A0F5C">
+                <a:alpha val="12000"/>
+              </a:srgbClr>
+            </a:outerShdw>
+          </a:effectLst>
+        </p:spPr>
+        <p:style>
+          <a:lnRef idx="1">
+            <a:schemeClr val="accent1"/>
+          </a:lnRef>
+          <a:fillRef idx="3">
+            <a:schemeClr val="accent1"/>
+          </a:fillRef>
+          <a:effectRef idx="2">
+            <a:schemeClr val="accent1"/>
+          </a:effectRef>
+          <a:fontRef idx="minor">
+            <a:schemeClr val="lt1"/>
+          </a:fontRef>
+        </p:style>
+        <p:txBody>
+          <a:bodyPr rtlCol="0" anchor="ctr" wrap="square"/>
+          <a:lstStyle/>
+          <a:p>
+            <a:pPr algn="ctr"/>
+          </a:p>
+        </p:txBody>
+      </p:sp>
+      <p:sp>
+        <p:nvSpPr>
+          <p:cNvPr id="22" name="Oval 21"/>
+          <p:cNvSpPr/>
+          <p:nvPr/>
+        </p:nvSpPr>
+        <p:spPr>
+          <a:xfrm>
+            <a:off x="6388455" y="2157984"/>
+            <a:ext cx="457200" cy="457200"/>
+          </a:xfrm>
+          <a:prstGeom prst="ellipse">
+            <a:avLst/>
+          </a:prstGeom>
+          <a:solidFill>
+            <a:srgbClr val="EEEAFB"/>
+          </a:solidFill>
+          <a:ln>
+            <a:noFill/>
+          </a:ln>
+          <a:effectLst/>
+        </p:spPr>
+        <p:style>
+          <a:lnRef idx="1">
+            <a:schemeClr val="accent1"/>
+          </a:lnRef>
+          <a:fillRef idx="3">
+            <a:schemeClr val="accent1"/>
+          </a:fillRef>
+          <a:effectRef idx="2">
+            <a:schemeClr val="accent1"/>
+          </a:effectRef>
+          <a:fontRef idx="minor">
+            <a:schemeClr val="lt1"/>
+          </a:fontRef>
+        </p:style>
+        <p:txBody>
+          <a:bodyPr rtlCol="0" anchor="ctr" wrap="square"/>
+          <a:lstStyle/>
+          <a:p>
+            <a:pPr algn="ctr"/>
+          </a:p>
+        </p:txBody>
+      </p:sp>
+      <p:pic>
+        <p:nvPicPr>
+          <p:cNvPr id="23" name="Picture 22" descr="list_637b34e7c72a.png"/>
+          <p:cNvPicPr>
+            <a:picLocks noChangeAspect="1"/>
+          </p:cNvPicPr>
+          <p:nvPr/>
+        </p:nvPicPr>
+        <p:blipFill>
+          <a:blip r:embed="rId4"/>
+          <a:stretch>
+            <a:fillRect/>
+          </a:stretch>
+        </p:blipFill>
+        <p:spPr>
+          <a:xfrm>
+            <a:off x="6498183" y="2267712"/>
+            <a:ext cx="237744" cy="237744"/>
+          </a:xfrm>
+          <a:prstGeom prst="rect">
+            <a:avLst/>
+          </a:prstGeom>
+        </p:spPr>
+      </p:pic>
+      <p:sp>
+        <p:nvSpPr>
+          <p:cNvPr id="24" name="TextBox 23"/>
+          <p:cNvSpPr txBox="1"/>
+          <p:nvPr/>
+        </p:nvSpPr>
+        <p:spPr>
+          <a:xfrm>
+            <a:off x="6388455" y="2724912"/>
+            <a:ext cx="2243251" cy="160401"/>
           </a:xfrm>
           <a:prstGeom prst="rect">
             <a:avLst/>
@@ -9169,21 +9244,319 @@
           </a:bodyPr>
           <a:lstStyle/>
           <a:p>
-            <a:r>
-              <a:rPr sz="1600" b="0" i="0">
-                <a:solidFill>
-                  <a:srgbClr val="1A1440"/>
+            <a:pPr algn="l"/>
+            <a:r>
+              <a:rPr sz="750" b="1" i="0" spc="250">
+                <a:solidFill>
+                  <a:srgbClr val="5B3FD6"/>
                 </a:solidFill>
                 <a:latin typeface="Calibri"/>
               </a:rPr>
-              <a:t>The order barely moves; the numbers move a great deal. The four-week test rests on four misses and on one origin week.</a:t>
-            </a:r>
-          </a:p>
-        </p:txBody>
-      </p:sp>
-      <p:sp>
-        <p:nvSpPr>
-          <p:cNvPr id="12" name="TextBox 11"/>
+              <a:t>C</a:t>
+            </a:r>
+          </a:p>
+        </p:txBody>
+      </p:sp>
+      <p:sp>
+        <p:nvSpPr>
+          <p:cNvPr id="25" name="TextBox 24"/>
+          <p:cNvSpPr txBox="1"/>
+          <p:nvPr/>
+        </p:nvSpPr>
+        <p:spPr>
+          <a:xfrm>
+            <a:off x="6388455" y="2962656"/>
+            <a:ext cx="2243251" cy="498856"/>
+          </a:xfrm>
+          <a:prstGeom prst="rect">
+            <a:avLst/>
+          </a:prstGeom>
+          <a:noFill/>
+        </p:spPr>
+        <p:txBody>
+          <a:bodyPr wrap="square" anchor="t" lIns="0" rIns="0" tIns="0" bIns="0">
+            <a:spAutoFit/>
+          </a:bodyPr>
+          <a:lstStyle/>
+          <a:p>
+            <a:pPr algn="l"/>
+            <a:r>
+              <a:rPr sz="1400" b="1" i="0">
+                <a:solidFill>
+                  <a:srgbClr val="1A0F5C"/>
+                </a:solidFill>
+                <a:latin typeface="Calibri"/>
+              </a:rPr>
+              <a:t>Four weeks are too few to average</a:t>
+            </a:r>
+          </a:p>
+        </p:txBody>
+      </p:sp>
+      <p:sp>
+        <p:nvSpPr>
+          <p:cNvPr id="26" name="TextBox 25"/>
+          <p:cNvSpPr txBox="1"/>
+          <p:nvPr/>
+        </p:nvSpPr>
+        <p:spPr>
+          <a:xfrm>
+            <a:off x="6388455" y="3534664"/>
+            <a:ext cx="2243251" cy="218186"/>
+          </a:xfrm>
+          <a:prstGeom prst="rect">
+            <a:avLst/>
+          </a:prstGeom>
+          <a:noFill/>
+        </p:spPr>
+        <p:txBody>
+          <a:bodyPr wrap="square" anchor="t" lIns="0" rIns="0" tIns="0" bIns="0">
+            <a:spAutoFit/>
+          </a:bodyPr>
+          <a:lstStyle/>
+          <a:p>
+            <a:pPr algn="l"/>
+            <a:r>
+              <a:rPr sz="1100" b="0" i="0">
+                <a:solidFill>
+                  <a:srgbClr val="6B6690"/>
+                </a:solidFill>
+                <a:latin typeface="Calibri"/>
+              </a:rPr>
+              <a:t>Any one miss moves the mean.</a:t>
+            </a:r>
+          </a:p>
+        </p:txBody>
+      </p:sp>
+      <p:sp>
+        <p:nvSpPr>
+          <p:cNvPr id="27" name="Rounded Rectangle 26"/>
+          <p:cNvSpPr/>
+          <p:nvPr/>
+        </p:nvSpPr>
+        <p:spPr>
+          <a:xfrm>
+            <a:off x="9015755" y="1956816"/>
+            <a:ext cx="2645587" cy="2195576"/>
+          </a:xfrm>
+          <a:prstGeom prst="roundRect">
+            <a:avLst>
+              <a:gd name="adj" fmla="val 5000"/>
+            </a:avLst>
+          </a:prstGeom>
+          <a:solidFill>
+            <a:srgbClr val="FFFFFF"/>
+          </a:solidFill>
+          <a:ln w="9525">
+            <a:solidFill>
+              <a:srgbClr val="E4E1F1"/>
+            </a:solidFill>
+          </a:ln>
+          <a:effectLst>
+            <a:outerShdw blurRad="76200" dist="19050" dir="5400000" algn="bl" rotWithShape="0">
+              <a:srgbClr val="1A0F5C">
+                <a:alpha val="12000"/>
+              </a:srgbClr>
+            </a:outerShdw>
+          </a:effectLst>
+        </p:spPr>
+        <p:style>
+          <a:lnRef idx="1">
+            <a:schemeClr val="accent1"/>
+          </a:lnRef>
+          <a:fillRef idx="3">
+            <a:schemeClr val="accent1"/>
+          </a:fillRef>
+          <a:effectRef idx="2">
+            <a:schemeClr val="accent1"/>
+          </a:effectRef>
+          <a:fontRef idx="minor">
+            <a:schemeClr val="lt1"/>
+          </a:fontRef>
+        </p:style>
+        <p:txBody>
+          <a:bodyPr rtlCol="0" anchor="ctr" wrap="square"/>
+          <a:lstStyle/>
+          <a:p>
+            <a:pPr algn="ctr"/>
+          </a:p>
+        </p:txBody>
+      </p:sp>
+      <p:sp>
+        <p:nvSpPr>
+          <p:cNvPr id="28" name="Oval 27"/>
+          <p:cNvSpPr/>
+          <p:nvPr/>
+        </p:nvSpPr>
+        <p:spPr>
+          <a:xfrm>
+            <a:off x="9216923" y="2157984"/>
+            <a:ext cx="457200" cy="457200"/>
+          </a:xfrm>
+          <a:prstGeom prst="ellipse">
+            <a:avLst/>
+          </a:prstGeom>
+          <a:solidFill>
+            <a:srgbClr val="EEEAFB"/>
+          </a:solidFill>
+          <a:ln>
+            <a:noFill/>
+          </a:ln>
+          <a:effectLst/>
+        </p:spPr>
+        <p:style>
+          <a:lnRef idx="1">
+            <a:schemeClr val="accent1"/>
+          </a:lnRef>
+          <a:fillRef idx="3">
+            <a:schemeClr val="accent1"/>
+          </a:fillRef>
+          <a:effectRef idx="2">
+            <a:schemeClr val="accent1"/>
+          </a:effectRef>
+          <a:fontRef idx="minor">
+            <a:schemeClr val="lt1"/>
+          </a:fontRef>
+        </p:style>
+        <p:txBody>
+          <a:bodyPr rtlCol="0" anchor="ctr" wrap="square"/>
+          <a:lstStyle/>
+          <a:p>
+            <a:pPr algn="ctr"/>
+          </a:p>
+        </p:txBody>
+      </p:sp>
+      <p:pic>
+        <p:nvPicPr>
+          <p:cNvPr id="29" name="Picture 28" descr="list_637b34e7c72a.png"/>
+          <p:cNvPicPr>
+            <a:picLocks noChangeAspect="1"/>
+          </p:cNvPicPr>
+          <p:nvPr/>
+        </p:nvPicPr>
+        <p:blipFill>
+          <a:blip r:embed="rId4"/>
+          <a:stretch>
+            <a:fillRect/>
+          </a:stretch>
+        </p:blipFill>
+        <p:spPr>
+          <a:xfrm>
+            <a:off x="9326651" y="2267712"/>
+            <a:ext cx="237744" cy="237744"/>
+          </a:xfrm>
+          <a:prstGeom prst="rect">
+            <a:avLst/>
+          </a:prstGeom>
+        </p:spPr>
+      </p:pic>
+      <p:sp>
+        <p:nvSpPr>
+          <p:cNvPr id="30" name="TextBox 29"/>
+          <p:cNvSpPr txBox="1"/>
+          <p:nvPr/>
+        </p:nvSpPr>
+        <p:spPr>
+          <a:xfrm>
+            <a:off x="9216923" y="2724912"/>
+            <a:ext cx="2243251" cy="160401"/>
+          </a:xfrm>
+          <a:prstGeom prst="rect">
+            <a:avLst/>
+          </a:prstGeom>
+          <a:noFill/>
+        </p:spPr>
+        <p:txBody>
+          <a:bodyPr wrap="square" anchor="t" lIns="0" rIns="0" tIns="0" bIns="0">
+            <a:spAutoFit/>
+          </a:bodyPr>
+          <a:lstStyle/>
+          <a:p>
+            <a:pPr algn="l"/>
+            <a:r>
+              <a:rPr sz="750" b="1" i="0" spc="250">
+                <a:solidFill>
+                  <a:srgbClr val="5B3FD6"/>
+                </a:solidFill>
+                <a:latin typeface="Calibri"/>
+              </a:rPr>
+              <a:t>D</a:t>
+            </a:r>
+          </a:p>
+        </p:txBody>
+      </p:sp>
+      <p:sp>
+        <p:nvSpPr>
+          <p:cNvPr id="31" name="TextBox 30"/>
+          <p:cNvSpPr txBox="1"/>
+          <p:nvPr/>
+        </p:nvSpPr>
+        <p:spPr>
+          <a:xfrm>
+            <a:off x="9216923" y="2962656"/>
+            <a:ext cx="2243251" cy="267716"/>
+          </a:xfrm>
+          <a:prstGeom prst="rect">
+            <a:avLst/>
+          </a:prstGeom>
+          <a:noFill/>
+        </p:spPr>
+        <p:txBody>
+          <a:bodyPr wrap="square" anchor="t" lIns="0" rIns="0" tIns="0" bIns="0">
+            <a:spAutoFit/>
+          </a:bodyPr>
+          <a:lstStyle/>
+          <a:p>
+            <a:pPr algn="l"/>
+            <a:r>
+              <a:rPr sz="1400" b="1" i="0">
+                <a:solidFill>
+                  <a:srgbClr val="1A0F5C"/>
+                </a:solidFill>
+                <a:latin typeface="Calibri"/>
+              </a:rPr>
+              <a:t>Naive ignores growth</a:t>
+            </a:r>
+          </a:p>
+        </p:txBody>
+      </p:sp>
+      <p:sp>
+        <p:nvSpPr>
+          <p:cNvPr id="32" name="TextBox 31"/>
+          <p:cNvSpPr txBox="1"/>
+          <p:nvPr/>
+        </p:nvSpPr>
+        <p:spPr>
+          <a:xfrm>
+            <a:off x="9216923" y="3303524"/>
+            <a:ext cx="2243251" cy="218186"/>
+          </a:xfrm>
+          <a:prstGeom prst="rect">
+            <a:avLst/>
+          </a:prstGeom>
+          <a:noFill/>
+        </p:spPr>
+        <p:txBody>
+          <a:bodyPr wrap="square" anchor="t" lIns="0" rIns="0" tIns="0" bIns="0">
+            <a:spAutoFit/>
+          </a:bodyPr>
+          <a:lstStyle/>
+          <a:p>
+            <a:pPr algn="l"/>
+            <a:r>
+              <a:rPr sz="1100" b="0" i="0">
+                <a:solidFill>
+                  <a:srgbClr val="6B6690"/>
+                </a:solidFill>
+                <a:latin typeface="Calibri"/>
+              </a:rPr>
+              <a:t>It never adds the 4 percent.</a:t>
+            </a:r>
+          </a:p>
+        </p:txBody>
+      </p:sp>
+      <p:sp>
+        <p:nvSpPr>
+          <p:cNvPr id="33" name="TextBox 32"/>
           <p:cNvSpPr txBox="1"/>
           <p:nvPr/>
         </p:nvSpPr>
@@ -9218,7 +9591,7 @@
       </p:sp>
       <p:sp>
         <p:nvSpPr>
-          <p:cNvPr id="13" name="TextBox 12"/>
+          <p:cNvPr id="34" name="TextBox 33"/>
           <p:cNvSpPr txBox="1"/>
           <p:nvPr/>
         </p:nvSpPr>
@@ -9246,7 +9619,7 @@
                 </a:solidFill>
                 <a:latin typeface="Calibri"/>
               </a:rPr>
-              <a:t>S2  ·  3 / 15</a:t>
+              <a:t>S3  ·  3 / 14</a:t>
             </a:r>
           </a:p>
         </p:txBody>
@@ -9417,7 +9790,7 @@
                 </a:solidFill>
                 <a:latin typeface="Calibri"/>
               </a:rPr>
-              <a:t>WEEK 4  ·  DAY 5  ·  KALPA GLOBAL CAPABILITY CENTRE</a:t>
+              <a:t>WEEK 4  ·  FRIDAY  ·  FLIPKART, LUCKNOW  ·  FALLBACK</a:t>
             </a:r>
           </a:p>
         </p:txBody>
@@ -9452,7 +9825,7 @@
                 </a:solidFill>
                 <a:latin typeface="Georgia"/>
               </a:rPr>
-              <a:t>Why did naive jump from 14,923 to 37,050?</a:t>
+              <a:t>Answer: the origin week was a dip, 196,600</a:t>
             </a:r>
           </a:p>
         </p:txBody>
@@ -9487,42 +9860,137 @@
                 </a:solidFill>
                 <a:latin typeface="Calibri"/>
               </a:rPr>
-              <a:t>What, in the four-week test, made naive's average miss more than double?</a:t>
-            </a:r>
-          </a:p>
-        </p:txBody>
-      </p:sp>
-      <p:sp>
-        <p:nvSpPr>
-          <p:cNvPr id="9" name="Rounded Rectangle 8"/>
+              <a:t>How does one origin week set every naive miss?</a:t>
+            </a:r>
+          </a:p>
+        </p:txBody>
+      </p:sp>
+      <p:sp>
+        <p:nvSpPr>
+          <p:cNvPr id="9" name="TextBox 8"/>
+          <p:cNvSpPr txBox="1"/>
+          <p:nvPr/>
+        </p:nvSpPr>
+        <p:spPr>
+          <a:xfrm>
+            <a:off x="530352" y="1956816"/>
+            <a:ext cx="3527450" cy="698500"/>
+          </a:xfrm>
+          <a:prstGeom prst="rect">
+            <a:avLst/>
+          </a:prstGeom>
+          <a:noFill/>
+        </p:spPr>
+        <p:txBody>
+          <a:bodyPr wrap="square" anchor="t" lIns="0" rIns="0" tIns="0" bIns="0">
+            <a:spAutoFit/>
+          </a:bodyPr>
+          <a:lstStyle/>
+          <a:p>
+            <a:pPr algn="l"/>
+            <a:r>
+              <a:rPr sz="4400" b="0" i="0">
+                <a:solidFill>
+                  <a:srgbClr val="5B3FD6"/>
+                </a:solidFill>
+                <a:latin typeface="Georgia"/>
+              </a:rPr>
+              <a:t>196,600</a:t>
+            </a:r>
+          </a:p>
+        </p:txBody>
+      </p:sp>
+      <p:sp>
+        <p:nvSpPr>
+          <p:cNvPr id="10" name="TextBox 9"/>
+          <p:cNvSpPr txBox="1"/>
+          <p:nvPr/>
+        </p:nvSpPr>
+        <p:spPr>
+          <a:xfrm>
+            <a:off x="530352" y="2691892"/>
+            <a:ext cx="3527450" cy="168656"/>
+          </a:xfrm>
+          <a:prstGeom prst="rect">
+            <a:avLst/>
+          </a:prstGeom>
+          <a:noFill/>
+        </p:spPr>
+        <p:txBody>
+          <a:bodyPr wrap="square" anchor="t" lIns="0" rIns="0" tIns="0" bIns="0">
+            <a:spAutoFit/>
+          </a:bodyPr>
+          <a:lstStyle/>
+          <a:p>
+            <a:pPr algn="l"/>
+            <a:r>
+              <a:rPr sz="800" b="1" i="0" spc="250">
+                <a:solidFill>
+                  <a:srgbClr val="1A0F5C"/>
+                </a:solidFill>
+                <a:latin typeface="Calibri"/>
+              </a:rPr>
+              <a:t>THE WEEK OF 24 AUGUST 2026</a:t>
+            </a:r>
+          </a:p>
+        </p:txBody>
+      </p:sp>
+      <p:sp>
+        <p:nvSpPr>
+          <p:cNvPr id="11" name="TextBox 10"/>
+          <p:cNvSpPr txBox="1"/>
+          <p:nvPr/>
+        </p:nvSpPr>
+        <p:spPr>
+          <a:xfrm>
+            <a:off x="530352" y="2893060"/>
+            <a:ext cx="3527450" cy="193421"/>
+          </a:xfrm>
+          <a:prstGeom prst="rect">
+            <a:avLst/>
+          </a:prstGeom>
+          <a:noFill/>
+        </p:spPr>
+        <p:txBody>
+          <a:bodyPr wrap="square" anchor="t" lIns="0" rIns="0" tIns="0" bIns="0">
+            <a:spAutoFit/>
+          </a:bodyPr>
+          <a:lstStyle/>
+          <a:p>
+            <a:pPr algn="l"/>
+            <a:r>
+              <a:rPr sz="950" b="0" i="0">
+                <a:solidFill>
+                  <a:srgbClr val="6B6690"/>
+                </a:solidFill>
+                <a:latin typeface="Calibri"/>
+              </a:rPr>
+              <a:t>the origin naive repeats four times</a:t>
+            </a:r>
+          </a:p>
+        </p:txBody>
+      </p:sp>
+      <p:sp>
+        <p:nvSpPr>
+          <p:cNvPr id="12" name="Rectangle 11"/>
           <p:cNvSpPr/>
           <p:nvPr/>
         </p:nvSpPr>
         <p:spPr>
           <a:xfrm>
-            <a:off x="530352" y="1956816"/>
-            <a:ext cx="2645587" cy="2195576"/>
-          </a:xfrm>
-          <a:prstGeom prst="roundRect">
-            <a:avLst>
-              <a:gd name="adj" fmla="val 5000"/>
-            </a:avLst>
+            <a:off x="530352" y="3145536"/>
+            <a:ext cx="3527450" cy="10972"/>
+          </a:xfrm>
+          <a:prstGeom prst="rect">
+            <a:avLst/>
           </a:prstGeom>
           <a:solidFill>
-            <a:srgbClr val="FFFFFF"/>
+            <a:srgbClr val="E4E1F1"/>
           </a:solidFill>
-          <a:ln w="9525">
-            <a:solidFill>
-              <a:srgbClr val="E4E1F1"/>
-            </a:solidFill>
+          <a:ln>
+            <a:noFill/>
           </a:ln>
-          <a:effectLst>
-            <a:outerShdw blurRad="76200" dist="19050" dir="5400000" algn="bl" rotWithShape="0">
-              <a:srgbClr val="1A0F5C">
-                <a:alpha val="12000"/>
-              </a:srgbClr>
-            </a:outerShdw>
-          </a:effectLst>
+          <a:effectLst/>
         </p:spPr>
         <p:style>
           <a:lnRef idx="1">
@@ -9548,20 +10016,125 @@
       </p:sp>
       <p:sp>
         <p:nvSpPr>
-          <p:cNvPr id="10" name="Oval 9"/>
+          <p:cNvPr id="13" name="TextBox 12"/>
+          <p:cNvSpPr txBox="1"/>
+          <p:nvPr/>
+        </p:nvSpPr>
+        <p:spPr>
+          <a:xfrm>
+            <a:off x="4332122" y="1956816"/>
+            <a:ext cx="3527450" cy="698500"/>
+          </a:xfrm>
+          <a:prstGeom prst="rect">
+            <a:avLst/>
+          </a:prstGeom>
+          <a:noFill/>
+        </p:spPr>
+        <p:txBody>
+          <a:bodyPr wrap="square" anchor="t" lIns="0" rIns="0" tIns="0" bIns="0">
+            <a:spAutoFit/>
+          </a:bodyPr>
+          <a:lstStyle/>
+          <a:p>
+            <a:pPr algn="l"/>
+            <a:r>
+              <a:rPr sz="4400" b="0" i="0">
+                <a:solidFill>
+                  <a:srgbClr val="5B3FD6"/>
+                </a:solidFill>
+                <a:latin typeface="Georgia"/>
+              </a:rPr>
+              <a:t>41,800</a:t>
+            </a:r>
+          </a:p>
+        </p:txBody>
+      </p:sp>
+      <p:sp>
+        <p:nvSpPr>
+          <p:cNvPr id="14" name="TextBox 13"/>
+          <p:cNvSpPr txBox="1"/>
+          <p:nvPr/>
+        </p:nvSpPr>
+        <p:spPr>
+          <a:xfrm>
+            <a:off x="4332122" y="2691892"/>
+            <a:ext cx="3527450" cy="168656"/>
+          </a:xfrm>
+          <a:prstGeom prst="rect">
+            <a:avLst/>
+          </a:prstGeom>
+          <a:noFill/>
+        </p:spPr>
+        <p:txBody>
+          <a:bodyPr wrap="square" anchor="t" lIns="0" rIns="0" tIns="0" bIns="0">
+            <a:spAutoFit/>
+          </a:bodyPr>
+          <a:lstStyle/>
+          <a:p>
+            <a:pPr algn="l"/>
+            <a:r>
+              <a:rPr sz="800" b="1" i="0" spc="250">
+                <a:solidFill>
+                  <a:srgbClr val="1A0F5C"/>
+                </a:solidFill>
+                <a:latin typeface="Calibri"/>
+              </a:rPr>
+              <a:t>ITS FIRST MISS, TOO LOW</a:t>
+            </a:r>
+          </a:p>
+        </p:txBody>
+      </p:sp>
+      <p:sp>
+        <p:nvSpPr>
+          <p:cNvPr id="15" name="TextBox 14"/>
+          <p:cNvSpPr txBox="1"/>
+          <p:nvPr/>
+        </p:nvSpPr>
+        <p:spPr>
+          <a:xfrm>
+            <a:off x="4332122" y="2893060"/>
+            <a:ext cx="3527450" cy="193421"/>
+          </a:xfrm>
+          <a:prstGeom prst="rect">
+            <a:avLst/>
+          </a:prstGeom>
+          <a:noFill/>
+        </p:spPr>
+        <p:txBody>
+          <a:bodyPr wrap="square" anchor="t" lIns="0" rIns="0" tIns="0" bIns="0">
+            <a:spAutoFit/>
+          </a:bodyPr>
+          <a:lstStyle/>
+          <a:p>
+            <a:pPr algn="l"/>
+            <a:r>
+              <a:rPr sz="950" b="0" i="0">
+                <a:solidFill>
+                  <a:srgbClr val="6B6690"/>
+                </a:solidFill>
+                <a:latin typeface="Calibri"/>
+              </a:rPr>
+              <a:t>then 37,100, 33,700 and 35,600, all too low</a:t>
+            </a:r>
+          </a:p>
+        </p:txBody>
+      </p:sp>
+      <p:sp>
+        <p:nvSpPr>
+          <p:cNvPr id="16" name="Rectangle 15"/>
           <p:cNvSpPr/>
           <p:nvPr/>
         </p:nvSpPr>
         <p:spPr>
           <a:xfrm>
-            <a:off x="731519" y="2157984"/>
-            <a:ext cx="457200" cy="457200"/>
-          </a:xfrm>
-          <a:prstGeom prst="ellipse">
+            <a:off x="4332122" y="3145536"/>
+            <a:ext cx="3527450" cy="10972"/>
+          </a:xfrm>
+          <a:prstGeom prst="rect">
             <a:avLst/>
           </a:prstGeom>
           <a:solidFill>
-            <a:srgbClr val="EEEAFB"/>
+            <a:srgbClr val="E4E1F1"/>
           </a:solidFill>
           <a:ln>
             <a:noFill/>
@@ -9590,40 +10163,16 @@
           </a:p>
         </p:txBody>
       </p:sp>
-      <p:pic>
-        <p:nvPicPr>
-          <p:cNvPr id="11" name="Picture 10" descr="list_637b34e7c72a.png"/>
-          <p:cNvPicPr>
-            <a:picLocks noChangeAspect="1"/>
-          </p:cNvPicPr>
-          <p:nvPr/>
-        </p:nvPicPr>
-        <p:blipFill>
-          <a:blip r:embed="rId4"/>
-          <a:stretch>
-            <a:fillRect/>
-          </a:stretch>
-        </p:blipFill>
-        <p:spPr>
-          <a:xfrm>
-            <a:off x="841247" y="2267712"/>
-            <a:ext cx="237744" cy="237744"/>
-          </a:xfrm>
-          <a:prstGeom prst="rect">
-            <a:avLst/>
-          </a:prstGeom>
-        </p:spPr>
-      </p:pic>
-      <p:sp>
-        <p:nvSpPr>
-          <p:cNvPr id="12" name="TextBox 11"/>
-          <p:cNvSpPr txBox="1"/>
-          <p:nvPr/>
-        </p:nvSpPr>
-        <p:spPr>
-          <a:xfrm>
-            <a:off x="731519" y="2724912"/>
-            <a:ext cx="2243251" cy="160401"/>
+      <p:sp>
+        <p:nvSpPr>
+          <p:cNvPr id="17" name="TextBox 16"/>
+          <p:cNvSpPr txBox="1"/>
+          <p:nvPr/>
+        </p:nvSpPr>
+        <p:spPr>
+          <a:xfrm>
+            <a:off x="8133892" y="1956816"/>
+            <a:ext cx="3527450" cy="698500"/>
           </a:xfrm>
           <a:prstGeom prst="rect">
             <a:avLst/>
@@ -9638,27 +10187,62 @@
           <a:p>
             <a:pPr algn="l"/>
             <a:r>
-              <a:rPr sz="750" b="1" i="0" spc="250">
+              <a:rPr sz="4400" b="0" i="0">
                 <a:solidFill>
                   <a:srgbClr val="5B3FD6"/>
                 </a:solidFill>
+                <a:latin typeface="Georgia"/>
+              </a:rPr>
+              <a:t>37,050</a:t>
+            </a:r>
+          </a:p>
+        </p:txBody>
+      </p:sp>
+      <p:sp>
+        <p:nvSpPr>
+          <p:cNvPr id="18" name="TextBox 17"/>
+          <p:cNvSpPr txBox="1"/>
+          <p:nvPr/>
+        </p:nvSpPr>
+        <p:spPr>
+          <a:xfrm>
+            <a:off x="8133892" y="2691892"/>
+            <a:ext cx="3527450" cy="168656"/>
+          </a:xfrm>
+          <a:prstGeom prst="rect">
+            <a:avLst/>
+          </a:prstGeom>
+          <a:noFill/>
+        </p:spPr>
+        <p:txBody>
+          <a:bodyPr wrap="square" anchor="t" lIns="0" rIns="0" tIns="0" bIns="0">
+            <a:spAutoFit/>
+          </a:bodyPr>
+          <a:lstStyle/>
+          <a:p>
+            <a:pPr algn="l"/>
+            <a:r>
+              <a:rPr sz="800" b="1" i="0" spc="250">
+                <a:solidFill>
+                  <a:srgbClr val="1A0F5C"/>
+                </a:solidFill>
                 <a:latin typeface="Calibri"/>
               </a:rPr>
-              <a:t>A</a:t>
-            </a:r>
-          </a:p>
-        </p:txBody>
-      </p:sp>
-      <p:sp>
-        <p:nvSpPr>
-          <p:cNvPr id="13" name="TextBox 12"/>
-          <p:cNvSpPr txBox="1"/>
-          <p:nvPr/>
-        </p:nvSpPr>
-        <p:spPr>
-          <a:xfrm>
-            <a:off x="731519" y="2962656"/>
-            <a:ext cx="2243251" cy="498856"/>
+              <a:t>NAIVE'S MAE ON FOUR WEEKS</a:t>
+            </a:r>
+          </a:p>
+        </p:txBody>
+      </p:sp>
+      <p:sp>
+        <p:nvSpPr>
+          <p:cNvPr id="19" name="TextBox 18"/>
+          <p:cNvSpPr txBox="1"/>
+          <p:nvPr/>
+        </p:nvSpPr>
+        <p:spPr>
+          <a:xfrm>
+            <a:off x="8133892" y="2893060"/>
+            <a:ext cx="3527450" cy="193421"/>
           </a:xfrm>
           <a:prstGeom prst="rect">
             <a:avLst/>
@@ -9673,83 +10257,38 @@
           <a:p>
             <a:pPr algn="l"/>
             <a:r>
-              <a:rPr sz="1400" b="1" i="0">
-                <a:solidFill>
-                  <a:srgbClr val="1A0F5C"/>
+              <a:rPr sz="950" b="0" i="0">
+                <a:solidFill>
+                  <a:srgbClr val="6B6690"/>
                 </a:solidFill>
                 <a:latin typeface="Calibri"/>
               </a:rPr>
-              <a:t>The last four weeks are harder</a:t>
-            </a:r>
-          </a:p>
-        </p:txBody>
-      </p:sp>
-      <p:sp>
-        <p:nvSpPr>
-          <p:cNvPr id="14" name="TextBox 13"/>
-          <p:cNvSpPr txBox="1"/>
-          <p:nvPr/>
-        </p:nvSpPr>
-        <p:spPr>
-          <a:xfrm>
-            <a:off x="731519" y="3534664"/>
-            <a:ext cx="2243251" cy="218186"/>
-          </a:xfrm>
-          <a:prstGeom prst="rect">
-            <a:avLst/>
-          </a:prstGeom>
-          <a:noFill/>
-        </p:spPr>
-        <p:txBody>
-          <a:bodyPr wrap="square" anchor="t" lIns="0" rIns="0" tIns="0" bIns="0">
-            <a:spAutoFit/>
-          </a:bodyPr>
-          <a:lstStyle/>
-          <a:p>
-            <a:pPr algn="l"/>
-            <a:r>
-              <a:rPr sz="1100" b="0" i="0">
-                <a:solidFill>
-                  <a:srgbClr val="6B6690"/>
-                </a:solidFill>
-                <a:latin typeface="Calibri"/>
-              </a:rPr>
-              <a:t>September ships more than July.</a:t>
-            </a:r>
-          </a:p>
-        </p:txBody>
-      </p:sp>
-      <p:sp>
-        <p:nvSpPr>
-          <p:cNvPr id="15" name="Rounded Rectangle 14"/>
+              <a:t>against 14,923 on thirteen</a:t>
+            </a:r>
+          </a:p>
+        </p:txBody>
+      </p:sp>
+      <p:sp>
+        <p:nvSpPr>
+          <p:cNvPr id="20" name="Rectangle 19"/>
           <p:cNvSpPr/>
           <p:nvPr/>
         </p:nvSpPr>
         <p:spPr>
           <a:xfrm>
-            <a:off x="3358819" y="1956816"/>
-            <a:ext cx="2645587" cy="2195576"/>
-          </a:xfrm>
-          <a:prstGeom prst="roundRect">
-            <a:avLst>
-              <a:gd name="adj" fmla="val 5000"/>
-            </a:avLst>
+            <a:off x="8133892" y="3145536"/>
+            <a:ext cx="3527450" cy="10972"/>
+          </a:xfrm>
+          <a:prstGeom prst="rect">
+            <a:avLst/>
           </a:prstGeom>
           <a:solidFill>
-            <a:srgbClr val="FFFFFF"/>
+            <a:srgbClr val="E4E1F1"/>
           </a:solidFill>
-          <a:ln w="9525">
-            <a:solidFill>
-              <a:srgbClr val="E4E1F1"/>
-            </a:solidFill>
+          <a:ln>
+            <a:noFill/>
           </a:ln>
-          <a:effectLst>
-            <a:outerShdw blurRad="76200" dist="19050" dir="5400000" algn="bl" rotWithShape="0">
-              <a:srgbClr val="1A0F5C">
-                <a:alpha val="12000"/>
-              </a:srgbClr>
-            </a:outerShdw>
-          </a:effectLst>
+          <a:effectLst/>
         </p:spPr>
         <p:style>
           <a:lnRef idx="1">
@@ -9775,82 +10314,14 @@
       </p:sp>
       <p:sp>
         <p:nvSpPr>
-          <p:cNvPr id="16" name="Oval 15"/>
-          <p:cNvSpPr/>
-          <p:nvPr/>
-        </p:nvSpPr>
-        <p:spPr>
-          <a:xfrm>
-            <a:off x="3559987" y="2157984"/>
-            <a:ext cx="457200" cy="457200"/>
-          </a:xfrm>
-          <a:prstGeom prst="ellipse">
-            <a:avLst/>
-          </a:prstGeom>
-          <a:solidFill>
-            <a:srgbClr val="EEEAFB"/>
-          </a:solidFill>
-          <a:ln>
-            <a:noFill/>
-          </a:ln>
-          <a:effectLst/>
-        </p:spPr>
-        <p:style>
-          <a:lnRef idx="1">
-            <a:schemeClr val="accent1"/>
-          </a:lnRef>
-          <a:fillRef idx="3">
-            <a:schemeClr val="accent1"/>
-          </a:fillRef>
-          <a:effectRef idx="2">
-            <a:schemeClr val="accent1"/>
-          </a:effectRef>
-          <a:fontRef idx="minor">
-            <a:schemeClr val="lt1"/>
-          </a:fontRef>
-        </p:style>
-        <p:txBody>
-          <a:bodyPr rtlCol="0" anchor="ctr" wrap="square"/>
-          <a:lstStyle/>
-          <a:p>
-            <a:pPr algn="ctr"/>
-          </a:p>
-        </p:txBody>
-      </p:sp>
-      <p:pic>
-        <p:nvPicPr>
-          <p:cNvPr id="17" name="Picture 16" descr="list_637b34e7c72a.png"/>
-          <p:cNvPicPr>
-            <a:picLocks noChangeAspect="1"/>
-          </p:cNvPicPr>
-          <p:nvPr/>
-        </p:nvPicPr>
-        <p:blipFill>
-          <a:blip r:embed="rId4"/>
-          <a:stretch>
-            <a:fillRect/>
-          </a:stretch>
-        </p:blipFill>
-        <p:spPr>
-          <a:xfrm>
-            <a:off x="3669715" y="2267712"/>
-            <a:ext cx="237744" cy="237744"/>
-          </a:xfrm>
-          <a:prstGeom prst="rect">
-            <a:avLst/>
-          </a:prstGeom>
-        </p:spPr>
-      </p:pic>
-      <p:sp>
-        <p:nvSpPr>
-          <p:cNvPr id="18" name="TextBox 17"/>
-          <p:cNvSpPr txBox="1"/>
-          <p:nvPr/>
-        </p:nvSpPr>
-        <p:spPr>
-          <a:xfrm>
-            <a:off x="3559987" y="2724912"/>
-            <a:ext cx="2243251" cy="160401"/>
+          <p:cNvPr id="21" name="TextBox 20"/>
+          <p:cNvSpPr txBox="1"/>
+          <p:nvPr/>
+        </p:nvSpPr>
+        <p:spPr>
+          <a:xfrm>
+            <a:off x="530352" y="3419856"/>
+            <a:ext cx="11130991" cy="1048512"/>
           </a:xfrm>
           <a:prstGeom prst="rect">
             <a:avLst/>
@@ -9863,546 +10334,26 @@
           </a:bodyPr>
           <a:lstStyle/>
           <a:p>
-            <a:pPr algn="l"/>
-            <a:r>
-              <a:rPr sz="750" b="1" i="0" spc="250">
-                <a:solidFill>
-                  <a:srgbClr val="5B3FD6"/>
+            <a:pPr>
+              <a:spcAft>
+                <a:spcPts val="800"/>
+              </a:spcAft>
+            </a:pPr>
+            <a:r>
+              <a:rPr sz="1600" b="0" i="0">
+                <a:solidFill>
+                  <a:srgbClr val="1A1440"/>
                 </a:solidFill>
                 <a:latin typeface="Calibri"/>
               </a:rPr>
-              <a:t>B</a:t>
-            </a:r>
-          </a:p>
-        </p:txBody>
-      </p:sp>
-      <p:sp>
-        <p:nvSpPr>
-          <p:cNvPr id="19" name="TextBox 18"/>
-          <p:cNvSpPr txBox="1"/>
-          <p:nvPr/>
-        </p:nvSpPr>
-        <p:spPr>
-          <a:xfrm>
-            <a:off x="3559987" y="2962656"/>
-            <a:ext cx="2243251" cy="498856"/>
-          </a:xfrm>
-          <a:prstGeom prst="rect">
-            <a:avLst/>
-          </a:prstGeom>
-          <a:noFill/>
-        </p:spPr>
-        <p:txBody>
-          <a:bodyPr wrap="square" anchor="t" lIns="0" rIns="0" tIns="0" bIns="0">
-            <a:spAutoFit/>
-          </a:bodyPr>
-          <a:lstStyle/>
-          <a:p>
-            <a:pPr algn="l"/>
-            <a:r>
-              <a:rPr sz="1400" b="1" i="0">
-                <a:solidFill>
-                  <a:srgbClr val="1A0F5C"/>
-                </a:solidFill>
-                <a:latin typeface="Calibri"/>
-              </a:rPr>
-              <a:t>The origin week was a dip</a:t>
-            </a:r>
-          </a:p>
-        </p:txBody>
-      </p:sp>
-      <p:sp>
-        <p:nvSpPr>
-          <p:cNvPr id="20" name="TextBox 19"/>
-          <p:cNvSpPr txBox="1"/>
-          <p:nvPr/>
-        </p:nvSpPr>
-        <p:spPr>
-          <a:xfrm>
-            <a:off x="3559987" y="3534664"/>
-            <a:ext cx="2243251" cy="399796"/>
-          </a:xfrm>
-          <a:prstGeom prst="rect">
-            <a:avLst/>
-          </a:prstGeom>
-          <a:noFill/>
-        </p:spPr>
-        <p:txBody>
-          <a:bodyPr wrap="square" anchor="t" lIns="0" rIns="0" tIns="0" bIns="0">
-            <a:spAutoFit/>
-          </a:bodyPr>
-          <a:lstStyle/>
-          <a:p>
-            <a:pPr algn="l"/>
-            <a:r>
-              <a:rPr sz="1100" b="0" i="0">
-                <a:solidFill>
-                  <a:srgbClr val="6B6690"/>
-                </a:solidFill>
-                <a:latin typeface="Calibri"/>
-              </a:rPr>
-              <a:t>The week of 24 August shipped 196,600.</a:t>
-            </a:r>
-          </a:p>
-        </p:txBody>
-      </p:sp>
-      <p:sp>
-        <p:nvSpPr>
-          <p:cNvPr id="21" name="Rounded Rectangle 20"/>
-          <p:cNvSpPr/>
-          <p:nvPr/>
-        </p:nvSpPr>
-        <p:spPr>
-          <a:xfrm>
-            <a:off x="6187287" y="1956816"/>
-            <a:ext cx="2645587" cy="2195576"/>
-          </a:xfrm>
-          <a:prstGeom prst="roundRect">
-            <a:avLst>
-              <a:gd name="adj" fmla="val 5000"/>
-            </a:avLst>
-          </a:prstGeom>
-          <a:solidFill>
-            <a:srgbClr val="FFFFFF"/>
-          </a:solidFill>
-          <a:ln w="9525">
-            <a:solidFill>
-              <a:srgbClr val="E4E1F1"/>
-            </a:solidFill>
-          </a:ln>
-          <a:effectLst>
-            <a:outerShdw blurRad="76200" dist="19050" dir="5400000" algn="bl" rotWithShape="0">
-              <a:srgbClr val="1A0F5C">
-                <a:alpha val="12000"/>
-              </a:srgbClr>
-            </a:outerShdw>
-          </a:effectLst>
-        </p:spPr>
-        <p:style>
-          <a:lnRef idx="1">
-            <a:schemeClr val="accent1"/>
-          </a:lnRef>
-          <a:fillRef idx="3">
-            <a:schemeClr val="accent1"/>
-          </a:fillRef>
-          <a:effectRef idx="2">
-            <a:schemeClr val="accent1"/>
-          </a:effectRef>
-          <a:fontRef idx="minor">
-            <a:schemeClr val="lt1"/>
-          </a:fontRef>
-        </p:style>
-        <p:txBody>
-          <a:bodyPr rtlCol="0" anchor="ctr" wrap="square"/>
-          <a:lstStyle/>
-          <a:p>
-            <a:pPr algn="ctr"/>
-          </a:p>
-        </p:txBody>
-      </p:sp>
-      <p:sp>
-        <p:nvSpPr>
-          <p:cNvPr id="22" name="Oval 21"/>
-          <p:cNvSpPr/>
-          <p:nvPr/>
-        </p:nvSpPr>
-        <p:spPr>
-          <a:xfrm>
-            <a:off x="6388455" y="2157984"/>
-            <a:ext cx="457200" cy="457200"/>
-          </a:xfrm>
-          <a:prstGeom prst="ellipse">
-            <a:avLst/>
-          </a:prstGeom>
-          <a:solidFill>
-            <a:srgbClr val="EEEAFB"/>
-          </a:solidFill>
-          <a:ln>
-            <a:noFill/>
-          </a:ln>
-          <a:effectLst/>
-        </p:spPr>
-        <p:style>
-          <a:lnRef idx="1">
-            <a:schemeClr val="accent1"/>
-          </a:lnRef>
-          <a:fillRef idx="3">
-            <a:schemeClr val="accent1"/>
-          </a:fillRef>
-          <a:effectRef idx="2">
-            <a:schemeClr val="accent1"/>
-          </a:effectRef>
-          <a:fontRef idx="minor">
-            <a:schemeClr val="lt1"/>
-          </a:fontRef>
-        </p:style>
-        <p:txBody>
-          <a:bodyPr rtlCol="0" anchor="ctr" wrap="square"/>
-          <a:lstStyle/>
-          <a:p>
-            <a:pPr algn="ctr"/>
-          </a:p>
-        </p:txBody>
-      </p:sp>
-      <p:pic>
-        <p:nvPicPr>
-          <p:cNvPr id="23" name="Picture 22" descr="list_637b34e7c72a.png"/>
-          <p:cNvPicPr>
-            <a:picLocks noChangeAspect="1"/>
-          </p:cNvPicPr>
-          <p:nvPr/>
-        </p:nvPicPr>
-        <p:blipFill>
-          <a:blip r:embed="rId4"/>
-          <a:stretch>
-            <a:fillRect/>
-          </a:stretch>
-        </p:blipFill>
-        <p:spPr>
-          <a:xfrm>
-            <a:off x="6498183" y="2267712"/>
-            <a:ext cx="237744" cy="237744"/>
-          </a:xfrm>
-          <a:prstGeom prst="rect">
-            <a:avLst/>
-          </a:prstGeom>
-        </p:spPr>
-      </p:pic>
-      <p:sp>
-        <p:nvSpPr>
-          <p:cNvPr id="24" name="TextBox 23"/>
-          <p:cNvSpPr txBox="1"/>
-          <p:nvPr/>
-        </p:nvSpPr>
-        <p:spPr>
-          <a:xfrm>
-            <a:off x="6388455" y="2724912"/>
-            <a:ext cx="2243251" cy="160401"/>
-          </a:xfrm>
-          <a:prstGeom prst="rect">
-            <a:avLst/>
-          </a:prstGeom>
-          <a:noFill/>
-        </p:spPr>
-        <p:txBody>
-          <a:bodyPr wrap="square" anchor="t" lIns="0" rIns="0" tIns="0" bIns="0">
-            <a:spAutoFit/>
-          </a:bodyPr>
-          <a:lstStyle/>
-          <a:p>
-            <a:pPr algn="l"/>
-            <a:r>
-              <a:rPr sz="750" b="1" i="0" spc="250">
-                <a:solidFill>
-                  <a:srgbClr val="5B3FD6"/>
-                </a:solidFill>
-                <a:latin typeface="Calibri"/>
-              </a:rPr>
-              <a:t>C</a:t>
-            </a:r>
-          </a:p>
-        </p:txBody>
-      </p:sp>
-      <p:sp>
-        <p:nvSpPr>
-          <p:cNvPr id="25" name="TextBox 24"/>
-          <p:cNvSpPr txBox="1"/>
-          <p:nvPr/>
-        </p:nvSpPr>
-        <p:spPr>
-          <a:xfrm>
-            <a:off x="6388455" y="2962656"/>
-            <a:ext cx="2243251" cy="498856"/>
-          </a:xfrm>
-          <a:prstGeom prst="rect">
-            <a:avLst/>
-          </a:prstGeom>
-          <a:noFill/>
-        </p:spPr>
-        <p:txBody>
-          <a:bodyPr wrap="square" anchor="t" lIns="0" rIns="0" tIns="0" bIns="0">
-            <a:spAutoFit/>
-          </a:bodyPr>
-          <a:lstStyle/>
-          <a:p>
-            <a:pPr algn="l"/>
-            <a:r>
-              <a:rPr sz="1400" b="1" i="0">
-                <a:solidFill>
-                  <a:srgbClr val="1A0F5C"/>
-                </a:solidFill>
-                <a:latin typeface="Calibri"/>
-              </a:rPr>
-              <a:t>Four weeks are too few to average</a:t>
-            </a:r>
-          </a:p>
-        </p:txBody>
-      </p:sp>
-      <p:sp>
-        <p:nvSpPr>
-          <p:cNvPr id="26" name="TextBox 25"/>
-          <p:cNvSpPr txBox="1"/>
-          <p:nvPr/>
-        </p:nvSpPr>
-        <p:spPr>
-          <a:xfrm>
-            <a:off x="6388455" y="3534664"/>
-            <a:ext cx="2243251" cy="218186"/>
-          </a:xfrm>
-          <a:prstGeom prst="rect">
-            <a:avLst/>
-          </a:prstGeom>
-          <a:noFill/>
-        </p:spPr>
-        <p:txBody>
-          <a:bodyPr wrap="square" anchor="t" lIns="0" rIns="0" tIns="0" bIns="0">
-            <a:spAutoFit/>
-          </a:bodyPr>
-          <a:lstStyle/>
-          <a:p>
-            <a:pPr algn="l"/>
-            <a:r>
-              <a:rPr sz="1100" b="0" i="0">
-                <a:solidFill>
-                  <a:srgbClr val="6B6690"/>
-                </a:solidFill>
-                <a:latin typeface="Calibri"/>
-              </a:rPr>
-              <a:t>Any one miss moves the mean.</a:t>
-            </a:r>
-          </a:p>
-        </p:txBody>
-      </p:sp>
-      <p:sp>
-        <p:nvSpPr>
-          <p:cNvPr id="27" name="Rounded Rectangle 26"/>
-          <p:cNvSpPr/>
-          <p:nvPr/>
-        </p:nvSpPr>
-        <p:spPr>
-          <a:xfrm>
-            <a:off x="9015755" y="1956816"/>
-            <a:ext cx="2645587" cy="2195576"/>
-          </a:xfrm>
-          <a:prstGeom prst="roundRect">
-            <a:avLst>
-              <a:gd name="adj" fmla="val 5000"/>
-            </a:avLst>
-          </a:prstGeom>
-          <a:solidFill>
-            <a:srgbClr val="FFFFFF"/>
-          </a:solidFill>
-          <a:ln w="9525">
-            <a:solidFill>
-              <a:srgbClr val="E4E1F1"/>
-            </a:solidFill>
-          </a:ln>
-          <a:effectLst>
-            <a:outerShdw blurRad="76200" dist="19050" dir="5400000" algn="bl" rotWithShape="0">
-              <a:srgbClr val="1A0F5C">
-                <a:alpha val="12000"/>
-              </a:srgbClr>
-            </a:outerShdw>
-          </a:effectLst>
-        </p:spPr>
-        <p:style>
-          <a:lnRef idx="1">
-            <a:schemeClr val="accent1"/>
-          </a:lnRef>
-          <a:fillRef idx="3">
-            <a:schemeClr val="accent1"/>
-          </a:fillRef>
-          <a:effectRef idx="2">
-            <a:schemeClr val="accent1"/>
-          </a:effectRef>
-          <a:fontRef idx="minor">
-            <a:schemeClr val="lt1"/>
-          </a:fontRef>
-        </p:style>
-        <p:txBody>
-          <a:bodyPr rtlCol="0" anchor="ctr" wrap="square"/>
-          <a:lstStyle/>
-          <a:p>
-            <a:pPr algn="ctr"/>
-          </a:p>
-        </p:txBody>
-      </p:sp>
-      <p:sp>
-        <p:nvSpPr>
-          <p:cNvPr id="28" name="Oval 27"/>
-          <p:cNvSpPr/>
-          <p:nvPr/>
-        </p:nvSpPr>
-        <p:spPr>
-          <a:xfrm>
-            <a:off x="9216923" y="2157984"/>
-            <a:ext cx="457200" cy="457200"/>
-          </a:xfrm>
-          <a:prstGeom prst="ellipse">
-            <a:avLst/>
-          </a:prstGeom>
-          <a:solidFill>
-            <a:srgbClr val="EEEAFB"/>
-          </a:solidFill>
-          <a:ln>
-            <a:noFill/>
-          </a:ln>
-          <a:effectLst/>
-        </p:spPr>
-        <p:style>
-          <a:lnRef idx="1">
-            <a:schemeClr val="accent1"/>
-          </a:lnRef>
-          <a:fillRef idx="3">
-            <a:schemeClr val="accent1"/>
-          </a:fillRef>
-          <a:effectRef idx="2">
-            <a:schemeClr val="accent1"/>
-          </a:effectRef>
-          <a:fontRef idx="minor">
-            <a:schemeClr val="lt1"/>
-          </a:fontRef>
-        </p:style>
-        <p:txBody>
-          <a:bodyPr rtlCol="0" anchor="ctr" wrap="square"/>
-          <a:lstStyle/>
-          <a:p>
-            <a:pPr algn="ctr"/>
-          </a:p>
-        </p:txBody>
-      </p:sp>
-      <p:pic>
-        <p:nvPicPr>
-          <p:cNvPr id="29" name="Picture 28" descr="list_637b34e7c72a.png"/>
-          <p:cNvPicPr>
-            <a:picLocks noChangeAspect="1"/>
-          </p:cNvPicPr>
-          <p:nvPr/>
-        </p:nvPicPr>
-        <p:blipFill>
-          <a:blip r:embed="rId4"/>
-          <a:stretch>
-            <a:fillRect/>
-          </a:stretch>
-        </p:blipFill>
-        <p:spPr>
-          <a:xfrm>
-            <a:off x="9326651" y="2267712"/>
-            <a:ext cx="237744" cy="237744"/>
-          </a:xfrm>
-          <a:prstGeom prst="rect">
-            <a:avLst/>
-          </a:prstGeom>
-        </p:spPr>
-      </p:pic>
-      <p:sp>
-        <p:nvSpPr>
-          <p:cNvPr id="30" name="TextBox 29"/>
-          <p:cNvSpPr txBox="1"/>
-          <p:nvPr/>
-        </p:nvSpPr>
-        <p:spPr>
-          <a:xfrm>
-            <a:off x="9216923" y="2724912"/>
-            <a:ext cx="2243251" cy="160401"/>
-          </a:xfrm>
-          <a:prstGeom prst="rect">
-            <a:avLst/>
-          </a:prstGeom>
-          <a:noFill/>
-        </p:spPr>
-        <p:txBody>
-          <a:bodyPr wrap="square" anchor="t" lIns="0" rIns="0" tIns="0" bIns="0">
-            <a:spAutoFit/>
-          </a:bodyPr>
-          <a:lstStyle/>
-          <a:p>
-            <a:pPr algn="l"/>
-            <a:r>
-              <a:rPr sz="750" b="1" i="0" spc="250">
-                <a:solidFill>
-                  <a:srgbClr val="5B3FD6"/>
-                </a:solidFill>
-                <a:latin typeface="Calibri"/>
-              </a:rPr>
-              <a:t>D</a:t>
-            </a:r>
-          </a:p>
-        </p:txBody>
-      </p:sp>
-      <p:sp>
-        <p:nvSpPr>
-          <p:cNvPr id="31" name="TextBox 30"/>
-          <p:cNvSpPr txBox="1"/>
-          <p:nvPr/>
-        </p:nvSpPr>
-        <p:spPr>
-          <a:xfrm>
-            <a:off x="9216923" y="2962656"/>
-            <a:ext cx="2243251" cy="267716"/>
-          </a:xfrm>
-          <a:prstGeom prst="rect">
-            <a:avLst/>
-          </a:prstGeom>
-          <a:noFill/>
-        </p:spPr>
-        <p:txBody>
-          <a:bodyPr wrap="square" anchor="t" lIns="0" rIns="0" tIns="0" bIns="0">
-            <a:spAutoFit/>
-          </a:bodyPr>
-          <a:lstStyle/>
-          <a:p>
-            <a:pPr algn="l"/>
-            <a:r>
-              <a:rPr sz="1400" b="1" i="0">
-                <a:solidFill>
-                  <a:srgbClr val="1A0F5C"/>
-                </a:solidFill>
-                <a:latin typeface="Calibri"/>
-              </a:rPr>
-              <a:t>Naive ignores growth</a:t>
-            </a:r>
-          </a:p>
-        </p:txBody>
-      </p:sp>
-      <p:sp>
-        <p:nvSpPr>
-          <p:cNvPr id="32" name="TextBox 31"/>
-          <p:cNvSpPr txBox="1"/>
-          <p:nvPr/>
-        </p:nvSpPr>
-        <p:spPr>
-          <a:xfrm>
-            <a:off x="9216923" y="3303524"/>
-            <a:ext cx="2243251" cy="218186"/>
-          </a:xfrm>
-          <a:prstGeom prst="rect">
-            <a:avLst/>
-          </a:prstGeom>
-          <a:noFill/>
-        </p:spPr>
-        <p:txBody>
-          <a:bodyPr wrap="square" anchor="t" lIns="0" rIns="0" tIns="0" bIns="0">
-            <a:spAutoFit/>
-          </a:bodyPr>
-          <a:lstStyle/>
-          <a:p>
-            <a:pPr algn="l"/>
-            <a:r>
-              <a:rPr sz="1100" b="0" i="0">
-                <a:solidFill>
-                  <a:srgbClr val="6B6690"/>
-                </a:solidFill>
-                <a:latin typeface="Calibri"/>
-              </a:rPr>
-              <a:t>It never adds the 4 percent.</a:t>
-            </a:r>
-          </a:p>
-        </p:txBody>
-      </p:sp>
-      <p:sp>
-        <p:nvSpPr>
-          <p:cNvPr id="33" name="TextBox 32"/>
+              <a:t>A short test judges the origin as much as the rule. All four of naive's misses are too low, so its MAE is the gap between the dip and the four weeks' average, 233,650. The thirteen-week test started from 218,300, close to its hidden weeks' average of 217,746: luck in the other direction.</a:t>
+            </a:r>
+          </a:p>
+        </p:txBody>
+      </p:sp>
+      <p:sp>
+        <p:nvSpPr>
+          <p:cNvPr id="22" name="TextBox 21"/>
           <p:cNvSpPr txBox="1"/>
           <p:nvPr/>
         </p:nvSpPr>
@@ -10437,7 +10388,7 @@
       </p:sp>
       <p:sp>
         <p:nvSpPr>
-          <p:cNvPr id="34" name="TextBox 33"/>
+          <p:cNvPr id="23" name="TextBox 22"/>
           <p:cNvSpPr txBox="1"/>
           <p:nvPr/>
         </p:nvSpPr>
@@ -10465,7 +10416,7 @@
                 </a:solidFill>
                 <a:latin typeface="Calibri"/>
               </a:rPr>
-              <a:t>S3  ·  4 / 15</a:t>
+              <a:t>S4  ·  4 / 14</a:t>
             </a:r>
           </a:p>
         </p:txBody>
@@ -10636,7 +10587,7 @@
                 </a:solidFill>
                 <a:latin typeface="Calibri"/>
               </a:rPr>
-              <a:t>WEEK 4  ·  DAY 5  ·  KALPA GLOBAL CAPABILITY CENTRE</a:t>
+              <a:t>WEEK 4  ·  FRIDAY  ·  FLIPKART, LUCKNOW  ·  FALLBACK</a:t>
             </a:r>
           </a:p>
         </p:txBody>
@@ -10671,7 +10622,7 @@
                 </a:solidFill>
                 <a:latin typeface="Georgia"/>
               </a:rPr>
-              <a:t>Answer: the origin week was a dip, 196,600</a:t>
+              <a:t>A test shorter than the plan judges too little</a:t>
             </a:r>
           </a:p>
         </p:txBody>
@@ -10706,137 +10657,48 @@
                 </a:solidFill>
                 <a:latin typeface="Calibri"/>
               </a:rPr>
-              <a:t>How does one origin week set every naive miss?</a:t>
-            </a:r>
-          </a:p>
-        </p:txBody>
-      </p:sp>
-      <p:sp>
-        <p:nvSpPr>
-          <p:cNvPr id="9" name="TextBox 8"/>
-          <p:cNvSpPr txBox="1"/>
+              <a:t>Why must the hidden weeks span at least the eight weeks the plan covers?</a:t>
+            </a:r>
+          </a:p>
+        </p:txBody>
+      </p:sp>
+      <p:sp>
+        <p:nvSpPr>
+          <p:cNvPr id="9" name="Rounded Rectangle 8"/>
+          <p:cNvSpPr/>
           <p:nvPr/>
         </p:nvSpPr>
         <p:spPr>
           <a:xfrm>
             <a:off x="530352" y="1956816"/>
-            <a:ext cx="3527450" cy="698500"/>
-          </a:xfrm>
-          <a:prstGeom prst="rect">
-            <a:avLst/>
-          </a:prstGeom>
-          <a:noFill/>
-        </p:spPr>
-        <p:txBody>
-          <a:bodyPr wrap="square" anchor="t" lIns="0" rIns="0" tIns="0" bIns="0">
-            <a:spAutoFit/>
-          </a:bodyPr>
-          <a:lstStyle/>
-          <a:p>
-            <a:pPr algn="l"/>
-            <a:r>
-              <a:rPr sz="4400" b="0" i="0">
-                <a:solidFill>
-                  <a:srgbClr val="5B3FD6"/>
-                </a:solidFill>
-                <a:latin typeface="Georgia"/>
-              </a:rPr>
-              <a:t>196,600</a:t>
-            </a:r>
-          </a:p>
-        </p:txBody>
-      </p:sp>
-      <p:sp>
-        <p:nvSpPr>
-          <p:cNvPr id="10" name="TextBox 9"/>
-          <p:cNvSpPr txBox="1"/>
-          <p:nvPr/>
-        </p:nvSpPr>
-        <p:spPr>
-          <a:xfrm>
-            <a:off x="530352" y="2691892"/>
-            <a:ext cx="3527450" cy="168656"/>
-          </a:xfrm>
-          <a:prstGeom prst="rect">
-            <a:avLst/>
-          </a:prstGeom>
-          <a:noFill/>
-        </p:spPr>
-        <p:txBody>
-          <a:bodyPr wrap="square" anchor="t" lIns="0" rIns="0" tIns="0" bIns="0">
-            <a:spAutoFit/>
-          </a:bodyPr>
-          <a:lstStyle/>
-          <a:p>
-            <a:pPr algn="l"/>
-            <a:r>
-              <a:rPr sz="800" b="1" i="0" spc="250">
-                <a:solidFill>
-                  <a:srgbClr val="1A0F5C"/>
-                </a:solidFill>
-                <a:latin typeface="Calibri"/>
-              </a:rPr>
-              <a:t>THE WEEK OF 24 AUGUST 2026</a:t>
-            </a:r>
-          </a:p>
-        </p:txBody>
-      </p:sp>
-      <p:sp>
-        <p:nvSpPr>
-          <p:cNvPr id="11" name="TextBox 10"/>
-          <p:cNvSpPr txBox="1"/>
-          <p:nvPr/>
-        </p:nvSpPr>
-        <p:spPr>
-          <a:xfrm>
-            <a:off x="530352" y="2893060"/>
-            <a:ext cx="3527450" cy="193421"/>
-          </a:xfrm>
-          <a:prstGeom prst="rect">
-            <a:avLst/>
-          </a:prstGeom>
-          <a:noFill/>
-        </p:spPr>
-        <p:txBody>
-          <a:bodyPr wrap="square" anchor="t" lIns="0" rIns="0" tIns="0" bIns="0">
-            <a:spAutoFit/>
-          </a:bodyPr>
-          <a:lstStyle/>
-          <a:p>
-            <a:pPr algn="l"/>
-            <a:r>
-              <a:rPr sz="950" b="0" i="0">
-                <a:solidFill>
-                  <a:srgbClr val="6B6690"/>
-                </a:solidFill>
-                <a:latin typeface="Calibri"/>
-              </a:rPr>
-              <a:t>the origin naive repeats four times</a:t>
-            </a:r>
-          </a:p>
-        </p:txBody>
-      </p:sp>
-      <p:sp>
-        <p:nvSpPr>
-          <p:cNvPr id="12" name="Rectangle 11"/>
-          <p:cNvSpPr/>
-          <p:nvPr/>
-        </p:nvSpPr>
-        <p:spPr>
-          <a:xfrm>
-            <a:off x="530352" y="3145536"/>
-            <a:ext cx="3527450" cy="10972"/>
-          </a:xfrm>
-          <a:prstGeom prst="rect">
-            <a:avLst/>
-          </a:prstGeom>
-          <a:solidFill>
-            <a:srgbClr val="E4E1F1"/>
-          </a:solidFill>
+            <a:ext cx="3588410" cy="2154428"/>
+          </a:xfrm>
+          <a:prstGeom prst="roundRect">
+            <a:avLst>
+              <a:gd name="adj" fmla="val 5000"/>
+            </a:avLst>
+          </a:prstGeom>
+          <a:gradFill rotWithShape="1">
+            <a:gsLst>
+              <a:gs pos="0">
+                <a:srgbClr val="2C1A86"/>
+              </a:gs>
+              <a:gs pos="100000">
+                <a:srgbClr val="1A0F5C"/>
+              </a:gs>
+            </a:gsLst>
+            <a:lin scaled="0" ang="16200000"/>
+          </a:gradFill>
           <a:ln>
             <a:noFill/>
           </a:ln>
-          <a:effectLst/>
+          <a:effectLst>
+            <a:outerShdw blurRad="76200" dist="19050" dir="5400000" algn="bl" rotWithShape="0">
+              <a:srgbClr val="1A0F5C">
+                <a:alpha val="12000"/>
+              </a:srgbClr>
+            </a:outerShdw>
+          </a:effectLst>
         </p:spPr>
         <p:style>
           <a:lnRef idx="1">
@@ -10862,125 +10724,20 @@
       </p:sp>
       <p:sp>
         <p:nvSpPr>
-          <p:cNvPr id="13" name="TextBox 12"/>
-          <p:cNvSpPr txBox="1"/>
-          <p:nvPr/>
-        </p:nvSpPr>
-        <p:spPr>
-          <a:xfrm>
-            <a:off x="4332122" y="1956816"/>
-            <a:ext cx="3527450" cy="698500"/>
-          </a:xfrm>
-          <a:prstGeom prst="rect">
-            <a:avLst/>
-          </a:prstGeom>
-          <a:noFill/>
-        </p:spPr>
-        <p:txBody>
-          <a:bodyPr wrap="square" anchor="t" lIns="0" rIns="0" tIns="0" bIns="0">
-            <a:spAutoFit/>
-          </a:bodyPr>
-          <a:lstStyle/>
-          <a:p>
-            <a:pPr algn="l"/>
-            <a:r>
-              <a:rPr sz="4400" b="0" i="0">
-                <a:solidFill>
-                  <a:srgbClr val="5B3FD6"/>
-                </a:solidFill>
-                <a:latin typeface="Georgia"/>
-              </a:rPr>
-              <a:t>41,800</a:t>
-            </a:r>
-          </a:p>
-        </p:txBody>
-      </p:sp>
-      <p:sp>
-        <p:nvSpPr>
-          <p:cNvPr id="14" name="TextBox 13"/>
-          <p:cNvSpPr txBox="1"/>
-          <p:nvPr/>
-        </p:nvSpPr>
-        <p:spPr>
-          <a:xfrm>
-            <a:off x="4332122" y="2691892"/>
-            <a:ext cx="3527450" cy="168656"/>
-          </a:xfrm>
-          <a:prstGeom prst="rect">
-            <a:avLst/>
-          </a:prstGeom>
-          <a:noFill/>
-        </p:spPr>
-        <p:txBody>
-          <a:bodyPr wrap="square" anchor="t" lIns="0" rIns="0" tIns="0" bIns="0">
-            <a:spAutoFit/>
-          </a:bodyPr>
-          <a:lstStyle/>
-          <a:p>
-            <a:pPr algn="l"/>
-            <a:r>
-              <a:rPr sz="800" b="1" i="0" spc="250">
-                <a:solidFill>
-                  <a:srgbClr val="1A0F5C"/>
-                </a:solidFill>
-                <a:latin typeface="Calibri"/>
-              </a:rPr>
-              <a:t>ITS FIRST MISS, TOO LOW</a:t>
-            </a:r>
-          </a:p>
-        </p:txBody>
-      </p:sp>
-      <p:sp>
-        <p:nvSpPr>
-          <p:cNvPr id="15" name="TextBox 14"/>
-          <p:cNvSpPr txBox="1"/>
-          <p:nvPr/>
-        </p:nvSpPr>
-        <p:spPr>
-          <a:xfrm>
-            <a:off x="4332122" y="2893060"/>
-            <a:ext cx="3527450" cy="193421"/>
-          </a:xfrm>
-          <a:prstGeom prst="rect">
-            <a:avLst/>
-          </a:prstGeom>
-          <a:noFill/>
-        </p:spPr>
-        <p:txBody>
-          <a:bodyPr wrap="square" anchor="t" lIns="0" rIns="0" tIns="0" bIns="0">
-            <a:spAutoFit/>
-          </a:bodyPr>
-          <a:lstStyle/>
-          <a:p>
-            <a:pPr algn="l"/>
-            <a:r>
-              <a:rPr sz="950" b="0" i="0">
-                <a:solidFill>
-                  <a:srgbClr val="6B6690"/>
-                </a:solidFill>
-                <a:latin typeface="Calibri"/>
-              </a:rPr>
-              <a:t>then 37,100, 33,700 and 35,600, all too low</a:t>
-            </a:r>
-          </a:p>
-        </p:txBody>
-      </p:sp>
-      <p:sp>
-        <p:nvSpPr>
-          <p:cNvPr id="16" name="Rectangle 15"/>
+          <p:cNvPr id="10" name="Oval 9"/>
           <p:cNvSpPr/>
           <p:nvPr/>
         </p:nvSpPr>
         <p:spPr>
           <a:xfrm>
-            <a:off x="4332122" y="3145536"/>
-            <a:ext cx="3527450" cy="10972"/>
-          </a:xfrm>
-          <a:prstGeom prst="rect">
+            <a:off x="731519" y="2157984"/>
+            <a:ext cx="457200" cy="457200"/>
+          </a:xfrm>
+          <a:prstGeom prst="ellipse">
             <a:avLst/>
           </a:prstGeom>
           <a:solidFill>
-            <a:srgbClr val="E4E1F1"/>
+            <a:srgbClr val="5B3FD6"/>
           </a:solidFill>
           <a:ln>
             <a:noFill/>
@@ -11009,16 +10766,40 @@
           </a:p>
         </p:txBody>
       </p:sp>
-      <p:sp>
-        <p:nvSpPr>
-          <p:cNvPr id="17" name="TextBox 16"/>
-          <p:cNvSpPr txBox="1"/>
-          <p:nvPr/>
-        </p:nvSpPr>
-        <p:spPr>
-          <a:xfrm>
-            <a:off x="8133892" y="1956816"/>
-            <a:ext cx="3527450" cy="698500"/>
+      <p:pic>
+        <p:nvPicPr>
+          <p:cNvPr id="11" name="Picture 10" descr="ruler_6c9ce23c020b.png"/>
+          <p:cNvPicPr>
+            <a:picLocks noChangeAspect="1"/>
+          </p:cNvPicPr>
+          <p:nvPr/>
+        </p:nvPicPr>
+        <p:blipFill>
+          <a:blip r:embed="rId4"/>
+          <a:stretch>
+            <a:fillRect/>
+          </a:stretch>
+        </p:blipFill>
+        <p:spPr>
+          <a:xfrm>
+            <a:off x="841247" y="2267712"/>
+            <a:ext cx="237744" cy="237744"/>
+          </a:xfrm>
+          <a:prstGeom prst="rect">
+            <a:avLst/>
+          </a:prstGeom>
+        </p:spPr>
+      </p:pic>
+      <p:sp>
+        <p:nvSpPr>
+          <p:cNvPr id="12" name="TextBox 11"/>
+          <p:cNvSpPr txBox="1"/>
+          <p:nvPr/>
+        </p:nvSpPr>
+        <p:spPr>
+          <a:xfrm>
+            <a:off x="731519" y="2724912"/>
+            <a:ext cx="3186074" cy="160401"/>
           </a:xfrm>
           <a:prstGeom prst="rect">
             <a:avLst/>
@@ -11033,27 +10814,27 @@
           <a:p>
             <a:pPr algn="l"/>
             <a:r>
-              <a:rPr sz="4400" b="0" i="0">
-                <a:solidFill>
-                  <a:srgbClr val="5B3FD6"/>
-                </a:solidFill>
-                <a:latin typeface="Georgia"/>
-              </a:rPr>
-              <a:t>37,050</a:t>
-            </a:r>
-          </a:p>
-        </p:txBody>
-      </p:sp>
-      <p:sp>
-        <p:nvSpPr>
-          <p:cNvPr id="18" name="TextBox 17"/>
-          <p:cNvSpPr txBox="1"/>
-          <p:nvPr/>
-        </p:nvSpPr>
-        <p:spPr>
-          <a:xfrm>
-            <a:off x="8133892" y="2691892"/>
-            <a:ext cx="3527450" cy="168656"/>
+              <a:rPr sz="750" b="1" i="0" spc="250">
+                <a:solidFill>
+                  <a:srgbClr val="D9A7FF"/>
+                </a:solidFill>
+                <a:latin typeface="Calibri"/>
+              </a:rPr>
+              <a:t>THE RULE</a:t>
+            </a:r>
+          </a:p>
+        </p:txBody>
+      </p:sp>
+      <p:sp>
+        <p:nvSpPr>
+          <p:cNvPr id="13" name="TextBox 12"/>
+          <p:cNvSpPr txBox="1"/>
+          <p:nvPr/>
+        </p:nvSpPr>
+        <p:spPr>
+          <a:xfrm>
+            <a:off x="731519" y="2962656"/>
+            <a:ext cx="3186074" cy="267716"/>
           </a:xfrm>
           <a:prstGeom prst="rect">
             <a:avLst/>
@@ -11068,27 +10849,27 @@
           <a:p>
             <a:pPr algn="l"/>
             <a:r>
-              <a:rPr sz="800" b="1" i="0" spc="250">
-                <a:solidFill>
-                  <a:srgbClr val="1A0F5C"/>
+              <a:rPr sz="1400" b="1" i="0">
+                <a:solidFill>
+                  <a:srgbClr val="FFFFFF"/>
                 </a:solidFill>
                 <a:latin typeface="Calibri"/>
               </a:rPr>
-              <a:t>NAIVE'S MAE ON FOUR WEEKS</a:t>
-            </a:r>
-          </a:p>
-        </p:txBody>
-      </p:sp>
-      <p:sp>
-        <p:nvSpPr>
-          <p:cNvPr id="19" name="TextBox 18"/>
-          <p:cNvSpPr txBox="1"/>
-          <p:nvPr/>
-        </p:nvSpPr>
-        <p:spPr>
-          <a:xfrm>
-            <a:off x="8133892" y="2893060"/>
-            <a:ext cx="3527450" cy="193421"/>
+              <a:t>At least as long as the horizon</a:t>
+            </a:r>
+          </a:p>
+        </p:txBody>
+      </p:sp>
+      <p:sp>
+        <p:nvSpPr>
+          <p:cNvPr id="14" name="TextBox 13"/>
+          <p:cNvSpPr txBox="1"/>
+          <p:nvPr/>
+        </p:nvSpPr>
+        <p:spPr>
+          <a:xfrm>
+            <a:off x="731519" y="3303524"/>
+            <a:ext cx="3186074" cy="581406"/>
           </a:xfrm>
           <a:prstGeom prst="rect">
             <a:avLst/>
@@ -11103,38 +10884,48 @@
           <a:p>
             <a:pPr algn="l"/>
             <a:r>
-              <a:rPr sz="950" b="0" i="0">
-                <a:solidFill>
-                  <a:srgbClr val="6B6690"/>
+              <a:rPr sz="1100" b="0" i="0">
+                <a:solidFill>
+                  <a:srgbClr val="CFC9EE"/>
                 </a:solidFill>
                 <a:latin typeface="Calibri"/>
               </a:rPr>
-              <a:t>against 14,923 on thirteen</a:t>
-            </a:r>
-          </a:p>
-        </p:txBody>
-      </p:sp>
-      <p:sp>
-        <p:nvSpPr>
-          <p:cNvPr id="20" name="Rectangle 19"/>
+              <a:t>The plan books eight weeks, so the test hides at least eight (FPP3, section 5.8, checked 12 October 2026).</a:t>
+            </a:r>
+          </a:p>
+        </p:txBody>
+      </p:sp>
+      <p:sp>
+        <p:nvSpPr>
+          <p:cNvPr id="15" name="Rounded Rectangle 14"/>
           <p:cNvSpPr/>
           <p:nvPr/>
         </p:nvSpPr>
         <p:spPr>
           <a:xfrm>
-            <a:off x="8133892" y="3145536"/>
-            <a:ext cx="3527450" cy="10972"/>
-          </a:xfrm>
-          <a:prstGeom prst="rect">
-            <a:avLst/>
+            <a:off x="4301642" y="1956816"/>
+            <a:ext cx="3588410" cy="2154428"/>
+          </a:xfrm>
+          <a:prstGeom prst="roundRect">
+            <a:avLst>
+              <a:gd name="adj" fmla="val 5000"/>
+            </a:avLst>
           </a:prstGeom>
           <a:solidFill>
-            <a:srgbClr val="E4E1F1"/>
+            <a:srgbClr val="FFFFFF"/>
           </a:solidFill>
-          <a:ln>
-            <a:noFill/>
+          <a:ln w="9525">
+            <a:solidFill>
+              <a:srgbClr val="E4E1F1"/>
+            </a:solidFill>
           </a:ln>
-          <a:effectLst/>
+          <a:effectLst>
+            <a:outerShdw blurRad="76200" dist="19050" dir="5400000" algn="bl" rotWithShape="0">
+              <a:srgbClr val="1A0F5C">
+                <a:alpha val="12000"/>
+              </a:srgbClr>
+            </a:outerShdw>
+          </a:effectLst>
         </p:spPr>
         <p:style>
           <a:lnRef idx="1">
@@ -11160,14 +10951,82 @@
       </p:sp>
       <p:sp>
         <p:nvSpPr>
-          <p:cNvPr id="21" name="TextBox 20"/>
-          <p:cNvSpPr txBox="1"/>
-          <p:nvPr/>
-        </p:nvSpPr>
-        <p:spPr>
-          <a:xfrm>
-            <a:off x="530352" y="3419856"/>
-            <a:ext cx="11130991" cy="772160"/>
+          <p:cNvPr id="16" name="Oval 15"/>
+          <p:cNvSpPr/>
+          <p:nvPr/>
+        </p:nvSpPr>
+        <p:spPr>
+          <a:xfrm>
+            <a:off x="4502810" y="2157984"/>
+            <a:ext cx="457200" cy="457200"/>
+          </a:xfrm>
+          <a:prstGeom prst="ellipse">
+            <a:avLst/>
+          </a:prstGeom>
+          <a:solidFill>
+            <a:srgbClr val="EEEAFB"/>
+          </a:solidFill>
+          <a:ln>
+            <a:noFill/>
+          </a:ln>
+          <a:effectLst/>
+        </p:spPr>
+        <p:style>
+          <a:lnRef idx="1">
+            <a:schemeClr val="accent1"/>
+          </a:lnRef>
+          <a:fillRef idx="3">
+            <a:schemeClr val="accent1"/>
+          </a:fillRef>
+          <a:effectRef idx="2">
+            <a:schemeClr val="accent1"/>
+          </a:effectRef>
+          <a:fontRef idx="minor">
+            <a:schemeClr val="lt1"/>
+          </a:fontRef>
+        </p:style>
+        <p:txBody>
+          <a:bodyPr rtlCol="0" anchor="ctr" wrap="square"/>
+          <a:lstStyle/>
+          <a:p>
+            <a:pPr algn="ctr"/>
+          </a:p>
+        </p:txBody>
+      </p:sp>
+      <p:pic>
+        <p:nvPicPr>
+          <p:cNvPr id="17" name="Picture 16" descr="trending-up_0f9f07881489.png"/>
+          <p:cNvPicPr>
+            <a:picLocks noChangeAspect="1"/>
+          </p:cNvPicPr>
+          <p:nvPr/>
+        </p:nvPicPr>
+        <p:blipFill>
+          <a:blip r:embed="rId5"/>
+          <a:stretch>
+            <a:fillRect/>
+          </a:stretch>
+        </p:blipFill>
+        <p:spPr>
+          <a:xfrm>
+            <a:off x="4612538" y="2267712"/>
+            <a:ext cx="237744" cy="237744"/>
+          </a:xfrm>
+          <a:prstGeom prst="rect">
+            <a:avLst/>
+          </a:prstGeom>
+        </p:spPr>
+      </p:pic>
+      <p:sp>
+        <p:nvSpPr>
+          <p:cNvPr id="18" name="TextBox 17"/>
+          <p:cNvSpPr txBox="1"/>
+          <p:nvPr/>
+        </p:nvSpPr>
+        <p:spPr>
+          <a:xfrm>
+            <a:off x="4502810" y="2724912"/>
+            <a:ext cx="3186074" cy="160401"/>
           </a:xfrm>
           <a:prstGeom prst="rect">
             <a:avLst/>
@@ -11180,26 +11039,319 @@
           </a:bodyPr>
           <a:lstStyle/>
           <a:p>
-            <a:pPr>
-              <a:spcAft>
-                <a:spcPts val="800"/>
-              </a:spcAft>
-            </a:pPr>
-            <a:r>
-              <a:rPr sz="1600" b="0" i="0">
-                <a:solidFill>
-                  <a:srgbClr val="1A1440"/>
+            <a:pPr algn="l"/>
+            <a:r>
+              <a:rPr sz="750" b="1" i="0" spc="250">
+                <a:solidFill>
+                  <a:srgbClr val="5B3FD6"/>
                 </a:solidFill>
                 <a:latin typeface="Calibri"/>
               </a:rPr>
-              <a:t>A short test judges the origin as much as the rule. The thirteen-week test spread that luck over thirteen weeks; four weeks cannot.</a:t>
-            </a:r>
-          </a:p>
-        </p:txBody>
-      </p:sp>
-      <p:sp>
-        <p:nvSpPr>
-          <p:cNvPr id="22" name="TextBox 21"/>
+              <a:t>THE VENDOR</a:t>
+            </a:r>
+          </a:p>
+        </p:txBody>
+      </p:sp>
+      <p:sp>
+        <p:nvSpPr>
+          <p:cNvPr id="19" name="TextBox 18"/>
+          <p:cNvSpPr txBox="1"/>
+          <p:nvPr/>
+        </p:nvSpPr>
+        <p:spPr>
+          <a:xfrm>
+            <a:off x="4502810" y="2962656"/>
+            <a:ext cx="3186074" cy="267716"/>
+          </a:xfrm>
+          <a:prstGeom prst="rect">
+            <a:avLst/>
+          </a:prstGeom>
+          <a:noFill/>
+        </p:spPr>
+        <p:txBody>
+          <a:bodyPr wrap="square" anchor="t" lIns="0" rIns="0" tIns="0" bIns="0">
+            <a:spAutoFit/>
+          </a:bodyPr>
+          <a:lstStyle/>
+          <a:p>
+            <a:pPr algn="l"/>
+            <a:r>
+              <a:rPr sz="1400" b="1" i="0">
+                <a:solidFill>
+                  <a:srgbClr val="1A0F5C"/>
+                </a:solidFill>
+                <a:latin typeface="Calibri"/>
+              </a:rPr>
+              <a:t>Its gap grows with the weeks ahead</a:t>
+            </a:r>
+          </a:p>
+        </p:txBody>
+      </p:sp>
+      <p:sp>
+        <p:nvSpPr>
+          <p:cNvPr id="20" name="TextBox 19"/>
+          <p:cNvSpPr txBox="1"/>
+          <p:nvPr/>
+        </p:nvSpPr>
+        <p:spPr>
+          <a:xfrm>
+            <a:off x="4502810" y="3303524"/>
+            <a:ext cx="3186074" cy="581406"/>
+          </a:xfrm>
+          <a:prstGeom prst="rect">
+            <a:avLst/>
+          </a:prstGeom>
+          <a:noFill/>
+        </p:spPr>
+        <p:txBody>
+          <a:bodyPr wrap="square" anchor="t" lIns="0" rIns="0" tIns="0" bIns="0">
+            <a:spAutoFit/>
+          </a:bodyPr>
+          <a:lstStyle/>
+          <a:p>
+            <a:pPr algn="l"/>
+            <a:r>
+              <a:rPr sz="1100" b="0" i="0">
+                <a:solidFill>
+                  <a:srgbClr val="6B6690"/>
+                </a:solidFill>
+                <a:latin typeface="Calibri"/>
+              </a:rPr>
+              <a:t>148 percent worse than festival-aligned on thirteen weeks, 233 percent on its four farthest.</a:t>
+            </a:r>
+          </a:p>
+        </p:txBody>
+      </p:sp>
+      <p:sp>
+        <p:nvSpPr>
+          <p:cNvPr id="21" name="Rounded Rectangle 20"/>
+          <p:cNvSpPr/>
+          <p:nvPr/>
+        </p:nvSpPr>
+        <p:spPr>
+          <a:xfrm>
+            <a:off x="8072932" y="1956816"/>
+            <a:ext cx="3588410" cy="2154428"/>
+          </a:xfrm>
+          <a:prstGeom prst="roundRect">
+            <a:avLst>
+              <a:gd name="adj" fmla="val 5000"/>
+            </a:avLst>
+          </a:prstGeom>
+          <a:solidFill>
+            <a:srgbClr val="FFFFFF"/>
+          </a:solidFill>
+          <a:ln w="9525">
+            <a:solidFill>
+              <a:srgbClr val="E4E1F1"/>
+            </a:solidFill>
+          </a:ln>
+          <a:effectLst>
+            <a:outerShdw blurRad="76200" dist="19050" dir="5400000" algn="bl" rotWithShape="0">
+              <a:srgbClr val="1A0F5C">
+                <a:alpha val="12000"/>
+              </a:srgbClr>
+            </a:outerShdw>
+          </a:effectLst>
+        </p:spPr>
+        <p:style>
+          <a:lnRef idx="1">
+            <a:schemeClr val="accent1"/>
+          </a:lnRef>
+          <a:fillRef idx="3">
+            <a:schemeClr val="accent1"/>
+          </a:fillRef>
+          <a:effectRef idx="2">
+            <a:schemeClr val="accent1"/>
+          </a:effectRef>
+          <a:fontRef idx="minor">
+            <a:schemeClr val="lt1"/>
+          </a:fontRef>
+        </p:style>
+        <p:txBody>
+          <a:bodyPr rtlCol="0" anchor="ctr" wrap="square"/>
+          <a:lstStyle/>
+          <a:p>
+            <a:pPr algn="ctr"/>
+          </a:p>
+        </p:txBody>
+      </p:sp>
+      <p:sp>
+        <p:nvSpPr>
+          <p:cNvPr id="22" name="Oval 21"/>
+          <p:cNvSpPr/>
+          <p:nvPr/>
+        </p:nvSpPr>
+        <p:spPr>
+          <a:xfrm>
+            <a:off x="8274100" y="2157984"/>
+            <a:ext cx="457200" cy="457200"/>
+          </a:xfrm>
+          <a:prstGeom prst="ellipse">
+            <a:avLst/>
+          </a:prstGeom>
+          <a:solidFill>
+            <a:srgbClr val="EEEAFB"/>
+          </a:solidFill>
+          <a:ln>
+            <a:noFill/>
+          </a:ln>
+          <a:effectLst/>
+        </p:spPr>
+        <p:style>
+          <a:lnRef idx="1">
+            <a:schemeClr val="accent1"/>
+          </a:lnRef>
+          <a:fillRef idx="3">
+            <a:schemeClr val="accent1"/>
+          </a:fillRef>
+          <a:effectRef idx="2">
+            <a:schemeClr val="accent1"/>
+          </a:effectRef>
+          <a:fontRef idx="minor">
+            <a:schemeClr val="lt1"/>
+          </a:fontRef>
+        </p:style>
+        <p:txBody>
+          <a:bodyPr rtlCol="0" anchor="ctr" wrap="square"/>
+          <a:lstStyle/>
+          <a:p>
+            <a:pPr algn="ctr"/>
+          </a:p>
+        </p:txBody>
+      </p:sp>
+      <p:pic>
+        <p:nvPicPr>
+          <p:cNvPr id="23" name="Picture 22" descr="shuffle_1f5f2f56d507.png"/>
+          <p:cNvPicPr>
+            <a:picLocks noChangeAspect="1"/>
+          </p:cNvPicPr>
+          <p:nvPr/>
+        </p:nvPicPr>
+        <p:blipFill>
+          <a:blip r:embed="rId6"/>
+          <a:stretch>
+            <a:fillRect/>
+          </a:stretch>
+        </p:blipFill>
+        <p:spPr>
+          <a:xfrm>
+            <a:off x="8383828" y="2267712"/>
+            <a:ext cx="237744" cy="237744"/>
+          </a:xfrm>
+          <a:prstGeom prst="rect">
+            <a:avLst/>
+          </a:prstGeom>
+        </p:spPr>
+      </p:pic>
+      <p:sp>
+        <p:nvSpPr>
+          <p:cNvPr id="24" name="TextBox 23"/>
+          <p:cNvSpPr txBox="1"/>
+          <p:nvPr/>
+        </p:nvSpPr>
+        <p:spPr>
+          <a:xfrm>
+            <a:off x="8274100" y="2724912"/>
+            <a:ext cx="3186074" cy="160401"/>
+          </a:xfrm>
+          <a:prstGeom prst="rect">
+            <a:avLst/>
+          </a:prstGeom>
+          <a:noFill/>
+        </p:spPr>
+        <p:txBody>
+          <a:bodyPr wrap="square" anchor="t" lIns="0" rIns="0" tIns="0" bIns="0">
+            <a:spAutoFit/>
+          </a:bodyPr>
+          <a:lstStyle/>
+          <a:p>
+            <a:pPr algn="l"/>
+            <a:r>
+              <a:rPr sz="750" b="1" i="0" spc="250">
+                <a:solidFill>
+                  <a:srgbClr val="5B3FD6"/>
+                </a:solidFill>
+                <a:latin typeface="Calibri"/>
+              </a:rPr>
+              <a:t>THE LUCK</a:t>
+            </a:r>
+          </a:p>
+        </p:txBody>
+      </p:sp>
+      <p:sp>
+        <p:nvSpPr>
+          <p:cNvPr id="25" name="TextBox 24"/>
+          <p:cNvSpPr txBox="1"/>
+          <p:nvPr/>
+        </p:nvSpPr>
+        <p:spPr>
+          <a:xfrm>
+            <a:off x="8274100" y="2962656"/>
+            <a:ext cx="3186074" cy="267716"/>
+          </a:xfrm>
+          <a:prstGeom prst="rect">
+            <a:avLst/>
+          </a:prstGeom>
+          <a:noFill/>
+        </p:spPr>
+        <p:txBody>
+          <a:bodyPr wrap="square" anchor="t" lIns="0" rIns="0" tIns="0" bIns="0">
+            <a:spAutoFit/>
+          </a:bodyPr>
+          <a:lstStyle/>
+          <a:p>
+            <a:pPr algn="l"/>
+            <a:r>
+              <a:rPr sz="1400" b="1" i="0">
+                <a:solidFill>
+                  <a:srgbClr val="1A0F5C"/>
+                </a:solidFill>
+                <a:latin typeface="Calibri"/>
+              </a:rPr>
+              <a:t>One origin can flatter or punish</a:t>
+            </a:r>
+          </a:p>
+        </p:txBody>
+      </p:sp>
+      <p:sp>
+        <p:nvSpPr>
+          <p:cNvPr id="26" name="TextBox 25"/>
+          <p:cNvSpPr txBox="1"/>
+          <p:nvPr/>
+        </p:nvSpPr>
+        <p:spPr>
+          <a:xfrm>
+            <a:off x="8274100" y="3303524"/>
+            <a:ext cx="3186074" cy="399796"/>
+          </a:xfrm>
+          <a:prstGeom prst="rect">
+            <a:avLst/>
+          </a:prstGeom>
+          <a:noFill/>
+        </p:spPr>
+        <p:txBody>
+          <a:bodyPr wrap="square" anchor="t" lIns="0" rIns="0" tIns="0" bIns="0">
+            <a:spAutoFit/>
+          </a:bodyPr>
+          <a:lstStyle/>
+          <a:p>
+            <a:pPr algn="l"/>
+            <a:r>
+              <a:rPr sz="1100" b="0" i="0">
+                <a:solidFill>
+                  <a:srgbClr val="6B6690"/>
+                </a:solidFill>
+                <a:latin typeface="Calibri"/>
+              </a:rPr>
+              <a:t>A rule that looked fine from 22 June looks poor from 24 August.</a:t>
+            </a:r>
+          </a:p>
+        </p:txBody>
+      </p:sp>
+      <p:sp>
+        <p:nvSpPr>
+          <p:cNvPr id="27" name="TextBox 26"/>
           <p:cNvSpPr txBox="1"/>
           <p:nvPr/>
         </p:nvSpPr>
@@ -11234,7 +11386,7 @@
       </p:sp>
       <p:sp>
         <p:nvSpPr>
-          <p:cNvPr id="23" name="TextBox 22"/>
+          <p:cNvPr id="28" name="TextBox 27"/>
           <p:cNvSpPr txBox="1"/>
           <p:nvPr/>
         </p:nvSpPr>
@@ -11262,7 +11414,7 @@
                 </a:solidFill>
                 <a:latin typeface="Calibri"/>
               </a:rPr>
-              <a:t>S4  ·  5 / 15</a:t>
+              <a:t>S5  ·  5 / 14</a:t>
             </a:r>
           </a:p>
         </p:txBody>
@@ -11433,7 +11585,7 @@
                 </a:solidFill>
                 <a:latin typeface="Calibri"/>
               </a:rPr>
-              <a:t>WEEK 4  ·  DAY 5  ·  KALPA GLOBAL CAPABILITY CENTRE</a:t>
+              <a:t>WEEK 4  ·  FRIDAY  ·  FLIPKART, LUCKNOW  ·  FALLBACK</a:t>
             </a:r>
           </a:p>
         </p:txBody>
@@ -11468,7 +11620,7 @@
                 </a:solidFill>
                 <a:latin typeface="Georgia"/>
               </a:rPr>
-              <a:t>A test shorter than the plan judges too little</a:t>
+              <a:t>Roll the origin: one week ahead, five times</a:t>
             </a:r>
           </a:p>
         </p:txBody>
@@ -11503,345 +11655,14 @@
                 </a:solidFill>
                 <a:latin typeface="Calibri"/>
               </a:rPr>
-              <a:t>Why must the hidden weeks span at least the eight weeks the plan covers?</a:t>
-            </a:r>
-          </a:p>
-        </p:txBody>
-      </p:sp>
-      <p:sp>
-        <p:nvSpPr>
-          <p:cNvPr id="9" name="Rounded Rectangle 8"/>
-          <p:cNvSpPr/>
-          <p:nvPr/>
-        </p:nvSpPr>
-        <p:spPr>
-          <a:xfrm>
-            <a:off x="530352" y="1956816"/>
-            <a:ext cx="3588410" cy="2154428"/>
-          </a:xfrm>
-          <a:prstGeom prst="roundRect">
-            <a:avLst>
-              <a:gd name="adj" fmla="val 5000"/>
-            </a:avLst>
-          </a:prstGeom>
-          <a:gradFill rotWithShape="1">
-            <a:gsLst>
-              <a:gs pos="0">
-                <a:srgbClr val="2C1A86"/>
-              </a:gs>
-              <a:gs pos="100000">
-                <a:srgbClr val="1A0F5C"/>
-              </a:gs>
-            </a:gsLst>
-            <a:lin scaled="0" ang="16200000"/>
-          </a:gradFill>
-          <a:ln>
-            <a:noFill/>
-          </a:ln>
-          <a:effectLst>
-            <a:outerShdw blurRad="76200" dist="19050" dir="5400000" algn="bl" rotWithShape="0">
-              <a:srgbClr val="1A0F5C">
-                <a:alpha val="12000"/>
-              </a:srgbClr>
-            </a:outerShdw>
-          </a:effectLst>
-        </p:spPr>
-        <p:style>
-          <a:lnRef idx="1">
-            <a:schemeClr val="accent1"/>
-          </a:lnRef>
-          <a:fillRef idx="3">
-            <a:schemeClr val="accent1"/>
-          </a:fillRef>
-          <a:effectRef idx="2">
-            <a:schemeClr val="accent1"/>
-          </a:effectRef>
-          <a:fontRef idx="minor">
-            <a:schemeClr val="lt1"/>
-          </a:fontRef>
-        </p:style>
-        <p:txBody>
-          <a:bodyPr rtlCol="0" anchor="ctr" wrap="square"/>
-          <a:lstStyle/>
-          <a:p>
-            <a:pPr algn="ctr"/>
-          </a:p>
-        </p:txBody>
-      </p:sp>
-      <p:sp>
-        <p:nvSpPr>
-          <p:cNvPr id="10" name="Oval 9"/>
-          <p:cNvSpPr/>
-          <p:nvPr/>
-        </p:nvSpPr>
-        <p:spPr>
-          <a:xfrm>
-            <a:off x="731519" y="2157984"/>
-            <a:ext cx="457200" cy="457200"/>
-          </a:xfrm>
-          <a:prstGeom prst="ellipse">
-            <a:avLst/>
-          </a:prstGeom>
-          <a:solidFill>
-            <a:srgbClr val="5B3FD6"/>
-          </a:solidFill>
-          <a:ln>
-            <a:noFill/>
-          </a:ln>
-          <a:effectLst/>
-        </p:spPr>
-        <p:style>
-          <a:lnRef idx="1">
-            <a:schemeClr val="accent1"/>
-          </a:lnRef>
-          <a:fillRef idx="3">
-            <a:schemeClr val="accent1"/>
-          </a:fillRef>
-          <a:effectRef idx="2">
-            <a:schemeClr val="accent1"/>
-          </a:effectRef>
-          <a:fontRef idx="minor">
-            <a:schemeClr val="lt1"/>
-          </a:fontRef>
-        </p:style>
-        <p:txBody>
-          <a:bodyPr rtlCol="0" anchor="ctr" wrap="square"/>
-          <a:lstStyle/>
-          <a:p>
-            <a:pPr algn="ctr"/>
+              <a:t>What does a rolling origin show that one hidden block cannot?</a:t>
+            </a:r>
           </a:p>
         </p:txBody>
       </p:sp>
       <p:pic>
         <p:nvPicPr>
-          <p:cNvPr id="11" name="Picture 10" descr="ruler_6c9ce23c020b.png"/>
-          <p:cNvPicPr>
-            <a:picLocks noChangeAspect="1"/>
-          </p:cNvPicPr>
-          <p:nvPr/>
-        </p:nvPicPr>
-        <p:blipFill>
-          <a:blip r:embed="rId4"/>
-          <a:stretch>
-            <a:fillRect/>
-          </a:stretch>
-        </p:blipFill>
-        <p:spPr>
-          <a:xfrm>
-            <a:off x="841247" y="2267712"/>
-            <a:ext cx="237744" cy="237744"/>
-          </a:xfrm>
-          <a:prstGeom prst="rect">
-            <a:avLst/>
-          </a:prstGeom>
-        </p:spPr>
-      </p:pic>
-      <p:sp>
-        <p:nvSpPr>
-          <p:cNvPr id="12" name="TextBox 11"/>
-          <p:cNvSpPr txBox="1"/>
-          <p:nvPr/>
-        </p:nvSpPr>
-        <p:spPr>
-          <a:xfrm>
-            <a:off x="731519" y="2724912"/>
-            <a:ext cx="3186074" cy="160401"/>
-          </a:xfrm>
-          <a:prstGeom prst="rect">
-            <a:avLst/>
-          </a:prstGeom>
-          <a:noFill/>
-        </p:spPr>
-        <p:txBody>
-          <a:bodyPr wrap="square" anchor="t" lIns="0" rIns="0" tIns="0" bIns="0">
-            <a:spAutoFit/>
-          </a:bodyPr>
-          <a:lstStyle/>
-          <a:p>
-            <a:pPr algn="l"/>
-            <a:r>
-              <a:rPr sz="750" b="1" i="0" spc="250">
-                <a:solidFill>
-                  <a:srgbClr val="D9A7FF"/>
-                </a:solidFill>
-                <a:latin typeface="Calibri"/>
-              </a:rPr>
-              <a:t>THE RULE</a:t>
-            </a:r>
-          </a:p>
-        </p:txBody>
-      </p:sp>
-      <p:sp>
-        <p:nvSpPr>
-          <p:cNvPr id="13" name="TextBox 12"/>
-          <p:cNvSpPr txBox="1"/>
-          <p:nvPr/>
-        </p:nvSpPr>
-        <p:spPr>
-          <a:xfrm>
-            <a:off x="731519" y="2962656"/>
-            <a:ext cx="3186074" cy="267716"/>
-          </a:xfrm>
-          <a:prstGeom prst="rect">
-            <a:avLst/>
-          </a:prstGeom>
-          <a:noFill/>
-        </p:spPr>
-        <p:txBody>
-          <a:bodyPr wrap="square" anchor="t" lIns="0" rIns="0" tIns="0" bIns="0">
-            <a:spAutoFit/>
-          </a:bodyPr>
-          <a:lstStyle/>
-          <a:p>
-            <a:pPr algn="l"/>
-            <a:r>
-              <a:rPr sz="1400" b="1" i="0">
-                <a:solidFill>
-                  <a:srgbClr val="FFFFFF"/>
-                </a:solidFill>
-                <a:latin typeface="Calibri"/>
-              </a:rPr>
-              <a:t>At least as long as the horizon</a:t>
-            </a:r>
-          </a:p>
-        </p:txBody>
-      </p:sp>
-      <p:sp>
-        <p:nvSpPr>
-          <p:cNvPr id="14" name="TextBox 13"/>
-          <p:cNvSpPr txBox="1"/>
-          <p:nvPr/>
-        </p:nvSpPr>
-        <p:spPr>
-          <a:xfrm>
-            <a:off x="731519" y="3303524"/>
-            <a:ext cx="3186074" cy="581406"/>
-          </a:xfrm>
-          <a:prstGeom prst="rect">
-            <a:avLst/>
-          </a:prstGeom>
-          <a:noFill/>
-        </p:spPr>
-        <p:txBody>
-          <a:bodyPr wrap="square" anchor="t" lIns="0" rIns="0" tIns="0" bIns="0">
-            <a:spAutoFit/>
-          </a:bodyPr>
-          <a:lstStyle/>
-          <a:p>
-            <a:pPr algn="l"/>
-            <a:r>
-              <a:rPr sz="1100" b="0" i="0">
-                <a:solidFill>
-                  <a:srgbClr val="CFC9EE"/>
-                </a:solidFill>
-                <a:latin typeface="Calibri"/>
-              </a:rPr>
-              <a:t>The plan books eight weeks, so the test hides at least eight (FPP3, section 5.8, checked 12 October 2026).</a:t>
-            </a:r>
-          </a:p>
-        </p:txBody>
-      </p:sp>
-      <p:sp>
-        <p:nvSpPr>
-          <p:cNvPr id="15" name="Rounded Rectangle 14"/>
-          <p:cNvSpPr/>
-          <p:nvPr/>
-        </p:nvSpPr>
-        <p:spPr>
-          <a:xfrm>
-            <a:off x="4301642" y="1956816"/>
-            <a:ext cx="3588410" cy="2154428"/>
-          </a:xfrm>
-          <a:prstGeom prst="roundRect">
-            <a:avLst>
-              <a:gd name="adj" fmla="val 5000"/>
-            </a:avLst>
-          </a:prstGeom>
-          <a:solidFill>
-            <a:srgbClr val="FFFFFF"/>
-          </a:solidFill>
-          <a:ln w="9525">
-            <a:solidFill>
-              <a:srgbClr val="E4E1F1"/>
-            </a:solidFill>
-          </a:ln>
-          <a:effectLst>
-            <a:outerShdw blurRad="76200" dist="19050" dir="5400000" algn="bl" rotWithShape="0">
-              <a:srgbClr val="1A0F5C">
-                <a:alpha val="12000"/>
-              </a:srgbClr>
-            </a:outerShdw>
-          </a:effectLst>
-        </p:spPr>
-        <p:style>
-          <a:lnRef idx="1">
-            <a:schemeClr val="accent1"/>
-          </a:lnRef>
-          <a:fillRef idx="3">
-            <a:schemeClr val="accent1"/>
-          </a:fillRef>
-          <a:effectRef idx="2">
-            <a:schemeClr val="accent1"/>
-          </a:effectRef>
-          <a:fontRef idx="minor">
-            <a:schemeClr val="lt1"/>
-          </a:fontRef>
-        </p:style>
-        <p:txBody>
-          <a:bodyPr rtlCol="0" anchor="ctr" wrap="square"/>
-          <a:lstStyle/>
-          <a:p>
-            <a:pPr algn="ctr"/>
-          </a:p>
-        </p:txBody>
-      </p:sp>
-      <p:sp>
-        <p:nvSpPr>
-          <p:cNvPr id="16" name="Oval 15"/>
-          <p:cNvSpPr/>
-          <p:nvPr/>
-        </p:nvSpPr>
-        <p:spPr>
-          <a:xfrm>
-            <a:off x="4502810" y="2157984"/>
-            <a:ext cx="457200" cy="457200"/>
-          </a:xfrm>
-          <a:prstGeom prst="ellipse">
-            <a:avLst/>
-          </a:prstGeom>
-          <a:solidFill>
-            <a:srgbClr val="EEEAFB"/>
-          </a:solidFill>
-          <a:ln>
-            <a:noFill/>
-          </a:ln>
-          <a:effectLst/>
-        </p:spPr>
-        <p:style>
-          <a:lnRef idx="1">
-            <a:schemeClr val="accent1"/>
-          </a:lnRef>
-          <a:fillRef idx="3">
-            <a:schemeClr val="accent1"/>
-          </a:fillRef>
-          <a:effectRef idx="2">
-            <a:schemeClr val="accent1"/>
-          </a:effectRef>
-          <a:fontRef idx="minor">
-            <a:schemeClr val="lt1"/>
-          </a:fontRef>
-        </p:style>
-        <p:txBody>
-          <a:bodyPr rtlCol="0" anchor="ctr" wrap="square"/>
-          <a:lstStyle/>
-          <a:p>
-            <a:pPr algn="ctr"/>
-          </a:p>
-        </p:txBody>
-      </p:sp>
-      <p:pic>
-        <p:nvPicPr>
-          <p:cNvPr id="17" name="Picture 16" descr="trending-up_0f9f07881489.png"/>
+          <p:cNvPr id="9" name="mermaid diagram" descr="a2c12a290d95efdf.png"/>
           <p:cNvPicPr>
             <a:picLocks noChangeAspect="1"/>
           </p:cNvPicPr>
@@ -11855,8 +11676,8 @@
         </p:blipFill>
         <p:spPr>
           <a:xfrm>
-            <a:off x="4612538" y="2267712"/>
-            <a:ext cx="237744" cy="237744"/>
+            <a:off x="530352" y="1956816"/>
+            <a:ext cx="11130991" cy="1129748"/>
           </a:xfrm>
           <a:prstGeom prst="rect">
             <a:avLst/>
@@ -11865,14 +11686,14 @@
       </p:pic>
       <p:sp>
         <p:nvSpPr>
-          <p:cNvPr id="18" name="TextBox 17"/>
-          <p:cNvSpPr txBox="1"/>
-          <p:nvPr/>
-        </p:nvSpPr>
-        <p:spPr>
-          <a:xfrm>
-            <a:off x="4502810" y="2724912"/>
-            <a:ext cx="3186074" cy="160401"/>
+          <p:cNvPr id="10" name="TextBox 9"/>
+          <p:cNvSpPr txBox="1"/>
+          <p:nvPr/>
+        </p:nvSpPr>
+        <p:spPr>
+          <a:xfrm>
+            <a:off x="530352" y="3232868"/>
+            <a:ext cx="11130991" cy="772160"/>
           </a:xfrm>
           <a:prstGeom prst="rect">
             <a:avLst/>
@@ -11885,319 +11706,26 @@
           </a:bodyPr>
           <a:lstStyle/>
           <a:p>
-            <a:pPr algn="l"/>
-            <a:r>
-              <a:rPr sz="750" b="1" i="0" spc="250">
-                <a:solidFill>
-                  <a:srgbClr val="5B3FD6"/>
+            <a:pPr>
+              <a:spcAft>
+                <a:spcPts val="800"/>
+              </a:spcAft>
+            </a:pPr>
+            <a:r>
+              <a:rPr sz="1600" b="0" i="0">
+                <a:solidFill>
+                  <a:srgbClr val="1A1440"/>
                 </a:solidFill>
                 <a:latin typeface="Calibri"/>
               </a:rPr>
-              <a:t>THE VENDOR</a:t>
-            </a:r>
-          </a:p>
-        </p:txBody>
-      </p:sp>
-      <p:sp>
-        <p:nvSpPr>
-          <p:cNvPr id="19" name="TextBox 18"/>
-          <p:cNvSpPr txBox="1"/>
-          <p:nvPr/>
-        </p:nvSpPr>
-        <p:spPr>
-          <a:xfrm>
-            <a:off x="4502810" y="2962656"/>
-            <a:ext cx="3186074" cy="267716"/>
-          </a:xfrm>
-          <a:prstGeom prst="rect">
-            <a:avLst/>
-          </a:prstGeom>
-          <a:noFill/>
-        </p:spPr>
-        <p:txBody>
-          <a:bodyPr wrap="square" anchor="t" lIns="0" rIns="0" tIns="0" bIns="0">
-            <a:spAutoFit/>
-          </a:bodyPr>
-          <a:lstStyle/>
-          <a:p>
-            <a:pPr algn="l"/>
-            <a:r>
-              <a:rPr sz="1400" b="1" i="0">
-                <a:solidFill>
-                  <a:srgbClr val="1A0F5C"/>
-                </a:solidFill>
-                <a:latin typeface="Calibri"/>
-              </a:rPr>
-              <a:t>Its gap grows with the weeks ahead</a:t>
-            </a:r>
-          </a:p>
-        </p:txBody>
-      </p:sp>
-      <p:sp>
-        <p:nvSpPr>
-          <p:cNvPr id="20" name="TextBox 19"/>
-          <p:cNvSpPr txBox="1"/>
-          <p:nvPr/>
-        </p:nvSpPr>
-        <p:spPr>
-          <a:xfrm>
-            <a:off x="4502810" y="3303524"/>
-            <a:ext cx="3186074" cy="581406"/>
-          </a:xfrm>
-          <a:prstGeom prst="rect">
-            <a:avLst/>
-          </a:prstGeom>
-          <a:noFill/>
-        </p:spPr>
-        <p:txBody>
-          <a:bodyPr wrap="square" anchor="t" lIns="0" rIns="0" tIns="0" bIns="0">
-            <a:spAutoFit/>
-          </a:bodyPr>
-          <a:lstStyle/>
-          <a:p>
-            <a:pPr algn="l"/>
-            <a:r>
-              <a:rPr sz="1100" b="0" i="0">
-                <a:solidFill>
-                  <a:srgbClr val="6B6690"/>
-                </a:solidFill>
-                <a:latin typeface="Calibri"/>
-              </a:rPr>
-              <a:t>148 percent worse than festival-aligned on thirteen weeks, 233 percent on its four farthest.</a:t>
-            </a:r>
-          </a:p>
-        </p:txBody>
-      </p:sp>
-      <p:sp>
-        <p:nvSpPr>
-          <p:cNvPr id="21" name="Rounded Rectangle 20"/>
-          <p:cNvSpPr/>
-          <p:nvPr/>
-        </p:nvSpPr>
-        <p:spPr>
-          <a:xfrm>
-            <a:off x="8072932" y="1956816"/>
-            <a:ext cx="3588410" cy="2154428"/>
-          </a:xfrm>
-          <a:prstGeom prst="roundRect">
-            <a:avLst>
-              <a:gd name="adj" fmla="val 5000"/>
-            </a:avLst>
-          </a:prstGeom>
-          <a:solidFill>
-            <a:srgbClr val="FFFFFF"/>
-          </a:solidFill>
-          <a:ln w="9525">
-            <a:solidFill>
-              <a:srgbClr val="E4E1F1"/>
-            </a:solidFill>
-          </a:ln>
-          <a:effectLst>
-            <a:outerShdw blurRad="76200" dist="19050" dir="5400000" algn="bl" rotWithShape="0">
-              <a:srgbClr val="1A0F5C">
-                <a:alpha val="12000"/>
-              </a:srgbClr>
-            </a:outerShdw>
-          </a:effectLst>
-        </p:spPr>
-        <p:style>
-          <a:lnRef idx="1">
-            <a:schemeClr val="accent1"/>
-          </a:lnRef>
-          <a:fillRef idx="3">
-            <a:schemeClr val="accent1"/>
-          </a:fillRef>
-          <a:effectRef idx="2">
-            <a:schemeClr val="accent1"/>
-          </a:effectRef>
-          <a:fontRef idx="minor">
-            <a:schemeClr val="lt1"/>
-          </a:fontRef>
-        </p:style>
-        <p:txBody>
-          <a:bodyPr rtlCol="0" anchor="ctr" wrap="square"/>
-          <a:lstStyle/>
-          <a:p>
-            <a:pPr algn="ctr"/>
-          </a:p>
-        </p:txBody>
-      </p:sp>
-      <p:sp>
-        <p:nvSpPr>
-          <p:cNvPr id="22" name="Oval 21"/>
-          <p:cNvSpPr/>
-          <p:nvPr/>
-        </p:nvSpPr>
-        <p:spPr>
-          <a:xfrm>
-            <a:off x="8274100" y="2157984"/>
-            <a:ext cx="457200" cy="457200"/>
-          </a:xfrm>
-          <a:prstGeom prst="ellipse">
-            <a:avLst/>
-          </a:prstGeom>
-          <a:solidFill>
-            <a:srgbClr val="EEEAFB"/>
-          </a:solidFill>
-          <a:ln>
-            <a:noFill/>
-          </a:ln>
-          <a:effectLst/>
-        </p:spPr>
-        <p:style>
-          <a:lnRef idx="1">
-            <a:schemeClr val="accent1"/>
-          </a:lnRef>
-          <a:fillRef idx="3">
-            <a:schemeClr val="accent1"/>
-          </a:fillRef>
-          <a:effectRef idx="2">
-            <a:schemeClr val="accent1"/>
-          </a:effectRef>
-          <a:fontRef idx="minor">
-            <a:schemeClr val="lt1"/>
-          </a:fontRef>
-        </p:style>
-        <p:txBody>
-          <a:bodyPr rtlCol="0" anchor="ctr" wrap="square"/>
-          <a:lstStyle/>
-          <a:p>
-            <a:pPr algn="ctr"/>
-          </a:p>
-        </p:txBody>
-      </p:sp>
-      <p:pic>
-        <p:nvPicPr>
-          <p:cNvPr id="23" name="Picture 22" descr="shuffle_1f5f2f56d507.png"/>
-          <p:cNvPicPr>
-            <a:picLocks noChangeAspect="1"/>
-          </p:cNvPicPr>
-          <p:nvPr/>
-        </p:nvPicPr>
-        <p:blipFill>
-          <a:blip r:embed="rId6"/>
-          <a:stretch>
-            <a:fillRect/>
-          </a:stretch>
-        </p:blipFill>
-        <p:spPr>
-          <a:xfrm>
-            <a:off x="8383828" y="2267712"/>
-            <a:ext cx="237744" cy="237744"/>
-          </a:xfrm>
-          <a:prstGeom prst="rect">
-            <a:avLst/>
-          </a:prstGeom>
-        </p:spPr>
-      </p:pic>
-      <p:sp>
-        <p:nvSpPr>
-          <p:cNvPr id="24" name="TextBox 23"/>
-          <p:cNvSpPr txBox="1"/>
-          <p:nvPr/>
-        </p:nvSpPr>
-        <p:spPr>
-          <a:xfrm>
-            <a:off x="8274100" y="2724912"/>
-            <a:ext cx="3186074" cy="160401"/>
-          </a:xfrm>
-          <a:prstGeom prst="rect">
-            <a:avLst/>
-          </a:prstGeom>
-          <a:noFill/>
-        </p:spPr>
-        <p:txBody>
-          <a:bodyPr wrap="square" anchor="t" lIns="0" rIns="0" tIns="0" bIns="0">
-            <a:spAutoFit/>
-          </a:bodyPr>
-          <a:lstStyle/>
-          <a:p>
-            <a:pPr algn="l"/>
-            <a:r>
-              <a:rPr sz="750" b="1" i="0" spc="250">
-                <a:solidFill>
-                  <a:srgbClr val="5B3FD6"/>
-                </a:solidFill>
-                <a:latin typeface="Calibri"/>
-              </a:rPr>
-              <a:t>THE LUCK</a:t>
-            </a:r>
-          </a:p>
-        </p:txBody>
-      </p:sp>
-      <p:sp>
-        <p:nvSpPr>
-          <p:cNvPr id="25" name="TextBox 24"/>
-          <p:cNvSpPr txBox="1"/>
-          <p:nvPr/>
-        </p:nvSpPr>
-        <p:spPr>
-          <a:xfrm>
-            <a:off x="8274100" y="2962656"/>
-            <a:ext cx="3186074" cy="267716"/>
-          </a:xfrm>
-          <a:prstGeom prst="rect">
-            <a:avLst/>
-          </a:prstGeom>
-          <a:noFill/>
-        </p:spPr>
-        <p:txBody>
-          <a:bodyPr wrap="square" anchor="t" lIns="0" rIns="0" tIns="0" bIns="0">
-            <a:spAutoFit/>
-          </a:bodyPr>
-          <a:lstStyle/>
-          <a:p>
-            <a:pPr algn="l"/>
-            <a:r>
-              <a:rPr sz="1400" b="1" i="0">
-                <a:solidFill>
-                  <a:srgbClr val="1A0F5C"/>
-                </a:solidFill>
-                <a:latin typeface="Calibri"/>
-              </a:rPr>
-              <a:t>One origin can flatter or punish</a:t>
-            </a:r>
-          </a:p>
-        </p:txBody>
-      </p:sp>
-      <p:sp>
-        <p:nvSpPr>
-          <p:cNvPr id="26" name="TextBox 25"/>
-          <p:cNvSpPr txBox="1"/>
-          <p:nvPr/>
-        </p:nvSpPr>
-        <p:spPr>
-          <a:xfrm>
-            <a:off x="8274100" y="3303524"/>
-            <a:ext cx="3186074" cy="399796"/>
-          </a:xfrm>
-          <a:prstGeom prst="rect">
-            <a:avLst/>
-          </a:prstGeom>
-          <a:noFill/>
-        </p:spPr>
-        <p:txBody>
-          <a:bodyPr wrap="square" anchor="t" lIns="0" rIns="0" tIns="0" bIns="0">
-            <a:spAutoFit/>
-          </a:bodyPr>
-          <a:lstStyle/>
-          <a:p>
-            <a:pPr algn="l"/>
-            <a:r>
-              <a:rPr sz="1100" b="0" i="0">
-                <a:solidFill>
-                  <a:srgbClr val="6B6690"/>
-                </a:solidFill>
-                <a:latin typeface="Calibri"/>
-              </a:rPr>
-              <a:t>A rule that looked fine from 22 June looks poor from 24 August.</a:t>
-            </a:r>
-          </a:p>
-        </p:txBody>
-      </p:sp>
-      <p:sp>
-        <p:nvSpPr>
-          <p:cNvPr id="27" name="TextBox 26"/>
+              <a:t>Each forecast is made from the week before and scored, then the origin moves on one week. The twelve rows hold five such steps in 2025: from 29 September to 27 October, forecasting the week after each.</a:t>
+            </a:r>
+          </a:p>
+        </p:txBody>
+      </p:sp>
+      <p:sp>
+        <p:nvSpPr>
+          <p:cNvPr id="11" name="TextBox 10"/>
           <p:cNvSpPr txBox="1"/>
           <p:nvPr/>
         </p:nvSpPr>
@@ -12232,7 +11760,7 @@
       </p:sp>
       <p:sp>
         <p:nvSpPr>
-          <p:cNvPr id="28" name="TextBox 27"/>
+          <p:cNvPr id="12" name="TextBox 11"/>
           <p:cNvSpPr txBox="1"/>
           <p:nvPr/>
         </p:nvSpPr>
@@ -12260,7 +11788,7 @@
                 </a:solidFill>
                 <a:latin typeface="Calibri"/>
               </a:rPr>
-              <a:t>S5  ·  6 / 15</a:t>
+              <a:t>S6  ·  6 / 14</a:t>
             </a:r>
           </a:p>
         </p:txBody>
@@ -12431,381 +11959,7 @@
                 </a:solidFill>
                 <a:latin typeface="Calibri"/>
               </a:rPr>
-              <a:t>WEEK 4  ·  DAY 5  ·  KALPA GLOBAL CAPABILITY CENTRE</a:t>
-            </a:r>
-          </a:p>
-        </p:txBody>
-      </p:sp>
-      <p:sp>
-        <p:nvSpPr>
-          <p:cNvPr id="7" name="TextBox 6"/>
-          <p:cNvSpPr txBox="1"/>
-          <p:nvPr/>
-        </p:nvSpPr>
-        <p:spPr>
-          <a:xfrm>
-            <a:off x="530352" y="676656"/>
-            <a:ext cx="11130991" cy="512064"/>
-          </a:xfrm>
-          <a:prstGeom prst="rect">
-            <a:avLst/>
-          </a:prstGeom>
-          <a:noFill/>
-        </p:spPr>
-        <p:txBody>
-          <a:bodyPr wrap="square" anchor="b" lIns="0" rIns="0" tIns="0" bIns="0">
-            <a:spAutoFit/>
-          </a:bodyPr>
-          <a:lstStyle/>
-          <a:p>
-            <a:pPr algn="l"/>
-            <a:r>
-              <a:rPr sz="2600" b="0" i="0">
-                <a:solidFill>
-                  <a:srgbClr val="1A0F5C"/>
-                </a:solidFill>
-                <a:latin typeface="Georgia"/>
-              </a:rPr>
-              <a:t>Roll the origin: one week ahead, five times</a:t>
-            </a:r>
-          </a:p>
-        </p:txBody>
-      </p:sp>
-      <p:sp>
-        <p:nvSpPr>
-          <p:cNvPr id="8" name="TextBox 7"/>
-          <p:cNvSpPr txBox="1"/>
-          <p:nvPr/>
-        </p:nvSpPr>
-        <p:spPr>
-          <a:xfrm>
-            <a:off x="530352" y="1243584"/>
-            <a:ext cx="11130991" cy="234696"/>
-          </a:xfrm>
-          <a:prstGeom prst="rect">
-            <a:avLst/>
-          </a:prstGeom>
-          <a:noFill/>
-        </p:spPr>
-        <p:txBody>
-          <a:bodyPr wrap="square" anchor="t" lIns="0" rIns="0" tIns="0" bIns="0">
-            <a:spAutoFit/>
-          </a:bodyPr>
-          <a:lstStyle/>
-          <a:p>
-            <a:pPr algn="l"/>
-            <a:r>
-              <a:rPr sz="1200" b="0" i="0">
-                <a:solidFill>
-                  <a:srgbClr val="6B6690"/>
-                </a:solidFill>
-                <a:latin typeface="Calibri"/>
-              </a:rPr>
-              <a:t>What does a rolling origin show that one hidden block cannot?</a:t>
-            </a:r>
-          </a:p>
-        </p:txBody>
-      </p:sp>
-      <p:pic>
-        <p:nvPicPr>
-          <p:cNvPr id="9" name="mermaid diagram" descr="a2c12a290d95efdf.png"/>
-          <p:cNvPicPr>
-            <a:picLocks noChangeAspect="1"/>
-          </p:cNvPicPr>
-          <p:nvPr/>
-        </p:nvPicPr>
-        <p:blipFill>
-          <a:blip r:embed="rId5"/>
-          <a:stretch>
-            <a:fillRect/>
-          </a:stretch>
-        </p:blipFill>
-        <p:spPr>
-          <a:xfrm>
-            <a:off x="530352" y="1956816"/>
-            <a:ext cx="11130991" cy="1129748"/>
-          </a:xfrm>
-          <a:prstGeom prst="rect">
-            <a:avLst/>
-          </a:prstGeom>
-        </p:spPr>
-      </p:pic>
-      <p:sp>
-        <p:nvSpPr>
-          <p:cNvPr id="10" name="TextBox 9"/>
-          <p:cNvSpPr txBox="1"/>
-          <p:nvPr/>
-        </p:nvSpPr>
-        <p:spPr>
-          <a:xfrm>
-            <a:off x="530352" y="3232868"/>
-            <a:ext cx="11130991" cy="772160"/>
-          </a:xfrm>
-          <a:prstGeom prst="rect">
-            <a:avLst/>
-          </a:prstGeom>
-          <a:noFill/>
-        </p:spPr>
-        <p:txBody>
-          <a:bodyPr wrap="square" anchor="t" lIns="0" rIns="0" tIns="0" bIns="0">
-            <a:spAutoFit/>
-          </a:bodyPr>
-          <a:lstStyle/>
-          <a:p>
-            <a:pPr>
-              <a:spcAft>
-                <a:spcPts val="800"/>
-              </a:spcAft>
-            </a:pPr>
-            <a:r>
-              <a:rPr sz="1600" b="0" i="0">
-                <a:solidFill>
-                  <a:srgbClr val="1A1440"/>
-                </a:solidFill>
-                <a:latin typeface="Calibri"/>
-              </a:rPr>
-              <a:t>Each forecast is made from the week before and scored, then the origin moves on one week. The twelve rows hold five such steps in 2025: from 29 September to 27 October, forecasting the week after each.</a:t>
-            </a:r>
-          </a:p>
-        </p:txBody>
-      </p:sp>
-      <p:sp>
-        <p:nvSpPr>
-          <p:cNvPr id="11" name="TextBox 10"/>
-          <p:cNvSpPr txBox="1"/>
-          <p:nvPr/>
-        </p:nvSpPr>
-        <p:spPr>
-          <a:xfrm>
-            <a:off x="530352" y="6437376"/>
-            <a:ext cx="9667951" cy="160401"/>
-          </a:xfrm>
-          <a:prstGeom prst="rect">
-            <a:avLst/>
-          </a:prstGeom>
-          <a:noFill/>
-        </p:spPr>
-        <p:txBody>
-          <a:bodyPr wrap="square" anchor="t" lIns="0" rIns="0" tIns="0" bIns="0">
-            <a:spAutoFit/>
-          </a:bodyPr>
-          <a:lstStyle/>
-          <a:p>
-            <a:pPr algn="l"/>
-            <a:r>
-              <a:rPr sz="750" b="0" i="0">
-                <a:solidFill>
-                  <a:srgbClr val="6B6690"/>
-                </a:solidFill>
-                <a:latin typeface="Calibri"/>
-              </a:rPr>
-              <a:t>Week 4 Day 5: how much is coming, and how wrong could we be</a:t>
-            </a:r>
-          </a:p>
-        </p:txBody>
-      </p:sp>
-      <p:sp>
-        <p:nvSpPr>
-          <p:cNvPr id="12" name="TextBox 11"/>
-          <p:cNvSpPr txBox="1"/>
-          <p:nvPr/>
-        </p:nvSpPr>
-        <p:spPr>
-          <a:xfrm>
-            <a:off x="10198303" y="6437376"/>
-            <a:ext cx="1463040" cy="160401"/>
-          </a:xfrm>
-          <a:prstGeom prst="rect">
-            <a:avLst/>
-          </a:prstGeom>
-          <a:noFill/>
-        </p:spPr>
-        <p:txBody>
-          <a:bodyPr wrap="square" anchor="t" lIns="0" rIns="0" tIns="0" bIns="0">
-            <a:spAutoFit/>
-          </a:bodyPr>
-          <a:lstStyle/>
-          <a:p>
-            <a:pPr algn="r"/>
-            <a:r>
-              <a:rPr sz="750" b="0" i="0">
-                <a:solidFill>
-                  <a:srgbClr val="6B6690"/>
-                </a:solidFill>
-                <a:latin typeface="Calibri"/>
-              </a:rPr>
-              <a:t>S6  ·  7 / 15</a:t>
-            </a:r>
-          </a:p>
-        </p:txBody>
-      </p:sp>
-    </p:spTree>
-  </p:cSld>
-  <p:clrMapOvr>
-    <a:masterClrMapping/>
-  </p:clrMapOvr>
-</p:sld>
-</file>
-
-<file path=ppt/slides/slide8.xml><?xml version="1.0" encoding="utf-8"?>
-<p:sld xmlns:a="http://schemas.openxmlformats.org/drawingml/2006/main" xmlns:p="http://schemas.openxmlformats.org/presentationml/2006/main" xmlns:r="http://schemas.openxmlformats.org/officeDocument/2006/relationships">
-  <p:cSld>
-    <p:spTree>
-      <p:nvGrpSpPr>
-        <p:cNvPr id="1" name=""/>
-        <p:cNvGrpSpPr/>
-        <p:nvPr/>
-      </p:nvGrpSpPr>
-      <p:grpSpPr/>
-      <p:pic>
-        <p:nvPicPr>
-          <p:cNvPr id="2" name="Picture 1" descr="bg_light.jpg"/>
-          <p:cNvPicPr>
-            <a:picLocks noChangeAspect="1"/>
-          </p:cNvPicPr>
-          <p:nvPr/>
-        </p:nvPicPr>
-        <p:blipFill>
-          <a:blip r:embed="rId2"/>
-          <a:stretch>
-            <a:fillRect/>
-          </a:stretch>
-        </p:blipFill>
-        <p:spPr>
-          <a:xfrm>
-            <a:off x="0" y="0"/>
-            <a:ext cx="12191695" cy="6858000"/>
-          </a:xfrm>
-          <a:prstGeom prst="rect">
-            <a:avLst/>
-          </a:prstGeom>
-        </p:spPr>
-      </p:pic>
-      <p:pic>
-        <p:nvPicPr>
-          <p:cNvPr id="3" name="Picture 2" descr="iitgn_logo.png"/>
-          <p:cNvPicPr>
-            <a:picLocks noChangeAspect="1"/>
-          </p:cNvPicPr>
-          <p:nvPr/>
-        </p:nvPicPr>
-        <p:blipFill>
-          <a:blip r:embed="rId3"/>
-          <a:stretch>
-            <a:fillRect/>
-          </a:stretch>
-        </p:blipFill>
-        <p:spPr>
-          <a:xfrm>
-            <a:off x="530352" y="201168"/>
-            <a:ext cx="420624" cy="420624"/>
-          </a:xfrm>
-          <a:prstGeom prst="rect">
-            <a:avLst/>
-          </a:prstGeom>
-        </p:spPr>
-      </p:pic>
-      <p:sp>
-        <p:nvSpPr>
-          <p:cNvPr id="4" name="TextBox 3"/>
-          <p:cNvSpPr txBox="1"/>
-          <p:nvPr/>
-        </p:nvSpPr>
-        <p:spPr>
-          <a:xfrm>
-            <a:off x="1042416" y="228600"/>
-            <a:ext cx="5120640" cy="185166"/>
-          </a:xfrm>
-          <a:prstGeom prst="rect">
-            <a:avLst/>
-          </a:prstGeom>
-          <a:noFill/>
-        </p:spPr>
-        <p:txBody>
-          <a:bodyPr wrap="square" anchor="t" lIns="0" rIns="0" tIns="0" bIns="0">
-            <a:spAutoFit/>
-          </a:bodyPr>
-          <a:lstStyle/>
-          <a:p>
-            <a:pPr algn="l"/>
-            <a:r>
-              <a:rPr sz="900" b="1" i="0">
-                <a:solidFill>
-                  <a:srgbClr val="1A0F5C"/>
-                </a:solidFill>
-                <a:latin typeface="Calibri"/>
-              </a:rPr>
-              <a:t>Indian Institute of Technology Gandhinagar</a:t>
-            </a:r>
-          </a:p>
-        </p:txBody>
-      </p:sp>
-      <p:sp>
-        <p:nvSpPr>
-          <p:cNvPr id="5" name="TextBox 4"/>
-          <p:cNvSpPr txBox="1"/>
-          <p:nvPr/>
-        </p:nvSpPr>
-        <p:spPr>
-          <a:xfrm>
-            <a:off x="1042416" y="420623"/>
-            <a:ext cx="5852160" cy="127381"/>
-          </a:xfrm>
-          <a:prstGeom prst="rect">
-            <a:avLst/>
-          </a:prstGeom>
-          <a:noFill/>
-        </p:spPr>
-        <p:txBody>
-          <a:bodyPr wrap="square" anchor="t" lIns="0" rIns="0" tIns="0" bIns="0">
-            <a:spAutoFit/>
-          </a:bodyPr>
-          <a:lstStyle/>
-          <a:p>
-            <a:pPr algn="l"/>
-            <a:r>
-              <a:rPr sz="550" b="1" i="0" spc="300">
-                <a:solidFill>
-                  <a:srgbClr val="6B6690"/>
-                </a:solidFill>
-                <a:latin typeface="Calibri"/>
-              </a:rPr>
-              <a:t>ADMINISTERED THROUGH THE COMPETENCY ADVANCEMENT ACADEMY</a:t>
-            </a:r>
-          </a:p>
-        </p:txBody>
-      </p:sp>
-      <p:sp>
-        <p:nvSpPr>
-          <p:cNvPr id="6" name="TextBox 5"/>
-          <p:cNvSpPr txBox="1"/>
-          <p:nvPr/>
-        </p:nvSpPr>
-        <p:spPr>
-          <a:xfrm>
-            <a:off x="5992063" y="310896"/>
-            <a:ext cx="5669280" cy="127381"/>
-          </a:xfrm>
-          <a:prstGeom prst="rect">
-            <a:avLst/>
-          </a:prstGeom>
-          <a:noFill/>
-        </p:spPr>
-        <p:txBody>
-          <a:bodyPr wrap="square" anchor="t" lIns="0" rIns="0" tIns="0" bIns="0">
-            <a:spAutoFit/>
-          </a:bodyPr>
-          <a:lstStyle/>
-          <a:p>
-            <a:pPr algn="r"/>
-            <a:r>
-              <a:rPr sz="550" b="1" i="0" spc="300">
-                <a:solidFill>
-                  <a:srgbClr val="6B6690"/>
-                </a:solidFill>
-                <a:latin typeface="Calibri"/>
-              </a:rPr>
-              <a:t>WEEK 4  ·  DAY 5  ·  KALPA GLOBAL CAPABILITY CENTRE</a:t>
+              <a:t>WEEK 4  ·  FRIDAY  ·  FLIPKART, LUCKNOW  ·  FALLBACK</a:t>
             </a:r>
           </a:p>
         </p:txBody>
@@ -13646,7 +12800,1226 @@
                 </a:solidFill>
                 <a:latin typeface="Calibri"/>
               </a:rPr>
-              <a:t>S7  ·  8 / 15</a:t>
+              <a:t>S7  ·  7 / 14</a:t>
+            </a:r>
+          </a:p>
+        </p:txBody>
+      </p:sp>
+    </p:spTree>
+  </p:cSld>
+  <p:clrMapOvr>
+    <a:masterClrMapping/>
+  </p:clrMapOvr>
+</p:sld>
+</file>
+
+<file path=ppt/slides/slide8.xml><?xml version="1.0" encoding="utf-8"?>
+<p:sld xmlns:a="http://schemas.openxmlformats.org/drawingml/2006/main" xmlns:p="http://schemas.openxmlformats.org/presentationml/2006/main" xmlns:r="http://schemas.openxmlformats.org/officeDocument/2006/relationships">
+  <p:cSld>
+    <p:spTree>
+      <p:nvGrpSpPr>
+        <p:cNvPr id="1" name=""/>
+        <p:cNvGrpSpPr/>
+        <p:nvPr/>
+      </p:nvGrpSpPr>
+      <p:grpSpPr/>
+      <p:pic>
+        <p:nvPicPr>
+          <p:cNvPr id="2" name="Picture 1" descr="bg_light.jpg"/>
+          <p:cNvPicPr>
+            <a:picLocks noChangeAspect="1"/>
+          </p:cNvPicPr>
+          <p:nvPr/>
+        </p:nvPicPr>
+        <p:blipFill>
+          <a:blip r:embed="rId2"/>
+          <a:stretch>
+            <a:fillRect/>
+          </a:stretch>
+        </p:blipFill>
+        <p:spPr>
+          <a:xfrm>
+            <a:off x="0" y="0"/>
+            <a:ext cx="12191695" cy="6858000"/>
+          </a:xfrm>
+          <a:prstGeom prst="rect">
+            <a:avLst/>
+          </a:prstGeom>
+        </p:spPr>
+      </p:pic>
+      <p:pic>
+        <p:nvPicPr>
+          <p:cNvPr id="3" name="Picture 2" descr="iitgn_logo.png"/>
+          <p:cNvPicPr>
+            <a:picLocks noChangeAspect="1"/>
+          </p:cNvPicPr>
+          <p:nvPr/>
+        </p:nvPicPr>
+        <p:blipFill>
+          <a:blip r:embed="rId3"/>
+          <a:stretch>
+            <a:fillRect/>
+          </a:stretch>
+        </p:blipFill>
+        <p:spPr>
+          <a:xfrm>
+            <a:off x="530352" y="201168"/>
+            <a:ext cx="420624" cy="420624"/>
+          </a:xfrm>
+          <a:prstGeom prst="rect">
+            <a:avLst/>
+          </a:prstGeom>
+        </p:spPr>
+      </p:pic>
+      <p:sp>
+        <p:nvSpPr>
+          <p:cNvPr id="4" name="TextBox 3"/>
+          <p:cNvSpPr txBox="1"/>
+          <p:nvPr/>
+        </p:nvSpPr>
+        <p:spPr>
+          <a:xfrm>
+            <a:off x="1042416" y="228600"/>
+            <a:ext cx="5120640" cy="185166"/>
+          </a:xfrm>
+          <a:prstGeom prst="rect">
+            <a:avLst/>
+          </a:prstGeom>
+          <a:noFill/>
+        </p:spPr>
+        <p:txBody>
+          <a:bodyPr wrap="square" anchor="t" lIns="0" rIns="0" tIns="0" bIns="0">
+            <a:spAutoFit/>
+          </a:bodyPr>
+          <a:lstStyle/>
+          <a:p>
+            <a:pPr algn="l"/>
+            <a:r>
+              <a:rPr sz="900" b="1" i="0">
+                <a:solidFill>
+                  <a:srgbClr val="1A0F5C"/>
+                </a:solidFill>
+                <a:latin typeface="Calibri"/>
+              </a:rPr>
+              <a:t>Indian Institute of Technology Gandhinagar</a:t>
+            </a:r>
+          </a:p>
+        </p:txBody>
+      </p:sp>
+      <p:sp>
+        <p:nvSpPr>
+          <p:cNvPr id="5" name="TextBox 4"/>
+          <p:cNvSpPr txBox="1"/>
+          <p:nvPr/>
+        </p:nvSpPr>
+        <p:spPr>
+          <a:xfrm>
+            <a:off x="1042416" y="420623"/>
+            <a:ext cx="5852160" cy="127381"/>
+          </a:xfrm>
+          <a:prstGeom prst="rect">
+            <a:avLst/>
+          </a:prstGeom>
+          <a:noFill/>
+        </p:spPr>
+        <p:txBody>
+          <a:bodyPr wrap="square" anchor="t" lIns="0" rIns="0" tIns="0" bIns="0">
+            <a:spAutoFit/>
+          </a:bodyPr>
+          <a:lstStyle/>
+          <a:p>
+            <a:pPr algn="l"/>
+            <a:r>
+              <a:rPr sz="550" b="1" i="0" spc="300">
+                <a:solidFill>
+                  <a:srgbClr val="6B6690"/>
+                </a:solidFill>
+                <a:latin typeface="Calibri"/>
+              </a:rPr>
+              <a:t>ADMINISTERED THROUGH THE COMPETENCY ADVANCEMENT ACADEMY</a:t>
+            </a:r>
+          </a:p>
+        </p:txBody>
+      </p:sp>
+      <p:sp>
+        <p:nvSpPr>
+          <p:cNvPr id="6" name="TextBox 5"/>
+          <p:cNvSpPr txBox="1"/>
+          <p:nvPr/>
+        </p:nvSpPr>
+        <p:spPr>
+          <a:xfrm>
+            <a:off x="5992063" y="310896"/>
+            <a:ext cx="5669280" cy="127381"/>
+          </a:xfrm>
+          <a:prstGeom prst="rect">
+            <a:avLst/>
+          </a:prstGeom>
+          <a:noFill/>
+        </p:spPr>
+        <p:txBody>
+          <a:bodyPr wrap="square" anchor="t" lIns="0" rIns="0" tIns="0" bIns="0">
+            <a:spAutoFit/>
+          </a:bodyPr>
+          <a:lstStyle/>
+          <a:p>
+            <a:pPr algn="r"/>
+            <a:r>
+              <a:rPr sz="550" b="1" i="0" spc="300">
+                <a:solidFill>
+                  <a:srgbClr val="6B6690"/>
+                </a:solidFill>
+                <a:latin typeface="Calibri"/>
+              </a:rPr>
+              <a:t>WEEK 4  ·  FRIDAY  ·  FLIPKART, LUCKNOW  ·  FALLBACK</a:t>
+            </a:r>
+          </a:p>
+        </p:txBody>
+      </p:sp>
+      <p:sp>
+        <p:nvSpPr>
+          <p:cNvPr id="7" name="TextBox 6"/>
+          <p:cNvSpPr txBox="1"/>
+          <p:nvPr/>
+        </p:nvSpPr>
+        <p:spPr>
+          <a:xfrm>
+            <a:off x="530352" y="676656"/>
+            <a:ext cx="11130991" cy="512064"/>
+          </a:xfrm>
+          <a:prstGeom prst="rect">
+            <a:avLst/>
+          </a:prstGeom>
+          <a:noFill/>
+        </p:spPr>
+        <p:txBody>
+          <a:bodyPr wrap="square" anchor="b" lIns="0" rIns="0" tIns="0" bIns="0">
+            <a:spAutoFit/>
+          </a:bodyPr>
+          <a:lstStyle/>
+          <a:p>
+            <a:pPr algn="l"/>
+            <a:r>
+              <a:rPr sz="2600" b="0" i="0">
+                <a:solidFill>
+                  <a:srgbClr val="1A0F5C"/>
+                </a:solidFill>
+                <a:latin typeface="Georgia"/>
+              </a:rPr>
+              <a:t>Which rule swings most through the festival?</a:t>
+            </a:r>
+          </a:p>
+        </p:txBody>
+      </p:sp>
+      <p:sp>
+        <p:nvSpPr>
+          <p:cNvPr id="8" name="TextBox 7"/>
+          <p:cNvSpPr txBox="1"/>
+          <p:nvPr/>
+        </p:nvSpPr>
+        <p:spPr>
+          <a:xfrm>
+            <a:off x="530352" y="1243584"/>
+            <a:ext cx="11130991" cy="234696"/>
+          </a:xfrm>
+          <a:prstGeom prst="rect">
+            <a:avLst/>
+          </a:prstGeom>
+          <a:noFill/>
+        </p:spPr>
+        <p:txBody>
+          <a:bodyPr wrap="square" anchor="t" lIns="0" rIns="0" tIns="0" bIns="0">
+            <a:spAutoFit/>
+          </a:bodyPr>
+          <a:lstStyle/>
+          <a:p>
+            <a:pPr algn="l"/>
+            <a:r>
+              <a:rPr sz="1200" b="0" i="0">
+                <a:solidFill>
+                  <a:srgbClr val="6B6690"/>
+                </a:solidFill>
+                <a:latin typeface="Calibri"/>
+              </a:rPr>
+              <a:t>Over the five one-week forecasts, whose average miss is larger, and by how much?</a:t>
+            </a:r>
+          </a:p>
+        </p:txBody>
+      </p:sp>
+      <p:sp>
+        <p:nvSpPr>
+          <p:cNvPr id="9" name="Rounded Rectangle 8"/>
+          <p:cNvSpPr/>
+          <p:nvPr/>
+        </p:nvSpPr>
+        <p:spPr>
+          <a:xfrm>
+            <a:off x="530352" y="1956816"/>
+            <a:ext cx="2645587" cy="2195576"/>
+          </a:xfrm>
+          <a:prstGeom prst="roundRect">
+            <a:avLst>
+              <a:gd name="adj" fmla="val 5000"/>
+            </a:avLst>
+          </a:prstGeom>
+          <a:solidFill>
+            <a:srgbClr val="FFFFFF"/>
+          </a:solidFill>
+          <a:ln w="9525">
+            <a:solidFill>
+              <a:srgbClr val="E4E1F1"/>
+            </a:solidFill>
+          </a:ln>
+          <a:effectLst>
+            <a:outerShdw blurRad="76200" dist="19050" dir="5400000" algn="bl" rotWithShape="0">
+              <a:srgbClr val="1A0F5C">
+                <a:alpha val="12000"/>
+              </a:srgbClr>
+            </a:outerShdw>
+          </a:effectLst>
+        </p:spPr>
+        <p:style>
+          <a:lnRef idx="1">
+            <a:schemeClr val="accent1"/>
+          </a:lnRef>
+          <a:fillRef idx="3">
+            <a:schemeClr val="accent1"/>
+          </a:fillRef>
+          <a:effectRef idx="2">
+            <a:schemeClr val="accent1"/>
+          </a:effectRef>
+          <a:fontRef idx="minor">
+            <a:schemeClr val="lt1"/>
+          </a:fontRef>
+        </p:style>
+        <p:txBody>
+          <a:bodyPr rtlCol="0" anchor="ctr" wrap="square"/>
+          <a:lstStyle/>
+          <a:p>
+            <a:pPr algn="ctr"/>
+          </a:p>
+        </p:txBody>
+      </p:sp>
+      <p:sp>
+        <p:nvSpPr>
+          <p:cNvPr id="10" name="Oval 9"/>
+          <p:cNvSpPr/>
+          <p:nvPr/>
+        </p:nvSpPr>
+        <p:spPr>
+          <a:xfrm>
+            <a:off x="731519" y="2157984"/>
+            <a:ext cx="457200" cy="457200"/>
+          </a:xfrm>
+          <a:prstGeom prst="ellipse">
+            <a:avLst/>
+          </a:prstGeom>
+          <a:solidFill>
+            <a:srgbClr val="EEEAFB"/>
+          </a:solidFill>
+          <a:ln>
+            <a:noFill/>
+          </a:ln>
+          <a:effectLst/>
+        </p:spPr>
+        <p:style>
+          <a:lnRef idx="1">
+            <a:schemeClr val="accent1"/>
+          </a:lnRef>
+          <a:fillRef idx="3">
+            <a:schemeClr val="accent1"/>
+          </a:fillRef>
+          <a:effectRef idx="2">
+            <a:schemeClr val="accent1"/>
+          </a:effectRef>
+          <a:fontRef idx="minor">
+            <a:schemeClr val="lt1"/>
+          </a:fontRef>
+        </p:style>
+        <p:txBody>
+          <a:bodyPr rtlCol="0" anchor="ctr" wrap="square"/>
+          <a:lstStyle/>
+          <a:p>
+            <a:pPr algn="ctr"/>
+          </a:p>
+        </p:txBody>
+      </p:sp>
+      <p:pic>
+        <p:nvPicPr>
+          <p:cNvPr id="11" name="Picture 10" descr="list_637b34e7c72a.png"/>
+          <p:cNvPicPr>
+            <a:picLocks noChangeAspect="1"/>
+          </p:cNvPicPr>
+          <p:nvPr/>
+        </p:nvPicPr>
+        <p:blipFill>
+          <a:blip r:embed="rId4"/>
+          <a:stretch>
+            <a:fillRect/>
+          </a:stretch>
+        </p:blipFill>
+        <p:spPr>
+          <a:xfrm>
+            <a:off x="841247" y="2267712"/>
+            <a:ext cx="237744" cy="237744"/>
+          </a:xfrm>
+          <a:prstGeom prst="rect">
+            <a:avLst/>
+          </a:prstGeom>
+        </p:spPr>
+      </p:pic>
+      <p:sp>
+        <p:nvSpPr>
+          <p:cNvPr id="12" name="TextBox 11"/>
+          <p:cNvSpPr txBox="1"/>
+          <p:nvPr/>
+        </p:nvSpPr>
+        <p:spPr>
+          <a:xfrm>
+            <a:off x="731519" y="2724912"/>
+            <a:ext cx="2243251" cy="160401"/>
+          </a:xfrm>
+          <a:prstGeom prst="rect">
+            <a:avLst/>
+          </a:prstGeom>
+          <a:noFill/>
+        </p:spPr>
+        <p:txBody>
+          <a:bodyPr wrap="square" anchor="t" lIns="0" rIns="0" tIns="0" bIns="0">
+            <a:spAutoFit/>
+          </a:bodyPr>
+          <a:lstStyle/>
+          <a:p>
+            <a:pPr algn="l"/>
+            <a:r>
+              <a:rPr sz="750" b="1" i="0" spc="250">
+                <a:solidFill>
+                  <a:srgbClr val="5B3FD6"/>
+                </a:solidFill>
+                <a:latin typeface="Calibri"/>
+              </a:rPr>
+              <a:t>A</a:t>
+            </a:r>
+          </a:p>
+        </p:txBody>
+      </p:sp>
+      <p:sp>
+        <p:nvSpPr>
+          <p:cNvPr id="13" name="TextBox 12"/>
+          <p:cNvSpPr txBox="1"/>
+          <p:nvPr/>
+        </p:nvSpPr>
+        <p:spPr>
+          <a:xfrm>
+            <a:off x="731519" y="2962656"/>
+            <a:ext cx="2243251" cy="498856"/>
+          </a:xfrm>
+          <a:prstGeom prst="rect">
+            <a:avLst/>
+          </a:prstGeom>
+          <a:noFill/>
+        </p:spPr>
+        <p:txBody>
+          <a:bodyPr wrap="square" anchor="t" lIns="0" rIns="0" tIns="0" bIns="0">
+            <a:spAutoFit/>
+          </a:bodyPr>
+          <a:lstStyle/>
+          <a:p>
+            <a:pPr algn="l"/>
+            <a:r>
+              <a:rPr sz="1400" b="1" i="0">
+                <a:solidFill>
+                  <a:srgbClr val="1A0F5C"/>
+                </a:solidFill>
+                <a:latin typeface="Calibri"/>
+              </a:rPr>
+              <a:t>Naive, by about ten times</a:t>
+            </a:r>
+          </a:p>
+        </p:txBody>
+      </p:sp>
+      <p:sp>
+        <p:nvSpPr>
+          <p:cNvPr id="14" name="TextBox 13"/>
+          <p:cNvSpPr txBox="1"/>
+          <p:nvPr/>
+        </p:nvSpPr>
+        <p:spPr>
+          <a:xfrm>
+            <a:off x="731519" y="3534664"/>
+            <a:ext cx="2243251" cy="399796"/>
+          </a:xfrm>
+          <a:prstGeom prst="rect">
+            <a:avLst/>
+          </a:prstGeom>
+          <a:noFill/>
+        </p:spPr>
+        <p:txBody>
+          <a:bodyPr wrap="square" anchor="t" lIns="0" rIns="0" tIns="0" bIns="0">
+            <a:spAutoFit/>
+          </a:bodyPr>
+          <a:lstStyle/>
+          <a:p>
+            <a:pPr algn="l"/>
+            <a:r>
+              <a:rPr sz="1100" b="0" i="0">
+                <a:solidFill>
+                  <a:srgbClr val="6B6690"/>
+                </a:solidFill>
+                <a:latin typeface="Calibri"/>
+              </a:rPr>
+              <a:t>The week before is a poor guide when weeks change fast.</a:t>
+            </a:r>
+          </a:p>
+        </p:txBody>
+      </p:sp>
+      <p:sp>
+        <p:nvSpPr>
+          <p:cNvPr id="15" name="Rounded Rectangle 14"/>
+          <p:cNvSpPr/>
+          <p:nvPr/>
+        </p:nvSpPr>
+        <p:spPr>
+          <a:xfrm>
+            <a:off x="3358819" y="1956816"/>
+            <a:ext cx="2645587" cy="2195576"/>
+          </a:xfrm>
+          <a:prstGeom prst="roundRect">
+            <a:avLst>
+              <a:gd name="adj" fmla="val 5000"/>
+            </a:avLst>
+          </a:prstGeom>
+          <a:solidFill>
+            <a:srgbClr val="FFFFFF"/>
+          </a:solidFill>
+          <a:ln w="9525">
+            <a:solidFill>
+              <a:srgbClr val="E4E1F1"/>
+            </a:solidFill>
+          </a:ln>
+          <a:effectLst>
+            <a:outerShdw blurRad="76200" dist="19050" dir="5400000" algn="bl" rotWithShape="0">
+              <a:srgbClr val="1A0F5C">
+                <a:alpha val="12000"/>
+              </a:srgbClr>
+            </a:outerShdw>
+          </a:effectLst>
+        </p:spPr>
+        <p:style>
+          <a:lnRef idx="1">
+            <a:schemeClr val="accent1"/>
+          </a:lnRef>
+          <a:fillRef idx="3">
+            <a:schemeClr val="accent1"/>
+          </a:fillRef>
+          <a:effectRef idx="2">
+            <a:schemeClr val="accent1"/>
+          </a:effectRef>
+          <a:fontRef idx="minor">
+            <a:schemeClr val="lt1"/>
+          </a:fontRef>
+        </p:style>
+        <p:txBody>
+          <a:bodyPr rtlCol="0" anchor="ctr" wrap="square"/>
+          <a:lstStyle/>
+          <a:p>
+            <a:pPr algn="ctr"/>
+          </a:p>
+        </p:txBody>
+      </p:sp>
+      <p:sp>
+        <p:nvSpPr>
+          <p:cNvPr id="16" name="Oval 15"/>
+          <p:cNvSpPr/>
+          <p:nvPr/>
+        </p:nvSpPr>
+        <p:spPr>
+          <a:xfrm>
+            <a:off x="3559987" y="2157984"/>
+            <a:ext cx="457200" cy="457200"/>
+          </a:xfrm>
+          <a:prstGeom prst="ellipse">
+            <a:avLst/>
+          </a:prstGeom>
+          <a:solidFill>
+            <a:srgbClr val="EEEAFB"/>
+          </a:solidFill>
+          <a:ln>
+            <a:noFill/>
+          </a:ln>
+          <a:effectLst/>
+        </p:spPr>
+        <p:style>
+          <a:lnRef idx="1">
+            <a:schemeClr val="accent1"/>
+          </a:lnRef>
+          <a:fillRef idx="3">
+            <a:schemeClr val="accent1"/>
+          </a:fillRef>
+          <a:effectRef idx="2">
+            <a:schemeClr val="accent1"/>
+          </a:effectRef>
+          <a:fontRef idx="minor">
+            <a:schemeClr val="lt1"/>
+          </a:fontRef>
+        </p:style>
+        <p:txBody>
+          <a:bodyPr rtlCol="0" anchor="ctr" wrap="square"/>
+          <a:lstStyle/>
+          <a:p>
+            <a:pPr algn="ctr"/>
+          </a:p>
+        </p:txBody>
+      </p:sp>
+      <p:pic>
+        <p:nvPicPr>
+          <p:cNvPr id="17" name="Picture 16" descr="list_637b34e7c72a.png"/>
+          <p:cNvPicPr>
+            <a:picLocks noChangeAspect="1"/>
+          </p:cNvPicPr>
+          <p:nvPr/>
+        </p:nvPicPr>
+        <p:blipFill>
+          <a:blip r:embed="rId4"/>
+          <a:stretch>
+            <a:fillRect/>
+          </a:stretch>
+        </p:blipFill>
+        <p:spPr>
+          <a:xfrm>
+            <a:off x="3669715" y="2267712"/>
+            <a:ext cx="237744" cy="237744"/>
+          </a:xfrm>
+          <a:prstGeom prst="rect">
+            <a:avLst/>
+          </a:prstGeom>
+        </p:spPr>
+      </p:pic>
+      <p:sp>
+        <p:nvSpPr>
+          <p:cNvPr id="18" name="TextBox 17"/>
+          <p:cNvSpPr txBox="1"/>
+          <p:nvPr/>
+        </p:nvSpPr>
+        <p:spPr>
+          <a:xfrm>
+            <a:off x="3559987" y="2724912"/>
+            <a:ext cx="2243251" cy="160401"/>
+          </a:xfrm>
+          <a:prstGeom prst="rect">
+            <a:avLst/>
+          </a:prstGeom>
+          <a:noFill/>
+        </p:spPr>
+        <p:txBody>
+          <a:bodyPr wrap="square" anchor="t" lIns="0" rIns="0" tIns="0" bIns="0">
+            <a:spAutoFit/>
+          </a:bodyPr>
+          <a:lstStyle/>
+          <a:p>
+            <a:pPr algn="l"/>
+            <a:r>
+              <a:rPr sz="750" b="1" i="0" spc="250">
+                <a:solidFill>
+                  <a:srgbClr val="5B3FD6"/>
+                </a:solidFill>
+                <a:latin typeface="Calibri"/>
+              </a:rPr>
+              <a:t>B</a:t>
+            </a:r>
+          </a:p>
+        </p:txBody>
+      </p:sp>
+      <p:sp>
+        <p:nvSpPr>
+          <p:cNvPr id="19" name="TextBox 18"/>
+          <p:cNvSpPr txBox="1"/>
+          <p:nvPr/>
+        </p:nvSpPr>
+        <p:spPr>
+          <a:xfrm>
+            <a:off x="3559987" y="2962656"/>
+            <a:ext cx="2243251" cy="498856"/>
+          </a:xfrm>
+          <a:prstGeom prst="rect">
+            <a:avLst/>
+          </a:prstGeom>
+          <a:noFill/>
+        </p:spPr>
+        <p:txBody>
+          <a:bodyPr wrap="square" anchor="t" lIns="0" rIns="0" tIns="0" bIns="0">
+            <a:spAutoFit/>
+          </a:bodyPr>
+          <a:lstStyle/>
+          <a:p>
+            <a:pPr algn="l"/>
+            <a:r>
+              <a:rPr sz="1400" b="1" i="0">
+                <a:solidFill>
+                  <a:srgbClr val="1A0F5C"/>
+                </a:solidFill>
+                <a:latin typeface="Calibri"/>
+              </a:rPr>
+              <a:t>Naive, by about thirty times</a:t>
+            </a:r>
+          </a:p>
+        </p:txBody>
+      </p:sp>
+      <p:sp>
+        <p:nvSpPr>
+          <p:cNvPr id="20" name="TextBox 19"/>
+          <p:cNvSpPr txBox="1"/>
+          <p:nvPr/>
+        </p:nvSpPr>
+        <p:spPr>
+          <a:xfrm>
+            <a:off x="3559987" y="3534664"/>
+            <a:ext cx="2243251" cy="399796"/>
+          </a:xfrm>
+          <a:prstGeom prst="rect">
+            <a:avLst/>
+          </a:prstGeom>
+          <a:noFill/>
+        </p:spPr>
+        <p:txBody>
+          <a:bodyPr wrap="square" anchor="t" lIns="0" rIns="0" tIns="0" bIns="0">
+            <a:spAutoFit/>
+          </a:bodyPr>
+          <a:lstStyle/>
+          <a:p>
+            <a:pPr algn="l"/>
+            <a:r>
+              <a:rPr sz="1100" b="0" i="0">
+                <a:solidFill>
+                  <a:srgbClr val="6B6690"/>
+                </a:solidFill>
+                <a:latin typeface="Calibri"/>
+              </a:rPr>
+              <a:t>Every festive week differs sharply from the last.</a:t>
+            </a:r>
+          </a:p>
+        </p:txBody>
+      </p:sp>
+      <p:sp>
+        <p:nvSpPr>
+          <p:cNvPr id="21" name="Rounded Rectangle 20"/>
+          <p:cNvSpPr/>
+          <p:nvPr/>
+        </p:nvSpPr>
+        <p:spPr>
+          <a:xfrm>
+            <a:off x="6187287" y="1956816"/>
+            <a:ext cx="2645587" cy="2195576"/>
+          </a:xfrm>
+          <a:prstGeom prst="roundRect">
+            <a:avLst>
+              <a:gd name="adj" fmla="val 5000"/>
+            </a:avLst>
+          </a:prstGeom>
+          <a:solidFill>
+            <a:srgbClr val="FFFFFF"/>
+          </a:solidFill>
+          <a:ln w="9525">
+            <a:solidFill>
+              <a:srgbClr val="E4E1F1"/>
+            </a:solidFill>
+          </a:ln>
+          <a:effectLst>
+            <a:outerShdw blurRad="76200" dist="19050" dir="5400000" algn="bl" rotWithShape="0">
+              <a:srgbClr val="1A0F5C">
+                <a:alpha val="12000"/>
+              </a:srgbClr>
+            </a:outerShdw>
+          </a:effectLst>
+        </p:spPr>
+        <p:style>
+          <a:lnRef idx="1">
+            <a:schemeClr val="accent1"/>
+          </a:lnRef>
+          <a:fillRef idx="3">
+            <a:schemeClr val="accent1"/>
+          </a:fillRef>
+          <a:effectRef idx="2">
+            <a:schemeClr val="accent1"/>
+          </a:effectRef>
+          <a:fontRef idx="minor">
+            <a:schemeClr val="lt1"/>
+          </a:fontRef>
+        </p:style>
+        <p:txBody>
+          <a:bodyPr rtlCol="0" anchor="ctr" wrap="square"/>
+          <a:lstStyle/>
+          <a:p>
+            <a:pPr algn="ctr"/>
+          </a:p>
+        </p:txBody>
+      </p:sp>
+      <p:sp>
+        <p:nvSpPr>
+          <p:cNvPr id="22" name="Oval 21"/>
+          <p:cNvSpPr/>
+          <p:nvPr/>
+        </p:nvSpPr>
+        <p:spPr>
+          <a:xfrm>
+            <a:off x="6388455" y="2157984"/>
+            <a:ext cx="457200" cy="457200"/>
+          </a:xfrm>
+          <a:prstGeom prst="ellipse">
+            <a:avLst/>
+          </a:prstGeom>
+          <a:solidFill>
+            <a:srgbClr val="EEEAFB"/>
+          </a:solidFill>
+          <a:ln>
+            <a:noFill/>
+          </a:ln>
+          <a:effectLst/>
+        </p:spPr>
+        <p:style>
+          <a:lnRef idx="1">
+            <a:schemeClr val="accent1"/>
+          </a:lnRef>
+          <a:fillRef idx="3">
+            <a:schemeClr val="accent1"/>
+          </a:fillRef>
+          <a:effectRef idx="2">
+            <a:schemeClr val="accent1"/>
+          </a:effectRef>
+          <a:fontRef idx="minor">
+            <a:schemeClr val="lt1"/>
+          </a:fontRef>
+        </p:style>
+        <p:txBody>
+          <a:bodyPr rtlCol="0" anchor="ctr" wrap="square"/>
+          <a:lstStyle/>
+          <a:p>
+            <a:pPr algn="ctr"/>
+          </a:p>
+        </p:txBody>
+      </p:sp>
+      <p:pic>
+        <p:nvPicPr>
+          <p:cNvPr id="23" name="Picture 22" descr="list_637b34e7c72a.png"/>
+          <p:cNvPicPr>
+            <a:picLocks noChangeAspect="1"/>
+          </p:cNvPicPr>
+          <p:nvPr/>
+        </p:nvPicPr>
+        <p:blipFill>
+          <a:blip r:embed="rId4"/>
+          <a:stretch>
+            <a:fillRect/>
+          </a:stretch>
+        </p:blipFill>
+        <p:spPr>
+          <a:xfrm>
+            <a:off x="6498183" y="2267712"/>
+            <a:ext cx="237744" cy="237744"/>
+          </a:xfrm>
+          <a:prstGeom prst="rect">
+            <a:avLst/>
+          </a:prstGeom>
+        </p:spPr>
+      </p:pic>
+      <p:sp>
+        <p:nvSpPr>
+          <p:cNvPr id="24" name="TextBox 23"/>
+          <p:cNvSpPr txBox="1"/>
+          <p:nvPr/>
+        </p:nvSpPr>
+        <p:spPr>
+          <a:xfrm>
+            <a:off x="6388455" y="2724912"/>
+            <a:ext cx="2243251" cy="160401"/>
+          </a:xfrm>
+          <a:prstGeom prst="rect">
+            <a:avLst/>
+          </a:prstGeom>
+          <a:noFill/>
+        </p:spPr>
+        <p:txBody>
+          <a:bodyPr wrap="square" anchor="t" lIns="0" rIns="0" tIns="0" bIns="0">
+            <a:spAutoFit/>
+          </a:bodyPr>
+          <a:lstStyle/>
+          <a:p>
+            <a:pPr algn="l"/>
+            <a:r>
+              <a:rPr sz="750" b="1" i="0" spc="250">
+                <a:solidFill>
+                  <a:srgbClr val="5B3FD6"/>
+                </a:solidFill>
+                <a:latin typeface="Calibri"/>
+              </a:rPr>
+              <a:t>C</a:t>
+            </a:r>
+          </a:p>
+        </p:txBody>
+      </p:sp>
+      <p:sp>
+        <p:nvSpPr>
+          <p:cNvPr id="25" name="TextBox 24"/>
+          <p:cNvSpPr txBox="1"/>
+          <p:nvPr/>
+        </p:nvSpPr>
+        <p:spPr>
+          <a:xfrm>
+            <a:off x="6388455" y="2962656"/>
+            <a:ext cx="2243251" cy="498856"/>
+          </a:xfrm>
+          <a:prstGeom prst="rect">
+            <a:avLst/>
+          </a:prstGeom>
+          <a:noFill/>
+        </p:spPr>
+        <p:txBody>
+          <a:bodyPr wrap="square" anchor="t" lIns="0" rIns="0" tIns="0" bIns="0">
+            <a:spAutoFit/>
+          </a:bodyPr>
+          <a:lstStyle/>
+          <a:p>
+            <a:pPr algn="l"/>
+            <a:r>
+              <a:rPr sz="1400" b="1" i="0">
+                <a:solidFill>
+                  <a:srgbClr val="1A0F5C"/>
+                </a:solidFill>
+                <a:latin typeface="Calibri"/>
+              </a:rPr>
+              <a:t>Festival-aligned, narrowly</a:t>
+            </a:r>
+          </a:p>
+        </p:txBody>
+      </p:sp>
+      <p:sp>
+        <p:nvSpPr>
+          <p:cNvPr id="26" name="TextBox 25"/>
+          <p:cNvSpPr txBox="1"/>
+          <p:nvPr/>
+        </p:nvSpPr>
+        <p:spPr>
+          <a:xfrm>
+            <a:off x="6388455" y="3534664"/>
+            <a:ext cx="2243251" cy="399796"/>
+          </a:xfrm>
+          <a:prstGeom prst="rect">
+            <a:avLst/>
+          </a:prstGeom>
+          <a:noFill/>
+        </p:spPr>
+        <p:txBody>
+          <a:bodyPr wrap="square" anchor="t" lIns="0" rIns="0" tIns="0" bIns="0">
+            <a:spAutoFit/>
+          </a:bodyPr>
+          <a:lstStyle/>
+          <a:p>
+            <a:pPr algn="l"/>
+            <a:r>
+              <a:rPr sz="1100" b="0" i="0">
+                <a:solidFill>
+                  <a:srgbClr val="6B6690"/>
+                </a:solidFill>
+                <a:latin typeface="Calibri"/>
+              </a:rPr>
+              <a:t>Copying 2024 adds 2024's own noise.</a:t>
+            </a:r>
+          </a:p>
+        </p:txBody>
+      </p:sp>
+      <p:sp>
+        <p:nvSpPr>
+          <p:cNvPr id="27" name="Rounded Rectangle 26"/>
+          <p:cNvSpPr/>
+          <p:nvPr/>
+        </p:nvSpPr>
+        <p:spPr>
+          <a:xfrm>
+            <a:off x="9015755" y="1956816"/>
+            <a:ext cx="2645587" cy="2195576"/>
+          </a:xfrm>
+          <a:prstGeom prst="roundRect">
+            <a:avLst>
+              <a:gd name="adj" fmla="val 5000"/>
+            </a:avLst>
+          </a:prstGeom>
+          <a:solidFill>
+            <a:srgbClr val="FFFFFF"/>
+          </a:solidFill>
+          <a:ln w="9525">
+            <a:solidFill>
+              <a:srgbClr val="E4E1F1"/>
+            </a:solidFill>
+          </a:ln>
+          <a:effectLst>
+            <a:outerShdw blurRad="76200" dist="19050" dir="5400000" algn="bl" rotWithShape="0">
+              <a:srgbClr val="1A0F5C">
+                <a:alpha val="12000"/>
+              </a:srgbClr>
+            </a:outerShdw>
+          </a:effectLst>
+        </p:spPr>
+        <p:style>
+          <a:lnRef idx="1">
+            <a:schemeClr val="accent1"/>
+          </a:lnRef>
+          <a:fillRef idx="3">
+            <a:schemeClr val="accent1"/>
+          </a:fillRef>
+          <a:effectRef idx="2">
+            <a:schemeClr val="accent1"/>
+          </a:effectRef>
+          <a:fontRef idx="minor">
+            <a:schemeClr val="lt1"/>
+          </a:fontRef>
+        </p:style>
+        <p:txBody>
+          <a:bodyPr rtlCol="0" anchor="ctr" wrap="square"/>
+          <a:lstStyle/>
+          <a:p>
+            <a:pPr algn="ctr"/>
+          </a:p>
+        </p:txBody>
+      </p:sp>
+      <p:sp>
+        <p:nvSpPr>
+          <p:cNvPr id="28" name="Oval 27"/>
+          <p:cNvSpPr/>
+          <p:nvPr/>
+        </p:nvSpPr>
+        <p:spPr>
+          <a:xfrm>
+            <a:off x="9216923" y="2157984"/>
+            <a:ext cx="457200" cy="457200"/>
+          </a:xfrm>
+          <a:prstGeom prst="ellipse">
+            <a:avLst/>
+          </a:prstGeom>
+          <a:solidFill>
+            <a:srgbClr val="EEEAFB"/>
+          </a:solidFill>
+          <a:ln>
+            <a:noFill/>
+          </a:ln>
+          <a:effectLst/>
+        </p:spPr>
+        <p:style>
+          <a:lnRef idx="1">
+            <a:schemeClr val="accent1"/>
+          </a:lnRef>
+          <a:fillRef idx="3">
+            <a:schemeClr val="accent1"/>
+          </a:fillRef>
+          <a:effectRef idx="2">
+            <a:schemeClr val="accent1"/>
+          </a:effectRef>
+          <a:fontRef idx="minor">
+            <a:schemeClr val="lt1"/>
+          </a:fontRef>
+        </p:style>
+        <p:txBody>
+          <a:bodyPr rtlCol="0" anchor="ctr" wrap="square"/>
+          <a:lstStyle/>
+          <a:p>
+            <a:pPr algn="ctr"/>
+          </a:p>
+        </p:txBody>
+      </p:sp>
+      <p:pic>
+        <p:nvPicPr>
+          <p:cNvPr id="29" name="Picture 28" descr="list_637b34e7c72a.png"/>
+          <p:cNvPicPr>
+            <a:picLocks noChangeAspect="1"/>
+          </p:cNvPicPr>
+          <p:nvPr/>
+        </p:nvPicPr>
+        <p:blipFill>
+          <a:blip r:embed="rId4"/>
+          <a:stretch>
+            <a:fillRect/>
+          </a:stretch>
+        </p:blipFill>
+        <p:spPr>
+          <a:xfrm>
+            <a:off x="9326651" y="2267712"/>
+            <a:ext cx="237744" cy="237744"/>
+          </a:xfrm>
+          <a:prstGeom prst="rect">
+            <a:avLst/>
+          </a:prstGeom>
+        </p:spPr>
+      </p:pic>
+      <p:sp>
+        <p:nvSpPr>
+          <p:cNvPr id="30" name="TextBox 29"/>
+          <p:cNvSpPr txBox="1"/>
+          <p:nvPr/>
+        </p:nvSpPr>
+        <p:spPr>
+          <a:xfrm>
+            <a:off x="9216923" y="2724912"/>
+            <a:ext cx="2243251" cy="160401"/>
+          </a:xfrm>
+          <a:prstGeom prst="rect">
+            <a:avLst/>
+          </a:prstGeom>
+          <a:noFill/>
+        </p:spPr>
+        <p:txBody>
+          <a:bodyPr wrap="square" anchor="t" lIns="0" rIns="0" tIns="0" bIns="0">
+            <a:spAutoFit/>
+          </a:bodyPr>
+          <a:lstStyle/>
+          <a:p>
+            <a:pPr algn="l"/>
+            <a:r>
+              <a:rPr sz="750" b="1" i="0" spc="250">
+                <a:solidFill>
+                  <a:srgbClr val="5B3FD6"/>
+                </a:solidFill>
+                <a:latin typeface="Calibri"/>
+              </a:rPr>
+              <a:t>D</a:t>
+            </a:r>
+          </a:p>
+        </p:txBody>
+      </p:sp>
+      <p:sp>
+        <p:nvSpPr>
+          <p:cNvPr id="31" name="TextBox 30"/>
+          <p:cNvSpPr txBox="1"/>
+          <p:nvPr/>
+        </p:nvSpPr>
+        <p:spPr>
+          <a:xfrm>
+            <a:off x="9216923" y="2962656"/>
+            <a:ext cx="2243251" cy="498856"/>
+          </a:xfrm>
+          <a:prstGeom prst="rect">
+            <a:avLst/>
+          </a:prstGeom>
+          <a:noFill/>
+        </p:spPr>
+        <p:txBody>
+          <a:bodyPr wrap="square" anchor="t" lIns="0" rIns="0" tIns="0" bIns="0">
+            <a:spAutoFit/>
+          </a:bodyPr>
+          <a:lstStyle/>
+          <a:p>
+            <a:pPr algn="l"/>
+            <a:r>
+              <a:rPr sz="1400" b="1" i="0">
+                <a:solidFill>
+                  <a:srgbClr val="1A0F5C"/>
+                </a:solidFill>
+                <a:latin typeface="Calibri"/>
+              </a:rPr>
+              <a:t>Level: one week ahead, both are close</a:t>
+            </a:r>
+          </a:p>
+        </p:txBody>
+      </p:sp>
+      <p:sp>
+        <p:nvSpPr>
+          <p:cNvPr id="32" name="TextBox 31"/>
+          <p:cNvSpPr txBox="1"/>
+          <p:nvPr/>
+        </p:nvSpPr>
+        <p:spPr>
+          <a:xfrm>
+            <a:off x="9216923" y="3534664"/>
+            <a:ext cx="2243251" cy="218186"/>
+          </a:xfrm>
+          <a:prstGeom prst="rect">
+            <a:avLst/>
+          </a:prstGeom>
+          <a:noFill/>
+        </p:spPr>
+        <p:txBody>
+          <a:bodyPr wrap="square" anchor="t" lIns="0" rIns="0" tIns="0" bIns="0">
+            <a:spAutoFit/>
+          </a:bodyPr>
+          <a:lstStyle/>
+          <a:p>
+            <a:pPr algn="l"/>
+            <a:r>
+              <a:rPr sz="1100" b="0" i="0">
+                <a:solidFill>
+                  <a:srgbClr val="6B6690"/>
+                </a:solidFill>
+                <a:latin typeface="Calibri"/>
+              </a:rPr>
+              <a:t>A week is short.</a:t>
+            </a:r>
+          </a:p>
+        </p:txBody>
+      </p:sp>
+      <p:sp>
+        <p:nvSpPr>
+          <p:cNvPr id="33" name="TextBox 32"/>
+          <p:cNvSpPr txBox="1"/>
+          <p:nvPr/>
+        </p:nvSpPr>
+        <p:spPr>
+          <a:xfrm>
+            <a:off x="530352" y="6437376"/>
+            <a:ext cx="9667951" cy="160401"/>
+          </a:xfrm>
+          <a:prstGeom prst="rect">
+            <a:avLst/>
+          </a:prstGeom>
+          <a:noFill/>
+        </p:spPr>
+        <p:txBody>
+          <a:bodyPr wrap="square" anchor="t" lIns="0" rIns="0" tIns="0" bIns="0">
+            <a:spAutoFit/>
+          </a:bodyPr>
+          <a:lstStyle/>
+          <a:p>
+            <a:pPr algn="l"/>
+            <a:r>
+              <a:rPr sz="750" b="0" i="0">
+                <a:solidFill>
+                  <a:srgbClr val="6B6690"/>
+                </a:solidFill>
+                <a:latin typeface="Calibri"/>
+              </a:rPr>
+              <a:t>Week 4 Day 5: how much is coming, and how wrong could we be</a:t>
+            </a:r>
+          </a:p>
+        </p:txBody>
+      </p:sp>
+      <p:sp>
+        <p:nvSpPr>
+          <p:cNvPr id="34" name="TextBox 33"/>
+          <p:cNvSpPr txBox="1"/>
+          <p:nvPr/>
+        </p:nvSpPr>
+        <p:spPr>
+          <a:xfrm>
+            <a:off x="10198303" y="6437376"/>
+            <a:ext cx="1463040" cy="160401"/>
+          </a:xfrm>
+          <a:prstGeom prst="rect">
+            <a:avLst/>
+          </a:prstGeom>
+          <a:noFill/>
+        </p:spPr>
+        <p:txBody>
+          <a:bodyPr wrap="square" anchor="t" lIns="0" rIns="0" tIns="0" bIns="0">
+            <a:spAutoFit/>
+          </a:bodyPr>
+          <a:lstStyle/>
+          <a:p>
+            <a:pPr algn="r"/>
+            <a:r>
+              <a:rPr sz="750" b="0" i="0">
+                <a:solidFill>
+                  <a:srgbClr val="6B6690"/>
+                </a:solidFill>
+                <a:latin typeface="Calibri"/>
+              </a:rPr>
+              <a:t>S8  ·  8 / 14</a:t>
             </a:r>
           </a:p>
         </p:txBody>
@@ -13817,7 +14190,7 @@
                 </a:solidFill>
                 <a:latin typeface="Calibri"/>
               </a:rPr>
-              <a:t>WEEK 4  ·  DAY 5  ·  KALPA GLOBAL CAPABILITY CENTRE</a:t>
+              <a:t>WEEK 4  ·  FRIDAY  ·  FLIPKART, LUCKNOW  ·  FALLBACK</a:t>
             </a:r>
           </a:p>
         </p:txBody>
@@ -13852,7 +14225,7 @@
                 </a:solidFill>
                 <a:latin typeface="Georgia"/>
               </a:rPr>
-              <a:t>Which rule swings most through the festival?</a:t>
+              <a:t>Answer: naive, by about thirty-five times</a:t>
             </a:r>
           </a:p>
         </p:txBody>
@@ -13887,112 +14260,14 @@
                 </a:solidFill>
                 <a:latin typeface="Calibri"/>
               </a:rPr>
-              <a:t>Over the five one-week forecasts, whose average miss is larger, and by how much?</a:t>
-            </a:r>
-          </a:p>
-        </p:txBody>
-      </p:sp>
-      <p:sp>
-        <p:nvSpPr>
-          <p:cNvPr id="9" name="Rounded Rectangle 8"/>
-          <p:cNvSpPr/>
-          <p:nvPr/>
-        </p:nvSpPr>
-        <p:spPr>
-          <a:xfrm>
-            <a:off x="530352" y="1956816"/>
-            <a:ext cx="2645587" cy="2195576"/>
-          </a:xfrm>
-          <a:prstGeom prst="roundRect">
-            <a:avLst>
-              <a:gd name="adj" fmla="val 5000"/>
-            </a:avLst>
-          </a:prstGeom>
-          <a:solidFill>
-            <a:srgbClr val="FFFFFF"/>
-          </a:solidFill>
-          <a:ln w="9525">
-            <a:solidFill>
-              <a:srgbClr val="E4E1F1"/>
-            </a:solidFill>
-          </a:ln>
-          <a:effectLst>
-            <a:outerShdw blurRad="76200" dist="19050" dir="5400000" algn="bl" rotWithShape="0">
-              <a:srgbClr val="1A0F5C">
-                <a:alpha val="12000"/>
-              </a:srgbClr>
-            </a:outerShdw>
-          </a:effectLst>
-        </p:spPr>
-        <p:style>
-          <a:lnRef idx="1">
-            <a:schemeClr val="accent1"/>
-          </a:lnRef>
-          <a:fillRef idx="3">
-            <a:schemeClr val="accent1"/>
-          </a:fillRef>
-          <a:effectRef idx="2">
-            <a:schemeClr val="accent1"/>
-          </a:effectRef>
-          <a:fontRef idx="minor">
-            <a:schemeClr val="lt1"/>
-          </a:fontRef>
-        </p:style>
-        <p:txBody>
-          <a:bodyPr rtlCol="0" anchor="ctr" wrap="square"/>
-          <a:lstStyle/>
-          <a:p>
-            <a:pPr algn="ctr"/>
-          </a:p>
-        </p:txBody>
-      </p:sp>
-      <p:sp>
-        <p:nvSpPr>
-          <p:cNvPr id="10" name="Oval 9"/>
-          <p:cNvSpPr/>
-          <p:nvPr/>
-        </p:nvSpPr>
-        <p:spPr>
-          <a:xfrm>
-            <a:off x="731519" y="2157984"/>
-            <a:ext cx="457200" cy="457200"/>
-          </a:xfrm>
-          <a:prstGeom prst="ellipse">
-            <a:avLst/>
-          </a:prstGeom>
-          <a:solidFill>
-            <a:srgbClr val="EEEAFB"/>
-          </a:solidFill>
-          <a:ln>
-            <a:noFill/>
-          </a:ln>
-          <a:effectLst/>
-        </p:spPr>
-        <p:style>
-          <a:lnRef idx="1">
-            <a:schemeClr val="accent1"/>
-          </a:lnRef>
-          <a:fillRef idx="3">
-            <a:schemeClr val="accent1"/>
-          </a:fillRef>
-          <a:effectRef idx="2">
-            <a:schemeClr val="accent1"/>
-          </a:effectRef>
-          <a:fontRef idx="minor">
-            <a:schemeClr val="lt1"/>
-          </a:fontRef>
-        </p:style>
-        <p:txBody>
-          <a:bodyPr rtlCol="0" anchor="ctr" wrap="square"/>
-          <a:lstStyle/>
-          <a:p>
-            <a:pPr algn="ctr"/>
+              <a:t>What does the rolling origin say about naive near a festival?</a:t>
+            </a:r>
           </a:p>
         </p:txBody>
       </p:sp>
       <p:pic>
         <p:nvPicPr>
-          <p:cNvPr id="11" name="Picture 10" descr="list_637b34e7c72a.png"/>
+          <p:cNvPr id="9" name="mermaid diagram" descr="C2_W04_D05_rolling_origin_STUDENT.png"/>
           <p:cNvPicPr>
             <a:picLocks noChangeAspect="1"/>
           </p:cNvPicPr>
@@ -14006,8 +14281,8 @@
         </p:blipFill>
         <p:spPr>
           <a:xfrm>
-            <a:off x="841247" y="2267712"/>
-            <a:ext cx="237744" cy="237744"/>
+            <a:off x="2400728" y="1664208"/>
+            <a:ext cx="7390239" cy="3215640"/>
           </a:xfrm>
           <a:prstGeom prst="rect">
             <a:avLst/>
@@ -14016,793 +14291,76 @@
       </p:pic>
       <p:sp>
         <p:nvSpPr>
+          <p:cNvPr id="10" name="picture caption"/>
+          <p:cNvSpPr txBox="1"/>
+          <p:nvPr/>
+        </p:nvSpPr>
+        <p:spPr>
+          <a:xfrm>
+            <a:off x="530352" y="4916424"/>
+            <a:ext cx="11130991" cy="316992"/>
+          </a:xfrm>
+          <a:prstGeom prst="rect">
+            <a:avLst/>
+          </a:prstGeom>
+          <a:noFill/>
+        </p:spPr>
+        <p:txBody>
+          <a:bodyPr wrap="square" anchor="t" lIns="0" rIns="0" tIns="0" bIns="0">
+            <a:spAutoFit/>
+          </a:bodyPr>
+          <a:lstStyle/>
+          <a:p>
+            <a:pPr algn="ctr"/>
+            <a:r>
+              <a:rPr sz="1200" b="0" i="0">
+                <a:solidFill>
+                  <a:srgbClr val="6B6690"/>
+                </a:solidFill>
+                <a:latin typeface="Calibri"/>
+              </a:rPr>
+              <a:t>Naive and festival-aligned, one week ahead from five origins</a:t>
+            </a:r>
+          </a:p>
+        </p:txBody>
+      </p:sp>
+      <p:sp>
+        <p:nvSpPr>
+          <p:cNvPr id="11" name="TextBox 10"/>
+          <p:cNvSpPr txBox="1"/>
+          <p:nvPr/>
+        </p:nvSpPr>
+        <p:spPr>
+          <a:xfrm>
+            <a:off x="530352" y="5242560"/>
+            <a:ext cx="11130991" cy="957072"/>
+          </a:xfrm>
+          <a:prstGeom prst="rect">
+            <a:avLst/>
+          </a:prstGeom>
+          <a:noFill/>
+        </p:spPr>
+        <p:txBody>
+          <a:bodyPr wrap="square" anchor="t" lIns="0" rIns="0" tIns="0" bIns="0">
+            <a:spAutoFit/>
+          </a:bodyPr>
+          <a:lstStyle/>
+          <a:p>
+            <a:r>
+              <a:rPr sz="1600" b="0" i="0">
+                <a:solidFill>
+                  <a:srgbClr val="1A1440"/>
+                </a:solidFill>
+                <a:latin typeface="Calibri"/>
+              </a:rPr>
+              <a:t>Naive's five misses average 71,180 a week and festival-aligned's 2,040. Near a festival the week before is a poor guide, because the weeks change sharply; last year's week at the same distance from Diwali is a good one.</a:t>
+            </a:r>
+          </a:p>
+        </p:txBody>
+      </p:sp>
+      <p:sp>
+        <p:nvSpPr>
           <p:cNvPr id="12" name="TextBox 11"/>
-          <p:cNvSpPr txBox="1"/>
-          <p:nvPr/>
-        </p:nvSpPr>
-        <p:spPr>
-          <a:xfrm>
-            <a:off x="731519" y="2724912"/>
-            <a:ext cx="2243251" cy="160401"/>
-          </a:xfrm>
-          <a:prstGeom prst="rect">
-            <a:avLst/>
-          </a:prstGeom>
-          <a:noFill/>
-        </p:spPr>
-        <p:txBody>
-          <a:bodyPr wrap="square" anchor="t" lIns="0" rIns="0" tIns="0" bIns="0">
-            <a:spAutoFit/>
-          </a:bodyPr>
-          <a:lstStyle/>
-          <a:p>
-            <a:pPr algn="l"/>
-            <a:r>
-              <a:rPr sz="750" b="1" i="0" spc="250">
-                <a:solidFill>
-                  <a:srgbClr val="5B3FD6"/>
-                </a:solidFill>
-                <a:latin typeface="Calibri"/>
-              </a:rPr>
-              <a:t>A</a:t>
-            </a:r>
-          </a:p>
-        </p:txBody>
-      </p:sp>
-      <p:sp>
-        <p:nvSpPr>
-          <p:cNvPr id="13" name="TextBox 12"/>
-          <p:cNvSpPr txBox="1"/>
-          <p:nvPr/>
-        </p:nvSpPr>
-        <p:spPr>
-          <a:xfrm>
-            <a:off x="731519" y="2962656"/>
-            <a:ext cx="2243251" cy="498856"/>
-          </a:xfrm>
-          <a:prstGeom prst="rect">
-            <a:avLst/>
-          </a:prstGeom>
-          <a:noFill/>
-        </p:spPr>
-        <p:txBody>
-          <a:bodyPr wrap="square" anchor="t" lIns="0" rIns="0" tIns="0" bIns="0">
-            <a:spAutoFit/>
-          </a:bodyPr>
-          <a:lstStyle/>
-          <a:p>
-            <a:pPr algn="l"/>
-            <a:r>
-              <a:rPr sz="1400" b="1" i="0">
-                <a:solidFill>
-                  <a:srgbClr val="1A0F5C"/>
-                </a:solidFill>
-                <a:latin typeface="Calibri"/>
-              </a:rPr>
-              <a:t>Naive, by about ten times</a:t>
-            </a:r>
-          </a:p>
-        </p:txBody>
-      </p:sp>
-      <p:sp>
-        <p:nvSpPr>
-          <p:cNvPr id="14" name="TextBox 13"/>
-          <p:cNvSpPr txBox="1"/>
-          <p:nvPr/>
-        </p:nvSpPr>
-        <p:spPr>
-          <a:xfrm>
-            <a:off x="731519" y="3534664"/>
-            <a:ext cx="2243251" cy="399796"/>
-          </a:xfrm>
-          <a:prstGeom prst="rect">
-            <a:avLst/>
-          </a:prstGeom>
-          <a:noFill/>
-        </p:spPr>
-        <p:txBody>
-          <a:bodyPr wrap="square" anchor="t" lIns="0" rIns="0" tIns="0" bIns="0">
-            <a:spAutoFit/>
-          </a:bodyPr>
-          <a:lstStyle/>
-          <a:p>
-            <a:pPr algn="l"/>
-            <a:r>
-              <a:rPr sz="1100" b="0" i="0">
-                <a:solidFill>
-                  <a:srgbClr val="6B6690"/>
-                </a:solidFill>
-                <a:latin typeface="Calibri"/>
-              </a:rPr>
-              <a:t>The week before is a poor guide when weeks change fast.</a:t>
-            </a:r>
-          </a:p>
-        </p:txBody>
-      </p:sp>
-      <p:sp>
-        <p:nvSpPr>
-          <p:cNvPr id="15" name="Rounded Rectangle 14"/>
-          <p:cNvSpPr/>
-          <p:nvPr/>
-        </p:nvSpPr>
-        <p:spPr>
-          <a:xfrm>
-            <a:off x="3358819" y="1956816"/>
-            <a:ext cx="2645587" cy="2195576"/>
-          </a:xfrm>
-          <a:prstGeom prst="roundRect">
-            <a:avLst>
-              <a:gd name="adj" fmla="val 5000"/>
-            </a:avLst>
-          </a:prstGeom>
-          <a:solidFill>
-            <a:srgbClr val="FFFFFF"/>
-          </a:solidFill>
-          <a:ln w="9525">
-            <a:solidFill>
-              <a:srgbClr val="E4E1F1"/>
-            </a:solidFill>
-          </a:ln>
-          <a:effectLst>
-            <a:outerShdw blurRad="76200" dist="19050" dir="5400000" algn="bl" rotWithShape="0">
-              <a:srgbClr val="1A0F5C">
-                <a:alpha val="12000"/>
-              </a:srgbClr>
-            </a:outerShdw>
-          </a:effectLst>
-        </p:spPr>
-        <p:style>
-          <a:lnRef idx="1">
-            <a:schemeClr val="accent1"/>
-          </a:lnRef>
-          <a:fillRef idx="3">
-            <a:schemeClr val="accent1"/>
-          </a:fillRef>
-          <a:effectRef idx="2">
-            <a:schemeClr val="accent1"/>
-          </a:effectRef>
-          <a:fontRef idx="minor">
-            <a:schemeClr val="lt1"/>
-          </a:fontRef>
-        </p:style>
-        <p:txBody>
-          <a:bodyPr rtlCol="0" anchor="ctr" wrap="square"/>
-          <a:lstStyle/>
-          <a:p>
-            <a:pPr algn="ctr"/>
-          </a:p>
-        </p:txBody>
-      </p:sp>
-      <p:sp>
-        <p:nvSpPr>
-          <p:cNvPr id="16" name="Oval 15"/>
-          <p:cNvSpPr/>
-          <p:nvPr/>
-        </p:nvSpPr>
-        <p:spPr>
-          <a:xfrm>
-            <a:off x="3559987" y="2157984"/>
-            <a:ext cx="457200" cy="457200"/>
-          </a:xfrm>
-          <a:prstGeom prst="ellipse">
-            <a:avLst/>
-          </a:prstGeom>
-          <a:solidFill>
-            <a:srgbClr val="EEEAFB"/>
-          </a:solidFill>
-          <a:ln>
-            <a:noFill/>
-          </a:ln>
-          <a:effectLst/>
-        </p:spPr>
-        <p:style>
-          <a:lnRef idx="1">
-            <a:schemeClr val="accent1"/>
-          </a:lnRef>
-          <a:fillRef idx="3">
-            <a:schemeClr val="accent1"/>
-          </a:fillRef>
-          <a:effectRef idx="2">
-            <a:schemeClr val="accent1"/>
-          </a:effectRef>
-          <a:fontRef idx="minor">
-            <a:schemeClr val="lt1"/>
-          </a:fontRef>
-        </p:style>
-        <p:txBody>
-          <a:bodyPr rtlCol="0" anchor="ctr" wrap="square"/>
-          <a:lstStyle/>
-          <a:p>
-            <a:pPr algn="ctr"/>
-          </a:p>
-        </p:txBody>
-      </p:sp>
-      <p:pic>
-        <p:nvPicPr>
-          <p:cNvPr id="17" name="Picture 16" descr="list_637b34e7c72a.png"/>
-          <p:cNvPicPr>
-            <a:picLocks noChangeAspect="1"/>
-          </p:cNvPicPr>
-          <p:nvPr/>
-        </p:nvPicPr>
-        <p:blipFill>
-          <a:blip r:embed="rId4"/>
-          <a:stretch>
-            <a:fillRect/>
-          </a:stretch>
-        </p:blipFill>
-        <p:spPr>
-          <a:xfrm>
-            <a:off x="3669715" y="2267712"/>
-            <a:ext cx="237744" cy="237744"/>
-          </a:xfrm>
-          <a:prstGeom prst="rect">
-            <a:avLst/>
-          </a:prstGeom>
-        </p:spPr>
-      </p:pic>
-      <p:sp>
-        <p:nvSpPr>
-          <p:cNvPr id="18" name="TextBox 17"/>
-          <p:cNvSpPr txBox="1"/>
-          <p:nvPr/>
-        </p:nvSpPr>
-        <p:spPr>
-          <a:xfrm>
-            <a:off x="3559987" y="2724912"/>
-            <a:ext cx="2243251" cy="160401"/>
-          </a:xfrm>
-          <a:prstGeom prst="rect">
-            <a:avLst/>
-          </a:prstGeom>
-          <a:noFill/>
-        </p:spPr>
-        <p:txBody>
-          <a:bodyPr wrap="square" anchor="t" lIns="0" rIns="0" tIns="0" bIns="0">
-            <a:spAutoFit/>
-          </a:bodyPr>
-          <a:lstStyle/>
-          <a:p>
-            <a:pPr algn="l"/>
-            <a:r>
-              <a:rPr sz="750" b="1" i="0" spc="250">
-                <a:solidFill>
-                  <a:srgbClr val="5B3FD6"/>
-                </a:solidFill>
-                <a:latin typeface="Calibri"/>
-              </a:rPr>
-              <a:t>B</a:t>
-            </a:r>
-          </a:p>
-        </p:txBody>
-      </p:sp>
-      <p:sp>
-        <p:nvSpPr>
-          <p:cNvPr id="19" name="TextBox 18"/>
-          <p:cNvSpPr txBox="1"/>
-          <p:nvPr/>
-        </p:nvSpPr>
-        <p:spPr>
-          <a:xfrm>
-            <a:off x="3559987" y="2962656"/>
-            <a:ext cx="2243251" cy="498856"/>
-          </a:xfrm>
-          <a:prstGeom prst="rect">
-            <a:avLst/>
-          </a:prstGeom>
-          <a:noFill/>
-        </p:spPr>
-        <p:txBody>
-          <a:bodyPr wrap="square" anchor="t" lIns="0" rIns="0" tIns="0" bIns="0">
-            <a:spAutoFit/>
-          </a:bodyPr>
-          <a:lstStyle/>
-          <a:p>
-            <a:pPr algn="l"/>
-            <a:r>
-              <a:rPr sz="1400" b="1" i="0">
-                <a:solidFill>
-                  <a:srgbClr val="1A0F5C"/>
-                </a:solidFill>
-                <a:latin typeface="Calibri"/>
-              </a:rPr>
-              <a:t>Naive, by about thirty times</a:t>
-            </a:r>
-          </a:p>
-        </p:txBody>
-      </p:sp>
-      <p:sp>
-        <p:nvSpPr>
-          <p:cNvPr id="20" name="TextBox 19"/>
-          <p:cNvSpPr txBox="1"/>
-          <p:nvPr/>
-        </p:nvSpPr>
-        <p:spPr>
-          <a:xfrm>
-            <a:off x="3559987" y="3534664"/>
-            <a:ext cx="2243251" cy="399796"/>
-          </a:xfrm>
-          <a:prstGeom prst="rect">
-            <a:avLst/>
-          </a:prstGeom>
-          <a:noFill/>
-        </p:spPr>
-        <p:txBody>
-          <a:bodyPr wrap="square" anchor="t" lIns="0" rIns="0" tIns="0" bIns="0">
-            <a:spAutoFit/>
-          </a:bodyPr>
-          <a:lstStyle/>
-          <a:p>
-            <a:pPr algn="l"/>
-            <a:r>
-              <a:rPr sz="1100" b="0" i="0">
-                <a:solidFill>
-                  <a:srgbClr val="6B6690"/>
-                </a:solidFill>
-                <a:latin typeface="Calibri"/>
-              </a:rPr>
-              <a:t>Every festive week differs sharply from the last.</a:t>
-            </a:r>
-          </a:p>
-        </p:txBody>
-      </p:sp>
-      <p:sp>
-        <p:nvSpPr>
-          <p:cNvPr id="21" name="Rounded Rectangle 20"/>
-          <p:cNvSpPr/>
-          <p:nvPr/>
-        </p:nvSpPr>
-        <p:spPr>
-          <a:xfrm>
-            <a:off x="6187287" y="1956816"/>
-            <a:ext cx="2645587" cy="2195576"/>
-          </a:xfrm>
-          <a:prstGeom prst="roundRect">
-            <a:avLst>
-              <a:gd name="adj" fmla="val 5000"/>
-            </a:avLst>
-          </a:prstGeom>
-          <a:solidFill>
-            <a:srgbClr val="FFFFFF"/>
-          </a:solidFill>
-          <a:ln w="9525">
-            <a:solidFill>
-              <a:srgbClr val="E4E1F1"/>
-            </a:solidFill>
-          </a:ln>
-          <a:effectLst>
-            <a:outerShdw blurRad="76200" dist="19050" dir="5400000" algn="bl" rotWithShape="0">
-              <a:srgbClr val="1A0F5C">
-                <a:alpha val="12000"/>
-              </a:srgbClr>
-            </a:outerShdw>
-          </a:effectLst>
-        </p:spPr>
-        <p:style>
-          <a:lnRef idx="1">
-            <a:schemeClr val="accent1"/>
-          </a:lnRef>
-          <a:fillRef idx="3">
-            <a:schemeClr val="accent1"/>
-          </a:fillRef>
-          <a:effectRef idx="2">
-            <a:schemeClr val="accent1"/>
-          </a:effectRef>
-          <a:fontRef idx="minor">
-            <a:schemeClr val="lt1"/>
-          </a:fontRef>
-        </p:style>
-        <p:txBody>
-          <a:bodyPr rtlCol="0" anchor="ctr" wrap="square"/>
-          <a:lstStyle/>
-          <a:p>
-            <a:pPr algn="ctr"/>
-          </a:p>
-        </p:txBody>
-      </p:sp>
-      <p:sp>
-        <p:nvSpPr>
-          <p:cNvPr id="22" name="Oval 21"/>
-          <p:cNvSpPr/>
-          <p:nvPr/>
-        </p:nvSpPr>
-        <p:spPr>
-          <a:xfrm>
-            <a:off x="6388455" y="2157984"/>
-            <a:ext cx="457200" cy="457200"/>
-          </a:xfrm>
-          <a:prstGeom prst="ellipse">
-            <a:avLst/>
-          </a:prstGeom>
-          <a:solidFill>
-            <a:srgbClr val="EEEAFB"/>
-          </a:solidFill>
-          <a:ln>
-            <a:noFill/>
-          </a:ln>
-          <a:effectLst/>
-        </p:spPr>
-        <p:style>
-          <a:lnRef idx="1">
-            <a:schemeClr val="accent1"/>
-          </a:lnRef>
-          <a:fillRef idx="3">
-            <a:schemeClr val="accent1"/>
-          </a:fillRef>
-          <a:effectRef idx="2">
-            <a:schemeClr val="accent1"/>
-          </a:effectRef>
-          <a:fontRef idx="minor">
-            <a:schemeClr val="lt1"/>
-          </a:fontRef>
-        </p:style>
-        <p:txBody>
-          <a:bodyPr rtlCol="0" anchor="ctr" wrap="square"/>
-          <a:lstStyle/>
-          <a:p>
-            <a:pPr algn="ctr"/>
-          </a:p>
-        </p:txBody>
-      </p:sp>
-      <p:pic>
-        <p:nvPicPr>
-          <p:cNvPr id="23" name="Picture 22" descr="list_637b34e7c72a.png"/>
-          <p:cNvPicPr>
-            <a:picLocks noChangeAspect="1"/>
-          </p:cNvPicPr>
-          <p:nvPr/>
-        </p:nvPicPr>
-        <p:blipFill>
-          <a:blip r:embed="rId4"/>
-          <a:stretch>
-            <a:fillRect/>
-          </a:stretch>
-        </p:blipFill>
-        <p:spPr>
-          <a:xfrm>
-            <a:off x="6498183" y="2267712"/>
-            <a:ext cx="237744" cy="237744"/>
-          </a:xfrm>
-          <a:prstGeom prst="rect">
-            <a:avLst/>
-          </a:prstGeom>
-        </p:spPr>
-      </p:pic>
-      <p:sp>
-        <p:nvSpPr>
-          <p:cNvPr id="24" name="TextBox 23"/>
-          <p:cNvSpPr txBox="1"/>
-          <p:nvPr/>
-        </p:nvSpPr>
-        <p:spPr>
-          <a:xfrm>
-            <a:off x="6388455" y="2724912"/>
-            <a:ext cx="2243251" cy="160401"/>
-          </a:xfrm>
-          <a:prstGeom prst="rect">
-            <a:avLst/>
-          </a:prstGeom>
-          <a:noFill/>
-        </p:spPr>
-        <p:txBody>
-          <a:bodyPr wrap="square" anchor="t" lIns="0" rIns="0" tIns="0" bIns="0">
-            <a:spAutoFit/>
-          </a:bodyPr>
-          <a:lstStyle/>
-          <a:p>
-            <a:pPr algn="l"/>
-            <a:r>
-              <a:rPr sz="750" b="1" i="0" spc="250">
-                <a:solidFill>
-                  <a:srgbClr val="5B3FD6"/>
-                </a:solidFill>
-                <a:latin typeface="Calibri"/>
-              </a:rPr>
-              <a:t>C</a:t>
-            </a:r>
-          </a:p>
-        </p:txBody>
-      </p:sp>
-      <p:sp>
-        <p:nvSpPr>
-          <p:cNvPr id="25" name="TextBox 24"/>
-          <p:cNvSpPr txBox="1"/>
-          <p:nvPr/>
-        </p:nvSpPr>
-        <p:spPr>
-          <a:xfrm>
-            <a:off x="6388455" y="2962656"/>
-            <a:ext cx="2243251" cy="498856"/>
-          </a:xfrm>
-          <a:prstGeom prst="rect">
-            <a:avLst/>
-          </a:prstGeom>
-          <a:noFill/>
-        </p:spPr>
-        <p:txBody>
-          <a:bodyPr wrap="square" anchor="t" lIns="0" rIns="0" tIns="0" bIns="0">
-            <a:spAutoFit/>
-          </a:bodyPr>
-          <a:lstStyle/>
-          <a:p>
-            <a:pPr algn="l"/>
-            <a:r>
-              <a:rPr sz="1400" b="1" i="0">
-                <a:solidFill>
-                  <a:srgbClr val="1A0F5C"/>
-                </a:solidFill>
-                <a:latin typeface="Calibri"/>
-              </a:rPr>
-              <a:t>Festival-aligned, narrowly</a:t>
-            </a:r>
-          </a:p>
-        </p:txBody>
-      </p:sp>
-      <p:sp>
-        <p:nvSpPr>
-          <p:cNvPr id="26" name="TextBox 25"/>
-          <p:cNvSpPr txBox="1"/>
-          <p:nvPr/>
-        </p:nvSpPr>
-        <p:spPr>
-          <a:xfrm>
-            <a:off x="6388455" y="3534664"/>
-            <a:ext cx="2243251" cy="399796"/>
-          </a:xfrm>
-          <a:prstGeom prst="rect">
-            <a:avLst/>
-          </a:prstGeom>
-          <a:noFill/>
-        </p:spPr>
-        <p:txBody>
-          <a:bodyPr wrap="square" anchor="t" lIns="0" rIns="0" tIns="0" bIns="0">
-            <a:spAutoFit/>
-          </a:bodyPr>
-          <a:lstStyle/>
-          <a:p>
-            <a:pPr algn="l"/>
-            <a:r>
-              <a:rPr sz="1100" b="0" i="0">
-                <a:solidFill>
-                  <a:srgbClr val="6B6690"/>
-                </a:solidFill>
-                <a:latin typeface="Calibri"/>
-              </a:rPr>
-              <a:t>Copying 2024 adds 2024's own noise.</a:t>
-            </a:r>
-          </a:p>
-        </p:txBody>
-      </p:sp>
-      <p:sp>
-        <p:nvSpPr>
-          <p:cNvPr id="27" name="Rounded Rectangle 26"/>
-          <p:cNvSpPr/>
-          <p:nvPr/>
-        </p:nvSpPr>
-        <p:spPr>
-          <a:xfrm>
-            <a:off x="9015755" y="1956816"/>
-            <a:ext cx="2645587" cy="2195576"/>
-          </a:xfrm>
-          <a:prstGeom prst="roundRect">
-            <a:avLst>
-              <a:gd name="adj" fmla="val 5000"/>
-            </a:avLst>
-          </a:prstGeom>
-          <a:solidFill>
-            <a:srgbClr val="FFFFFF"/>
-          </a:solidFill>
-          <a:ln w="9525">
-            <a:solidFill>
-              <a:srgbClr val="E4E1F1"/>
-            </a:solidFill>
-          </a:ln>
-          <a:effectLst>
-            <a:outerShdw blurRad="76200" dist="19050" dir="5400000" algn="bl" rotWithShape="0">
-              <a:srgbClr val="1A0F5C">
-                <a:alpha val="12000"/>
-              </a:srgbClr>
-            </a:outerShdw>
-          </a:effectLst>
-        </p:spPr>
-        <p:style>
-          <a:lnRef idx="1">
-            <a:schemeClr val="accent1"/>
-          </a:lnRef>
-          <a:fillRef idx="3">
-            <a:schemeClr val="accent1"/>
-          </a:fillRef>
-          <a:effectRef idx="2">
-            <a:schemeClr val="accent1"/>
-          </a:effectRef>
-          <a:fontRef idx="minor">
-            <a:schemeClr val="lt1"/>
-          </a:fontRef>
-        </p:style>
-        <p:txBody>
-          <a:bodyPr rtlCol="0" anchor="ctr" wrap="square"/>
-          <a:lstStyle/>
-          <a:p>
-            <a:pPr algn="ctr"/>
-          </a:p>
-        </p:txBody>
-      </p:sp>
-      <p:sp>
-        <p:nvSpPr>
-          <p:cNvPr id="28" name="Oval 27"/>
-          <p:cNvSpPr/>
-          <p:nvPr/>
-        </p:nvSpPr>
-        <p:spPr>
-          <a:xfrm>
-            <a:off x="9216923" y="2157984"/>
-            <a:ext cx="457200" cy="457200"/>
-          </a:xfrm>
-          <a:prstGeom prst="ellipse">
-            <a:avLst/>
-          </a:prstGeom>
-          <a:solidFill>
-            <a:srgbClr val="EEEAFB"/>
-          </a:solidFill>
-          <a:ln>
-            <a:noFill/>
-          </a:ln>
-          <a:effectLst/>
-        </p:spPr>
-        <p:style>
-          <a:lnRef idx="1">
-            <a:schemeClr val="accent1"/>
-          </a:lnRef>
-          <a:fillRef idx="3">
-            <a:schemeClr val="accent1"/>
-          </a:fillRef>
-          <a:effectRef idx="2">
-            <a:schemeClr val="accent1"/>
-          </a:effectRef>
-          <a:fontRef idx="minor">
-            <a:schemeClr val="lt1"/>
-          </a:fontRef>
-        </p:style>
-        <p:txBody>
-          <a:bodyPr rtlCol="0" anchor="ctr" wrap="square"/>
-          <a:lstStyle/>
-          <a:p>
-            <a:pPr algn="ctr"/>
-          </a:p>
-        </p:txBody>
-      </p:sp>
-      <p:pic>
-        <p:nvPicPr>
-          <p:cNvPr id="29" name="Picture 28" descr="list_637b34e7c72a.png"/>
-          <p:cNvPicPr>
-            <a:picLocks noChangeAspect="1"/>
-          </p:cNvPicPr>
-          <p:nvPr/>
-        </p:nvPicPr>
-        <p:blipFill>
-          <a:blip r:embed="rId4"/>
-          <a:stretch>
-            <a:fillRect/>
-          </a:stretch>
-        </p:blipFill>
-        <p:spPr>
-          <a:xfrm>
-            <a:off x="9326651" y="2267712"/>
-            <a:ext cx="237744" cy="237744"/>
-          </a:xfrm>
-          <a:prstGeom prst="rect">
-            <a:avLst/>
-          </a:prstGeom>
-        </p:spPr>
-      </p:pic>
-      <p:sp>
-        <p:nvSpPr>
-          <p:cNvPr id="30" name="TextBox 29"/>
-          <p:cNvSpPr txBox="1"/>
-          <p:nvPr/>
-        </p:nvSpPr>
-        <p:spPr>
-          <a:xfrm>
-            <a:off x="9216923" y="2724912"/>
-            <a:ext cx="2243251" cy="160401"/>
-          </a:xfrm>
-          <a:prstGeom prst="rect">
-            <a:avLst/>
-          </a:prstGeom>
-          <a:noFill/>
-        </p:spPr>
-        <p:txBody>
-          <a:bodyPr wrap="square" anchor="t" lIns="0" rIns="0" tIns="0" bIns="0">
-            <a:spAutoFit/>
-          </a:bodyPr>
-          <a:lstStyle/>
-          <a:p>
-            <a:pPr algn="l"/>
-            <a:r>
-              <a:rPr sz="750" b="1" i="0" spc="250">
-                <a:solidFill>
-                  <a:srgbClr val="5B3FD6"/>
-                </a:solidFill>
-                <a:latin typeface="Calibri"/>
-              </a:rPr>
-              <a:t>D</a:t>
-            </a:r>
-          </a:p>
-        </p:txBody>
-      </p:sp>
-      <p:sp>
-        <p:nvSpPr>
-          <p:cNvPr id="31" name="TextBox 30"/>
-          <p:cNvSpPr txBox="1"/>
-          <p:nvPr/>
-        </p:nvSpPr>
-        <p:spPr>
-          <a:xfrm>
-            <a:off x="9216923" y="2962656"/>
-            <a:ext cx="2243251" cy="498856"/>
-          </a:xfrm>
-          <a:prstGeom prst="rect">
-            <a:avLst/>
-          </a:prstGeom>
-          <a:noFill/>
-        </p:spPr>
-        <p:txBody>
-          <a:bodyPr wrap="square" anchor="t" lIns="0" rIns="0" tIns="0" bIns="0">
-            <a:spAutoFit/>
-          </a:bodyPr>
-          <a:lstStyle/>
-          <a:p>
-            <a:pPr algn="l"/>
-            <a:r>
-              <a:rPr sz="1400" b="1" i="0">
-                <a:solidFill>
-                  <a:srgbClr val="1A0F5C"/>
-                </a:solidFill>
-                <a:latin typeface="Calibri"/>
-              </a:rPr>
-              <a:t>Level: one week ahead, both are close</a:t>
-            </a:r>
-          </a:p>
-        </p:txBody>
-      </p:sp>
-      <p:sp>
-        <p:nvSpPr>
-          <p:cNvPr id="32" name="TextBox 31"/>
-          <p:cNvSpPr txBox="1"/>
-          <p:nvPr/>
-        </p:nvSpPr>
-        <p:spPr>
-          <a:xfrm>
-            <a:off x="9216923" y="3534664"/>
-            <a:ext cx="2243251" cy="218186"/>
-          </a:xfrm>
-          <a:prstGeom prst="rect">
-            <a:avLst/>
-          </a:prstGeom>
-          <a:noFill/>
-        </p:spPr>
-        <p:txBody>
-          <a:bodyPr wrap="square" anchor="t" lIns="0" rIns="0" tIns="0" bIns="0">
-            <a:spAutoFit/>
-          </a:bodyPr>
-          <a:lstStyle/>
-          <a:p>
-            <a:pPr algn="l"/>
-            <a:r>
-              <a:rPr sz="1100" b="0" i="0">
-                <a:solidFill>
-                  <a:srgbClr val="6B6690"/>
-                </a:solidFill>
-                <a:latin typeface="Calibri"/>
-              </a:rPr>
-              <a:t>A week is short.</a:t>
-            </a:r>
-          </a:p>
-        </p:txBody>
-      </p:sp>
-      <p:sp>
-        <p:nvSpPr>
-          <p:cNvPr id="33" name="TextBox 32"/>
           <p:cNvSpPr txBox="1"/>
           <p:nvPr/>
         </p:nvSpPr>
@@ -14837,7 +14395,7 @@
       </p:sp>
       <p:sp>
         <p:nvSpPr>
-          <p:cNvPr id="34" name="TextBox 33"/>
+          <p:cNvPr id="13" name="TextBox 12"/>
           <p:cNvSpPr txBox="1"/>
           <p:nvPr/>
         </p:nvSpPr>
@@ -14865,7 +14423,7 @@
                 </a:solidFill>
                 <a:latin typeface="Calibri"/>
               </a:rPr>
-              <a:t>S8  ·  9 / 15</a:t>
+              <a:t>S9  ·  9 / 14</a:t>
             </a:r>
           </a:p>
         </p:txBody>

--- a/content/W04/D5/slides/C2_W04_D05_fallback_STUDENT.pptx
+++ b/content/W04/D5/slides/C2_W04_D05_fallback_STUDENT.pptx
@@ -605,7 +605,7 @@
           </a:p>
           <a:p>
             <a:r>
-              <a:t>own error band with nobody watching the band. Transition: Target Canada.</a:t>
+              <a:t>own error bar with nobody watching it. Transition: Target Canada.</a:t>
             </a:r>
           </a:p>
         </p:txBody>
@@ -5123,7 +5123,7 @@
         </p:nvGraphicFramePr>
         <p:xfrm>
           <a:off x="530352" y="1956816"/>
-          <a:ext cx="11130991" cy="2332736"/>
+          <a:ext cx="11130991" cy="2574544"/>
         </p:xfrm>
         <a:graphic>
           <a:graphicData uri="http://schemas.openxmlformats.org/drawingml/2006/table">
@@ -5160,7 +5160,7 @@
                           </a:solidFill>
                           <a:latin typeface="Calibri"/>
                         </a:rPr>
-                        <a:t>Zillow Offers, 2021 (F3, Zillow's Q3 2021 shareholder letter, checked 12 October 2026)</a:t>
+                        <a:t>Zillow Offers, 2021 (Zillow's Q3 2021 shareholder letter, checked 12 October 2026)</a:t>
                       </a:r>
                     </a:p>
                   </a:txBody>
@@ -5217,7 +5217,7 @@
                   </a:tcPr>
                 </a:tc>
               </a:tr>
-              <a:tr h="369824">
+              <a:tr h="611632">
                 <a:tc>
                   <a:txBody>
                     <a:bodyPr/>
@@ -5252,7 +5252,7 @@
                           </a:solidFill>
                           <a:latin typeface="Calibri"/>
                         </a:rPr>
-                        <a:t>Public targets of plus or minus 200 basis points of breakeven unit economics</a:t>
+                        <a:t>Public targets of plus or minus 200 basis points, 2 percent, of breakeven unit economics: what Zillow made or lost on each home it resold was meant to stay near zero</a:t>
                       </a:r>
                     </a:p>
                   </a:txBody>
@@ -5298,7 +5298,7 @@
                           </a:solidFill>
                           <a:latin typeface="Calibri"/>
                         </a:rPr>
-                        <a:t>Unit economics swung about 1,200 basis points from Q2 to an expected minus 500 to minus 700 in Q4 2021</a:t>
+                        <a:t>Unit economics swung about 1,200 basis points, 12 percentage points, from Q2 to an expected minus 500 to minus 700 basis points in Q4 2021</a:t>
                       </a:r>
                     </a:p>
                   </a:txBody>
@@ -5344,7 +5344,7 @@
                           </a:solidFill>
                           <a:latin typeface="Calibri"/>
                         </a:rPr>
-                        <a:t>A write-down of about USD 304 million on inventory; the business wound down, and about 25 percent of the workforce was cut</a:t>
+                        <a:t>A write-down of about USD 304 million: homes in stock marked below what Zillow paid; the business wound down, and about 25 percent of the workforce was cut</a:t>
                       </a:r>
                     </a:p>
                   </a:txBody>
@@ -5680,7 +5680,7 @@
         </p:nvGraphicFramePr>
         <p:xfrm>
           <a:off x="530352" y="1956816"/>
-          <a:ext cx="11130990" cy="1962912"/>
+          <a:ext cx="11130990" cy="2204720"/>
         </p:xfrm>
         <a:graphic>
           <a:graphicData uri="http://schemas.openxmlformats.org/drawingml/2006/table">
@@ -5692,7 +5692,7 @@
                 <a:gridCol w="3290491"/>
                 <a:gridCol w="7840499"/>
               </a:tblGrid>
-              <a:tr h="369824">
+              <a:tr h="611632">
                 <a:tc>
                   <a:txBody>
                     <a:bodyPr/>
@@ -5717,7 +5717,7 @@
                           </a:solidFill>
                           <a:latin typeface="Calibri"/>
                         </a:rPr>
-                        <a:t>Target Canada, 2013 to 2015 (F4, checked 12 October 2026)</a:t>
+                        <a:t>Target Canada, 2013 to 2015 (Target's release of 15 January 2015 and Canadian Business, checked 12 October 2026)</a:t>
                       </a:r>
                     </a:p>
                   </a:txBody>
@@ -6329,7 +6329,7 @@
                           </a:solidFill>
                           <a:latin typeface="Calibri"/>
                         </a:rPr>
-                        <a:t>Score every week against the error band, and stop when it is breached</a:t>
+                        <a:t>Score every week's miss against the error bar, and stop when it is breached</a:t>
                       </a:r>
                     </a:p>
                   </a:txBody>
@@ -6697,7 +6697,7 @@
         <p:spPr>
           <a:xfrm>
             <a:off x="530352" y="1243584"/>
-            <a:ext cx="11130991" cy="234696"/>
+            <a:ext cx="11130991" cy="399796"/>
           </a:xfrm>
           <a:prstGeom prst="rect">
             <a:avLst/>
@@ -6712,13 +6712,13 @@
           <a:p>
             <a:pPr algn="l"/>
             <a:r>
-              <a:rPr sz="1200" b="0" i="0">
+              <a:rPr sz="1100" b="0" i="0">
                 <a:solidFill>
                   <a:srgbClr val="6B6690"/>
                 </a:solidFill>
                 <a:latin typeface="Calibri"/>
               </a:rPr>
-              <a:t>How does a candidate choose between two stakeholders' forecasts, and present the error?</a:t>
+              <a:t>How does a candidate choose between two stakeholders' forecasts and present the error? [D] tags a differentiator, a question that separates strong candidates.</a:t>
             </a:r>
           </a:p>
         </p:txBody>
@@ -13460,7 +13460,7 @@
                 </a:solidFill>
                 <a:latin typeface="Calibri"/>
               </a:rPr>
-              <a:t>Naive, by about thirty times</a:t>
+              <a:t>Naive, by about thirty-five times</a:t>
             </a:r>
           </a:p>
         </p:txBody>

--- a/content/W04/D5/slides/C2_W04_D05_fallback_STUDENT.pptx
+++ b/content/W04/D5/slides/C2_W04_D05_fallback_STUDENT.pptx
@@ -13914,7 +13914,7 @@
                 </a:solidFill>
                 <a:latin typeface="Calibri"/>
               </a:rPr>
-              <a:t>Level: one week ahead, both are close</a:t>
+              <a:t>A tie: one week ahead, both are close</a:t>
             </a:r>
           </a:p>
         </p:txBody>

--- a/content/W04/D5/slides/C2_W04_D05_fallback_STUDENT.pptx
+++ b/content/W04/D5/slides/C2_W04_D05_fallback_STUDENT.pptx
@@ -600,12 +600,22 @@
           <a:lstStyle/>
           <a:p>
             <a:r>
-              <a:t>LIVE, 10 minutes. Groups name the Lucknow equivalent: a vendor forecast allowed to run past its</a:t>
-            </a:r>
-          </a:p>
-          <a:p>
-            <a:r>
-              <a:t>own error bar with nobody watching it. Transition: Target Canada.</a:t>
+              <a:t>LIVE, 10 minutes. The guardrail sat on the margin, and the price forecast's error at a six-month</a:t>
+            </a:r>
+          </a:p>
+          <a:p>
+            <a:r>
+              <a:t>horizon was wider than the whole band; Zillow did stop, by winding the business down. Groups name</a:t>
+            </a:r>
+          </a:p>
+          <a:p>
+            <a:r>
+              <a:t>the Lucknow equivalent: a cushion thinner than the forecast's error at the plan's horizon.</a:t>
+            </a:r>
+          </a:p>
+          <a:p>
+            <a:r>
+              <a:t>Transition: Target Canada.</a:t>
             </a:r>
           </a:p>
         </p:txBody>
@@ -5073,7 +5083,7 @@
                 </a:solidFill>
                 <a:latin typeface="Georgia"/>
               </a:rPr>
-              <a:t>Zillow: a forecast broke its own guardrail</a:t>
+              <a:t>Zillow: a forecast's error outran its guardrail</a:t>
             </a:r>
           </a:p>
         </p:txBody>
@@ -5123,7 +5133,7 @@
         </p:nvGraphicFramePr>
         <p:xfrm>
           <a:off x="530352" y="1956816"/>
-          <a:ext cx="11130991" cy="2574544"/>
+          <a:ext cx="11130991" cy="3058160"/>
         </p:xfrm>
         <a:graphic>
           <a:graphicData uri="http://schemas.openxmlformats.org/drawingml/2006/table">
@@ -5252,7 +5262,7 @@
                           </a:solidFill>
                           <a:latin typeface="Calibri"/>
                         </a:rPr>
-                        <a:t>Public targets of plus or minus 200 basis points, 2 percent, of breakeven unit economics: what Zillow made or lost on each home it resold was meant to stay near zero</a:t>
+                        <a:t>Public targets of plus or minus 200 basis points, 2 percentage points, of breakeven unit economics: what Zillow made or lost on each home it resold was meant to stay near zero</a:t>
                       </a:r>
                     </a:p>
                   </a:txBody>
@@ -5263,7 +5273,7 @@
                   </a:tcPr>
                 </a:tc>
               </a:tr>
-              <a:tr h="611632">
+              <a:tr h="1095248">
                 <a:tc>
                   <a:txBody>
                     <a:bodyPr/>
@@ -5298,7 +5308,7 @@
                           </a:solidFill>
                           <a:latin typeface="Calibri"/>
                         </a:rPr>
-                        <a:t>Unit economics swung about 1,200 basis points, 12 percentage points, from Q2 to an expected minus 500 to minus 700 basis points in Q4 2021</a:t>
+                        <a:t>Price forecasts missed in both directions by far more than Zillow had modelled, and unit economics swung about 1,200 basis points, 12 percentage points, from Q2 to an expected minus 500 to minus 700 basis points in Q4 2021; more offers were accepted than planned, and renovation capacity ran short</a:t>
                       </a:r>
                     </a:p>
                   </a:txBody>
@@ -5344,7 +5354,7 @@
                           </a:solidFill>
                           <a:latin typeface="Calibri"/>
                         </a:rPr>
-                        <a:t>A write-down of about USD 304 million: homes in stock marked below what Zillow paid; the business wound down, and about 25 percent of the workforce was cut</a:t>
+                        <a:t>A write-down of about USD 304 million on homes bought above what they would now sell for; Zillow wound the business down and cut about 25 percent of its workforce</a:t>
                       </a:r>
                     </a:p>
                   </a:txBody>
@@ -5680,7 +5690,7 @@
         </p:nvGraphicFramePr>
         <p:xfrm>
           <a:off x="530352" y="1956816"/>
-          <a:ext cx="11130990" cy="2204720"/>
+          <a:ext cx="11130990" cy="2446528"/>
         </p:xfrm>
         <a:graphic>
           <a:graphicData uri="http://schemas.openxmlformats.org/drawingml/2006/table">
@@ -5774,7 +5784,7 @@
                   </a:tcPr>
                 </a:tc>
               </a:tr>
-              <a:tr h="611632">
+              <a:tr h="853440">
                 <a:tc>
                   <a:txBody>
                     <a:bodyPr/>
@@ -5809,7 +5819,7 @@
                           </a:solidFill>
                           <a:latin typeface="Calibri"/>
                         </a:rPr>
-                        <a:t>Its forecasting and replenishment system needed years of history and could not forecast new stores, so buyers used optimistic projections instead</a:t>
+                        <a:t>Its forecasting and replenishment system needed years of sales history the new stores did not have, so buyers used optimistic projections from headquarters, and the item data feeding it was right about 30 percent of the time</a:t>
                       </a:r>
                     </a:p>
                   </a:txBody>
@@ -5855,7 +5865,7 @@
                           </a:solidFill>
                           <a:latin typeface="Calibri"/>
                         </a:rPr>
-                        <a:t>Distribution centres overflowed while shelves sat empty</a:t>
+                        <a:t>Distribution centres overflowed while shelves sat barely stocked</a:t>
                       </a:r>
                     </a:p>
                   </a:txBody>
@@ -6191,7 +6201,7 @@
         </p:nvGraphicFramePr>
         <p:xfrm>
           <a:off x="530352" y="1956816"/>
-          <a:ext cx="11130989" cy="1593088"/>
+          <a:ext cx="11130990" cy="2560320"/>
         </p:xfrm>
         <a:graphic>
           <a:graphicData uri="http://schemas.openxmlformats.org/drawingml/2006/table">
@@ -6200,9 +6210,9 @@
                 <a:tableStyleId>{2D5ABB26-0587-4C30-8999-92F81FD0307C}</a:tableStyleId>
               </a:tblPr>
               <a:tblGrid>
-                <a:gridCol w="3132847"/>
-                <a:gridCol w="3999071"/>
-                <a:gridCol w="3999071"/>
+                <a:gridCol w="3706162"/>
+                <a:gridCol w="3712414"/>
+                <a:gridCol w="3712414"/>
               </a:tblGrid>
               <a:tr h="369824">
                 <a:tc>
@@ -6272,7 +6282,7 @@
                   </a:tcPr>
                 </a:tc>
               </a:tr>
-              <a:tr h="611632">
+              <a:tr h="853440">
                 <a:tc>
                   <a:txBody>
                     <a:bodyPr/>
@@ -6285,7 +6295,7 @@
                           </a:solidFill>
                           <a:latin typeface="Calibri"/>
                         </a:rPr>
-                        <a:t>Zillow: a forecast ran past its own guardrail</a:t>
+                        <a:t>Zillow: a forecast's error wider than its margin guardrail</a:t>
                       </a:r>
                     </a:p>
                   </a:txBody>
@@ -6329,7 +6339,7 @@
                           </a:solidFill>
                           <a:latin typeface="Calibri"/>
                         </a:rPr>
-                        <a:t>Score every week's miss against the error bar, and stop when it is breached</a:t>
+                        <a:t>Size the forecast's miss at the plan's horizon, and compare it with the cushion before booking</a:t>
                       </a:r>
                     </a:p>
                   </a:txBody>
@@ -6340,7 +6350,7 @@
                   </a:tcPr>
                 </a:tc>
               </a:tr>
-              <a:tr h="611632">
+              <a:tr h="1337056">
                 <a:tc>
                   <a:txBody>
                     <a:bodyPr/>
@@ -6397,7 +6407,7 @@
                           </a:solidFill>
                           <a:latin typeface="Calibri"/>
                         </a:rPr>
-                        <a:t>Score it on 2025's festival from data to September 2025 before it books a shift</a:t>
+                        <a:t>Score it on 2025's festival from data to September 2025 before it books a shift; with no history at all, size from the ground up and keep capacity that can stretch</a:t>
                       </a:r>
                     </a:p>
                   </a:txBody>
@@ -6804,7 +6814,7 @@
                           </a:solidFill>
                           <a:latin typeface="Calibri"/>
                         </a:rPr>
-                        <a:t>"I would average the two: 13 percent sits between 4 and 22."</a:t>
+                        <a:t>"I would go with the vendor, trimmed toward finance: plus 13 percent."</a:t>
                       </a:r>
                     </a:p>
                   </a:txBody>
@@ -6872,7 +6882,7 @@
                           </a:solidFill>
                           <a:latin typeface="Calibri"/>
                         </a:rPr>
-                        <a:t>Concedes what is true in each: finance's growth, the vendor's fit</a:t>
+                        <a:t>Concedes what is true in each: finance's growth, the vendor's tilt to the cheap side</a:t>
                       </a:r>
                     </a:p>
                   </a:txBody>
@@ -8258,8 +8268,8 @@
         </p:blipFill>
         <p:spPr>
           <a:xfrm>
-            <a:off x="2032232" y="1664208"/>
-            <a:ext cx="8127229" cy="3491992"/>
+            <a:off x="2353822" y="1664208"/>
+            <a:ext cx="7484050" cy="3215640"/>
           </a:xfrm>
           <a:prstGeom prst="rect">
             <a:avLst/>
@@ -8274,7 +8284,7 @@
         </p:nvSpPr>
         <p:spPr>
           <a:xfrm>
-            <a:off x="530352" y="5192776"/>
+            <a:off x="530352" y="4916424"/>
             <a:ext cx="11130991" cy="316992"/>
           </a:xfrm>
           <a:prstGeom prst="rect">
@@ -8309,8 +8319,8 @@
         </p:nvSpPr>
         <p:spPr>
           <a:xfrm>
-            <a:off x="530352" y="5518912"/>
-            <a:ext cx="11130991" cy="680720"/>
+            <a:off x="530352" y="5242560"/>
+            <a:ext cx="11130991" cy="957072"/>
           </a:xfrm>
           <a:prstGeom prst="rect">
             <a:avLst/>
@@ -8330,7 +8340,7 @@
                 </a:solidFill>
                 <a:latin typeface="Calibri"/>
               </a:rPr>
-              <a:t>The order barely moves; the numbers move a great deal. The four-week test rests on four misses and on one origin week.</a:t>
+              <a:t>Festival-aligned and finance's rule still lead and the house bot stays next, while naive and drift fall below the vendor; every number moves a great deal. The four-week test rests on four misses and on one origin week.</a:t>
             </a:r>
           </a:p>
         </p:txBody>
@@ -10622,7 +10632,7 @@
                 </a:solidFill>
                 <a:latin typeface="Georgia"/>
               </a:rPr>
-              <a:t>A test shorter than the plan judges too little</a:t>
+              <a:t>A test shorter than the horizon judges too little</a:t>
             </a:r>
           </a:p>
         </p:txBody>
@@ -10657,7 +10667,7 @@
                 </a:solidFill>
                 <a:latin typeface="Calibri"/>
               </a:rPr>
-              <a:t>Why must the hidden weeks span at least the eight weeks the plan covers?</a:t>
+              <a:t>Why must the hidden weeks reach at least as far ahead as the plan does, ten weeks?</a:t>
             </a:r>
           </a:p>
         </p:txBody>
@@ -10671,7 +10681,7 @@
         <p:spPr>
           <a:xfrm>
             <a:off x="530352" y="1956816"/>
-            <a:ext cx="3588410" cy="2154428"/>
+            <a:ext cx="3588410" cy="2344420"/>
           </a:xfrm>
           <a:prstGeom prst="roundRect">
             <a:avLst>
@@ -10869,7 +10879,7 @@
         <p:spPr>
           <a:xfrm>
             <a:off x="731519" y="3303524"/>
-            <a:ext cx="3186074" cy="581406"/>
+            <a:ext cx="3186074" cy="763016"/>
           </a:xfrm>
           <a:prstGeom prst="rect">
             <a:avLst/>
@@ -10890,7 +10900,7 @@
                 </a:solidFill>
                 <a:latin typeface="Calibri"/>
               </a:rPr>
-              <a:t>The plan books eight weeks, so the test hides at least eight (FPP3, section 5.8, checked 12 October 2026).</a:t>
+              <a:t>The plan's last week is ten weeks past the data, so the test must reach ten weeks ahead; four cannot (FPP3, section 5.8, checked 12 October 2026).</a:t>
             </a:r>
           </a:p>
         </p:txBody>
@@ -10904,7 +10914,7 @@
         <p:spPr>
           <a:xfrm>
             <a:off x="4301642" y="1956816"/>
-            <a:ext cx="3588410" cy="2154428"/>
+            <a:ext cx="3588410" cy="2344420"/>
           </a:xfrm>
           <a:prstGeom prst="roundRect">
             <a:avLst>
@@ -11131,7 +11141,7 @@
         <p:spPr>
           <a:xfrm>
             <a:off x="8072932" y="1956816"/>
-            <a:ext cx="3588410" cy="2154428"/>
+            <a:ext cx="3588410" cy="2344420"/>
           </a:xfrm>
           <a:prstGeom prst="roundRect">
             <a:avLst>

--- a/content/W04/D5/slides/C2_W04_D05_fallback_STUDENT.pptx
+++ b/content/W04/D5/slides/C2_W04_D05_fallback_STUDENT.pptx
@@ -600,12 +600,12 @@
           <a:lstStyle/>
           <a:p>
             <a:r>
-              <a:t>LIVE, 10 minutes. The guardrail sat on the margin, and the price forecast's error at a six-month</a:t>
-            </a:r>
-          </a:p>
-          <a:p>
-            <a:r>
-              <a:t>horizon was wider than the whole band; Zillow did stop, by winding the business down. Groups name</a:t>
+              <a:t>LIVE, 10 minutes. The guardrail sat on the margin, which suggests the price forecast's error three to</a:t>
+            </a:r>
+          </a:p>
+          <a:p>
+            <a:r>
+              <a:t>six months out was wider than the whole band; Zillow did stop, by winding the business down. Groups name</a:t>
             </a:r>
           </a:p>
           <a:p>

--- a/content/W04/D5/slides/C2_W04_D05_fallback_STUDENT.pptx
+++ b/content/W04/D5/slides/C2_W04_D05_fallback_STUDENT.pptx
@@ -19,6 +19,10 @@
     <p:sldId id="267" r:id="rId19"/>
     <p:sldId id="268" r:id="rId20"/>
     <p:sldId id="269" r:id="rId21"/>
+    <p:sldId id="270" r:id="rId22"/>
+    <p:sldId id="271" r:id="rId23"/>
+    <p:sldId id="272" r:id="rId24"/>
+    <p:sldId id="273" r:id="rId25"/>
   </p:sldIdLst>
   <p:sldSz cx="12191695" cy="6858000" type="screen4x3"/>
   <p:notesSz cx="6858000" cy="9144000"/>
@@ -520,7 +524,12 @@
           </a:p>
           <a:p>
             <a:r>
-              <a:t>autocorrelation, smoothing or ARIMA: the faculty session (tentative) owns them. Read the four parts.</a:t>
+              <a:t>autocorrelation, smoothing or ARIMA: the faculty session (tentative) owns them. Read the five parts;</a:t>
+            </a:r>
+          </a:p>
+          <a:p>
+            <a:r>
+              <a:t>part 3 goes beyond the curriculum row's five subtopics, and says so on its first slide.</a:t>
             </a:r>
           </a:p>
           <a:p>
@@ -600,22 +609,17 @@
           <a:lstStyle/>
           <a:p>
             <a:r>
-              <a:t>LIVE, 10 minutes. The guardrail sat on the margin, which suggests the price forecast's error three to</a:t>
-            </a:r>
-          </a:p>
-          <a:p>
-            <a:r>
-              <a:t>six months out was wider than the whole band; Zillow did stop, by winding the business down. Groups name</a:t>
-            </a:r>
-          </a:p>
-          <a:p>
-            <a:r>
-              <a:t>the Lucknow equivalent: a cushion thinner than the forecast's error at the plan's horizon.</a:t>
-            </a:r>
-          </a:p>
-          <a:p>
-            <a:r>
-              <a:t>Transition: Target Canada.</a:t>
+              <a:t>LIVE, 4 minutes. Vote first. The day's plan, 19,760 shifts, books festival-aligned's forecast itself</a:t>
+            </a:r>
+          </a:p>
+          <a:p>
+            <a:r>
+              <a:t>and prices the error bar both ways; this part asks how far a planner should lean. Transition: the</a:t>
+            </a:r>
+          </a:p>
+          <a:p>
+            <a:r>
+              <a:t>answer.</a:t>
             </a:r>
           </a:p>
         </p:txBody>
@@ -685,17 +689,22 @@
           <a:lstStyle/>
           <a:p>
             <a:r>
-              <a:t>LIVE, 10 minutes. The forecasting account is Canadian Business's, through the archived copy the</a:t>
-            </a:r>
-          </a:p>
-          <a:p>
-            <a:r>
-              <a:t>research ledger cites. The Lucknow version: a vendor model with no Lucknow festival in its record.</a:t>
-            </a:r>
-          </a:p>
-          <a:p>
-            <a:r>
-              <a:t>Transition: the two side by side.</a:t>
+              <a:t>LIVE, 6 minutes. Work the 100 weeks on the board first, then read the curve: the average cost of the</a:t>
+            </a:r>
+          </a:p>
+          <a:p>
+            <a:r>
+              <a:t>week of 19 October with each of the thirteen hidden-week misses tried as its demand. The total is</a:t>
+            </a:r>
+          </a:p>
+          <a:p>
+            <a:r>
+              <a:t>lowest between 2 and 3 percent above the forecast. If the late cost rises toward Rs 40, the low point</a:t>
+            </a:r>
+          </a:p>
+          <a:p>
+            <a:r>
+              <a:t>moves right. Explorer: scene F4. Transition: reading the 0.82 off thirteen weeks.</a:t>
             </a:r>
           </a:p>
         </p:txBody>
@@ -765,12 +774,27 @@
           <a:lstStyle/>
           <a:p>
             <a:r>
-              <a:t>LIVE, 10 minutes. Each group writes the check in one line. Transition: part 4, the second</a:t>
-            </a:r>
-          </a:p>
-          <a:p>
-            <a:r>
-              <a:t>transcript.</a:t>
+              <a:t>LIVE, 5 minutes. Point at the 10th and 11th dots. With thirteen weeks the true point could sit</a:t>
+            </a:r>
+          </a:p>
+          <a:p>
+            <a:r>
+              <a:t>anywhere from about 2 to 3 percent, and the curve on S11 is nearly flat there. The cushion is read</a:t>
+            </a:r>
+          </a:p>
+          <a:p>
+            <a:r>
+              <a:t>from the same weeks it is scored on, so every forecast is compared at its own 0.82 point; a rolling</a:t>
+            </a:r>
+          </a:p>
+          <a:p>
+            <a:r>
+              <a:t>origin through 2025's festival would set it on weeks the test never touches. Transition: the plan,</a:t>
+            </a:r>
+          </a:p>
+          <a:p>
+            <a:r>
+              <a:t>raised.</a:t>
             </a:r>
           </a:p>
         </p:txBody>
@@ -840,12 +864,17 @@
           <a:lstStyle/>
           <a:p>
             <a:r>
-              <a:t>LIVE, 15 minutes. Pairs play the planner and one stakeholder, then swap. The full [D] transcript is</a:t>
-            </a:r>
-          </a:p>
-          <a:p>
-            <a:r>
-              <a:t>in `extras/C2_W04_D05_interview_transcripts_STUDENT.md`. Transition: the close.</a:t>
+              <a:t>LIVE, 5 minutes. Walk the first row aloud: 344,448 times 1.026 is 353,404, over 120 and rounded up is</a:t>
+            </a:r>
+          </a:p>
+          <a:p>
+            <a:r>
+              <a:t>2,946 shifts. Each group writes one line: what the 515 extra shifts buy, and what would lower them.</a:t>
+            </a:r>
+          </a:p>
+          <a:p>
+            <a:r>
+              <a:t>Transition: part 4, two real failures.</a:t>
             </a:r>
           </a:p>
         </p:txBody>
@@ -915,6 +944,321 @@
           <a:lstStyle/>
           <a:p>
             <a:r>
+              <a:t>LIVE, 7 minutes. The guardrail sat on the margin, which suggests the price forecast's error three to</a:t>
+            </a:r>
+          </a:p>
+          <a:p>
+            <a:r>
+              <a:t>six months out was wider than the whole band; Zillow did stop, by winding the business down. Groups name</a:t>
+            </a:r>
+          </a:p>
+          <a:p>
+            <a:r>
+              <a:t>the Lucknow equivalent: a cushion thinner than the forecast's error at the plan's horizon.</a:t>
+            </a:r>
+          </a:p>
+          <a:p>
+            <a:r>
+              <a:t>Transition: Target Canada.</a:t>
+            </a:r>
+          </a:p>
+        </p:txBody>
+      </p:sp>
+      <p:sp>
+        <p:nvSpPr>
+          <p:cNvPr id="4" name="Slide Number Placeholder 3"/>
+          <p:cNvSpPr>
+            <a:spLocks noGrp="1"/>
+          </p:cNvSpPr>
+          <p:nvPr>
+            <p:ph type="sldNum" idx="5" sz="quarter"/>
+          </p:nvPr>
+        </p:nvSpPr>
+        <p:spPr/>
+      </p:sp>
+    </p:spTree>
+  </p:cSld>
+  <p:clrMapOvr>
+    <a:masterClrMapping/>
+  </p:clrMapOvr>
+</p:notes>
+</file>
+
+<file path=ppt/notesSlides/notesSlide15.xml><?xml version="1.0" encoding="utf-8"?>
+<p:notes xmlns:a="http://schemas.openxmlformats.org/drawingml/2006/main" xmlns:p="http://schemas.openxmlformats.org/presentationml/2006/main" xmlns:r="http://schemas.openxmlformats.org/officeDocument/2006/relationships">
+  <p:cSld>
+    <p:spTree>
+      <p:nvGrpSpPr>
+        <p:cNvPr id="1" name=""/>
+        <p:cNvGrpSpPr/>
+        <p:nvPr/>
+      </p:nvGrpSpPr>
+      <p:grpSpPr>
+        <a:xfrm>
+          <a:off x="0" y="0"/>
+          <a:ext cx="0" cy="0"/>
+          <a:chOff x="0" y="0"/>
+          <a:chExt cx="0" cy="0"/>
+        </a:xfrm>
+      </p:grpSpPr>
+      <p:sp>
+        <p:nvSpPr>
+          <p:cNvPr id="2" name="Slide Image Placeholder 1"/>
+          <p:cNvSpPr>
+            <a:spLocks noGrp="1"/>
+          </p:cNvSpPr>
+          <p:nvPr>
+            <p:ph type="sldImg" idx="2"/>
+          </p:nvPr>
+        </p:nvSpPr>
+        <p:spPr/>
+      </p:sp>
+      <p:sp>
+        <p:nvSpPr>
+          <p:cNvPr id="3" name="Notes Placeholder 2"/>
+          <p:cNvSpPr>
+            <a:spLocks noGrp="1"/>
+          </p:cNvSpPr>
+          <p:nvPr>
+            <p:ph type="body" idx="3" sz="quarter"/>
+          </p:nvPr>
+        </p:nvSpPr>
+        <p:spPr/>
+        <p:txBody>
+          <a:bodyPr/>
+          <a:lstStyle/>
+          <a:p>
+            <a:r>
+              <a:t>LIVE, 7 minutes. The forecasting account is Canadian Business's, through the archived copy the</a:t>
+            </a:r>
+          </a:p>
+          <a:p>
+            <a:r>
+              <a:t>research ledger cites. The Lucknow version: a vendor model with no Lucknow festival in its record.</a:t>
+            </a:r>
+          </a:p>
+          <a:p>
+            <a:r>
+              <a:t>Transition: the two side by side.</a:t>
+            </a:r>
+          </a:p>
+        </p:txBody>
+      </p:sp>
+      <p:sp>
+        <p:nvSpPr>
+          <p:cNvPr id="4" name="Slide Number Placeholder 3"/>
+          <p:cNvSpPr>
+            <a:spLocks noGrp="1"/>
+          </p:cNvSpPr>
+          <p:nvPr>
+            <p:ph type="sldNum" idx="5" sz="quarter"/>
+          </p:nvPr>
+        </p:nvSpPr>
+        <p:spPr/>
+      </p:sp>
+    </p:spTree>
+  </p:cSld>
+  <p:clrMapOvr>
+    <a:masterClrMapping/>
+  </p:clrMapOvr>
+</p:notes>
+</file>
+
+<file path=ppt/notesSlides/notesSlide16.xml><?xml version="1.0" encoding="utf-8"?>
+<p:notes xmlns:a="http://schemas.openxmlformats.org/drawingml/2006/main" xmlns:p="http://schemas.openxmlformats.org/presentationml/2006/main" xmlns:r="http://schemas.openxmlformats.org/officeDocument/2006/relationships">
+  <p:cSld>
+    <p:spTree>
+      <p:nvGrpSpPr>
+        <p:cNvPr id="1" name=""/>
+        <p:cNvGrpSpPr/>
+        <p:nvPr/>
+      </p:nvGrpSpPr>
+      <p:grpSpPr>
+        <a:xfrm>
+          <a:off x="0" y="0"/>
+          <a:ext cx="0" cy="0"/>
+          <a:chOff x="0" y="0"/>
+          <a:chExt cx="0" cy="0"/>
+        </a:xfrm>
+      </p:grpSpPr>
+      <p:sp>
+        <p:nvSpPr>
+          <p:cNvPr id="2" name="Slide Image Placeholder 1"/>
+          <p:cNvSpPr>
+            <a:spLocks noGrp="1"/>
+          </p:cNvSpPr>
+          <p:nvPr>
+            <p:ph type="sldImg" idx="2"/>
+          </p:nvPr>
+        </p:nvSpPr>
+        <p:spPr/>
+      </p:sp>
+      <p:sp>
+        <p:nvSpPr>
+          <p:cNvPr id="3" name="Notes Placeholder 2"/>
+          <p:cNvSpPr>
+            <a:spLocks noGrp="1"/>
+          </p:cNvSpPr>
+          <p:nvPr>
+            <p:ph type="body" idx="3" sz="quarter"/>
+          </p:nvPr>
+        </p:nvSpPr>
+        <p:spPr/>
+        <p:txBody>
+          <a:bodyPr/>
+          <a:lstStyle/>
+          <a:p>
+            <a:r>
+              <a:t>LIVE, 6 minutes. Each group writes the check in one line. Transition: part 5, the second</a:t>
+            </a:r>
+          </a:p>
+          <a:p>
+            <a:r>
+              <a:t>transcript.</a:t>
+            </a:r>
+          </a:p>
+        </p:txBody>
+      </p:sp>
+      <p:sp>
+        <p:nvSpPr>
+          <p:cNvPr id="4" name="Slide Number Placeholder 3"/>
+          <p:cNvSpPr>
+            <a:spLocks noGrp="1"/>
+          </p:cNvSpPr>
+          <p:nvPr>
+            <p:ph type="sldNum" idx="5" sz="quarter"/>
+          </p:nvPr>
+        </p:nvSpPr>
+        <p:spPr/>
+      </p:sp>
+    </p:spTree>
+  </p:cSld>
+  <p:clrMapOvr>
+    <a:masterClrMapping/>
+  </p:clrMapOvr>
+</p:notes>
+</file>
+
+<file path=ppt/notesSlides/notesSlide17.xml><?xml version="1.0" encoding="utf-8"?>
+<p:notes xmlns:a="http://schemas.openxmlformats.org/drawingml/2006/main" xmlns:p="http://schemas.openxmlformats.org/presentationml/2006/main" xmlns:r="http://schemas.openxmlformats.org/officeDocument/2006/relationships">
+  <p:cSld>
+    <p:spTree>
+      <p:nvGrpSpPr>
+        <p:cNvPr id="1" name=""/>
+        <p:cNvGrpSpPr/>
+        <p:nvPr/>
+      </p:nvGrpSpPr>
+      <p:grpSpPr>
+        <a:xfrm>
+          <a:off x="0" y="0"/>
+          <a:ext cx="0" cy="0"/>
+          <a:chOff x="0" y="0"/>
+          <a:chExt cx="0" cy="0"/>
+        </a:xfrm>
+      </p:grpSpPr>
+      <p:sp>
+        <p:nvSpPr>
+          <p:cNvPr id="2" name="Slide Image Placeholder 1"/>
+          <p:cNvSpPr>
+            <a:spLocks noGrp="1"/>
+          </p:cNvSpPr>
+          <p:nvPr>
+            <p:ph type="sldImg" idx="2"/>
+          </p:nvPr>
+        </p:nvSpPr>
+        <p:spPr/>
+      </p:sp>
+      <p:sp>
+        <p:nvSpPr>
+          <p:cNvPr id="3" name="Notes Placeholder 2"/>
+          <p:cNvSpPr>
+            <a:spLocks noGrp="1"/>
+          </p:cNvSpPr>
+          <p:nvPr>
+            <p:ph type="body" idx="3" sz="quarter"/>
+          </p:nvPr>
+        </p:nvSpPr>
+        <p:spPr/>
+        <p:txBody>
+          <a:bodyPr/>
+          <a:lstStyle/>
+          <a:p>
+            <a:r>
+              <a:t>LIVE, 23 minutes. Pairs play the planner and one stakeholder, then swap. The full [D] transcript is</a:t>
+            </a:r>
+          </a:p>
+          <a:p>
+            <a:r>
+              <a:t>in `extras/C2_W04_D05_interview_transcripts_STUDENT.md`. Transition: the close.</a:t>
+            </a:r>
+          </a:p>
+        </p:txBody>
+      </p:sp>
+      <p:sp>
+        <p:nvSpPr>
+          <p:cNvPr id="4" name="Slide Number Placeholder 3"/>
+          <p:cNvSpPr>
+            <a:spLocks noGrp="1"/>
+          </p:cNvSpPr>
+          <p:nvPr>
+            <p:ph type="sldNum" idx="5" sz="quarter"/>
+          </p:nvPr>
+        </p:nvSpPr>
+        <p:spPr/>
+      </p:sp>
+    </p:spTree>
+  </p:cSld>
+  <p:clrMapOvr>
+    <a:masterClrMapping/>
+  </p:clrMapOvr>
+</p:notes>
+</file>
+
+<file path=ppt/notesSlides/notesSlide18.xml><?xml version="1.0" encoding="utf-8"?>
+<p:notes xmlns:a="http://schemas.openxmlformats.org/drawingml/2006/main" xmlns:p="http://schemas.openxmlformats.org/presentationml/2006/main" xmlns:r="http://schemas.openxmlformats.org/officeDocument/2006/relationships">
+  <p:cSld>
+    <p:spTree>
+      <p:nvGrpSpPr>
+        <p:cNvPr id="1" name=""/>
+        <p:cNvGrpSpPr/>
+        <p:nvPr/>
+      </p:nvGrpSpPr>
+      <p:grpSpPr>
+        <a:xfrm>
+          <a:off x="0" y="0"/>
+          <a:ext cx="0" cy="0"/>
+          <a:chOff x="0" y="0"/>
+          <a:chExt cx="0" cy="0"/>
+        </a:xfrm>
+      </p:grpSpPr>
+      <p:sp>
+        <p:nvSpPr>
+          <p:cNvPr id="2" name="Slide Image Placeholder 1"/>
+          <p:cNvSpPr>
+            <a:spLocks noGrp="1"/>
+          </p:cNvSpPr>
+          <p:nvPr>
+            <p:ph type="sldImg" idx="2"/>
+          </p:nvPr>
+        </p:nvSpPr>
+        <p:spPr/>
+      </p:sp>
+      <p:sp>
+        <p:nvSpPr>
+          <p:cNvPr id="3" name="Notes Placeholder 2"/>
+          <p:cNvSpPr>
+            <a:spLocks noGrp="1"/>
+          </p:cNvSpPr>
+          <p:nvPr>
+            <p:ph type="body" idx="3" sz="quarter"/>
+          </p:nvPr>
+        </p:nvSpPr>
+        <p:spPr/>
+        <p:txBody>
+          <a:bodyPr/>
+          <a:lstStyle/>
+          <a:p>
+            <a:r>
               <a:t>LIVE, 2 minutes. The faculty session (tentative) picks up autocorrelation and smoothing from here</a:t>
             </a:r>
           </a:p>
@@ -990,7 +1334,7 @@
           <a:lstStyle/>
           <a:p>
             <a:r>
-              <a:t>LIVE, 10 minutes. Groups run notebook 02 with the split moved to 24 August 2026, or read this table.</a:t>
+              <a:t>LIVE, 8 minutes. Groups run notebook 06 with the split moved to 24 August 2026, or read this table.</a:t>
             </a:r>
           </a:p>
           <a:p>
@@ -1070,7 +1414,7 @@
           <a:lstStyle/>
           <a:p>
             <a:r>
-              <a:t>LIVE, 4 minutes. Vote, argue for one minute, vote again. a and c are partly true; b is the cause.</a:t>
+              <a:t>LIVE, 5 minutes. Vote, argue for one minute, vote again. a and c are partly true; b is the cause.</a:t>
             </a:r>
           </a:p>
           <a:p>
@@ -1220,7 +1564,7 @@
           <a:lstStyle/>
           <a:p>
             <a:r>
-              <a:t>LIVE, 6 minutes. Each group writes one line: what a four-week test would have let the vendor's</a:t>
+              <a:t>LIVE, 5 minutes. Each group writes one line: what a four-week test would have let the vendor's</a:t>
             </a:r>
           </a:p>
           <a:p>
@@ -1295,7 +1639,7 @@
           <a:lstStyle/>
           <a:p>
             <a:r>
-              <a:t>LIVE, 4 minutes. This is the rolling-origin picture of FPP3's section 5.10 (checked 12 October</a:t>
+              <a:t>LIVE, 5 minutes. This is the rolling-origin picture of FPP3's section 5.10 (checked 12 October</a:t>
             </a:r>
           </a:p>
           <a:p>
@@ -1370,7 +1714,7 @@
           <a:lstStyle/>
           <a:p>
             <a:r>
-              <a:t>LIVE, 10 minutes. Each group takes one row and calls out its two misses. Festival-aligned copies</a:t>
+              <a:t>LIVE, 12 minutes. Each group takes one row and calls out its two misses. Festival-aligned copies</a:t>
             </a:r>
           </a:p>
           <a:p>
@@ -1445,7 +1789,7 @@
           <a:lstStyle/>
           <a:p>
             <a:r>
-              <a:t>LIVE, 3 minutes. Groups add their row's misses to the board first. Transition: the answer.</a:t>
+              <a:t>LIVE, 5 minutes. Groups add their row's misses to the board first. Transition: the answer.</a:t>
             </a:r>
           </a:p>
         </p:txBody>
@@ -1515,12 +1859,12 @@
           <a:lstStyle/>
           <a:p>
             <a:r>
-              <a:t>LIVE, 3 minutes. 71,180 over 2,040 is about thirty-five: b was the closest option. Transition:</a:t>
-            </a:r>
-          </a:p>
-          <a:p>
-            <a:r>
-              <a:t>part 3, two real failures.</a:t>
+              <a:t>LIVE, 8 minutes. 71,180 over 2,040 is about thirty-five: b was the closest option. Transition:</a:t>
+            </a:r>
+          </a:p>
+          <a:p>
+            <a:r>
+              <a:t>part 3, how far above the forecast the plan should sit.</a:t>
             </a:r>
           </a:p>
         </p:txBody>
@@ -4674,7 +5018,7 @@
                 </a:solidFill>
                 <a:latin typeface="Calibri"/>
               </a:rPr>
-              <a:t>WEEK 4  ·  FRIDAY  ·  FLIPKART, LUCKNOW  ·  FALLBACK</a:t>
+              <a:t>WEEK 4  ·  FRIDAY  ·  FORECASTING BASICS  ·  FALLBACK</a:t>
             </a:r>
           </a:p>
         </p:txBody>
@@ -4709,7 +5053,7 @@
                 </a:solidFill>
                 <a:latin typeface="Georgia"/>
               </a:rPr>
-              <a:t>Four parts, each testing the morning's choice</a:t>
+              <a:t>Five parts, each testing the day's choice</a:t>
             </a:r>
           </a:p>
         </p:txBody>
@@ -4751,7 +5095,7 @@
       </p:sp>
       <p:pic>
         <p:nvPicPr>
-          <p:cNvPr id="9" name="mermaid diagram" descr="f7bebd1c83210485.png"/>
+          <p:cNvPr id="9" name="mermaid diagram" descr="318abff76339a967.png"/>
           <p:cNvPicPr>
             <a:picLocks noChangeAspect="1"/>
           </p:cNvPicPr>
@@ -4765,8 +5109,8 @@
         </p:blipFill>
         <p:spPr>
           <a:xfrm>
-            <a:off x="780897" y="1956816"/>
-            <a:ext cx="10629900" cy="1600200"/>
+            <a:off x="530352" y="1956816"/>
+            <a:ext cx="11130991" cy="1748136"/>
           </a:xfrm>
           <a:prstGeom prst="rect">
             <a:avLst/>
@@ -4781,7 +5125,7 @@
         </p:nvSpPr>
         <p:spPr>
           <a:xfrm>
-            <a:off x="530352" y="3703320"/>
+            <a:off x="530352" y="3851256"/>
             <a:ext cx="11130991" cy="772160"/>
           </a:xfrm>
           <a:prstGeom prst="rect">
@@ -4842,7 +5186,7 @@
                 </a:solidFill>
                 <a:latin typeface="Calibri"/>
               </a:rPr>
-              <a:t>Week 4 Day 5: how much is coming, and how wrong could we be</a:t>
+              <a:t>Week 4, Day 5. Forecasting basics: the fallback hour</a:t>
             </a:r>
           </a:p>
         </p:txBody>
@@ -4877,7 +5221,7 @@
                 </a:solidFill>
                 <a:latin typeface="Calibri"/>
               </a:rPr>
-              <a:t>S1  ·  1 / 14</a:t>
+              <a:t>S1  ·  1 / 18</a:t>
             </a:r>
           </a:p>
         </p:txBody>
@@ -5048,7 +5392,3261 @@
                 </a:solidFill>
                 <a:latin typeface="Calibri"/>
               </a:rPr>
-              <a:t>WEEK 4  ·  FRIDAY  ·  FLIPKART, LUCKNOW  ·  FALLBACK</a:t>
+              <a:t>WEEK 4  ·  FRIDAY  ·  FORECASTING BASICS  ·  FALLBACK</a:t>
+            </a:r>
+          </a:p>
+        </p:txBody>
+      </p:sp>
+      <p:sp>
+        <p:nvSpPr>
+          <p:cNvPr id="7" name="TextBox 6"/>
+          <p:cNvSpPr txBox="1"/>
+          <p:nvPr/>
+        </p:nvSpPr>
+        <p:spPr>
+          <a:xfrm>
+            <a:off x="530352" y="676656"/>
+            <a:ext cx="11130991" cy="512064"/>
+          </a:xfrm>
+          <a:prstGeom prst="rect">
+            <a:avLst/>
+          </a:prstGeom>
+          <a:noFill/>
+        </p:spPr>
+        <p:txBody>
+          <a:bodyPr wrap="square" anchor="b" lIns="0" rIns="0" tIns="0" bIns="0">
+            <a:spAutoFit/>
+          </a:bodyPr>
+          <a:lstStyle/>
+          <a:p>
+            <a:pPr algn="l"/>
+            <a:r>
+              <a:rPr sz="2600" b="0" i="0">
+                <a:solidFill>
+                  <a:srgbClr val="1A0F5C"/>
+                </a:solidFill>
+                <a:latin typeface="Georgia"/>
+              </a:rPr>
+              <a:t>Beyond the row: how far above the forecast?</a:t>
+            </a:r>
+          </a:p>
+        </p:txBody>
+      </p:sp>
+      <p:sp>
+        <p:nvSpPr>
+          <p:cNvPr id="8" name="TextBox 7"/>
+          <p:cNvSpPr txBox="1"/>
+          <p:nvPr/>
+        </p:nvSpPr>
+        <p:spPr>
+          <a:xfrm>
+            <a:off x="530352" y="1243584"/>
+            <a:ext cx="11130991" cy="234696"/>
+          </a:xfrm>
+          <a:prstGeom prst="rect">
+            <a:avLst/>
+          </a:prstGeom>
+          <a:noFill/>
+        </p:spPr>
+        <p:txBody>
+          <a:bodyPr wrap="square" anchor="t" lIns="0" rIns="0" tIns="0" bIns="0">
+            <a:spAutoFit/>
+          </a:bodyPr>
+          <a:lstStyle/>
+          <a:p>
+            <a:pPr algn="l"/>
+            <a:r>
+              <a:rPr sz="1200" b="0" i="0">
+                <a:solidFill>
+                  <a:srgbClr val="6B6690"/>
+                </a:solidFill>
+                <a:latin typeface="Calibri"/>
+              </a:rPr>
+              <a:t>The day booked the forecast itself, and a late shipment costs 4.6 times a spare one. Where should the plan sit?</a:t>
+            </a:r>
+          </a:p>
+        </p:txBody>
+      </p:sp>
+      <p:sp>
+        <p:nvSpPr>
+          <p:cNvPr id="9" name="Rounded Rectangle 8"/>
+          <p:cNvSpPr/>
+          <p:nvPr/>
+        </p:nvSpPr>
+        <p:spPr>
+          <a:xfrm>
+            <a:off x="530352" y="1956816"/>
+            <a:ext cx="2645587" cy="2195576"/>
+          </a:xfrm>
+          <a:prstGeom prst="roundRect">
+            <a:avLst>
+              <a:gd name="adj" fmla="val 5000"/>
+            </a:avLst>
+          </a:prstGeom>
+          <a:solidFill>
+            <a:srgbClr val="FFFFFF"/>
+          </a:solidFill>
+          <a:ln w="9525">
+            <a:solidFill>
+              <a:srgbClr val="E4E1F1"/>
+            </a:solidFill>
+          </a:ln>
+          <a:effectLst>
+            <a:outerShdw blurRad="76200" dist="19050" dir="5400000" algn="bl" rotWithShape="0">
+              <a:srgbClr val="1A0F5C">
+                <a:alpha val="12000"/>
+              </a:srgbClr>
+            </a:outerShdw>
+          </a:effectLst>
+        </p:spPr>
+        <p:style>
+          <a:lnRef idx="1">
+            <a:schemeClr val="accent1"/>
+          </a:lnRef>
+          <a:fillRef idx="3">
+            <a:schemeClr val="accent1"/>
+          </a:fillRef>
+          <a:effectRef idx="2">
+            <a:schemeClr val="accent1"/>
+          </a:effectRef>
+          <a:fontRef idx="minor">
+            <a:schemeClr val="lt1"/>
+          </a:fontRef>
+        </p:style>
+        <p:txBody>
+          <a:bodyPr rtlCol="0" anchor="ctr" wrap="square"/>
+          <a:lstStyle/>
+          <a:p>
+            <a:pPr algn="ctr"/>
+          </a:p>
+        </p:txBody>
+      </p:sp>
+      <p:sp>
+        <p:nvSpPr>
+          <p:cNvPr id="10" name="Oval 9"/>
+          <p:cNvSpPr/>
+          <p:nvPr/>
+        </p:nvSpPr>
+        <p:spPr>
+          <a:xfrm>
+            <a:off x="731519" y="2157984"/>
+            <a:ext cx="457200" cy="457200"/>
+          </a:xfrm>
+          <a:prstGeom prst="ellipse">
+            <a:avLst/>
+          </a:prstGeom>
+          <a:solidFill>
+            <a:srgbClr val="EEEAFB"/>
+          </a:solidFill>
+          <a:ln>
+            <a:noFill/>
+          </a:ln>
+          <a:effectLst/>
+        </p:spPr>
+        <p:style>
+          <a:lnRef idx="1">
+            <a:schemeClr val="accent1"/>
+          </a:lnRef>
+          <a:fillRef idx="3">
+            <a:schemeClr val="accent1"/>
+          </a:fillRef>
+          <a:effectRef idx="2">
+            <a:schemeClr val="accent1"/>
+          </a:effectRef>
+          <a:fontRef idx="minor">
+            <a:schemeClr val="lt1"/>
+          </a:fontRef>
+        </p:style>
+        <p:txBody>
+          <a:bodyPr rtlCol="0" anchor="ctr" wrap="square"/>
+          <a:lstStyle/>
+          <a:p>
+            <a:pPr algn="ctr"/>
+          </a:p>
+        </p:txBody>
+      </p:sp>
+      <p:pic>
+        <p:nvPicPr>
+          <p:cNvPr id="11" name="Picture 10" descr="list_637b34e7c72a.png"/>
+          <p:cNvPicPr>
+            <a:picLocks noChangeAspect="1"/>
+          </p:cNvPicPr>
+          <p:nvPr/>
+        </p:nvPicPr>
+        <p:blipFill>
+          <a:blip r:embed="rId4"/>
+          <a:stretch>
+            <a:fillRect/>
+          </a:stretch>
+        </p:blipFill>
+        <p:spPr>
+          <a:xfrm>
+            <a:off x="841247" y="2267712"/>
+            <a:ext cx="237744" cy="237744"/>
+          </a:xfrm>
+          <a:prstGeom prst="rect">
+            <a:avLst/>
+          </a:prstGeom>
+        </p:spPr>
+      </p:pic>
+      <p:sp>
+        <p:nvSpPr>
+          <p:cNvPr id="12" name="TextBox 11"/>
+          <p:cNvSpPr txBox="1"/>
+          <p:nvPr/>
+        </p:nvSpPr>
+        <p:spPr>
+          <a:xfrm>
+            <a:off x="731519" y="2724912"/>
+            <a:ext cx="2243251" cy="160401"/>
+          </a:xfrm>
+          <a:prstGeom prst="rect">
+            <a:avLst/>
+          </a:prstGeom>
+          <a:noFill/>
+        </p:spPr>
+        <p:txBody>
+          <a:bodyPr wrap="square" anchor="t" lIns="0" rIns="0" tIns="0" bIns="0">
+            <a:spAutoFit/>
+          </a:bodyPr>
+          <a:lstStyle/>
+          <a:p>
+            <a:pPr algn="l"/>
+            <a:r>
+              <a:rPr sz="750" b="1" i="0" spc="250">
+                <a:solidFill>
+                  <a:srgbClr val="5B3FD6"/>
+                </a:solidFill>
+                <a:latin typeface="Calibri"/>
+              </a:rPr>
+              <a:t>A</a:t>
+            </a:r>
+          </a:p>
+        </p:txBody>
+      </p:sp>
+      <p:sp>
+        <p:nvSpPr>
+          <p:cNvPr id="13" name="TextBox 12"/>
+          <p:cNvSpPr txBox="1"/>
+          <p:nvPr/>
+        </p:nvSpPr>
+        <p:spPr>
+          <a:xfrm>
+            <a:off x="731519" y="2962656"/>
+            <a:ext cx="2243251" cy="267716"/>
+          </a:xfrm>
+          <a:prstGeom prst="rect">
+            <a:avLst/>
+          </a:prstGeom>
+          <a:noFill/>
+        </p:spPr>
+        <p:txBody>
+          <a:bodyPr wrap="square" anchor="t" lIns="0" rIns="0" tIns="0" bIns="0">
+            <a:spAutoFit/>
+          </a:bodyPr>
+          <a:lstStyle/>
+          <a:p>
+            <a:pPr algn="l"/>
+            <a:r>
+              <a:rPr sz="1400" b="1" i="0">
+                <a:solidFill>
+                  <a:srgbClr val="1A0F5C"/>
+                </a:solidFill>
+                <a:latin typeface="Calibri"/>
+              </a:rPr>
+              <a:t>At the forecast</a:t>
+            </a:r>
+          </a:p>
+        </p:txBody>
+      </p:sp>
+      <p:sp>
+        <p:nvSpPr>
+          <p:cNvPr id="14" name="TextBox 13"/>
+          <p:cNvSpPr txBox="1"/>
+          <p:nvPr/>
+        </p:nvSpPr>
+        <p:spPr>
+          <a:xfrm>
+            <a:off x="731519" y="3303524"/>
+            <a:ext cx="2243251" cy="399796"/>
+          </a:xfrm>
+          <a:prstGeom prst="rect">
+            <a:avLst/>
+          </a:prstGeom>
+          <a:noFill/>
+        </p:spPr>
+        <p:txBody>
+          <a:bodyPr wrap="square" anchor="t" lIns="0" rIns="0" tIns="0" bIns="0">
+            <a:spAutoFit/>
+          </a:bodyPr>
+          <a:lstStyle/>
+          <a:p>
+            <a:pPr algn="l"/>
+            <a:r>
+              <a:rPr sz="1100" b="0" i="0">
+                <a:solidFill>
+                  <a:srgbClr val="6B6690"/>
+                </a:solidFill>
+                <a:latin typeface="Calibri"/>
+              </a:rPr>
+              <a:t>Covering demand in about half the weeks.</a:t>
+            </a:r>
+          </a:p>
+        </p:txBody>
+      </p:sp>
+      <p:sp>
+        <p:nvSpPr>
+          <p:cNvPr id="15" name="Rounded Rectangle 14"/>
+          <p:cNvSpPr/>
+          <p:nvPr/>
+        </p:nvSpPr>
+        <p:spPr>
+          <a:xfrm>
+            <a:off x="3358819" y="1956816"/>
+            <a:ext cx="2645587" cy="2195576"/>
+          </a:xfrm>
+          <a:prstGeom prst="roundRect">
+            <a:avLst>
+              <a:gd name="adj" fmla="val 5000"/>
+            </a:avLst>
+          </a:prstGeom>
+          <a:solidFill>
+            <a:srgbClr val="FFFFFF"/>
+          </a:solidFill>
+          <a:ln w="9525">
+            <a:solidFill>
+              <a:srgbClr val="E4E1F1"/>
+            </a:solidFill>
+          </a:ln>
+          <a:effectLst>
+            <a:outerShdw blurRad="76200" dist="19050" dir="5400000" algn="bl" rotWithShape="0">
+              <a:srgbClr val="1A0F5C">
+                <a:alpha val="12000"/>
+              </a:srgbClr>
+            </a:outerShdw>
+          </a:effectLst>
+        </p:spPr>
+        <p:style>
+          <a:lnRef idx="1">
+            <a:schemeClr val="accent1"/>
+          </a:lnRef>
+          <a:fillRef idx="3">
+            <a:schemeClr val="accent1"/>
+          </a:fillRef>
+          <a:effectRef idx="2">
+            <a:schemeClr val="accent1"/>
+          </a:effectRef>
+          <a:fontRef idx="minor">
+            <a:schemeClr val="lt1"/>
+          </a:fontRef>
+        </p:style>
+        <p:txBody>
+          <a:bodyPr rtlCol="0" anchor="ctr" wrap="square"/>
+          <a:lstStyle/>
+          <a:p>
+            <a:pPr algn="ctr"/>
+          </a:p>
+        </p:txBody>
+      </p:sp>
+      <p:sp>
+        <p:nvSpPr>
+          <p:cNvPr id="16" name="Oval 15"/>
+          <p:cNvSpPr/>
+          <p:nvPr/>
+        </p:nvSpPr>
+        <p:spPr>
+          <a:xfrm>
+            <a:off x="3559987" y="2157984"/>
+            <a:ext cx="457200" cy="457200"/>
+          </a:xfrm>
+          <a:prstGeom prst="ellipse">
+            <a:avLst/>
+          </a:prstGeom>
+          <a:solidFill>
+            <a:srgbClr val="EEEAFB"/>
+          </a:solidFill>
+          <a:ln>
+            <a:noFill/>
+          </a:ln>
+          <a:effectLst/>
+        </p:spPr>
+        <p:style>
+          <a:lnRef idx="1">
+            <a:schemeClr val="accent1"/>
+          </a:lnRef>
+          <a:fillRef idx="3">
+            <a:schemeClr val="accent1"/>
+          </a:fillRef>
+          <a:effectRef idx="2">
+            <a:schemeClr val="accent1"/>
+          </a:effectRef>
+          <a:fontRef idx="minor">
+            <a:schemeClr val="lt1"/>
+          </a:fontRef>
+        </p:style>
+        <p:txBody>
+          <a:bodyPr rtlCol="0" anchor="ctr" wrap="square"/>
+          <a:lstStyle/>
+          <a:p>
+            <a:pPr algn="ctr"/>
+          </a:p>
+        </p:txBody>
+      </p:sp>
+      <p:pic>
+        <p:nvPicPr>
+          <p:cNvPr id="17" name="Picture 16" descr="list_637b34e7c72a.png"/>
+          <p:cNvPicPr>
+            <a:picLocks noChangeAspect="1"/>
+          </p:cNvPicPr>
+          <p:nvPr/>
+        </p:nvPicPr>
+        <p:blipFill>
+          <a:blip r:embed="rId4"/>
+          <a:stretch>
+            <a:fillRect/>
+          </a:stretch>
+        </p:blipFill>
+        <p:spPr>
+          <a:xfrm>
+            <a:off x="3669715" y="2267712"/>
+            <a:ext cx="237744" cy="237744"/>
+          </a:xfrm>
+          <a:prstGeom prst="rect">
+            <a:avLst/>
+          </a:prstGeom>
+        </p:spPr>
+      </p:pic>
+      <p:sp>
+        <p:nvSpPr>
+          <p:cNvPr id="18" name="TextBox 17"/>
+          <p:cNvSpPr txBox="1"/>
+          <p:nvPr/>
+        </p:nvSpPr>
+        <p:spPr>
+          <a:xfrm>
+            <a:off x="3559987" y="2724912"/>
+            <a:ext cx="2243251" cy="160401"/>
+          </a:xfrm>
+          <a:prstGeom prst="rect">
+            <a:avLst/>
+          </a:prstGeom>
+          <a:noFill/>
+        </p:spPr>
+        <p:txBody>
+          <a:bodyPr wrap="square" anchor="t" lIns="0" rIns="0" tIns="0" bIns="0">
+            <a:spAutoFit/>
+          </a:bodyPr>
+          <a:lstStyle/>
+          <a:p>
+            <a:pPr algn="l"/>
+            <a:r>
+              <a:rPr sz="750" b="1" i="0" spc="250">
+                <a:solidFill>
+                  <a:srgbClr val="5B3FD6"/>
+                </a:solidFill>
+                <a:latin typeface="Calibri"/>
+              </a:rPr>
+              <a:t>B</a:t>
+            </a:r>
+          </a:p>
+        </p:txBody>
+      </p:sp>
+      <p:sp>
+        <p:nvSpPr>
+          <p:cNvPr id="19" name="TextBox 18"/>
+          <p:cNvSpPr txBox="1"/>
+          <p:nvPr/>
+        </p:nvSpPr>
+        <p:spPr>
+          <a:xfrm>
+            <a:off x="3559987" y="2962656"/>
+            <a:ext cx="2243251" cy="267716"/>
+          </a:xfrm>
+          <a:prstGeom prst="rect">
+            <a:avLst/>
+          </a:prstGeom>
+          <a:noFill/>
+        </p:spPr>
+        <p:txBody>
+          <a:bodyPr wrap="square" anchor="t" lIns="0" rIns="0" tIns="0" bIns="0">
+            <a:spAutoFit/>
+          </a:bodyPr>
+          <a:lstStyle/>
+          <a:p>
+            <a:pPr algn="l"/>
+            <a:r>
+              <a:rPr sz="1400" b="1" i="0">
+                <a:solidFill>
+                  <a:srgbClr val="1A0F5C"/>
+                </a:solidFill>
+                <a:latin typeface="Calibri"/>
+              </a:rPr>
+              <a:t>Above the forecast</a:t>
+            </a:r>
+          </a:p>
+        </p:txBody>
+      </p:sp>
+      <p:sp>
+        <p:nvSpPr>
+          <p:cNvPr id="20" name="TextBox 19"/>
+          <p:cNvSpPr txBox="1"/>
+          <p:nvPr/>
+        </p:nvSpPr>
+        <p:spPr>
+          <a:xfrm>
+            <a:off x="3559987" y="3303524"/>
+            <a:ext cx="2243251" cy="399796"/>
+          </a:xfrm>
+          <a:prstGeom prst="rect">
+            <a:avLst/>
+          </a:prstGeom>
+          <a:noFill/>
+        </p:spPr>
+        <p:txBody>
+          <a:bodyPr wrap="square" anchor="t" lIns="0" rIns="0" tIns="0" bIns="0">
+            <a:spAutoFit/>
+          </a:bodyPr>
+          <a:lstStyle/>
+          <a:p>
+            <a:pPr algn="l"/>
+            <a:r>
+              <a:rPr sz="1100" b="0" i="0">
+                <a:solidFill>
+                  <a:srgbClr val="6B6690"/>
+                </a:solidFill>
+                <a:latin typeface="Calibri"/>
+              </a:rPr>
+              <a:t>Covering demand in about four weeks of five.</a:t>
+            </a:r>
+          </a:p>
+        </p:txBody>
+      </p:sp>
+      <p:sp>
+        <p:nvSpPr>
+          <p:cNvPr id="21" name="Rounded Rectangle 20"/>
+          <p:cNvSpPr/>
+          <p:nvPr/>
+        </p:nvSpPr>
+        <p:spPr>
+          <a:xfrm>
+            <a:off x="6187287" y="1956816"/>
+            <a:ext cx="2645587" cy="2195576"/>
+          </a:xfrm>
+          <a:prstGeom prst="roundRect">
+            <a:avLst>
+              <a:gd name="adj" fmla="val 5000"/>
+            </a:avLst>
+          </a:prstGeom>
+          <a:solidFill>
+            <a:srgbClr val="FFFFFF"/>
+          </a:solidFill>
+          <a:ln w="9525">
+            <a:solidFill>
+              <a:srgbClr val="E4E1F1"/>
+            </a:solidFill>
+          </a:ln>
+          <a:effectLst>
+            <a:outerShdw blurRad="76200" dist="19050" dir="5400000" algn="bl" rotWithShape="0">
+              <a:srgbClr val="1A0F5C">
+                <a:alpha val="12000"/>
+              </a:srgbClr>
+            </a:outerShdw>
+          </a:effectLst>
+        </p:spPr>
+        <p:style>
+          <a:lnRef idx="1">
+            <a:schemeClr val="accent1"/>
+          </a:lnRef>
+          <a:fillRef idx="3">
+            <a:schemeClr val="accent1"/>
+          </a:fillRef>
+          <a:effectRef idx="2">
+            <a:schemeClr val="accent1"/>
+          </a:effectRef>
+          <a:fontRef idx="minor">
+            <a:schemeClr val="lt1"/>
+          </a:fontRef>
+        </p:style>
+        <p:txBody>
+          <a:bodyPr rtlCol="0" anchor="ctr" wrap="square"/>
+          <a:lstStyle/>
+          <a:p>
+            <a:pPr algn="ctr"/>
+          </a:p>
+        </p:txBody>
+      </p:sp>
+      <p:sp>
+        <p:nvSpPr>
+          <p:cNvPr id="22" name="Oval 21"/>
+          <p:cNvSpPr/>
+          <p:nvPr/>
+        </p:nvSpPr>
+        <p:spPr>
+          <a:xfrm>
+            <a:off x="6388455" y="2157984"/>
+            <a:ext cx="457200" cy="457200"/>
+          </a:xfrm>
+          <a:prstGeom prst="ellipse">
+            <a:avLst/>
+          </a:prstGeom>
+          <a:solidFill>
+            <a:srgbClr val="EEEAFB"/>
+          </a:solidFill>
+          <a:ln>
+            <a:noFill/>
+          </a:ln>
+          <a:effectLst/>
+        </p:spPr>
+        <p:style>
+          <a:lnRef idx="1">
+            <a:schemeClr val="accent1"/>
+          </a:lnRef>
+          <a:fillRef idx="3">
+            <a:schemeClr val="accent1"/>
+          </a:fillRef>
+          <a:effectRef idx="2">
+            <a:schemeClr val="accent1"/>
+          </a:effectRef>
+          <a:fontRef idx="minor">
+            <a:schemeClr val="lt1"/>
+          </a:fontRef>
+        </p:style>
+        <p:txBody>
+          <a:bodyPr rtlCol="0" anchor="ctr" wrap="square"/>
+          <a:lstStyle/>
+          <a:p>
+            <a:pPr algn="ctr"/>
+          </a:p>
+        </p:txBody>
+      </p:sp>
+      <p:pic>
+        <p:nvPicPr>
+          <p:cNvPr id="23" name="Picture 22" descr="list_637b34e7c72a.png"/>
+          <p:cNvPicPr>
+            <a:picLocks noChangeAspect="1"/>
+          </p:cNvPicPr>
+          <p:nvPr/>
+        </p:nvPicPr>
+        <p:blipFill>
+          <a:blip r:embed="rId4"/>
+          <a:stretch>
+            <a:fillRect/>
+          </a:stretch>
+        </p:blipFill>
+        <p:spPr>
+          <a:xfrm>
+            <a:off x="6498183" y="2267712"/>
+            <a:ext cx="237744" cy="237744"/>
+          </a:xfrm>
+          <a:prstGeom prst="rect">
+            <a:avLst/>
+          </a:prstGeom>
+        </p:spPr>
+      </p:pic>
+      <p:sp>
+        <p:nvSpPr>
+          <p:cNvPr id="24" name="TextBox 23"/>
+          <p:cNvSpPr txBox="1"/>
+          <p:nvPr/>
+        </p:nvSpPr>
+        <p:spPr>
+          <a:xfrm>
+            <a:off x="6388455" y="2724912"/>
+            <a:ext cx="2243251" cy="160401"/>
+          </a:xfrm>
+          <a:prstGeom prst="rect">
+            <a:avLst/>
+          </a:prstGeom>
+          <a:noFill/>
+        </p:spPr>
+        <p:txBody>
+          <a:bodyPr wrap="square" anchor="t" lIns="0" rIns="0" tIns="0" bIns="0">
+            <a:spAutoFit/>
+          </a:bodyPr>
+          <a:lstStyle/>
+          <a:p>
+            <a:pPr algn="l"/>
+            <a:r>
+              <a:rPr sz="750" b="1" i="0" spc="250">
+                <a:solidFill>
+                  <a:srgbClr val="5B3FD6"/>
+                </a:solidFill>
+                <a:latin typeface="Calibri"/>
+              </a:rPr>
+              <a:t>C</a:t>
+            </a:r>
+          </a:p>
+        </p:txBody>
+      </p:sp>
+      <p:sp>
+        <p:nvSpPr>
+          <p:cNvPr id="25" name="TextBox 24"/>
+          <p:cNvSpPr txBox="1"/>
+          <p:nvPr/>
+        </p:nvSpPr>
+        <p:spPr>
+          <a:xfrm>
+            <a:off x="6388455" y="2962656"/>
+            <a:ext cx="2243251" cy="498856"/>
+          </a:xfrm>
+          <a:prstGeom prst="rect">
+            <a:avLst/>
+          </a:prstGeom>
+          <a:noFill/>
+        </p:spPr>
+        <p:txBody>
+          <a:bodyPr wrap="square" anchor="t" lIns="0" rIns="0" tIns="0" bIns="0">
+            <a:spAutoFit/>
+          </a:bodyPr>
+          <a:lstStyle/>
+          <a:p>
+            <a:pPr algn="l"/>
+            <a:r>
+              <a:rPr sz="1400" b="1" i="0">
+                <a:solidFill>
+                  <a:srgbClr val="1A0F5C"/>
+                </a:solidFill>
+                <a:latin typeface="Calibri"/>
+              </a:rPr>
+              <a:t>Far enough to cover every week</a:t>
+            </a:r>
+          </a:p>
+        </p:txBody>
+      </p:sp>
+      <p:sp>
+        <p:nvSpPr>
+          <p:cNvPr id="26" name="TextBox 25"/>
+          <p:cNvSpPr txBox="1"/>
+          <p:nvPr/>
+        </p:nvSpPr>
+        <p:spPr>
+          <a:xfrm>
+            <a:off x="6388455" y="3534664"/>
+            <a:ext cx="2243251" cy="399796"/>
+          </a:xfrm>
+          <a:prstGeom prst="rect">
+            <a:avLst/>
+          </a:prstGeom>
+          <a:noFill/>
+        </p:spPr>
+        <p:txBody>
+          <a:bodyPr wrap="square" anchor="t" lIns="0" rIns="0" tIns="0" bIns="0">
+            <a:spAutoFit/>
+          </a:bodyPr>
+          <a:lstStyle/>
+          <a:p>
+            <a:pPr algn="l"/>
+            <a:r>
+              <a:rPr sz="1100" b="0" i="0">
+                <a:solidFill>
+                  <a:srgbClr val="6B6690"/>
+                </a:solidFill>
+                <a:latin typeface="Calibri"/>
+              </a:rPr>
+              <a:t>Since a late parcel is never acceptable.</a:t>
+            </a:r>
+          </a:p>
+        </p:txBody>
+      </p:sp>
+      <p:sp>
+        <p:nvSpPr>
+          <p:cNvPr id="27" name="Rounded Rectangle 26"/>
+          <p:cNvSpPr/>
+          <p:nvPr/>
+        </p:nvSpPr>
+        <p:spPr>
+          <a:xfrm>
+            <a:off x="9015755" y="1956816"/>
+            <a:ext cx="2645587" cy="2195576"/>
+          </a:xfrm>
+          <a:prstGeom prst="roundRect">
+            <a:avLst>
+              <a:gd name="adj" fmla="val 5000"/>
+            </a:avLst>
+          </a:prstGeom>
+          <a:solidFill>
+            <a:srgbClr val="FFFFFF"/>
+          </a:solidFill>
+          <a:ln w="9525">
+            <a:solidFill>
+              <a:srgbClr val="E4E1F1"/>
+            </a:solidFill>
+          </a:ln>
+          <a:effectLst>
+            <a:outerShdw blurRad="76200" dist="19050" dir="5400000" algn="bl" rotWithShape="0">
+              <a:srgbClr val="1A0F5C">
+                <a:alpha val="12000"/>
+              </a:srgbClr>
+            </a:outerShdw>
+          </a:effectLst>
+        </p:spPr>
+        <p:style>
+          <a:lnRef idx="1">
+            <a:schemeClr val="accent1"/>
+          </a:lnRef>
+          <a:fillRef idx="3">
+            <a:schemeClr val="accent1"/>
+          </a:fillRef>
+          <a:effectRef idx="2">
+            <a:schemeClr val="accent1"/>
+          </a:effectRef>
+          <a:fontRef idx="minor">
+            <a:schemeClr val="lt1"/>
+          </a:fontRef>
+        </p:style>
+        <p:txBody>
+          <a:bodyPr rtlCol="0" anchor="ctr" wrap="square"/>
+          <a:lstStyle/>
+          <a:p>
+            <a:pPr algn="ctr"/>
+          </a:p>
+        </p:txBody>
+      </p:sp>
+      <p:sp>
+        <p:nvSpPr>
+          <p:cNvPr id="28" name="Oval 27"/>
+          <p:cNvSpPr/>
+          <p:nvPr/>
+        </p:nvSpPr>
+        <p:spPr>
+          <a:xfrm>
+            <a:off x="9216923" y="2157984"/>
+            <a:ext cx="457200" cy="457200"/>
+          </a:xfrm>
+          <a:prstGeom prst="ellipse">
+            <a:avLst/>
+          </a:prstGeom>
+          <a:solidFill>
+            <a:srgbClr val="EEEAFB"/>
+          </a:solidFill>
+          <a:ln>
+            <a:noFill/>
+          </a:ln>
+          <a:effectLst/>
+        </p:spPr>
+        <p:style>
+          <a:lnRef idx="1">
+            <a:schemeClr val="accent1"/>
+          </a:lnRef>
+          <a:fillRef idx="3">
+            <a:schemeClr val="accent1"/>
+          </a:fillRef>
+          <a:effectRef idx="2">
+            <a:schemeClr val="accent1"/>
+          </a:effectRef>
+          <a:fontRef idx="minor">
+            <a:schemeClr val="lt1"/>
+          </a:fontRef>
+        </p:style>
+        <p:txBody>
+          <a:bodyPr rtlCol="0" anchor="ctr" wrap="square"/>
+          <a:lstStyle/>
+          <a:p>
+            <a:pPr algn="ctr"/>
+          </a:p>
+        </p:txBody>
+      </p:sp>
+      <p:pic>
+        <p:nvPicPr>
+          <p:cNvPr id="29" name="Picture 28" descr="list_637b34e7c72a.png"/>
+          <p:cNvPicPr>
+            <a:picLocks noChangeAspect="1"/>
+          </p:cNvPicPr>
+          <p:nvPr/>
+        </p:nvPicPr>
+        <p:blipFill>
+          <a:blip r:embed="rId4"/>
+          <a:stretch>
+            <a:fillRect/>
+          </a:stretch>
+        </p:blipFill>
+        <p:spPr>
+          <a:xfrm>
+            <a:off x="9326651" y="2267712"/>
+            <a:ext cx="237744" cy="237744"/>
+          </a:xfrm>
+          <a:prstGeom prst="rect">
+            <a:avLst/>
+          </a:prstGeom>
+        </p:spPr>
+      </p:pic>
+      <p:sp>
+        <p:nvSpPr>
+          <p:cNvPr id="30" name="TextBox 29"/>
+          <p:cNvSpPr txBox="1"/>
+          <p:nvPr/>
+        </p:nvSpPr>
+        <p:spPr>
+          <a:xfrm>
+            <a:off x="9216923" y="2724912"/>
+            <a:ext cx="2243251" cy="160401"/>
+          </a:xfrm>
+          <a:prstGeom prst="rect">
+            <a:avLst/>
+          </a:prstGeom>
+          <a:noFill/>
+        </p:spPr>
+        <p:txBody>
+          <a:bodyPr wrap="square" anchor="t" lIns="0" rIns="0" tIns="0" bIns="0">
+            <a:spAutoFit/>
+          </a:bodyPr>
+          <a:lstStyle/>
+          <a:p>
+            <a:pPr algn="l"/>
+            <a:r>
+              <a:rPr sz="750" b="1" i="0" spc="250">
+                <a:solidFill>
+                  <a:srgbClr val="5B3FD6"/>
+                </a:solidFill>
+                <a:latin typeface="Calibri"/>
+              </a:rPr>
+              <a:t>D</a:t>
+            </a:r>
+          </a:p>
+        </p:txBody>
+      </p:sp>
+      <p:sp>
+        <p:nvSpPr>
+          <p:cNvPr id="31" name="TextBox 30"/>
+          <p:cNvSpPr txBox="1"/>
+          <p:nvPr/>
+        </p:nvSpPr>
+        <p:spPr>
+          <a:xfrm>
+            <a:off x="9216923" y="2962656"/>
+            <a:ext cx="2243251" cy="267716"/>
+          </a:xfrm>
+          <a:prstGeom prst="rect">
+            <a:avLst/>
+          </a:prstGeom>
+          <a:noFill/>
+        </p:spPr>
+        <p:txBody>
+          <a:bodyPr wrap="square" anchor="t" lIns="0" rIns="0" tIns="0" bIns="0">
+            <a:spAutoFit/>
+          </a:bodyPr>
+          <a:lstStyle/>
+          <a:p>
+            <a:pPr algn="l"/>
+            <a:r>
+              <a:rPr sz="1400" b="1" i="0">
+                <a:solidFill>
+                  <a:srgbClr val="1A0F5C"/>
+                </a:solidFill>
+                <a:latin typeface="Calibri"/>
+              </a:rPr>
+              <a:t>Below the forecast</a:t>
+            </a:r>
+          </a:p>
+        </p:txBody>
+      </p:sp>
+      <p:sp>
+        <p:nvSpPr>
+          <p:cNvPr id="32" name="TextBox 31"/>
+          <p:cNvSpPr txBox="1"/>
+          <p:nvPr/>
+        </p:nvSpPr>
+        <p:spPr>
+          <a:xfrm>
+            <a:off x="9216923" y="3303524"/>
+            <a:ext cx="2243251" cy="399796"/>
+          </a:xfrm>
+          <a:prstGeom prst="rect">
+            <a:avLst/>
+          </a:prstGeom>
+          <a:noFill/>
+        </p:spPr>
+        <p:txBody>
+          <a:bodyPr wrap="square" anchor="t" lIns="0" rIns="0" tIns="0" bIns="0">
+            <a:spAutoFit/>
+          </a:bodyPr>
+          <a:lstStyle/>
+          <a:p>
+            <a:pPr algn="l"/>
+            <a:r>
+              <a:rPr sz="1100" b="0" i="0">
+                <a:solidFill>
+                  <a:srgbClr val="6B6690"/>
+                </a:solidFill>
+                <a:latin typeface="Calibri"/>
+              </a:rPr>
+              <a:t>Since spare shipments waste money.</a:t>
+            </a:r>
+          </a:p>
+        </p:txBody>
+      </p:sp>
+      <p:sp>
+        <p:nvSpPr>
+          <p:cNvPr id="33" name="TextBox 32"/>
+          <p:cNvSpPr txBox="1"/>
+          <p:nvPr/>
+        </p:nvSpPr>
+        <p:spPr>
+          <a:xfrm>
+            <a:off x="530352" y="4335272"/>
+            <a:ext cx="11130991" cy="772160"/>
+          </a:xfrm>
+          <a:prstGeom prst="rect">
+            <a:avLst/>
+          </a:prstGeom>
+          <a:noFill/>
+        </p:spPr>
+        <p:txBody>
+          <a:bodyPr wrap="square" anchor="t" lIns="0" rIns="0" tIns="0" bIns="0">
+            <a:spAutoFit/>
+          </a:bodyPr>
+          <a:lstStyle/>
+          <a:p>
+            <a:pPr>
+              <a:spcAft>
+                <a:spcPts val="800"/>
+              </a:spcAft>
+            </a:pPr>
+            <a:r>
+              <a:rPr sz="1600" b="0" i="0">
+                <a:solidFill>
+                  <a:srgbClr val="1A1440"/>
+                </a:solidFill>
+                <a:latin typeface="Calibri"/>
+              </a:rPr>
+              <a:t>This part goes beyond the five subtopics of Friday's curriculum row: it is the plan quantile, the spine's addition, taught only in this hour and in notebook 07's depth section.</a:t>
+            </a:r>
+          </a:p>
+        </p:txBody>
+      </p:sp>
+      <p:sp>
+        <p:nvSpPr>
+          <p:cNvPr id="34" name="TextBox 33"/>
+          <p:cNvSpPr txBox="1"/>
+          <p:nvPr/>
+        </p:nvSpPr>
+        <p:spPr>
+          <a:xfrm>
+            <a:off x="530352" y="6437376"/>
+            <a:ext cx="9667951" cy="160401"/>
+          </a:xfrm>
+          <a:prstGeom prst="rect">
+            <a:avLst/>
+          </a:prstGeom>
+          <a:noFill/>
+        </p:spPr>
+        <p:txBody>
+          <a:bodyPr wrap="square" anchor="t" lIns="0" rIns="0" tIns="0" bIns="0">
+            <a:spAutoFit/>
+          </a:bodyPr>
+          <a:lstStyle/>
+          <a:p>
+            <a:pPr algn="l"/>
+            <a:r>
+              <a:rPr sz="750" b="0" i="0">
+                <a:solidFill>
+                  <a:srgbClr val="6B6690"/>
+                </a:solidFill>
+                <a:latin typeface="Calibri"/>
+              </a:rPr>
+              <a:t>Week 4, Day 5. Forecasting basics: the fallback hour</a:t>
+            </a:r>
+          </a:p>
+        </p:txBody>
+      </p:sp>
+      <p:sp>
+        <p:nvSpPr>
+          <p:cNvPr id="35" name="TextBox 34"/>
+          <p:cNvSpPr txBox="1"/>
+          <p:nvPr/>
+        </p:nvSpPr>
+        <p:spPr>
+          <a:xfrm>
+            <a:off x="10198303" y="6437376"/>
+            <a:ext cx="1463040" cy="160401"/>
+          </a:xfrm>
+          <a:prstGeom prst="rect">
+            <a:avLst/>
+          </a:prstGeom>
+          <a:noFill/>
+        </p:spPr>
+        <p:txBody>
+          <a:bodyPr wrap="square" anchor="t" lIns="0" rIns="0" tIns="0" bIns="0">
+            <a:spAutoFit/>
+          </a:bodyPr>
+          <a:lstStyle/>
+          <a:p>
+            <a:pPr algn="r"/>
+            <a:r>
+              <a:rPr sz="750" b="0" i="0">
+                <a:solidFill>
+                  <a:srgbClr val="6B6690"/>
+                </a:solidFill>
+                <a:latin typeface="Calibri"/>
+              </a:rPr>
+              <a:t>S10  ·  10 / 18</a:t>
+            </a:r>
+          </a:p>
+        </p:txBody>
+      </p:sp>
+    </p:spTree>
+  </p:cSld>
+  <p:clrMapOvr>
+    <a:masterClrMapping/>
+  </p:clrMapOvr>
+</p:sld>
+</file>
+
+<file path=ppt/slides/slide11.xml><?xml version="1.0" encoding="utf-8"?>
+<p:sld xmlns:a="http://schemas.openxmlformats.org/drawingml/2006/main" xmlns:p="http://schemas.openxmlformats.org/presentationml/2006/main" xmlns:r="http://schemas.openxmlformats.org/officeDocument/2006/relationships">
+  <p:cSld>
+    <p:spTree>
+      <p:nvGrpSpPr>
+        <p:cNvPr id="1" name=""/>
+        <p:cNvGrpSpPr/>
+        <p:nvPr/>
+      </p:nvGrpSpPr>
+      <p:grpSpPr/>
+      <p:pic>
+        <p:nvPicPr>
+          <p:cNvPr id="2" name="Picture 1" descr="bg_light.jpg"/>
+          <p:cNvPicPr>
+            <a:picLocks noChangeAspect="1"/>
+          </p:cNvPicPr>
+          <p:nvPr/>
+        </p:nvPicPr>
+        <p:blipFill>
+          <a:blip r:embed="rId2"/>
+          <a:stretch>
+            <a:fillRect/>
+          </a:stretch>
+        </p:blipFill>
+        <p:spPr>
+          <a:xfrm>
+            <a:off x="0" y="0"/>
+            <a:ext cx="12191695" cy="6858000"/>
+          </a:xfrm>
+          <a:prstGeom prst="rect">
+            <a:avLst/>
+          </a:prstGeom>
+        </p:spPr>
+      </p:pic>
+      <p:pic>
+        <p:nvPicPr>
+          <p:cNvPr id="3" name="Picture 2" descr="iitgn_logo.png"/>
+          <p:cNvPicPr>
+            <a:picLocks noChangeAspect="1"/>
+          </p:cNvPicPr>
+          <p:nvPr/>
+        </p:nvPicPr>
+        <p:blipFill>
+          <a:blip r:embed="rId3"/>
+          <a:stretch>
+            <a:fillRect/>
+          </a:stretch>
+        </p:blipFill>
+        <p:spPr>
+          <a:xfrm>
+            <a:off x="530352" y="201168"/>
+            <a:ext cx="420624" cy="420624"/>
+          </a:xfrm>
+          <a:prstGeom prst="rect">
+            <a:avLst/>
+          </a:prstGeom>
+        </p:spPr>
+      </p:pic>
+      <p:sp>
+        <p:nvSpPr>
+          <p:cNvPr id="4" name="TextBox 3"/>
+          <p:cNvSpPr txBox="1"/>
+          <p:nvPr/>
+        </p:nvSpPr>
+        <p:spPr>
+          <a:xfrm>
+            <a:off x="1042416" y="228600"/>
+            <a:ext cx="5120640" cy="185166"/>
+          </a:xfrm>
+          <a:prstGeom prst="rect">
+            <a:avLst/>
+          </a:prstGeom>
+          <a:noFill/>
+        </p:spPr>
+        <p:txBody>
+          <a:bodyPr wrap="square" anchor="t" lIns="0" rIns="0" tIns="0" bIns="0">
+            <a:spAutoFit/>
+          </a:bodyPr>
+          <a:lstStyle/>
+          <a:p>
+            <a:pPr algn="l"/>
+            <a:r>
+              <a:rPr sz="900" b="1" i="0">
+                <a:solidFill>
+                  <a:srgbClr val="1A0F5C"/>
+                </a:solidFill>
+                <a:latin typeface="Calibri"/>
+              </a:rPr>
+              <a:t>Indian Institute of Technology Gandhinagar</a:t>
+            </a:r>
+          </a:p>
+        </p:txBody>
+      </p:sp>
+      <p:sp>
+        <p:nvSpPr>
+          <p:cNvPr id="5" name="TextBox 4"/>
+          <p:cNvSpPr txBox="1"/>
+          <p:nvPr/>
+        </p:nvSpPr>
+        <p:spPr>
+          <a:xfrm>
+            <a:off x="1042416" y="420623"/>
+            <a:ext cx="5852160" cy="127381"/>
+          </a:xfrm>
+          <a:prstGeom prst="rect">
+            <a:avLst/>
+          </a:prstGeom>
+          <a:noFill/>
+        </p:spPr>
+        <p:txBody>
+          <a:bodyPr wrap="square" anchor="t" lIns="0" rIns="0" tIns="0" bIns="0">
+            <a:spAutoFit/>
+          </a:bodyPr>
+          <a:lstStyle/>
+          <a:p>
+            <a:pPr algn="l"/>
+            <a:r>
+              <a:rPr sz="550" b="1" i="0" spc="300">
+                <a:solidFill>
+                  <a:srgbClr val="6B6690"/>
+                </a:solidFill>
+                <a:latin typeface="Calibri"/>
+              </a:rPr>
+              <a:t>ADMINISTERED THROUGH THE COMPETENCY ADVANCEMENT ACADEMY</a:t>
+            </a:r>
+          </a:p>
+        </p:txBody>
+      </p:sp>
+      <p:sp>
+        <p:nvSpPr>
+          <p:cNvPr id="6" name="TextBox 5"/>
+          <p:cNvSpPr txBox="1"/>
+          <p:nvPr/>
+        </p:nvSpPr>
+        <p:spPr>
+          <a:xfrm>
+            <a:off x="5992063" y="310896"/>
+            <a:ext cx="5669280" cy="127381"/>
+          </a:xfrm>
+          <a:prstGeom prst="rect">
+            <a:avLst/>
+          </a:prstGeom>
+          <a:noFill/>
+        </p:spPr>
+        <p:txBody>
+          <a:bodyPr wrap="square" anchor="t" lIns="0" rIns="0" tIns="0" bIns="0">
+            <a:spAutoFit/>
+          </a:bodyPr>
+          <a:lstStyle/>
+          <a:p>
+            <a:pPr algn="r"/>
+            <a:r>
+              <a:rPr sz="550" b="1" i="0" spc="300">
+                <a:solidFill>
+                  <a:srgbClr val="6B6690"/>
+                </a:solidFill>
+                <a:latin typeface="Calibri"/>
+              </a:rPr>
+              <a:t>WEEK 4  ·  FRIDAY  ·  FORECASTING BASICS  ·  FALLBACK</a:t>
+            </a:r>
+          </a:p>
+        </p:txBody>
+      </p:sp>
+      <p:sp>
+        <p:nvSpPr>
+          <p:cNvPr id="7" name="TextBox 6"/>
+          <p:cNvSpPr txBox="1"/>
+          <p:nvPr/>
+        </p:nvSpPr>
+        <p:spPr>
+          <a:xfrm>
+            <a:off x="530352" y="676656"/>
+            <a:ext cx="11130991" cy="512064"/>
+          </a:xfrm>
+          <a:prstGeom prst="rect">
+            <a:avLst/>
+          </a:prstGeom>
+          <a:noFill/>
+        </p:spPr>
+        <p:txBody>
+          <a:bodyPr wrap="square" anchor="b" lIns="0" rIns="0" tIns="0" bIns="0">
+            <a:spAutoFit/>
+          </a:bodyPr>
+          <a:lstStyle/>
+          <a:p>
+            <a:pPr algn="l"/>
+            <a:r>
+              <a:rPr sz="2600" b="0" i="0">
+                <a:solidFill>
+                  <a:srgbClr val="1A0F5C"/>
+                </a:solidFill>
+                <a:latin typeface="Georgia"/>
+              </a:rPr>
+              <a:t>Answer: cover 0.82 of weeks, 25 over 25 plus 5.42</a:t>
+            </a:r>
+          </a:p>
+        </p:txBody>
+      </p:sp>
+      <p:sp>
+        <p:nvSpPr>
+          <p:cNvPr id="8" name="TextBox 7"/>
+          <p:cNvSpPr txBox="1"/>
+          <p:nvPr/>
+        </p:nvSpPr>
+        <p:spPr>
+          <a:xfrm>
+            <a:off x="530352" y="1243584"/>
+            <a:ext cx="11130991" cy="234696"/>
+          </a:xfrm>
+          <a:prstGeom prst="rect">
+            <a:avLst/>
+          </a:prstGeom>
+          <a:noFill/>
+        </p:spPr>
+        <p:txBody>
+          <a:bodyPr wrap="square" anchor="t" lIns="0" rIns="0" tIns="0" bIns="0">
+            <a:spAutoFit/>
+          </a:bodyPr>
+          <a:lstStyle/>
+          <a:p>
+            <a:pPr algn="l"/>
+            <a:r>
+              <a:rPr sz="1200" b="0" i="0">
+                <a:solidFill>
+                  <a:srgbClr val="6B6690"/>
+                </a:solidFill>
+                <a:latin typeface="Calibri"/>
+              </a:rPr>
+              <a:t>Why should the plan sit above the forecast, and how far?</a:t>
+            </a:r>
+          </a:p>
+        </p:txBody>
+      </p:sp>
+      <p:pic>
+        <p:nvPicPr>
+          <p:cNvPr id="9" name="mermaid diagram" descr="C2_W04_D05_cost_curve_STUDENT.png"/>
+          <p:cNvPicPr>
+            <a:picLocks noChangeAspect="1"/>
+          </p:cNvPicPr>
+          <p:nvPr/>
+        </p:nvPicPr>
+        <p:blipFill>
+          <a:blip r:embed="rId4"/>
+          <a:stretch>
+            <a:fillRect/>
+          </a:stretch>
+        </p:blipFill>
+        <p:spPr>
+          <a:xfrm>
+            <a:off x="2389245" y="1664208"/>
+            <a:ext cx="7413204" cy="3319272"/>
+          </a:xfrm>
+          <a:prstGeom prst="rect">
+            <a:avLst/>
+          </a:prstGeom>
+        </p:spPr>
+      </p:pic>
+      <p:sp>
+        <p:nvSpPr>
+          <p:cNvPr id="10" name="picture caption"/>
+          <p:cNvSpPr txBox="1"/>
+          <p:nvPr/>
+        </p:nvSpPr>
+        <p:spPr>
+          <a:xfrm>
+            <a:off x="530352" y="5020056"/>
+            <a:ext cx="11130991" cy="316992"/>
+          </a:xfrm>
+          <a:prstGeom prst="rect">
+            <a:avLst/>
+          </a:prstGeom>
+          <a:noFill/>
+        </p:spPr>
+        <p:txBody>
+          <a:bodyPr wrap="square" anchor="t" lIns="0" rIns="0" tIns="0" bIns="0">
+            <a:spAutoFit/>
+          </a:bodyPr>
+          <a:lstStyle/>
+          <a:p>
+            <a:pPr algn="ctr"/>
+            <a:r>
+              <a:rPr sz="1200" b="0" i="0">
+                <a:solidFill>
+                  <a:srgbClr val="6B6690"/>
+                </a:solidFill>
+                <a:latin typeface="Calibri"/>
+              </a:rPr>
+              <a:t>The average cost of a week's plan against how far it is raised</a:t>
+            </a:r>
+          </a:p>
+        </p:txBody>
+      </p:sp>
+      <p:sp>
+        <p:nvSpPr>
+          <p:cNvPr id="11" name="TextBox 10"/>
+          <p:cNvSpPr txBox="1"/>
+          <p:nvPr/>
+        </p:nvSpPr>
+        <p:spPr>
+          <a:xfrm>
+            <a:off x="530352" y="5346192"/>
+            <a:ext cx="11130991" cy="853440"/>
+          </a:xfrm>
+          <a:prstGeom prst="rect">
+            <a:avLst/>
+          </a:prstGeom>
+          <a:noFill/>
+        </p:spPr>
+        <p:txBody>
+          <a:bodyPr wrap="square" anchor="t" lIns="0" rIns="0" tIns="0" bIns="0">
+            <a:spAutoFit/>
+          </a:bodyPr>
+          <a:lstStyle/>
+          <a:p>
+            <a:r>
+              <a:rPr sz="1400" b="0" i="0">
+                <a:solidFill>
+                  <a:srgbClr val="1A1440"/>
+                </a:solidFill>
+                <a:latin typeface="Calibri"/>
+              </a:rPr>
+              <a:t>The answer is b. Raise the plan by one shipment. Over 100 weeks, if demand beats the plan in 18, that shipment saves 18 x Rs 25 = Rs 450 and wastes 82 x Rs 5.42 = Rs 444: about even. So the cheapest plan covers demand in 25 / (25 + 5.42), about 0.82, of weeks: the newsvendor rule, named after a seller deciding how many newspapers to stock.</a:t>
+            </a:r>
+          </a:p>
+        </p:txBody>
+      </p:sp>
+      <p:sp>
+        <p:nvSpPr>
+          <p:cNvPr id="12" name="TextBox 11"/>
+          <p:cNvSpPr txBox="1"/>
+          <p:nvPr/>
+        </p:nvSpPr>
+        <p:spPr>
+          <a:xfrm>
+            <a:off x="530352" y="6437376"/>
+            <a:ext cx="9667951" cy="160401"/>
+          </a:xfrm>
+          <a:prstGeom prst="rect">
+            <a:avLst/>
+          </a:prstGeom>
+          <a:noFill/>
+        </p:spPr>
+        <p:txBody>
+          <a:bodyPr wrap="square" anchor="t" lIns="0" rIns="0" tIns="0" bIns="0">
+            <a:spAutoFit/>
+          </a:bodyPr>
+          <a:lstStyle/>
+          <a:p>
+            <a:pPr algn="l"/>
+            <a:r>
+              <a:rPr sz="750" b="0" i="0">
+                <a:solidFill>
+                  <a:srgbClr val="6B6690"/>
+                </a:solidFill>
+                <a:latin typeface="Calibri"/>
+              </a:rPr>
+              <a:t>Week 4, Day 5. Forecasting basics: the fallback hour</a:t>
+            </a:r>
+          </a:p>
+        </p:txBody>
+      </p:sp>
+      <p:sp>
+        <p:nvSpPr>
+          <p:cNvPr id="13" name="TextBox 12"/>
+          <p:cNvSpPr txBox="1"/>
+          <p:nvPr/>
+        </p:nvSpPr>
+        <p:spPr>
+          <a:xfrm>
+            <a:off x="10198303" y="6437376"/>
+            <a:ext cx="1463040" cy="160401"/>
+          </a:xfrm>
+          <a:prstGeom prst="rect">
+            <a:avLst/>
+          </a:prstGeom>
+          <a:noFill/>
+        </p:spPr>
+        <p:txBody>
+          <a:bodyPr wrap="square" anchor="t" lIns="0" rIns="0" tIns="0" bIns="0">
+            <a:spAutoFit/>
+          </a:bodyPr>
+          <a:lstStyle/>
+          <a:p>
+            <a:pPr algn="r"/>
+            <a:r>
+              <a:rPr sz="750" b="0" i="0">
+                <a:solidFill>
+                  <a:srgbClr val="6B6690"/>
+                </a:solidFill>
+                <a:latin typeface="Calibri"/>
+              </a:rPr>
+              <a:t>S11  ·  11 / 18</a:t>
+            </a:r>
+          </a:p>
+        </p:txBody>
+      </p:sp>
+    </p:spTree>
+  </p:cSld>
+  <p:clrMapOvr>
+    <a:masterClrMapping/>
+  </p:clrMapOvr>
+</p:sld>
+</file>
+
+<file path=ppt/slides/slide12.xml><?xml version="1.0" encoding="utf-8"?>
+<p:sld xmlns:a="http://schemas.openxmlformats.org/drawingml/2006/main" xmlns:p="http://schemas.openxmlformats.org/presentationml/2006/main" xmlns:r="http://schemas.openxmlformats.org/officeDocument/2006/relationships">
+  <p:cSld>
+    <p:spTree>
+      <p:nvGrpSpPr>
+        <p:cNvPr id="1" name=""/>
+        <p:cNvGrpSpPr/>
+        <p:nvPr/>
+      </p:nvGrpSpPr>
+      <p:grpSpPr/>
+      <p:pic>
+        <p:nvPicPr>
+          <p:cNvPr id="2" name="Picture 1" descr="bg_light.jpg"/>
+          <p:cNvPicPr>
+            <a:picLocks noChangeAspect="1"/>
+          </p:cNvPicPr>
+          <p:nvPr/>
+        </p:nvPicPr>
+        <p:blipFill>
+          <a:blip r:embed="rId2"/>
+          <a:stretch>
+            <a:fillRect/>
+          </a:stretch>
+        </p:blipFill>
+        <p:spPr>
+          <a:xfrm>
+            <a:off x="0" y="0"/>
+            <a:ext cx="12191695" cy="6858000"/>
+          </a:xfrm>
+          <a:prstGeom prst="rect">
+            <a:avLst/>
+          </a:prstGeom>
+        </p:spPr>
+      </p:pic>
+      <p:pic>
+        <p:nvPicPr>
+          <p:cNvPr id="3" name="Picture 2" descr="iitgn_logo.png"/>
+          <p:cNvPicPr>
+            <a:picLocks noChangeAspect="1"/>
+          </p:cNvPicPr>
+          <p:nvPr/>
+        </p:nvPicPr>
+        <p:blipFill>
+          <a:blip r:embed="rId3"/>
+          <a:stretch>
+            <a:fillRect/>
+          </a:stretch>
+        </p:blipFill>
+        <p:spPr>
+          <a:xfrm>
+            <a:off x="530352" y="201168"/>
+            <a:ext cx="420624" cy="420624"/>
+          </a:xfrm>
+          <a:prstGeom prst="rect">
+            <a:avLst/>
+          </a:prstGeom>
+        </p:spPr>
+      </p:pic>
+      <p:sp>
+        <p:nvSpPr>
+          <p:cNvPr id="4" name="TextBox 3"/>
+          <p:cNvSpPr txBox="1"/>
+          <p:nvPr/>
+        </p:nvSpPr>
+        <p:spPr>
+          <a:xfrm>
+            <a:off x="1042416" y="228600"/>
+            <a:ext cx="5120640" cy="185166"/>
+          </a:xfrm>
+          <a:prstGeom prst="rect">
+            <a:avLst/>
+          </a:prstGeom>
+          <a:noFill/>
+        </p:spPr>
+        <p:txBody>
+          <a:bodyPr wrap="square" anchor="t" lIns="0" rIns="0" tIns="0" bIns="0">
+            <a:spAutoFit/>
+          </a:bodyPr>
+          <a:lstStyle/>
+          <a:p>
+            <a:pPr algn="l"/>
+            <a:r>
+              <a:rPr sz="900" b="1" i="0">
+                <a:solidFill>
+                  <a:srgbClr val="1A0F5C"/>
+                </a:solidFill>
+                <a:latin typeface="Calibri"/>
+              </a:rPr>
+              <a:t>Indian Institute of Technology Gandhinagar</a:t>
+            </a:r>
+          </a:p>
+        </p:txBody>
+      </p:sp>
+      <p:sp>
+        <p:nvSpPr>
+          <p:cNvPr id="5" name="TextBox 4"/>
+          <p:cNvSpPr txBox="1"/>
+          <p:nvPr/>
+        </p:nvSpPr>
+        <p:spPr>
+          <a:xfrm>
+            <a:off x="1042416" y="420623"/>
+            <a:ext cx="5852160" cy="127381"/>
+          </a:xfrm>
+          <a:prstGeom prst="rect">
+            <a:avLst/>
+          </a:prstGeom>
+          <a:noFill/>
+        </p:spPr>
+        <p:txBody>
+          <a:bodyPr wrap="square" anchor="t" lIns="0" rIns="0" tIns="0" bIns="0">
+            <a:spAutoFit/>
+          </a:bodyPr>
+          <a:lstStyle/>
+          <a:p>
+            <a:pPr algn="l"/>
+            <a:r>
+              <a:rPr sz="550" b="1" i="0" spc="300">
+                <a:solidFill>
+                  <a:srgbClr val="6B6690"/>
+                </a:solidFill>
+                <a:latin typeface="Calibri"/>
+              </a:rPr>
+              <a:t>ADMINISTERED THROUGH THE COMPETENCY ADVANCEMENT ACADEMY</a:t>
+            </a:r>
+          </a:p>
+        </p:txBody>
+      </p:sp>
+      <p:sp>
+        <p:nvSpPr>
+          <p:cNvPr id="6" name="TextBox 5"/>
+          <p:cNvSpPr txBox="1"/>
+          <p:nvPr/>
+        </p:nvSpPr>
+        <p:spPr>
+          <a:xfrm>
+            <a:off x="5992063" y="310896"/>
+            <a:ext cx="5669280" cy="127381"/>
+          </a:xfrm>
+          <a:prstGeom prst="rect">
+            <a:avLst/>
+          </a:prstGeom>
+          <a:noFill/>
+        </p:spPr>
+        <p:txBody>
+          <a:bodyPr wrap="square" anchor="t" lIns="0" rIns="0" tIns="0" bIns="0">
+            <a:spAutoFit/>
+          </a:bodyPr>
+          <a:lstStyle/>
+          <a:p>
+            <a:pPr algn="r"/>
+            <a:r>
+              <a:rPr sz="550" b="1" i="0" spc="300">
+                <a:solidFill>
+                  <a:srgbClr val="6B6690"/>
+                </a:solidFill>
+                <a:latin typeface="Calibri"/>
+              </a:rPr>
+              <a:t>WEEK 4  ·  FRIDAY  ·  FORECASTING BASICS  ·  FALLBACK</a:t>
+            </a:r>
+          </a:p>
+        </p:txBody>
+      </p:sp>
+      <p:sp>
+        <p:nvSpPr>
+          <p:cNvPr id="7" name="TextBox 6"/>
+          <p:cNvSpPr txBox="1"/>
+          <p:nvPr/>
+        </p:nvSpPr>
+        <p:spPr>
+          <a:xfrm>
+            <a:off x="530352" y="676656"/>
+            <a:ext cx="11130991" cy="512064"/>
+          </a:xfrm>
+          <a:prstGeom prst="rect">
+            <a:avLst/>
+          </a:prstGeom>
+          <a:noFill/>
+        </p:spPr>
+        <p:txBody>
+          <a:bodyPr wrap="square" anchor="b" lIns="0" rIns="0" tIns="0" bIns="0">
+            <a:spAutoFit/>
+          </a:bodyPr>
+          <a:lstStyle/>
+          <a:p>
+            <a:pPr algn="l"/>
+            <a:r>
+              <a:rPr sz="2600" b="0" i="0">
+                <a:solidFill>
+                  <a:srgbClr val="1A0F5C"/>
+                </a:solidFill>
+                <a:latin typeface="Georgia"/>
+              </a:rPr>
+              <a:t>The 2.6 percent sits 0.82 along thirteen weeks</a:t>
+            </a:r>
+          </a:p>
+        </p:txBody>
+      </p:sp>
+      <p:sp>
+        <p:nvSpPr>
+          <p:cNvPr id="8" name="TextBox 7"/>
+          <p:cNvSpPr txBox="1"/>
+          <p:nvPr/>
+        </p:nvSpPr>
+        <p:spPr>
+          <a:xfrm>
+            <a:off x="530352" y="1243584"/>
+            <a:ext cx="11130991" cy="234696"/>
+          </a:xfrm>
+          <a:prstGeom prst="rect">
+            <a:avLst/>
+          </a:prstGeom>
+          <a:noFill/>
+        </p:spPr>
+        <p:txBody>
+          <a:bodyPr wrap="square" anchor="t" lIns="0" rIns="0" tIns="0" bIns="0">
+            <a:spAutoFit/>
+          </a:bodyPr>
+          <a:lstStyle/>
+          <a:p>
+            <a:pPr algn="l"/>
+            <a:r>
+              <a:rPr sz="1200" b="0" i="0">
+                <a:solidFill>
+                  <a:srgbClr val="6B6690"/>
+                </a:solidFill>
+                <a:latin typeface="Calibri"/>
+              </a:rPr>
+              <a:t>How far above the forecast is the 0.82 point, on the weeks we hid?</a:t>
+            </a:r>
+          </a:p>
+        </p:txBody>
+      </p:sp>
+      <p:pic>
+        <p:nvPicPr>
+          <p:cNvPr id="9" name="mermaid diagram" descr="C2_W04_D05_cushion_strip_STUDENT.png"/>
+          <p:cNvPicPr>
+            <a:picLocks noChangeAspect="1"/>
+          </p:cNvPicPr>
+          <p:nvPr/>
+        </p:nvPicPr>
+        <p:blipFill>
+          <a:blip r:embed="rId4"/>
+          <a:stretch>
+            <a:fillRect/>
+          </a:stretch>
+        </p:blipFill>
+        <p:spPr>
+          <a:xfrm>
+            <a:off x="2066094" y="1664208"/>
+            <a:ext cx="8059506" cy="2939288"/>
+          </a:xfrm>
+          <a:prstGeom prst="rect">
+            <a:avLst/>
+          </a:prstGeom>
+        </p:spPr>
+      </p:pic>
+      <p:sp>
+        <p:nvSpPr>
+          <p:cNvPr id="10" name="picture caption"/>
+          <p:cNvSpPr txBox="1"/>
+          <p:nvPr/>
+        </p:nvSpPr>
+        <p:spPr>
+          <a:xfrm>
+            <a:off x="530352" y="4640072"/>
+            <a:ext cx="11130991" cy="316992"/>
+          </a:xfrm>
+          <a:prstGeom prst="rect">
+            <a:avLst/>
+          </a:prstGeom>
+          <a:noFill/>
+        </p:spPr>
+        <p:txBody>
+          <a:bodyPr wrap="square" anchor="t" lIns="0" rIns="0" tIns="0" bIns="0">
+            <a:spAutoFit/>
+          </a:bodyPr>
+          <a:lstStyle/>
+          <a:p>
+            <a:pPr algn="ctr"/>
+            <a:r>
+              <a:rPr sz="1200" b="0" i="0">
+                <a:solidFill>
+                  <a:srgbClr val="6B6690"/>
+                </a:solidFill>
+                <a:latin typeface="Calibri"/>
+              </a:rPr>
+              <a:t>Thirteen hidden weeks sorted by how far demand came above festival-aligned</a:t>
+            </a:r>
+          </a:p>
+        </p:txBody>
+      </p:sp>
+      <p:sp>
+        <p:nvSpPr>
+          <p:cNvPr id="11" name="TextBox 10"/>
+          <p:cNvSpPr txBox="1"/>
+          <p:nvPr/>
+        </p:nvSpPr>
+        <p:spPr>
+          <a:xfrm>
+            <a:off x="530352" y="4966208"/>
+            <a:ext cx="11130991" cy="1233424"/>
+          </a:xfrm>
+          <a:prstGeom prst="rect">
+            <a:avLst/>
+          </a:prstGeom>
+          <a:noFill/>
+        </p:spPr>
+        <p:txBody>
+          <a:bodyPr wrap="square" anchor="t" lIns="0" rIns="0" tIns="0" bIns="0">
+            <a:spAutoFit/>
+          </a:bodyPr>
+          <a:lstStyle/>
+          <a:p>
+            <a:r>
+              <a:rPr sz="1600" b="0" i="0">
+                <a:solidFill>
+                  <a:srgbClr val="1A1440"/>
+                </a:solidFill>
+                <a:latin typeface="Calibri"/>
+              </a:rPr>
+              <a:t>Sort the thirteen hidden weeks by how far demand came above festival-aligned: from 5.9 percent below to 7.8 percent above. The 0.82 point falls between the 10th week, 2.1 percent, and the 11th, 2.7; read 0.82 of the way along, it is 2.6 percent. The raised forecast covers 10 of the 13 weeks, and the 11th sits just above it.</a:t>
+            </a:r>
+          </a:p>
+        </p:txBody>
+      </p:sp>
+      <p:sp>
+        <p:nvSpPr>
+          <p:cNvPr id="12" name="TextBox 11"/>
+          <p:cNvSpPr txBox="1"/>
+          <p:nvPr/>
+        </p:nvSpPr>
+        <p:spPr>
+          <a:xfrm>
+            <a:off x="530352" y="6437376"/>
+            <a:ext cx="9667951" cy="160401"/>
+          </a:xfrm>
+          <a:prstGeom prst="rect">
+            <a:avLst/>
+          </a:prstGeom>
+          <a:noFill/>
+        </p:spPr>
+        <p:txBody>
+          <a:bodyPr wrap="square" anchor="t" lIns="0" rIns="0" tIns="0" bIns="0">
+            <a:spAutoFit/>
+          </a:bodyPr>
+          <a:lstStyle/>
+          <a:p>
+            <a:pPr algn="l"/>
+            <a:r>
+              <a:rPr sz="750" b="0" i="0">
+                <a:solidFill>
+                  <a:srgbClr val="6B6690"/>
+                </a:solidFill>
+                <a:latin typeface="Calibri"/>
+              </a:rPr>
+              <a:t>Week 4, Day 5. Forecasting basics: the fallback hour</a:t>
+            </a:r>
+          </a:p>
+        </p:txBody>
+      </p:sp>
+      <p:sp>
+        <p:nvSpPr>
+          <p:cNvPr id="13" name="TextBox 12"/>
+          <p:cNvSpPr txBox="1"/>
+          <p:nvPr/>
+        </p:nvSpPr>
+        <p:spPr>
+          <a:xfrm>
+            <a:off x="10198303" y="6437376"/>
+            <a:ext cx="1463040" cy="160401"/>
+          </a:xfrm>
+          <a:prstGeom prst="rect">
+            <a:avLst/>
+          </a:prstGeom>
+          <a:noFill/>
+        </p:spPr>
+        <p:txBody>
+          <a:bodyPr wrap="square" anchor="t" lIns="0" rIns="0" tIns="0" bIns="0">
+            <a:spAutoFit/>
+          </a:bodyPr>
+          <a:lstStyle/>
+          <a:p>
+            <a:pPr algn="r"/>
+            <a:r>
+              <a:rPr sz="750" b="0" i="0">
+                <a:solidFill>
+                  <a:srgbClr val="6B6690"/>
+                </a:solidFill>
+                <a:latin typeface="Calibri"/>
+              </a:rPr>
+              <a:t>S12  ·  12 / 18</a:t>
+            </a:r>
+          </a:p>
+        </p:txBody>
+      </p:sp>
+    </p:spTree>
+  </p:cSld>
+  <p:clrMapOvr>
+    <a:masterClrMapping/>
+  </p:clrMapOvr>
+</p:sld>
+</file>
+
+<file path=ppt/slides/slide13.xml><?xml version="1.0" encoding="utf-8"?>
+<p:sld xmlns:a="http://schemas.openxmlformats.org/drawingml/2006/main" xmlns:p="http://schemas.openxmlformats.org/presentationml/2006/main" xmlns:r="http://schemas.openxmlformats.org/officeDocument/2006/relationships">
+  <p:cSld>
+    <p:spTree>
+      <p:nvGrpSpPr>
+        <p:cNvPr id="1" name=""/>
+        <p:cNvGrpSpPr/>
+        <p:nvPr/>
+      </p:nvGrpSpPr>
+      <p:grpSpPr/>
+      <p:pic>
+        <p:nvPicPr>
+          <p:cNvPr id="2" name="Picture 1" descr="bg_light.jpg"/>
+          <p:cNvPicPr>
+            <a:picLocks noChangeAspect="1"/>
+          </p:cNvPicPr>
+          <p:nvPr/>
+        </p:nvPicPr>
+        <p:blipFill>
+          <a:blip r:embed="rId2"/>
+          <a:stretch>
+            <a:fillRect/>
+          </a:stretch>
+        </p:blipFill>
+        <p:spPr>
+          <a:xfrm>
+            <a:off x="0" y="0"/>
+            <a:ext cx="12191695" cy="6858000"/>
+          </a:xfrm>
+          <a:prstGeom prst="rect">
+            <a:avLst/>
+          </a:prstGeom>
+        </p:spPr>
+      </p:pic>
+      <p:pic>
+        <p:nvPicPr>
+          <p:cNvPr id="3" name="Picture 2" descr="iitgn_logo.png"/>
+          <p:cNvPicPr>
+            <a:picLocks noChangeAspect="1"/>
+          </p:cNvPicPr>
+          <p:nvPr/>
+        </p:nvPicPr>
+        <p:blipFill>
+          <a:blip r:embed="rId3"/>
+          <a:stretch>
+            <a:fillRect/>
+          </a:stretch>
+        </p:blipFill>
+        <p:spPr>
+          <a:xfrm>
+            <a:off x="530352" y="201168"/>
+            <a:ext cx="420624" cy="420624"/>
+          </a:xfrm>
+          <a:prstGeom prst="rect">
+            <a:avLst/>
+          </a:prstGeom>
+        </p:spPr>
+      </p:pic>
+      <p:sp>
+        <p:nvSpPr>
+          <p:cNvPr id="4" name="TextBox 3"/>
+          <p:cNvSpPr txBox="1"/>
+          <p:nvPr/>
+        </p:nvSpPr>
+        <p:spPr>
+          <a:xfrm>
+            <a:off x="1042416" y="228600"/>
+            <a:ext cx="5120640" cy="185166"/>
+          </a:xfrm>
+          <a:prstGeom prst="rect">
+            <a:avLst/>
+          </a:prstGeom>
+          <a:noFill/>
+        </p:spPr>
+        <p:txBody>
+          <a:bodyPr wrap="square" anchor="t" lIns="0" rIns="0" tIns="0" bIns="0">
+            <a:spAutoFit/>
+          </a:bodyPr>
+          <a:lstStyle/>
+          <a:p>
+            <a:pPr algn="l"/>
+            <a:r>
+              <a:rPr sz="900" b="1" i="0">
+                <a:solidFill>
+                  <a:srgbClr val="1A0F5C"/>
+                </a:solidFill>
+                <a:latin typeface="Calibri"/>
+              </a:rPr>
+              <a:t>Indian Institute of Technology Gandhinagar</a:t>
+            </a:r>
+          </a:p>
+        </p:txBody>
+      </p:sp>
+      <p:sp>
+        <p:nvSpPr>
+          <p:cNvPr id="5" name="TextBox 4"/>
+          <p:cNvSpPr txBox="1"/>
+          <p:nvPr/>
+        </p:nvSpPr>
+        <p:spPr>
+          <a:xfrm>
+            <a:off x="1042416" y="420623"/>
+            <a:ext cx="5852160" cy="127381"/>
+          </a:xfrm>
+          <a:prstGeom prst="rect">
+            <a:avLst/>
+          </a:prstGeom>
+          <a:noFill/>
+        </p:spPr>
+        <p:txBody>
+          <a:bodyPr wrap="square" anchor="t" lIns="0" rIns="0" tIns="0" bIns="0">
+            <a:spAutoFit/>
+          </a:bodyPr>
+          <a:lstStyle/>
+          <a:p>
+            <a:pPr algn="l"/>
+            <a:r>
+              <a:rPr sz="550" b="1" i="0" spc="300">
+                <a:solidFill>
+                  <a:srgbClr val="6B6690"/>
+                </a:solidFill>
+                <a:latin typeface="Calibri"/>
+              </a:rPr>
+              <a:t>ADMINISTERED THROUGH THE COMPETENCY ADVANCEMENT ACADEMY</a:t>
+            </a:r>
+          </a:p>
+        </p:txBody>
+      </p:sp>
+      <p:sp>
+        <p:nvSpPr>
+          <p:cNvPr id="6" name="TextBox 5"/>
+          <p:cNvSpPr txBox="1"/>
+          <p:nvPr/>
+        </p:nvSpPr>
+        <p:spPr>
+          <a:xfrm>
+            <a:off x="5992063" y="310896"/>
+            <a:ext cx="5669280" cy="127381"/>
+          </a:xfrm>
+          <a:prstGeom prst="rect">
+            <a:avLst/>
+          </a:prstGeom>
+          <a:noFill/>
+        </p:spPr>
+        <p:txBody>
+          <a:bodyPr wrap="square" anchor="t" lIns="0" rIns="0" tIns="0" bIns="0">
+            <a:spAutoFit/>
+          </a:bodyPr>
+          <a:lstStyle/>
+          <a:p>
+            <a:pPr algn="r"/>
+            <a:r>
+              <a:rPr sz="550" b="1" i="0" spc="300">
+                <a:solidFill>
+                  <a:srgbClr val="6B6690"/>
+                </a:solidFill>
+                <a:latin typeface="Calibri"/>
+              </a:rPr>
+              <a:t>WEEK 4  ·  FRIDAY  ·  FORECASTING BASICS  ·  FALLBACK</a:t>
+            </a:r>
+          </a:p>
+        </p:txBody>
+      </p:sp>
+      <p:sp>
+        <p:nvSpPr>
+          <p:cNvPr id="7" name="TextBox 6"/>
+          <p:cNvSpPr txBox="1"/>
+          <p:nvPr/>
+        </p:nvSpPr>
+        <p:spPr>
+          <a:xfrm>
+            <a:off x="530352" y="676656"/>
+            <a:ext cx="11130991" cy="512064"/>
+          </a:xfrm>
+          <a:prstGeom prst="rect">
+            <a:avLst/>
+          </a:prstGeom>
+          <a:noFill/>
+        </p:spPr>
+        <p:txBody>
+          <a:bodyPr wrap="square" anchor="b" lIns="0" rIns="0" tIns="0" bIns="0">
+            <a:spAutoFit/>
+          </a:bodyPr>
+          <a:lstStyle/>
+          <a:p>
+            <a:pPr algn="l"/>
+            <a:r>
+              <a:rPr sz="2600" b="0" i="0">
+                <a:solidFill>
+                  <a:srgbClr val="1A0F5C"/>
+                </a:solidFill>
+                <a:latin typeface="Georgia"/>
+              </a:rPr>
+              <a:t>The plan, raised: 20,275 packer shifts</a:t>
+            </a:r>
+          </a:p>
+        </p:txBody>
+      </p:sp>
+      <p:sp>
+        <p:nvSpPr>
+          <p:cNvPr id="8" name="TextBox 7"/>
+          <p:cNvSpPr txBox="1"/>
+          <p:nvPr/>
+        </p:nvSpPr>
+        <p:spPr>
+          <a:xfrm>
+            <a:off x="530352" y="1243584"/>
+            <a:ext cx="11130991" cy="234696"/>
+          </a:xfrm>
+          <a:prstGeom prst="rect">
+            <a:avLst/>
+          </a:prstGeom>
+          <a:noFill/>
+        </p:spPr>
+        <p:txBody>
+          <a:bodyPr wrap="square" anchor="t" lIns="0" rIns="0" tIns="0" bIns="0">
+            <a:spAutoFit/>
+          </a:bodyPr>
+          <a:lstStyle/>
+          <a:p>
+            <a:pPr algn="l"/>
+            <a:r>
+              <a:rPr sz="1200" b="0" i="0">
+                <a:solidFill>
+                  <a:srgbClr val="6B6690"/>
+                </a:solidFill>
+                <a:latin typeface="Calibri"/>
+              </a:rPr>
+              <a:t>How many packer shifts does each week need once the plan sits 2.6 percent above the forecast?</a:t>
+            </a:r>
+          </a:p>
+        </p:txBody>
+      </p:sp>
+      <p:graphicFrame>
+        <p:nvGraphicFramePr>
+          <p:cNvPr id="9" name="Table 8"/>
+          <p:cNvGraphicFramePr>
+            <a:graphicFrameLocks noGrp="1"/>
+          </p:cNvGraphicFramePr>
+          <p:nvPr/>
+        </p:nvGraphicFramePr>
+        <p:xfrm>
+          <a:off x="530352" y="1682496"/>
+          <a:ext cx="11130990" cy="3017520"/>
+        </p:xfrm>
+        <a:graphic>
+          <a:graphicData uri="http://schemas.openxmlformats.org/drawingml/2006/table">
+            <a:tbl>
+              <a:tblPr firstRow="0" bandRow="0">
+                <a:tableStyleId>{2D5ABB26-0587-4C30-8999-92F81FD0307C}</a:tableStyleId>
+              </a:tblPr>
+              <a:tblGrid>
+                <a:gridCol w="914400"/>
+                <a:gridCol w="2123058"/>
+                <a:gridCol w="4957996"/>
+                <a:gridCol w="3135536"/>
+              </a:tblGrid>
+              <a:tr h="335280">
+                <a:tc>
+                  <a:txBody>
+                    <a:bodyPr/>
+                    <a:lstStyle/>
+                    <a:p>
+                      <a:r>
+                        <a:rPr sz="1250" b="1" i="0">
+                          <a:solidFill>
+                            <a:srgbClr val="FFFFFF"/>
+                          </a:solidFill>
+                          <a:latin typeface="Calibri"/>
+                        </a:rPr>
+                        <a:t>Week of</a:t>
+                      </a:r>
+                    </a:p>
+                  </a:txBody>
+                  <a:tcPr marL="101600" marR="101600" marT="38100" marB="38100" anchor="ctr">
+                    <a:solidFill>
+                      <a:srgbClr val="1A0F5C"/>
+                    </a:solidFill>
+                  </a:tcPr>
+                </a:tc>
+                <a:tc>
+                  <a:txBody>
+                    <a:bodyPr/>
+                    <a:lstStyle/>
+                    <a:p>
+                      <a:r>
+                        <a:rPr sz="1250" b="1" i="0">
+                          <a:solidFill>
+                            <a:srgbClr val="FFFFFF"/>
+                          </a:solidFill>
+                          <a:latin typeface="Calibri"/>
+                        </a:rPr>
+                        <a:t>Forecast</a:t>
+                      </a:r>
+                    </a:p>
+                  </a:txBody>
+                  <a:tcPr marL="101600" marR="101600" marT="38100" marB="38100" anchor="ctr">
+                    <a:solidFill>
+                      <a:srgbClr val="1A0F5C"/>
+                    </a:solidFill>
+                  </a:tcPr>
+                </a:tc>
+                <a:tc>
+                  <a:txBody>
+                    <a:bodyPr/>
+                    <a:lstStyle/>
+                    <a:p>
+                      <a:r>
+                        <a:rPr sz="1250" b="1" i="0">
+                          <a:solidFill>
+                            <a:srgbClr val="FFFFFF"/>
+                          </a:solidFill>
+                          <a:latin typeface="Calibri"/>
+                        </a:rPr>
+                        <a:t>Plan, plus 2.6 percent</a:t>
+                      </a:r>
+                    </a:p>
+                  </a:txBody>
+                  <a:tcPr marL="101600" marR="101600" marT="38100" marB="38100" anchor="ctr">
+                    <a:solidFill>
+                      <a:srgbClr val="1A0F5C"/>
+                    </a:solidFill>
+                  </a:tcPr>
+                </a:tc>
+                <a:tc>
+                  <a:txBody>
+                    <a:bodyPr/>
+                    <a:lstStyle/>
+                    <a:p>
+                      <a:r>
+                        <a:rPr sz="1250" b="1" i="0">
+                          <a:solidFill>
+                            <a:srgbClr val="FFFFFF"/>
+                          </a:solidFill>
+                          <a:latin typeface="Calibri"/>
+                        </a:rPr>
+                        <a:t>Packer shifts</a:t>
+                      </a:r>
+                    </a:p>
+                  </a:txBody>
+                  <a:tcPr marL="101600" marR="101600" marT="38100" marB="38100" anchor="ctr">
+                    <a:solidFill>
+                      <a:srgbClr val="1A0F5C"/>
+                    </a:solidFill>
+                  </a:tcPr>
+                </a:tc>
+              </a:tr>
+              <a:tr h="335280">
+                <a:tc>
+                  <a:txBody>
+                    <a:bodyPr/>
+                    <a:lstStyle/>
+                    <a:p>
+                      <a:r>
+                        <a:rPr sz="1200" b="0" i="0">
+                          <a:solidFill>
+                            <a:srgbClr val="1A1440"/>
+                          </a:solidFill>
+                          <a:latin typeface="Calibri"/>
+                        </a:rPr>
+                        <a:t>12 Oct</a:t>
+                      </a:r>
+                    </a:p>
+                  </a:txBody>
+                  <a:tcPr marL="101600" marR="101600" marT="38100" marB="38100" anchor="ctr">
+                    <a:solidFill>
+                      <a:srgbClr val="FFFFFF"/>
+                    </a:solidFill>
+                  </a:tcPr>
+                </a:tc>
+                <a:tc>
+                  <a:txBody>
+                    <a:bodyPr/>
+                    <a:lstStyle/>
+                    <a:p>
+                      <a:r>
+                        <a:rPr sz="1200" b="0" i="0">
+                          <a:solidFill>
+                            <a:srgbClr val="1A1440"/>
+                          </a:solidFill>
+                          <a:latin typeface="Calibri"/>
+                        </a:rPr>
+                        <a:t>344,448</a:t>
+                      </a:r>
+                    </a:p>
+                  </a:txBody>
+                  <a:tcPr marL="101600" marR="101600" marT="38100" marB="38100" anchor="ctr">
+                    <a:solidFill>
+                      <a:srgbClr val="FFFFFF"/>
+                    </a:solidFill>
+                  </a:tcPr>
+                </a:tc>
+                <a:tc>
+                  <a:txBody>
+                    <a:bodyPr/>
+                    <a:lstStyle/>
+                    <a:p>
+                      <a:r>
+                        <a:rPr sz="1200" b="0" i="0">
+                          <a:solidFill>
+                            <a:srgbClr val="1A1440"/>
+                          </a:solidFill>
+                          <a:latin typeface="Calibri"/>
+                        </a:rPr>
+                        <a:t>353,404</a:t>
+                      </a:r>
+                    </a:p>
+                  </a:txBody>
+                  <a:tcPr marL="101600" marR="101600" marT="38100" marB="38100" anchor="ctr">
+                    <a:solidFill>
+                      <a:srgbClr val="FFFFFF"/>
+                    </a:solidFill>
+                  </a:tcPr>
+                </a:tc>
+                <a:tc>
+                  <a:txBody>
+                    <a:bodyPr/>
+                    <a:lstStyle/>
+                    <a:p>
+                      <a:r>
+                        <a:rPr sz="1200" b="0" i="0">
+                          <a:solidFill>
+                            <a:srgbClr val="1A1440"/>
+                          </a:solidFill>
+                          <a:latin typeface="Calibri"/>
+                        </a:rPr>
+                        <a:t>2,946</a:t>
+                      </a:r>
+                    </a:p>
+                  </a:txBody>
+                  <a:tcPr marL="101600" marR="101600" marT="38100" marB="38100" anchor="ctr">
+                    <a:solidFill>
+                      <a:srgbClr val="FFFFFF"/>
+                    </a:solidFill>
+                  </a:tcPr>
+                </a:tc>
+              </a:tr>
+              <a:tr h="335280">
+                <a:tc>
+                  <a:txBody>
+                    <a:bodyPr/>
+                    <a:lstStyle/>
+                    <a:p>
+                      <a:r>
+                        <a:rPr sz="1200" b="0" i="0">
+                          <a:solidFill>
+                            <a:srgbClr val="1A1440"/>
+                          </a:solidFill>
+                          <a:latin typeface="Calibri"/>
+                        </a:rPr>
+                        <a:t>19 Oct</a:t>
+                      </a:r>
+                    </a:p>
+                  </a:txBody>
+                  <a:tcPr marL="101600" marR="101600" marT="38100" marB="38100" anchor="ctr">
+                    <a:solidFill>
+                      <a:srgbClr val="F4F2FA"/>
+                    </a:solidFill>
+                  </a:tcPr>
+                </a:tc>
+                <a:tc>
+                  <a:txBody>
+                    <a:bodyPr/>
+                    <a:lstStyle/>
+                    <a:p>
+                      <a:r>
+                        <a:rPr sz="1200" b="0" i="0">
+                          <a:solidFill>
+                            <a:srgbClr val="1A1440"/>
+                          </a:solidFill>
+                          <a:latin typeface="Calibri"/>
+                        </a:rPr>
+                        <a:t>434,928</a:t>
+                      </a:r>
+                    </a:p>
+                  </a:txBody>
+                  <a:tcPr marL="101600" marR="101600" marT="38100" marB="38100" anchor="ctr">
+                    <a:solidFill>
+                      <a:srgbClr val="F4F2FA"/>
+                    </a:solidFill>
+                  </a:tcPr>
+                </a:tc>
+                <a:tc>
+                  <a:txBody>
+                    <a:bodyPr/>
+                    <a:lstStyle/>
+                    <a:p>
+                      <a:r>
+                        <a:rPr sz="1200" b="0" i="0">
+                          <a:solidFill>
+                            <a:srgbClr val="1A1440"/>
+                          </a:solidFill>
+                          <a:latin typeface="Calibri"/>
+                        </a:rPr>
+                        <a:t>446,236</a:t>
+                      </a:r>
+                    </a:p>
+                  </a:txBody>
+                  <a:tcPr marL="101600" marR="101600" marT="38100" marB="38100" anchor="ctr">
+                    <a:solidFill>
+                      <a:srgbClr val="F4F2FA"/>
+                    </a:solidFill>
+                  </a:tcPr>
+                </a:tc>
+                <a:tc>
+                  <a:txBody>
+                    <a:bodyPr/>
+                    <a:lstStyle/>
+                    <a:p>
+                      <a:r>
+                        <a:rPr sz="1200" b="0" i="0">
+                          <a:solidFill>
+                            <a:srgbClr val="1A1440"/>
+                          </a:solidFill>
+                          <a:latin typeface="Calibri"/>
+                        </a:rPr>
+                        <a:t>3,719</a:t>
+                      </a:r>
+                    </a:p>
+                  </a:txBody>
+                  <a:tcPr marL="101600" marR="101600" marT="38100" marB="38100" anchor="ctr">
+                    <a:solidFill>
+                      <a:srgbClr val="F4F2FA"/>
+                    </a:solidFill>
+                  </a:tcPr>
+                </a:tc>
+              </a:tr>
+              <a:tr h="335280">
+                <a:tc>
+                  <a:txBody>
+                    <a:bodyPr/>
+                    <a:lstStyle/>
+                    <a:p>
+                      <a:r>
+                        <a:rPr sz="1200" b="0" i="0">
+                          <a:solidFill>
+                            <a:srgbClr val="1A1440"/>
+                          </a:solidFill>
+                          <a:latin typeface="Calibri"/>
+                        </a:rPr>
+                        <a:t>26 Oct</a:t>
+                      </a:r>
+                    </a:p>
+                  </a:txBody>
+                  <a:tcPr marL="101600" marR="101600" marT="38100" marB="38100" anchor="ctr">
+                    <a:solidFill>
+                      <a:srgbClr val="FFFFFF"/>
+                    </a:solidFill>
+                  </a:tcPr>
+                </a:tc>
+                <a:tc>
+                  <a:txBody>
+                    <a:bodyPr/>
+                    <a:lstStyle/>
+                    <a:p>
+                      <a:r>
+                        <a:rPr sz="1200" b="0" i="0">
+                          <a:solidFill>
+                            <a:srgbClr val="1A1440"/>
+                          </a:solidFill>
+                          <a:latin typeface="Calibri"/>
+                        </a:rPr>
+                        <a:t>383,760</a:t>
+                      </a:r>
+                    </a:p>
+                  </a:txBody>
+                  <a:tcPr marL="101600" marR="101600" marT="38100" marB="38100" anchor="ctr">
+                    <a:solidFill>
+                      <a:srgbClr val="FFFFFF"/>
+                    </a:solidFill>
+                  </a:tcPr>
+                </a:tc>
+                <a:tc>
+                  <a:txBody>
+                    <a:bodyPr/>
+                    <a:lstStyle/>
+                    <a:p>
+                      <a:r>
+                        <a:rPr sz="1200" b="0" i="0">
+                          <a:solidFill>
+                            <a:srgbClr val="1A1440"/>
+                          </a:solidFill>
+                          <a:latin typeface="Calibri"/>
+                        </a:rPr>
+                        <a:t>393,738</a:t>
+                      </a:r>
+                    </a:p>
+                  </a:txBody>
+                  <a:tcPr marL="101600" marR="101600" marT="38100" marB="38100" anchor="ctr">
+                    <a:solidFill>
+                      <a:srgbClr val="FFFFFF"/>
+                    </a:solidFill>
+                  </a:tcPr>
+                </a:tc>
+                <a:tc>
+                  <a:txBody>
+                    <a:bodyPr/>
+                    <a:lstStyle/>
+                    <a:p>
+                      <a:r>
+                        <a:rPr sz="1200" b="0" i="0">
+                          <a:solidFill>
+                            <a:srgbClr val="1A1440"/>
+                          </a:solidFill>
+                          <a:latin typeface="Calibri"/>
+                        </a:rPr>
+                        <a:t>3,282</a:t>
+                      </a:r>
+                    </a:p>
+                  </a:txBody>
+                  <a:tcPr marL="101600" marR="101600" marT="38100" marB="38100" anchor="ctr">
+                    <a:solidFill>
+                      <a:srgbClr val="FFFFFF"/>
+                    </a:solidFill>
+                  </a:tcPr>
+                </a:tc>
+              </a:tr>
+              <a:tr h="335280">
+                <a:tc>
+                  <a:txBody>
+                    <a:bodyPr/>
+                    <a:lstStyle/>
+                    <a:p>
+                      <a:r>
+                        <a:rPr sz="1200" b="0" i="0">
+                          <a:solidFill>
+                            <a:srgbClr val="1A1440"/>
+                          </a:solidFill>
+                          <a:latin typeface="Calibri"/>
+                        </a:rPr>
+                        <a:t>2 Nov</a:t>
+                      </a:r>
+                    </a:p>
+                  </a:txBody>
+                  <a:tcPr marL="101600" marR="101600" marT="38100" marB="38100" anchor="ctr">
+                    <a:solidFill>
+                      <a:srgbClr val="F4F2FA"/>
+                    </a:solidFill>
+                  </a:tcPr>
+                </a:tc>
+                <a:tc>
+                  <a:txBody>
+                    <a:bodyPr/>
+                    <a:lstStyle/>
+                    <a:p>
+                      <a:r>
+                        <a:rPr sz="1200" b="0" i="0">
+                          <a:solidFill>
+                            <a:srgbClr val="1A1440"/>
+                          </a:solidFill>
+                          <a:latin typeface="Calibri"/>
+                        </a:rPr>
+                        <a:t>321,256</a:t>
+                      </a:r>
+                    </a:p>
+                  </a:txBody>
+                  <a:tcPr marL="101600" marR="101600" marT="38100" marB="38100" anchor="ctr">
+                    <a:solidFill>
+                      <a:srgbClr val="F4F2FA"/>
+                    </a:solidFill>
+                  </a:tcPr>
+                </a:tc>
+                <a:tc>
+                  <a:txBody>
+                    <a:bodyPr/>
+                    <a:lstStyle/>
+                    <a:p>
+                      <a:r>
+                        <a:rPr sz="1200" b="0" i="0">
+                          <a:solidFill>
+                            <a:srgbClr val="1A1440"/>
+                          </a:solidFill>
+                          <a:latin typeface="Calibri"/>
+                        </a:rPr>
+                        <a:t>329,609</a:t>
+                      </a:r>
+                    </a:p>
+                  </a:txBody>
+                  <a:tcPr marL="101600" marR="101600" marT="38100" marB="38100" anchor="ctr">
+                    <a:solidFill>
+                      <a:srgbClr val="F4F2FA"/>
+                    </a:solidFill>
+                  </a:tcPr>
+                </a:tc>
+                <a:tc>
+                  <a:txBody>
+                    <a:bodyPr/>
+                    <a:lstStyle/>
+                    <a:p>
+                      <a:r>
+                        <a:rPr sz="1200" b="0" i="0">
+                          <a:solidFill>
+                            <a:srgbClr val="1A1440"/>
+                          </a:solidFill>
+                          <a:latin typeface="Calibri"/>
+                        </a:rPr>
+                        <a:t>2,747</a:t>
+                      </a:r>
+                    </a:p>
+                  </a:txBody>
+                  <a:tcPr marL="101600" marR="101600" marT="38100" marB="38100" anchor="ctr">
+                    <a:solidFill>
+                      <a:srgbClr val="F4F2FA"/>
+                    </a:solidFill>
+                  </a:tcPr>
+                </a:tc>
+              </a:tr>
+              <a:tr h="335280">
+                <a:tc>
+                  <a:txBody>
+                    <a:bodyPr/>
+                    <a:lstStyle/>
+                    <a:p>
+                      <a:r>
+                        <a:rPr sz="1200" b="0" i="0">
+                          <a:solidFill>
+                            <a:srgbClr val="1A1440"/>
+                          </a:solidFill>
+                          <a:latin typeface="Calibri"/>
+                        </a:rPr>
+                        <a:t>9 Nov</a:t>
+                      </a:r>
+                    </a:p>
+                  </a:txBody>
+                  <a:tcPr marL="101600" marR="101600" marT="38100" marB="38100" anchor="ctr">
+                    <a:solidFill>
+                      <a:srgbClr val="FFFFFF"/>
+                    </a:solidFill>
+                  </a:tcPr>
+                </a:tc>
+                <a:tc>
+                  <a:txBody>
+                    <a:bodyPr/>
+                    <a:lstStyle/>
+                    <a:p>
+                      <a:r>
+                        <a:rPr sz="1200" b="0" i="0">
+                          <a:solidFill>
+                            <a:srgbClr val="1A1440"/>
+                          </a:solidFill>
+                          <a:latin typeface="Calibri"/>
+                        </a:rPr>
+                        <a:t>196,144</a:t>
+                      </a:r>
+                    </a:p>
+                  </a:txBody>
+                  <a:tcPr marL="101600" marR="101600" marT="38100" marB="38100" anchor="ctr">
+                    <a:solidFill>
+                      <a:srgbClr val="FFFFFF"/>
+                    </a:solidFill>
+                  </a:tcPr>
+                </a:tc>
+                <a:tc>
+                  <a:txBody>
+                    <a:bodyPr/>
+                    <a:lstStyle/>
+                    <a:p>
+                      <a:r>
+                        <a:rPr sz="1200" b="0" i="0">
+                          <a:solidFill>
+                            <a:srgbClr val="1A1440"/>
+                          </a:solidFill>
+                          <a:latin typeface="Calibri"/>
+                        </a:rPr>
+                        <a:t>201,244</a:t>
+                      </a:r>
+                    </a:p>
+                  </a:txBody>
+                  <a:tcPr marL="101600" marR="101600" marT="38100" marB="38100" anchor="ctr">
+                    <a:solidFill>
+                      <a:srgbClr val="FFFFFF"/>
+                    </a:solidFill>
+                  </a:tcPr>
+                </a:tc>
+                <a:tc>
+                  <a:txBody>
+                    <a:bodyPr/>
+                    <a:lstStyle/>
+                    <a:p>
+                      <a:r>
+                        <a:rPr sz="1200" b="0" i="0">
+                          <a:solidFill>
+                            <a:srgbClr val="1A1440"/>
+                          </a:solidFill>
+                          <a:latin typeface="Calibri"/>
+                        </a:rPr>
+                        <a:t>1,678</a:t>
+                      </a:r>
+                    </a:p>
+                  </a:txBody>
+                  <a:tcPr marL="101600" marR="101600" marT="38100" marB="38100" anchor="ctr">
+                    <a:solidFill>
+                      <a:srgbClr val="FFFFFF"/>
+                    </a:solidFill>
+                  </a:tcPr>
+                </a:tc>
+              </a:tr>
+              <a:tr h="335280">
+                <a:tc>
+                  <a:txBody>
+                    <a:bodyPr/>
+                    <a:lstStyle/>
+                    <a:p>
+                      <a:r>
+                        <a:rPr sz="1200" b="0" i="0">
+                          <a:solidFill>
+                            <a:srgbClr val="1A1440"/>
+                          </a:solidFill>
+                          <a:latin typeface="Calibri"/>
+                        </a:rPr>
+                        <a:t>16 Nov</a:t>
+                      </a:r>
+                    </a:p>
+                  </a:txBody>
+                  <a:tcPr marL="101600" marR="101600" marT="38100" marB="38100" anchor="ctr">
+                    <a:solidFill>
+                      <a:srgbClr val="F4F2FA"/>
+                    </a:solidFill>
+                  </a:tcPr>
+                </a:tc>
+                <a:tc>
+                  <a:txBody>
+                    <a:bodyPr/>
+                    <a:lstStyle/>
+                    <a:p>
+                      <a:r>
+                        <a:rPr sz="1200" b="0" i="0">
+                          <a:solidFill>
+                            <a:srgbClr val="1A1440"/>
+                          </a:solidFill>
+                          <a:latin typeface="Calibri"/>
+                        </a:rPr>
+                        <a:t>237,016</a:t>
+                      </a:r>
+                    </a:p>
+                  </a:txBody>
+                  <a:tcPr marL="101600" marR="101600" marT="38100" marB="38100" anchor="ctr">
+                    <a:solidFill>
+                      <a:srgbClr val="F4F2FA"/>
+                    </a:solidFill>
+                  </a:tcPr>
+                </a:tc>
+                <a:tc>
+                  <a:txBody>
+                    <a:bodyPr/>
+                    <a:lstStyle/>
+                    <a:p>
+                      <a:r>
+                        <a:rPr sz="1200" b="0" i="0">
+                          <a:solidFill>
+                            <a:srgbClr val="1A1440"/>
+                          </a:solidFill>
+                          <a:latin typeface="Calibri"/>
+                        </a:rPr>
+                        <a:t>243,178</a:t>
+                      </a:r>
+                    </a:p>
+                  </a:txBody>
+                  <a:tcPr marL="101600" marR="101600" marT="38100" marB="38100" anchor="ctr">
+                    <a:solidFill>
+                      <a:srgbClr val="F4F2FA"/>
+                    </a:solidFill>
+                  </a:tcPr>
+                </a:tc>
+                <a:tc>
+                  <a:txBody>
+                    <a:bodyPr/>
+                    <a:lstStyle/>
+                    <a:p>
+                      <a:r>
+                        <a:rPr sz="1200" b="0" i="0">
+                          <a:solidFill>
+                            <a:srgbClr val="1A1440"/>
+                          </a:solidFill>
+                          <a:latin typeface="Calibri"/>
+                        </a:rPr>
+                        <a:t>2,027</a:t>
+                      </a:r>
+                    </a:p>
+                  </a:txBody>
+                  <a:tcPr marL="101600" marR="101600" marT="38100" marB="38100" anchor="ctr">
+                    <a:solidFill>
+                      <a:srgbClr val="F4F2FA"/>
+                    </a:solidFill>
+                  </a:tcPr>
+                </a:tc>
+              </a:tr>
+              <a:tr h="335280">
+                <a:tc>
+                  <a:txBody>
+                    <a:bodyPr/>
+                    <a:lstStyle/>
+                    <a:p>
+                      <a:r>
+                        <a:rPr sz="1200" b="0" i="0">
+                          <a:solidFill>
+                            <a:srgbClr val="1A1440"/>
+                          </a:solidFill>
+                          <a:latin typeface="Calibri"/>
+                        </a:rPr>
+                        <a:t>23 Nov</a:t>
+                      </a:r>
+                    </a:p>
+                  </a:txBody>
+                  <a:tcPr marL="101600" marR="101600" marT="38100" marB="38100" anchor="ctr">
+                    <a:solidFill>
+                      <a:srgbClr val="FFFFFF"/>
+                    </a:solidFill>
+                  </a:tcPr>
+                </a:tc>
+                <a:tc>
+                  <a:txBody>
+                    <a:bodyPr/>
+                    <a:lstStyle/>
+                    <a:p>
+                      <a:r>
+                        <a:rPr sz="1200" b="0" i="0">
+                          <a:solidFill>
+                            <a:srgbClr val="1A1440"/>
+                          </a:solidFill>
+                          <a:latin typeface="Calibri"/>
+                        </a:rPr>
+                        <a:t>225,992</a:t>
+                      </a:r>
+                    </a:p>
+                  </a:txBody>
+                  <a:tcPr marL="101600" marR="101600" marT="38100" marB="38100" anchor="ctr">
+                    <a:solidFill>
+                      <a:srgbClr val="FFFFFF"/>
+                    </a:solidFill>
+                  </a:tcPr>
+                </a:tc>
+                <a:tc>
+                  <a:txBody>
+                    <a:bodyPr/>
+                    <a:lstStyle/>
+                    <a:p>
+                      <a:r>
+                        <a:rPr sz="1200" b="0" i="0">
+                          <a:solidFill>
+                            <a:srgbClr val="1A1440"/>
+                          </a:solidFill>
+                          <a:latin typeface="Calibri"/>
+                        </a:rPr>
+                        <a:t>231,868</a:t>
+                      </a:r>
+                    </a:p>
+                  </a:txBody>
+                  <a:tcPr marL="101600" marR="101600" marT="38100" marB="38100" anchor="ctr">
+                    <a:solidFill>
+                      <a:srgbClr val="FFFFFF"/>
+                    </a:solidFill>
+                  </a:tcPr>
+                </a:tc>
+                <a:tc>
+                  <a:txBody>
+                    <a:bodyPr/>
+                    <a:lstStyle/>
+                    <a:p>
+                      <a:r>
+                        <a:rPr sz="1200" b="0" i="0">
+                          <a:solidFill>
+                            <a:srgbClr val="1A1440"/>
+                          </a:solidFill>
+                          <a:latin typeface="Calibri"/>
+                        </a:rPr>
+                        <a:t>1,933</a:t>
+                      </a:r>
+                    </a:p>
+                  </a:txBody>
+                  <a:tcPr marL="101600" marR="101600" marT="38100" marB="38100" anchor="ctr">
+                    <a:solidFill>
+                      <a:srgbClr val="FFFFFF"/>
+                    </a:solidFill>
+                  </a:tcPr>
+                </a:tc>
+              </a:tr>
+              <a:tr h="335280">
+                <a:tc>
+                  <a:txBody>
+                    <a:bodyPr/>
+                    <a:lstStyle/>
+                    <a:p>
+                      <a:r>
+                        <a:rPr sz="1200" b="0" i="0">
+                          <a:solidFill>
+                            <a:srgbClr val="1A1440"/>
+                          </a:solidFill>
+                          <a:latin typeface="Calibri"/>
+                        </a:rPr>
+                        <a:t>30 Nov</a:t>
+                      </a:r>
+                    </a:p>
+                  </a:txBody>
+                  <a:tcPr marL="101600" marR="101600" marT="38100" marB="38100" anchor="ctr">
+                    <a:solidFill>
+                      <a:srgbClr val="F4F2FA"/>
+                    </a:solidFill>
+                  </a:tcPr>
+                </a:tc>
+                <a:tc>
+                  <a:txBody>
+                    <a:bodyPr/>
+                    <a:lstStyle/>
+                    <a:p>
+                      <a:r>
+                        <a:rPr sz="1200" b="0" i="0">
+                          <a:solidFill>
+                            <a:srgbClr val="1A1440"/>
+                          </a:solidFill>
+                          <a:latin typeface="Calibri"/>
+                        </a:rPr>
+                        <a:t>227,136</a:t>
+                      </a:r>
+                    </a:p>
+                  </a:txBody>
+                  <a:tcPr marL="101600" marR="101600" marT="38100" marB="38100" anchor="ctr">
+                    <a:solidFill>
+                      <a:srgbClr val="F4F2FA"/>
+                    </a:solidFill>
+                  </a:tcPr>
+                </a:tc>
+                <a:tc>
+                  <a:txBody>
+                    <a:bodyPr/>
+                    <a:lstStyle/>
+                    <a:p>
+                      <a:r>
+                        <a:rPr sz="1200" b="0" i="0">
+                          <a:solidFill>
+                            <a:srgbClr val="1A1440"/>
+                          </a:solidFill>
+                          <a:latin typeface="Calibri"/>
+                        </a:rPr>
+                        <a:t>233,042</a:t>
+                      </a:r>
+                    </a:p>
+                  </a:txBody>
+                  <a:tcPr marL="101600" marR="101600" marT="38100" marB="38100" anchor="ctr">
+                    <a:solidFill>
+                      <a:srgbClr val="F4F2FA"/>
+                    </a:solidFill>
+                  </a:tcPr>
+                </a:tc>
+                <a:tc>
+                  <a:txBody>
+                    <a:bodyPr/>
+                    <a:lstStyle/>
+                    <a:p>
+                      <a:r>
+                        <a:rPr sz="1200" b="0" i="0">
+                          <a:solidFill>
+                            <a:srgbClr val="1A1440"/>
+                          </a:solidFill>
+                          <a:latin typeface="Calibri"/>
+                        </a:rPr>
+                        <a:t>1,943</a:t>
+                      </a:r>
+                    </a:p>
+                  </a:txBody>
+                  <a:tcPr marL="101600" marR="101600" marT="38100" marB="38100" anchor="ctr">
+                    <a:solidFill>
+                      <a:srgbClr val="F4F2FA"/>
+                    </a:solidFill>
+                  </a:tcPr>
+                </a:tc>
+              </a:tr>
+            </a:tbl>
+          </a:graphicData>
+        </a:graphic>
+      </p:graphicFrame>
+      <p:sp>
+        <p:nvSpPr>
+          <p:cNvPr id="10" name="TextBox 9"/>
+          <p:cNvSpPr txBox="1"/>
+          <p:nvPr/>
+        </p:nvSpPr>
+        <p:spPr>
+          <a:xfrm>
+            <a:off x="530352" y="4956048"/>
+            <a:ext cx="11130991" cy="1048512"/>
+          </a:xfrm>
+          <a:prstGeom prst="rect">
+            <a:avLst/>
+          </a:prstGeom>
+          <a:noFill/>
+        </p:spPr>
+        <p:txBody>
+          <a:bodyPr wrap="square" anchor="t" lIns="0" rIns="0" tIns="0" bIns="0">
+            <a:spAutoFit/>
+          </a:bodyPr>
+          <a:lstStyle/>
+          <a:p>
+            <a:pPr>
+              <a:spcAft>
+                <a:spcPts val="800"/>
+              </a:spcAft>
+            </a:pPr>
+            <a:r>
+              <a:rPr sz="1600" b="0" i="0">
+                <a:solidFill>
+                  <a:srgbClr val="1A1440"/>
+                </a:solidFill>
+                <a:latin typeface="Calibri"/>
+              </a:rPr>
+              <a:t>Shifts are the plan over 120, rounded up: 20,275 in all, 515 more than the 19,760 the forecast alone needs. For 19 October, demand at the hidden weeks' extremes would need 3,413 to 3,906 shifts against the 3,719 booked.</a:t>
+            </a:r>
+          </a:p>
+        </p:txBody>
+      </p:sp>
+      <p:sp>
+        <p:nvSpPr>
+          <p:cNvPr id="11" name="TextBox 10"/>
+          <p:cNvSpPr txBox="1"/>
+          <p:nvPr/>
+        </p:nvSpPr>
+        <p:spPr>
+          <a:xfrm>
+            <a:off x="530352" y="6437376"/>
+            <a:ext cx="9667951" cy="160401"/>
+          </a:xfrm>
+          <a:prstGeom prst="rect">
+            <a:avLst/>
+          </a:prstGeom>
+          <a:noFill/>
+        </p:spPr>
+        <p:txBody>
+          <a:bodyPr wrap="square" anchor="t" lIns="0" rIns="0" tIns="0" bIns="0">
+            <a:spAutoFit/>
+          </a:bodyPr>
+          <a:lstStyle/>
+          <a:p>
+            <a:pPr algn="l"/>
+            <a:r>
+              <a:rPr sz="750" b="0" i="0">
+                <a:solidFill>
+                  <a:srgbClr val="6B6690"/>
+                </a:solidFill>
+                <a:latin typeface="Calibri"/>
+              </a:rPr>
+              <a:t>Week 4, Day 5. Forecasting basics: the fallback hour</a:t>
+            </a:r>
+          </a:p>
+        </p:txBody>
+      </p:sp>
+      <p:sp>
+        <p:nvSpPr>
+          <p:cNvPr id="12" name="TextBox 11"/>
+          <p:cNvSpPr txBox="1"/>
+          <p:nvPr/>
+        </p:nvSpPr>
+        <p:spPr>
+          <a:xfrm>
+            <a:off x="10198303" y="6437376"/>
+            <a:ext cx="1463040" cy="160401"/>
+          </a:xfrm>
+          <a:prstGeom prst="rect">
+            <a:avLst/>
+          </a:prstGeom>
+          <a:noFill/>
+        </p:spPr>
+        <p:txBody>
+          <a:bodyPr wrap="square" anchor="t" lIns="0" rIns="0" tIns="0" bIns="0">
+            <a:spAutoFit/>
+          </a:bodyPr>
+          <a:lstStyle/>
+          <a:p>
+            <a:pPr algn="r"/>
+            <a:r>
+              <a:rPr sz="750" b="0" i="0">
+                <a:solidFill>
+                  <a:srgbClr val="6B6690"/>
+                </a:solidFill>
+                <a:latin typeface="Calibri"/>
+              </a:rPr>
+              <a:t>S13  ·  13 / 18</a:t>
+            </a:r>
+          </a:p>
+        </p:txBody>
+      </p:sp>
+    </p:spTree>
+  </p:cSld>
+  <p:clrMapOvr>
+    <a:masterClrMapping/>
+  </p:clrMapOvr>
+</p:sld>
+</file>
+
+<file path=ppt/slides/slide14.xml><?xml version="1.0" encoding="utf-8"?>
+<p:sld xmlns:a="http://schemas.openxmlformats.org/drawingml/2006/main" xmlns:p="http://schemas.openxmlformats.org/presentationml/2006/main" xmlns:r="http://schemas.openxmlformats.org/officeDocument/2006/relationships">
+  <p:cSld>
+    <p:spTree>
+      <p:nvGrpSpPr>
+        <p:cNvPr id="1" name=""/>
+        <p:cNvGrpSpPr/>
+        <p:nvPr/>
+      </p:nvGrpSpPr>
+      <p:grpSpPr/>
+      <p:pic>
+        <p:nvPicPr>
+          <p:cNvPr id="2" name="Picture 1" descr="bg_light.jpg"/>
+          <p:cNvPicPr>
+            <a:picLocks noChangeAspect="1"/>
+          </p:cNvPicPr>
+          <p:nvPr/>
+        </p:nvPicPr>
+        <p:blipFill>
+          <a:blip r:embed="rId2"/>
+          <a:stretch>
+            <a:fillRect/>
+          </a:stretch>
+        </p:blipFill>
+        <p:spPr>
+          <a:xfrm>
+            <a:off x="0" y="0"/>
+            <a:ext cx="12191695" cy="6858000"/>
+          </a:xfrm>
+          <a:prstGeom prst="rect">
+            <a:avLst/>
+          </a:prstGeom>
+        </p:spPr>
+      </p:pic>
+      <p:pic>
+        <p:nvPicPr>
+          <p:cNvPr id="3" name="Picture 2" descr="iitgn_logo.png"/>
+          <p:cNvPicPr>
+            <a:picLocks noChangeAspect="1"/>
+          </p:cNvPicPr>
+          <p:nvPr/>
+        </p:nvPicPr>
+        <p:blipFill>
+          <a:blip r:embed="rId3"/>
+          <a:stretch>
+            <a:fillRect/>
+          </a:stretch>
+        </p:blipFill>
+        <p:spPr>
+          <a:xfrm>
+            <a:off x="530352" y="201168"/>
+            <a:ext cx="420624" cy="420624"/>
+          </a:xfrm>
+          <a:prstGeom prst="rect">
+            <a:avLst/>
+          </a:prstGeom>
+        </p:spPr>
+      </p:pic>
+      <p:sp>
+        <p:nvSpPr>
+          <p:cNvPr id="4" name="TextBox 3"/>
+          <p:cNvSpPr txBox="1"/>
+          <p:nvPr/>
+        </p:nvSpPr>
+        <p:spPr>
+          <a:xfrm>
+            <a:off x="1042416" y="228600"/>
+            <a:ext cx="5120640" cy="185166"/>
+          </a:xfrm>
+          <a:prstGeom prst="rect">
+            <a:avLst/>
+          </a:prstGeom>
+          <a:noFill/>
+        </p:spPr>
+        <p:txBody>
+          <a:bodyPr wrap="square" anchor="t" lIns="0" rIns="0" tIns="0" bIns="0">
+            <a:spAutoFit/>
+          </a:bodyPr>
+          <a:lstStyle/>
+          <a:p>
+            <a:pPr algn="l"/>
+            <a:r>
+              <a:rPr sz="900" b="1" i="0">
+                <a:solidFill>
+                  <a:srgbClr val="1A0F5C"/>
+                </a:solidFill>
+                <a:latin typeface="Calibri"/>
+              </a:rPr>
+              <a:t>Indian Institute of Technology Gandhinagar</a:t>
+            </a:r>
+          </a:p>
+        </p:txBody>
+      </p:sp>
+      <p:sp>
+        <p:nvSpPr>
+          <p:cNvPr id="5" name="TextBox 4"/>
+          <p:cNvSpPr txBox="1"/>
+          <p:nvPr/>
+        </p:nvSpPr>
+        <p:spPr>
+          <a:xfrm>
+            <a:off x="1042416" y="420623"/>
+            <a:ext cx="5852160" cy="127381"/>
+          </a:xfrm>
+          <a:prstGeom prst="rect">
+            <a:avLst/>
+          </a:prstGeom>
+          <a:noFill/>
+        </p:spPr>
+        <p:txBody>
+          <a:bodyPr wrap="square" anchor="t" lIns="0" rIns="0" tIns="0" bIns="0">
+            <a:spAutoFit/>
+          </a:bodyPr>
+          <a:lstStyle/>
+          <a:p>
+            <a:pPr algn="l"/>
+            <a:r>
+              <a:rPr sz="550" b="1" i="0" spc="300">
+                <a:solidFill>
+                  <a:srgbClr val="6B6690"/>
+                </a:solidFill>
+                <a:latin typeface="Calibri"/>
+              </a:rPr>
+              <a:t>ADMINISTERED THROUGH THE COMPETENCY ADVANCEMENT ACADEMY</a:t>
+            </a:r>
+          </a:p>
+        </p:txBody>
+      </p:sp>
+      <p:sp>
+        <p:nvSpPr>
+          <p:cNvPr id="6" name="TextBox 5"/>
+          <p:cNvSpPr txBox="1"/>
+          <p:nvPr/>
+        </p:nvSpPr>
+        <p:spPr>
+          <a:xfrm>
+            <a:off x="5992063" y="310896"/>
+            <a:ext cx="5669280" cy="127381"/>
+          </a:xfrm>
+          <a:prstGeom prst="rect">
+            <a:avLst/>
+          </a:prstGeom>
+          <a:noFill/>
+        </p:spPr>
+        <p:txBody>
+          <a:bodyPr wrap="square" anchor="t" lIns="0" rIns="0" tIns="0" bIns="0">
+            <a:spAutoFit/>
+          </a:bodyPr>
+          <a:lstStyle/>
+          <a:p>
+            <a:pPr algn="r"/>
+            <a:r>
+              <a:rPr sz="550" b="1" i="0" spc="300">
+                <a:solidFill>
+                  <a:srgbClr val="6B6690"/>
+                </a:solidFill>
+                <a:latin typeface="Calibri"/>
+              </a:rPr>
+              <a:t>WEEK 4  ·  FRIDAY  ·  FORECASTING BASICS  ·  FALLBACK</a:t>
             </a:r>
           </a:p>
         </p:txBody>
@@ -5399,7 +8997,7 @@
                 </a:solidFill>
                 <a:latin typeface="Calibri"/>
               </a:rPr>
-              <a:t>Week 4 Day 5: how much is coming, and how wrong could we be</a:t>
+              <a:t>Week 4, Day 5. Forecasting basics: the fallback hour</a:t>
             </a:r>
           </a:p>
         </p:txBody>
@@ -5434,7 +9032,7 @@
                 </a:solidFill>
                 <a:latin typeface="Calibri"/>
               </a:rPr>
-              <a:t>S10  ·  10 / 14</a:t>
+              <a:t>S14  ·  14 / 18</a:t>
             </a:r>
           </a:p>
         </p:txBody>
@@ -5447,7 +9045,7 @@
 </p:sld>
 </file>
 
-<file path=ppt/slides/slide11.xml><?xml version="1.0" encoding="utf-8"?>
+<file path=ppt/slides/slide15.xml><?xml version="1.0" encoding="utf-8"?>
 <p:sld xmlns:a="http://schemas.openxmlformats.org/drawingml/2006/main" xmlns:p="http://schemas.openxmlformats.org/presentationml/2006/main" xmlns:r="http://schemas.openxmlformats.org/officeDocument/2006/relationships">
   <p:cSld>
     <p:spTree>
@@ -5605,7 +9203,7 @@
                 </a:solidFill>
                 <a:latin typeface="Calibri"/>
               </a:rPr>
-              <a:t>WEEK 4  ·  FRIDAY  ·  FLIPKART, LUCKNOW  ·  FALLBACK</a:t>
+              <a:t>WEEK 4  ·  FRIDAY  ·  FORECASTING BASICS  ·  FALLBACK</a:t>
             </a:r>
           </a:p>
         </p:txBody>
@@ -5910,7 +9508,7 @@
                 </a:solidFill>
                 <a:latin typeface="Calibri"/>
               </a:rPr>
-              <a:t>Week 4 Day 5: how much is coming, and how wrong could we be</a:t>
+              <a:t>Week 4, Day 5. Forecasting basics: the fallback hour</a:t>
             </a:r>
           </a:p>
         </p:txBody>
@@ -5945,7 +9543,7 @@
                 </a:solidFill>
                 <a:latin typeface="Calibri"/>
               </a:rPr>
-              <a:t>S11  ·  11 / 14</a:t>
+              <a:t>S15  ·  15 / 18</a:t>
             </a:r>
           </a:p>
         </p:txBody>
@@ -5958,7 +9556,7 @@
 </p:sld>
 </file>
 
-<file path=ppt/slides/slide12.xml><?xml version="1.0" encoding="utf-8"?>
+<file path=ppt/slides/slide16.xml><?xml version="1.0" encoding="utf-8"?>
 <p:sld xmlns:a="http://schemas.openxmlformats.org/drawingml/2006/main" xmlns:p="http://schemas.openxmlformats.org/presentationml/2006/main" xmlns:r="http://schemas.openxmlformats.org/officeDocument/2006/relationships">
   <p:cSld>
     <p:spTree>
@@ -6116,7 +9714,7 @@
                 </a:solidFill>
                 <a:latin typeface="Calibri"/>
               </a:rPr>
-              <a:t>WEEK 4  ·  FRIDAY  ·  FLIPKART, LUCKNOW  ·  FALLBACK</a:t>
+              <a:t>WEEK 4  ·  FRIDAY  ·  FORECASTING BASICS  ·  FALLBACK</a:t>
             </a:r>
           </a:p>
         </p:txBody>
@@ -6452,7 +10050,7 @@
                 </a:solidFill>
                 <a:latin typeface="Calibri"/>
               </a:rPr>
-              <a:t>Week 4 Day 5: how much is coming, and how wrong could we be</a:t>
+              <a:t>Week 4, Day 5. Forecasting basics: the fallback hour</a:t>
             </a:r>
           </a:p>
         </p:txBody>
@@ -6487,7 +10085,7 @@
                 </a:solidFill>
                 <a:latin typeface="Calibri"/>
               </a:rPr>
-              <a:t>S12  ·  12 / 14</a:t>
+              <a:t>S16  ·  16 / 18</a:t>
             </a:r>
           </a:p>
         </p:txBody>
@@ -6500,7 +10098,7 @@
 </p:sld>
 </file>
 
-<file path=ppt/slides/slide13.xml><?xml version="1.0" encoding="utf-8"?>
+<file path=ppt/slides/slide17.xml><?xml version="1.0" encoding="utf-8"?>
 <p:sld xmlns:a="http://schemas.openxmlformats.org/drawingml/2006/main" xmlns:p="http://schemas.openxmlformats.org/presentationml/2006/main" xmlns:r="http://schemas.openxmlformats.org/officeDocument/2006/relationships">
   <p:cSld>
     <p:spTree>
@@ -6658,7 +10256,7 @@
                 </a:solidFill>
                 <a:latin typeface="Calibri"/>
               </a:rPr>
-              <a:t>WEEK 4  ·  FRIDAY  ·  FLIPKART, LUCKNOW  ·  FALLBACK</a:t>
+              <a:t>WEEK 4  ·  FRIDAY  ·  FORECASTING BASICS  ·  FALLBACK</a:t>
             </a:r>
           </a:p>
         </p:txBody>
@@ -6973,7 +10571,7 @@
                 </a:solidFill>
                 <a:latin typeface="Calibri"/>
               </a:rPr>
-              <a:t>Week 4 Day 5: how much is coming, and how wrong could we be</a:t>
+              <a:t>Week 4, Day 5. Forecasting basics: the fallback hour</a:t>
             </a:r>
           </a:p>
         </p:txBody>
@@ -7008,7 +10606,7 @@
                 </a:solidFill>
                 <a:latin typeface="Calibri"/>
               </a:rPr>
-              <a:t>S13  ·  13 / 14</a:t>
+              <a:t>S17  ·  17 / 18</a:t>
             </a:r>
           </a:p>
         </p:txBody>
@@ -7021,7 +10619,7 @@
 </p:sld>
 </file>
 
-<file path=ppt/slides/slide14.xml><?xml version="1.0" encoding="utf-8"?>
+<file path=ppt/slides/slide18.xml><?xml version="1.0" encoding="utf-8"?>
 <p:sld xmlns:a="http://schemas.openxmlformats.org/drawingml/2006/main" xmlns:p="http://schemas.openxmlformats.org/presentationml/2006/main" xmlns:r="http://schemas.openxmlformats.org/officeDocument/2006/relationships">
   <p:cSld>
     <p:spTree>
@@ -7179,7 +10777,7 @@
                 </a:solidFill>
                 <a:latin typeface="Calibri"/>
               </a:rPr>
-              <a:t>WEEK 4  ·  FRIDAY  ·  FLIPKART, LUCKNOW  ·  FALLBACK</a:t>
+              <a:t>WEEK 4  ·  FRIDAY  ·  FORECASTING BASICS  ·  FALLBACK</a:t>
             </a:r>
           </a:p>
         </p:txBody>
@@ -7476,7 +11074,7 @@
                 </a:solidFill>
                 <a:latin typeface="Calibri"/>
               </a:rPr>
-              <a:t>Hide at least as many weeks as the plan books, from one origin.</a:t>
+              <a:t>Hide at least as many weeks as the plan reaches ahead, from one origin.</a:t>
             </a:r>
           </a:p>
         </p:txBody>
@@ -7971,7 +11569,7 @@
                 </a:solidFill>
                 <a:latin typeface="Calibri"/>
               </a:rPr>
-              <a:t>Week 4 Day 5: how much is coming, and how wrong could we be</a:t>
+              <a:t>Week 4, Day 5. Forecasting basics: the fallback hour</a:t>
             </a:r>
           </a:p>
         </p:txBody>
@@ -8006,7 +11604,7 @@
                 </a:solidFill>
                 <a:latin typeface="Calibri"/>
               </a:rPr>
-              <a:t>S14  ·  14 / 14</a:t>
+              <a:t>S18  ·  18 / 18</a:t>
             </a:r>
           </a:p>
         </p:txBody>
@@ -8177,7 +11775,7 @@
                 </a:solidFill>
                 <a:latin typeface="Calibri"/>
               </a:rPr>
-              <a:t>WEEK 4  ·  FRIDAY  ·  FLIPKART, LUCKNOW  ·  FALLBACK</a:t>
+              <a:t>WEEK 4  ·  FRIDAY  ·  FORECASTING BASICS  ·  FALLBACK</a:t>
             </a:r>
           </a:p>
         </p:txBody>
@@ -8375,7 +11973,7 @@
                 </a:solidFill>
                 <a:latin typeface="Calibri"/>
               </a:rPr>
-              <a:t>Week 4 Day 5: how much is coming, and how wrong could we be</a:t>
+              <a:t>Week 4, Day 5. Forecasting basics: the fallback hour</a:t>
             </a:r>
           </a:p>
         </p:txBody>
@@ -8410,7 +12008,7 @@
                 </a:solidFill>
                 <a:latin typeface="Calibri"/>
               </a:rPr>
-              <a:t>S2  ·  2 / 14</a:t>
+              <a:t>S2  ·  2 / 18</a:t>
             </a:r>
           </a:p>
         </p:txBody>
@@ -8581,7 +12179,7 @@
                 </a:solidFill>
                 <a:latin typeface="Calibri"/>
               </a:rPr>
-              <a:t>WEEK 4  ·  FRIDAY  ·  FLIPKART, LUCKNOW  ·  FALLBACK</a:t>
+              <a:t>WEEK 4  ·  FRIDAY  ·  FORECASTING BASICS  ·  FALLBACK</a:t>
             </a:r>
           </a:p>
         </p:txBody>
@@ -9594,7 +13192,7 @@
                 </a:solidFill>
                 <a:latin typeface="Calibri"/>
               </a:rPr>
-              <a:t>Week 4 Day 5: how much is coming, and how wrong could we be</a:t>
+              <a:t>Week 4, Day 5. Forecasting basics: the fallback hour</a:t>
             </a:r>
           </a:p>
         </p:txBody>
@@ -9629,7 +13227,7 @@
                 </a:solidFill>
                 <a:latin typeface="Calibri"/>
               </a:rPr>
-              <a:t>S3  ·  3 / 14</a:t>
+              <a:t>S3  ·  3 / 18</a:t>
             </a:r>
           </a:p>
         </p:txBody>
@@ -9800,7 +13398,7 @@
                 </a:solidFill>
                 <a:latin typeface="Calibri"/>
               </a:rPr>
-              <a:t>WEEK 4  ·  FRIDAY  ·  FLIPKART, LUCKNOW  ·  FALLBACK</a:t>
+              <a:t>WEEK 4  ·  FRIDAY  ·  FORECASTING BASICS  ·  FALLBACK</a:t>
             </a:r>
           </a:p>
         </p:txBody>
@@ -10391,7 +13989,7 @@
                 </a:solidFill>
                 <a:latin typeface="Calibri"/>
               </a:rPr>
-              <a:t>Week 4 Day 5: how much is coming, and how wrong could we be</a:t>
+              <a:t>Week 4, Day 5. Forecasting basics: the fallback hour</a:t>
             </a:r>
           </a:p>
         </p:txBody>
@@ -10426,7 +14024,7 @@
                 </a:solidFill>
                 <a:latin typeface="Calibri"/>
               </a:rPr>
-              <a:t>S4  ·  4 / 14</a:t>
+              <a:t>S4  ·  4 / 18</a:t>
             </a:r>
           </a:p>
         </p:txBody>
@@ -10597,7 +14195,7 @@
                 </a:solidFill>
                 <a:latin typeface="Calibri"/>
               </a:rPr>
-              <a:t>WEEK 4  ·  FRIDAY  ·  FLIPKART, LUCKNOW  ·  FALLBACK</a:t>
+              <a:t>WEEK 4  ·  FRIDAY  ·  FORECASTING BASICS  ·  FALLBACK</a:t>
             </a:r>
           </a:p>
         </p:txBody>
@@ -10900,7 +14498,7 @@
                 </a:solidFill>
                 <a:latin typeface="Calibri"/>
               </a:rPr>
-              <a:t>The plan's last week is ten weeks past the data, so the test must reach ten weeks ahead; four cannot (FPP3, section 5.8, checked 12 October 2026).</a:t>
+              <a:t>The plan's last week is ten weeks past the data, so the test must reach ten weeks ahead; four cannot (FPP3, section 5.8, checked 13 October 2026).</a:t>
             </a:r>
           </a:p>
         </p:txBody>
@@ -11389,7 +14987,7 @@
                 </a:solidFill>
                 <a:latin typeface="Calibri"/>
               </a:rPr>
-              <a:t>Week 4 Day 5: how much is coming, and how wrong could we be</a:t>
+              <a:t>Week 4, Day 5. Forecasting basics: the fallback hour</a:t>
             </a:r>
           </a:p>
         </p:txBody>
@@ -11424,7 +15022,7 @@
                 </a:solidFill>
                 <a:latin typeface="Calibri"/>
               </a:rPr>
-              <a:t>S5  ·  5 / 14</a:t>
+              <a:t>S5  ·  5 / 18</a:t>
             </a:r>
           </a:p>
         </p:txBody>
@@ -11595,7 +15193,7 @@
                 </a:solidFill>
                 <a:latin typeface="Calibri"/>
               </a:rPr>
-              <a:t>WEEK 4  ·  FRIDAY  ·  FLIPKART, LUCKNOW  ·  FALLBACK</a:t>
+              <a:t>WEEK 4  ·  FRIDAY  ·  FORECASTING BASICS  ·  FALLBACK</a:t>
             </a:r>
           </a:p>
         </p:txBody>
@@ -11763,7 +15361,7 @@
                 </a:solidFill>
                 <a:latin typeface="Calibri"/>
               </a:rPr>
-              <a:t>Week 4 Day 5: how much is coming, and how wrong could we be</a:t>
+              <a:t>Week 4, Day 5. Forecasting basics: the fallback hour</a:t>
             </a:r>
           </a:p>
         </p:txBody>
@@ -11798,7 +15396,7 @@
                 </a:solidFill>
                 <a:latin typeface="Calibri"/>
               </a:rPr>
-              <a:t>S6  ·  6 / 14</a:t>
+              <a:t>S6  ·  6 / 18</a:t>
             </a:r>
           </a:p>
         </p:txBody>
@@ -11969,7 +15567,7 @@
                 </a:solidFill>
                 <a:latin typeface="Calibri"/>
               </a:rPr>
-              <a:t>WEEK 4  ·  FRIDAY  ·  FLIPKART, LUCKNOW  ·  FALLBACK</a:t>
+              <a:t>WEEK 4  ·  FRIDAY  ·  FORECASTING BASICS  ·  FALLBACK</a:t>
             </a:r>
           </a:p>
         </p:txBody>
@@ -12775,7 +16373,7 @@
                 </a:solidFill>
                 <a:latin typeface="Calibri"/>
               </a:rPr>
-              <a:t>Week 4 Day 5: how much is coming, and how wrong could we be</a:t>
+              <a:t>Week 4, Day 5. Forecasting basics: the fallback hour</a:t>
             </a:r>
           </a:p>
         </p:txBody>
@@ -12810,7 +16408,7 @@
                 </a:solidFill>
                 <a:latin typeface="Calibri"/>
               </a:rPr>
-              <a:t>S7  ·  7 / 14</a:t>
+              <a:t>S7  ·  7 / 18</a:t>
             </a:r>
           </a:p>
         </p:txBody>
@@ -12981,7 +16579,7 @@
                 </a:solidFill>
                 <a:latin typeface="Calibri"/>
               </a:rPr>
-              <a:t>WEEK 4  ·  FRIDAY  ·  FLIPKART, LUCKNOW  ·  FALLBACK</a:t>
+              <a:t>WEEK 4  ·  FRIDAY  ·  FORECASTING BASICS  ·  FALLBACK</a:t>
             </a:r>
           </a:p>
         </p:txBody>
@@ -13994,7 +17592,7 @@
                 </a:solidFill>
                 <a:latin typeface="Calibri"/>
               </a:rPr>
-              <a:t>Week 4 Day 5: how much is coming, and how wrong could we be</a:t>
+              <a:t>Week 4, Day 5. Forecasting basics: the fallback hour</a:t>
             </a:r>
           </a:p>
         </p:txBody>
@@ -14029,7 +17627,7 @@
                 </a:solidFill>
                 <a:latin typeface="Calibri"/>
               </a:rPr>
-              <a:t>S8  ·  8 / 14</a:t>
+              <a:t>S8  ·  8 / 18</a:t>
             </a:r>
           </a:p>
         </p:txBody>
@@ -14200,7 +17798,7 @@
                 </a:solidFill>
                 <a:latin typeface="Calibri"/>
               </a:rPr>
-              <a:t>WEEK 4  ·  FRIDAY  ·  FLIPKART, LUCKNOW  ·  FALLBACK</a:t>
+              <a:t>WEEK 4  ·  FRIDAY  ·  FORECASTING BASICS  ·  FALLBACK</a:t>
             </a:r>
           </a:p>
         </p:txBody>
@@ -14398,7 +17996,7 @@
                 </a:solidFill>
                 <a:latin typeface="Calibri"/>
               </a:rPr>
-              <a:t>Week 4 Day 5: how much is coming, and how wrong could we be</a:t>
+              <a:t>Week 4, Day 5. Forecasting basics: the fallback hour</a:t>
             </a:r>
           </a:p>
         </p:txBody>
@@ -14433,7 +18031,7 @@
                 </a:solidFill>
                 <a:latin typeface="Calibri"/>
               </a:rPr>
-              <a:t>S9  ·  9 / 14</a:t>
+              <a:t>S9  ·  9 / 18</a:t>
             </a:r>
           </a:p>
         </p:txBody>

--- a/content/W04/D5/slides/C2_W04_D05_fallback_STUDENT.pptx
+++ b/content/W04/D5/slides/C2_W04_D05_fallback_STUDENT.pptx
@@ -1334,7 +1334,7 @@
           <a:lstStyle/>
           <a:p>
             <a:r>
-              <a:t>LIVE, 8 minutes. Groups run notebook 06 with the split moved to 24 August 2026, or read this table.</a:t>
+              <a:t>LIVE, 8 minutes. Groups run notebook 06 with the split moved to 24 August 2026, or read this chart.</a:t>
             </a:r>
           </a:p>
           <a:p>
@@ -1719,7 +1719,17 @@
           </a:p>
           <a:p>
             <a:r>
-              <a:t>2024's week at the same distance from Diwali, plus 4 percent. Transition: the vote.</a:t>
+              <a:t>2024's week at the same distance from Diwali and adds no growth, since in October 2025 no week had a</a:t>
+            </a:r>
+          </a:p>
+          <a:p>
+            <a:r>
+              <a:t>twin a year earlier outside the festival; every one of its misses is too low by about the year's</a:t>
+            </a:r>
+          </a:p>
+          <a:p>
+            <a:r>
+              <a:t>growth. Transition: the vote.</a:t>
             </a:r>
           </a:p>
         </p:txBody>
@@ -1859,12 +1869,12 @@
           <a:lstStyle/>
           <a:p>
             <a:r>
-              <a:t>LIVE, 8 minutes. 71,180 over 2,040 is about thirty-five: b was the closest option. Transition:</a:t>
-            </a:r>
-          </a:p>
-          <a:p>
-            <a:r>
-              <a:t>part 3, how far above the forecast the plan should sit.</a:t>
+              <a:t>LIVE, 8 minutes. 71,180 over 13,040 is about 5.5: b was the closest option. Transition: part 3, how</a:t>
+            </a:r>
+          </a:p>
+          <a:p>
+            <a:r>
+              <a:t>far above the forecast the plan should sit.</a:t>
             </a:r>
           </a:p>
         </p:txBody>
@@ -5151,7 +5161,7 @@
                 </a:solidFill>
                 <a:latin typeface="Calibri"/>
               </a:rPr>
-              <a:t>This hour runs only if the IITGN faculty session W4-4 (tentative) does not run. Illustrative case: the company is real, the situation and the data are synthetic, built for this class.</a:t>
+              <a:t>This session runs only if the IITGN faculty session W4-4 (tentative) does not run. Illustrative case: the company is real, the situation and the data are synthetic, built for this class.</a:t>
             </a:r>
           </a:p>
         </p:txBody>
@@ -5186,7 +5196,7 @@
                 </a:solidFill>
                 <a:latin typeface="Calibri"/>
               </a:rPr>
-              <a:t>Week 4, Day 5. Forecasting basics: the fallback hour</a:t>
+              <a:t>Week 4, Day 5. Forecasting basics: what does the fallback session test?</a:t>
             </a:r>
           </a:p>
         </p:txBody>
@@ -6409,7 +6419,7 @@
                 </a:solidFill>
                 <a:latin typeface="Calibri"/>
               </a:rPr>
-              <a:t>This part goes beyond the five subtopics of Friday's curriculum row: it is the plan quantile, the spine's addition, taught only in this hour and in notebook 07's depth section.</a:t>
+              <a:t>This part goes beyond the row, that is, beyond Friday's five topics: it is the plan quantile, taught only in this session and in notebook 07's depth section.</a:t>
             </a:r>
           </a:p>
         </p:txBody>
@@ -6444,7 +6454,7 @@
                 </a:solidFill>
                 <a:latin typeface="Calibri"/>
               </a:rPr>
-              <a:t>Week 4, Day 5. Forecasting basics: the fallback hour</a:t>
+              <a:t>Week 4, Day 5. Forecasting basics: what does the fallback session test?</a:t>
             </a:r>
           </a:p>
         </p:txBody>
@@ -6848,7 +6858,7 @@
                 </a:solidFill>
                 <a:latin typeface="Calibri"/>
               </a:rPr>
-              <a:t>Week 4, Day 5. Forecasting basics: the fallback hour</a:t>
+              <a:t>Week 4, Day 5. Forecasting basics: what does the fallback session test?</a:t>
             </a:r>
           </a:p>
         </p:txBody>
@@ -7252,7 +7262,7 @@
                 </a:solidFill>
                 <a:latin typeface="Calibri"/>
               </a:rPr>
-              <a:t>Week 4, Day 5. Forecasting basics: the fallback hour</a:t>
+              <a:t>Week 4, Day 5. Forecasting basics: what does the fallback session test?</a:t>
             </a:r>
           </a:p>
         </p:txBody>
@@ -8440,7 +8450,7 @@
                 </a:solidFill>
                 <a:latin typeface="Calibri"/>
               </a:rPr>
-              <a:t>Week 4, Day 5. Forecasting basics: the fallback hour</a:t>
+              <a:t>Week 4, Day 5. Forecasting basics: what does the fallback session test?</a:t>
             </a:r>
           </a:p>
         </p:txBody>
@@ -8997,7 +9007,7 @@
                 </a:solidFill>
                 <a:latin typeface="Calibri"/>
               </a:rPr>
-              <a:t>Week 4, Day 5. Forecasting basics: the fallback hour</a:t>
+              <a:t>Week 4, Day 5. Forecasting basics: what does the fallback session test?</a:t>
             </a:r>
           </a:p>
         </p:txBody>
@@ -9508,7 +9518,7 @@
                 </a:solidFill>
                 <a:latin typeface="Calibri"/>
               </a:rPr>
-              <a:t>Week 4, Day 5. Forecasting basics: the fallback hour</a:t>
+              <a:t>Week 4, Day 5. Forecasting basics: what does the fallback session test?</a:t>
             </a:r>
           </a:p>
         </p:txBody>
@@ -10050,7 +10060,7 @@
                 </a:solidFill>
                 <a:latin typeface="Calibri"/>
               </a:rPr>
-              <a:t>Week 4, Day 5. Forecasting basics: the fallback hour</a:t>
+              <a:t>Week 4, Day 5. Forecasting basics: what does the fallback session test?</a:t>
             </a:r>
           </a:p>
         </p:txBody>
@@ -10571,7 +10581,7 @@
                 </a:solidFill>
                 <a:latin typeface="Calibri"/>
               </a:rPr>
-              <a:t>Week 4, Day 5. Forecasting basics: the fallback hour</a:t>
+              <a:t>Week 4, Day 5. Forecasting basics: what does the fallback session test?</a:t>
             </a:r>
           </a:p>
         </p:txBody>
@@ -10847,7 +10857,7 @@
                 </a:solidFill>
                 <a:latin typeface="Calibri"/>
               </a:rPr>
-              <a:t>What survives this hour, whether or not the faculty session (tentative) runs?</a:t>
+              <a:t>What survives this session, whether or not the faculty session (tentative) runs?</a:t>
             </a:r>
           </a:p>
         </p:txBody>
@@ -11569,7 +11579,7 @@
                 </a:solidFill>
                 <a:latin typeface="Calibri"/>
               </a:rPr>
-              <a:t>Week 4, Day 5. Forecasting basics: the fallback hour</a:t>
+              <a:t>Week 4, Day 5. Forecasting basics: what does the fallback session test?</a:t>
             </a:r>
           </a:p>
         </p:txBody>
@@ -11938,7 +11948,7 @@
                 </a:solidFill>
                 <a:latin typeface="Calibri"/>
               </a:rPr>
-              <a:t>Festival-aligned and finance's rule still lead and the house bot stays next, while naive and drift fall below the vendor; every number moves a great deal. The four-week test rests on four misses and on one origin week.</a:t>
+              <a:t>Festival-aligned and finance's rule still lead and the house bot stays next, while naive and drift fall below the vendor: naive and drift move most, the copies of last year least. The four-week test rests on four misses and on one origin week.</a:t>
             </a:r>
           </a:p>
         </p:txBody>
@@ -11973,7 +11983,7 @@
                 </a:solidFill>
                 <a:latin typeface="Calibri"/>
               </a:rPr>
-              <a:t>Week 4, Day 5. Forecasting basics: the fallback hour</a:t>
+              <a:t>Week 4, Day 5. Forecasting basics: what does the fallback session test?</a:t>
             </a:r>
           </a:p>
         </p:txBody>
@@ -13192,7 +13202,7 @@
                 </a:solidFill>
                 <a:latin typeface="Calibri"/>
               </a:rPr>
-              <a:t>Week 4, Day 5. Forecasting basics: the fallback hour</a:t>
+              <a:t>Week 4, Day 5. Forecasting basics: what does the fallback session test?</a:t>
             </a:r>
           </a:p>
         </p:txBody>
@@ -13989,7 +13999,7 @@
                 </a:solidFill>
                 <a:latin typeface="Calibri"/>
               </a:rPr>
-              <a:t>Week 4, Day 5. Forecasting basics: the fallback hour</a:t>
+              <a:t>Week 4, Day 5. Forecasting basics: what does the fallback session test?</a:t>
             </a:r>
           </a:p>
         </p:txBody>
@@ -14265,7 +14275,7 @@
                 </a:solidFill>
                 <a:latin typeface="Calibri"/>
               </a:rPr>
-              <a:t>Why must the hidden weeks reach at least as far ahead as the plan does, ten weeks?</a:t>
+              <a:t>Why should the hidden weeks reach at least as far ahead as the plan does, ten weeks?</a:t>
             </a:r>
           </a:p>
         </p:txBody>
@@ -14279,7 +14289,7 @@
         <p:spPr>
           <a:xfrm>
             <a:off x="530352" y="1956816"/>
-            <a:ext cx="3588410" cy="2344420"/>
+            <a:ext cx="3588410" cy="2534412"/>
           </a:xfrm>
           <a:prstGeom prst="roundRect">
             <a:avLst>
@@ -14477,7 +14487,7 @@
         <p:spPr>
           <a:xfrm>
             <a:off x="731519" y="3303524"/>
-            <a:ext cx="3186074" cy="763016"/>
+            <a:ext cx="3186074" cy="944626"/>
           </a:xfrm>
           <a:prstGeom prst="rect">
             <a:avLst/>
@@ -14498,7 +14508,7 @@
                 </a:solidFill>
                 <a:latin typeface="Calibri"/>
               </a:rPr>
-              <a:t>The plan's last week is ten weeks past the data, so the test must reach ten weeks ahead; four cannot (FPP3, section 5.8, checked 13 October 2026).</a:t>
+              <a:t>The plan's last week is ten weeks past the data, so the test should ideally reach ten weeks ahead; four cannot (Forecasting: Principles and Practice, section 5.8, checked 13 October 2026).</a:t>
             </a:r>
           </a:p>
         </p:txBody>
@@ -14512,7 +14522,7 @@
         <p:spPr>
           <a:xfrm>
             <a:off x="4301642" y="1956816"/>
-            <a:ext cx="3588410" cy="2344420"/>
+            <a:ext cx="3588410" cy="2534412"/>
           </a:xfrm>
           <a:prstGeom prst="roundRect">
             <a:avLst>
@@ -14739,7 +14749,7 @@
         <p:spPr>
           <a:xfrm>
             <a:off x="8072932" y="1956816"/>
-            <a:ext cx="3588410" cy="2344420"/>
+            <a:ext cx="3588410" cy="2534412"/>
           </a:xfrm>
           <a:prstGeom prst="roundRect">
             <a:avLst>
@@ -14987,7 +14997,7 @@
                 </a:solidFill>
                 <a:latin typeface="Calibri"/>
               </a:rPr>
-              <a:t>Week 4, Day 5. Forecasting basics: the fallback hour</a:t>
+              <a:t>Week 4, Day 5. Forecasting basics: what does the fallback session test?</a:t>
             </a:r>
           </a:p>
         </p:txBody>
@@ -15361,7 +15371,7 @@
                 </a:solidFill>
                 <a:latin typeface="Calibri"/>
               </a:rPr>
-              <a:t>Week 4, Day 5. Forecasting basics: the fallback hour</a:t>
+              <a:t>Week 4, Day 5. Forecasting basics: what does the fallback session test?</a:t>
             </a:r>
           </a:p>
         </p:txBody>
@@ -15858,7 +15868,7 @@
                           </a:solidFill>
                           <a:latin typeface="Calibri"/>
                         </a:rPr>
-                        <a:t>417,040</a:t>
+                        <a:t>401,000</a:t>
                       </a:r>
                     </a:p>
                   </a:txBody>
@@ -15880,7 +15890,7 @@
                           </a:solidFill>
                           <a:latin typeface="Calibri"/>
                         </a:rPr>
-                        <a:t>1,160 too low</a:t>
+                        <a:t>17,200 too low</a:t>
                       </a:r>
                     </a:p>
                   </a:txBody>
@@ -15970,7 +15980,7 @@
                           </a:solidFill>
                           <a:latin typeface="Calibri"/>
                         </a:rPr>
-                        <a:t>370,448</a:t>
+                        <a:t>356,200</a:t>
                       </a:r>
                     </a:p>
                   </a:txBody>
@@ -15992,7 +16002,7 @@
                           </a:solidFill>
                           <a:latin typeface="Calibri"/>
                         </a:rPr>
-                        <a:t>1,448 too high</a:t>
+                        <a:t>12,800 too low</a:t>
                       </a:r>
                     </a:p>
                   </a:txBody>
@@ -16082,7 +16092,7 @@
                           </a:solidFill>
                           <a:latin typeface="Calibri"/>
                         </a:rPr>
-                        <a:t>308,776</a:t>
+                        <a:t>296,900</a:t>
                       </a:r>
                     </a:p>
                   </a:txBody>
@@ -16104,7 +16114,7 @@
                           </a:solidFill>
                           <a:latin typeface="Calibri"/>
                         </a:rPr>
-                        <a:t>124 too low</a:t>
+                        <a:t>12,000 too low</a:t>
                       </a:r>
                     </a:p>
                   </a:txBody>
@@ -16194,7 +16204,7 @@
                           </a:solidFill>
                           <a:latin typeface="Calibri"/>
                         </a:rPr>
-                        <a:t>187,824</a:t>
+                        <a:t>180,600</a:t>
                       </a:r>
                     </a:p>
                   </a:txBody>
@@ -16216,7 +16226,7 @@
                           </a:solidFill>
                           <a:latin typeface="Calibri"/>
                         </a:rPr>
-                        <a:t>776 too low</a:t>
+                        <a:t>8,000 too low</a:t>
                       </a:r>
                     </a:p>
                   </a:txBody>
@@ -16306,7 +16316,7 @@
                           </a:solidFill>
                           <a:latin typeface="Calibri"/>
                         </a:rPr>
-                        <a:t>221,208</a:t>
+                        <a:t>212,700</a:t>
                       </a:r>
                     </a:p>
                   </a:txBody>
@@ -16328,7 +16338,7 @@
                           </a:solidFill>
                           <a:latin typeface="Calibri"/>
                         </a:rPr>
-                        <a:t>6,692 too low</a:t>
+                        <a:t>15,200 too low</a:t>
                       </a:r>
                     </a:p>
                   </a:txBody>
@@ -16373,7 +16383,7 @@
                 </a:solidFill>
                 <a:latin typeface="Calibri"/>
               </a:rPr>
-              <a:t>Week 4, Day 5. Forecasting basics: the fallback hour</a:t>
+              <a:t>Week 4, Day 5. Forecasting basics: what does the fallback session test?</a:t>
             </a:r>
           </a:p>
         </p:txBody>
@@ -16820,7 +16830,7 @@
         <p:spPr>
           <a:xfrm>
             <a:off x="731519" y="2962656"/>
-            <a:ext cx="2243251" cy="498856"/>
+            <a:ext cx="2243251" cy="267716"/>
           </a:xfrm>
           <a:prstGeom prst="rect">
             <a:avLst/>
@@ -16841,7 +16851,7 @@
                 </a:solidFill>
                 <a:latin typeface="Calibri"/>
               </a:rPr>
-              <a:t>Naive, by about ten times</a:t>
+              <a:t>Naive, by about twice</a:t>
             </a:r>
           </a:p>
         </p:txBody>
@@ -16854,7 +16864,7 @@
         </p:nvSpPr>
         <p:spPr>
           <a:xfrm>
-            <a:off x="731519" y="3534664"/>
+            <a:off x="731519" y="3303524"/>
             <a:ext cx="2243251" cy="399796"/>
           </a:xfrm>
           <a:prstGeom prst="rect">
@@ -17068,7 +17078,7 @@
                 </a:solidFill>
                 <a:latin typeface="Calibri"/>
               </a:rPr>
-              <a:t>Naive, by about thirty-five times</a:t>
+              <a:t>Naive, by about five times</a:t>
             </a:r>
           </a:p>
         </p:txBody>
@@ -17330,7 +17340,7 @@
                 </a:solidFill>
                 <a:latin typeface="Calibri"/>
               </a:rPr>
-              <a:t>Copying 2024 adds 2024's own noise.</a:t>
+              <a:t>Copying 2024 adds 2024's own wobble.</a:t>
             </a:r>
           </a:p>
         </p:txBody>
@@ -17592,7 +17602,7 @@
                 </a:solidFill>
                 <a:latin typeface="Calibri"/>
               </a:rPr>
-              <a:t>Week 4, Day 5. Forecasting basics: the fallback hour</a:t>
+              <a:t>Week 4, Day 5. Forecasting basics: what does the fallback session test?</a:t>
             </a:r>
           </a:p>
         </p:txBody>
@@ -17833,7 +17843,7 @@
                 </a:solidFill>
                 <a:latin typeface="Georgia"/>
               </a:rPr>
-              <a:t>Answer: naive, by about thirty-five times</a:t>
+              <a:t>Answer: naive, by about five times</a:t>
             </a:r>
           </a:p>
         </p:txBody>
@@ -17961,7 +17971,7 @@
                 </a:solidFill>
                 <a:latin typeface="Calibri"/>
               </a:rPr>
-              <a:t>Naive's five misses average 71,180 a week and festival-aligned's 2,040. Near a festival the week before is a poor guide, because the weeks change sharply; last year's week at the same distance from Diwali is a good one.</a:t>
+              <a:t>Naive's five misses average 71,180 a week and festival-aligned's 13,040, with no growth added. Near a festival the week before is a poor guide, because the weeks change sharply; last year's week at the same distance from Diwali is a good one, low only by the growth nobody could yet measure.</a:t>
             </a:r>
           </a:p>
         </p:txBody>
@@ -17996,7 +18006,7 @@
                 </a:solidFill>
                 <a:latin typeface="Calibri"/>
               </a:rPr>
-              <a:t>Week 4, Day 5. Forecasting basics: the fallback hour</a:t>
+              <a:t>Week 4, Day 5. Forecasting basics: what does the fallback session test?</a:t>
             </a:r>
           </a:p>
         </p:txBody>
